--- a/paper/iclr2027/output/powerpoint/Figure-1-DeltaTrace-native-v2.pptx
+++ b/paper/iclr2027/output/powerpoint/Figure-1-DeltaTrace-native-v2.pptx
@@ -710,7 +710,7 @@
 </file>
 
 <file path=ppt/slides/slide1.xml><?xml version="1.0" encoding="utf-8"?>
-<p:sld xmlns:a="http://schemas.openxmlformats.org/drawingml/2006/main" xmlns:a14="http://schemas.microsoft.com/office/drawing/2010/main" xmlns:a16="http://schemas.microsoft.com/office/drawing/2014/main" xmlns:m="http://schemas.openxmlformats.org/officeDocument/2006/math" xmlns:mc="http://schemas.openxmlformats.org/markup-compatibility/2006" xmlns:ns7="http://schemas.microsoft.com/office/powerpoint/2010/main" xmlns:p="http://schemas.openxmlformats.org/presentationml/2006/main" xmlns:r="http://schemas.openxmlformats.org/officeDocument/2006/relationships">
+<p:sld xmlns:a="http://schemas.openxmlformats.org/drawingml/2006/main" xmlns:r="http://schemas.openxmlformats.org/officeDocument/2006/relationships" xmlns:p="http://schemas.openxmlformats.org/presentationml/2006/main">
   <p:cSld>
     <p:bg>
       <p:bgPr>
@@ -739,7 +739,7 @@
           <p:cNvPr id="30" name="F1_0029_patch_23">
             <a:extLst>
               <a:ext uri="{FF2B5EF4-FFF2-40B4-BE49-F238E27FC236}">
-                <a16:creationId id="{A41CEC2B-284F-40D7-91A7-70577BC12A0B}"/>
+                <a16:creationId xmlns:a16="http://schemas.microsoft.com/office/drawing/2014/main" id="{A41CEC2B-284F-40D7-91A7-70577BC12A0B}"/>
               </a:ext>
             </a:extLst>
           </p:cNvPr>
@@ -793,7 +793,7 @@
           <p:cNvPr id="31" name="F1_0030_patch_24">
             <a:extLst>
               <a:ext uri="{FF2B5EF4-FFF2-40B4-BE49-F238E27FC236}">
-                <a16:creationId id="{D63E835E-472E-47B4-BF52-4893FD7A602C}"/>
+                <a16:creationId xmlns:a16="http://schemas.microsoft.com/office/drawing/2014/main" id="{D63E835E-472E-47B4-BF52-4893FD7A602C}"/>
               </a:ext>
             </a:extLst>
           </p:cNvPr>
@@ -847,7 +847,7 @@
           <p:cNvPr id="32" name="F1_0031_patch_25">
             <a:extLst>
               <a:ext uri="{FF2B5EF4-FFF2-40B4-BE49-F238E27FC236}">
-                <a16:creationId id="{5BFB69F2-255A-4F37-B771-EBCC869F3192}"/>
+                <a16:creationId xmlns:a16="http://schemas.microsoft.com/office/drawing/2014/main" id="{5BFB69F2-255A-4F37-B771-EBCC869F3192}"/>
               </a:ext>
             </a:extLst>
           </p:cNvPr>
@@ -901,7 +901,7 @@
           <p:cNvPr id="33" name="F1_0032_patch_26">
             <a:extLst>
               <a:ext uri="{FF2B5EF4-FFF2-40B4-BE49-F238E27FC236}">
-                <a16:creationId id="{8DF2D027-4A59-4FB5-9758-75FB5F65EE8A}"/>
+                <a16:creationId xmlns:a16="http://schemas.microsoft.com/office/drawing/2014/main" id="{8DF2D027-4A59-4FB5-9758-75FB5F65EE8A}"/>
               </a:ext>
             </a:extLst>
           </p:cNvPr>
@@ -955,7 +955,7 @@
           <p:cNvPr id="34" name="F1_0033_patch_27">
             <a:extLst>
               <a:ext uri="{FF2B5EF4-FFF2-40B4-BE49-F238E27FC236}">
-                <a16:creationId id="{839492DE-A54B-42D6-A122-B21468602C8C}"/>
+                <a16:creationId xmlns:a16="http://schemas.microsoft.com/office/drawing/2014/main" id="{839492DE-A54B-42D6-A122-B21468602C8C}"/>
               </a:ext>
             </a:extLst>
           </p:cNvPr>
@@ -1009,7 +1009,7 @@
           <p:cNvPr id="35" name="F1_0034_patch_28">
             <a:extLst>
               <a:ext uri="{FF2B5EF4-FFF2-40B4-BE49-F238E27FC236}">
-                <a16:creationId id="{25FA5FE1-E71D-4B88-BF8B-D14DCEF44197}"/>
+                <a16:creationId xmlns:a16="http://schemas.microsoft.com/office/drawing/2014/main" id="{25FA5FE1-E71D-4B88-BF8B-D14DCEF44197}"/>
               </a:ext>
             </a:extLst>
           </p:cNvPr>
@@ -1063,7 +1063,7 @@
           <p:cNvPr id="36" name="F1_0035_patch_29">
             <a:extLst>
               <a:ext uri="{FF2B5EF4-FFF2-40B4-BE49-F238E27FC236}">
-                <a16:creationId id="{F0E3C136-ECFC-44D6-B6D1-67C4BA1CC11A}"/>
+                <a16:creationId xmlns:a16="http://schemas.microsoft.com/office/drawing/2014/main" id="{F0E3C136-ECFC-44D6-B6D1-67C4BA1CC11A}"/>
               </a:ext>
             </a:extLst>
           </p:cNvPr>
@@ -1117,7 +1117,7 @@
           <p:cNvPr id="37" name="F1_0036_patch_30">
             <a:extLst>
               <a:ext uri="{FF2B5EF4-FFF2-40B4-BE49-F238E27FC236}">
-                <a16:creationId id="{72EA5A29-F215-444C-BB4B-C9C291699ECC}"/>
+                <a16:creationId xmlns:a16="http://schemas.microsoft.com/office/drawing/2014/main" id="{72EA5A29-F215-444C-BB4B-C9C291699ECC}"/>
               </a:ext>
             </a:extLst>
           </p:cNvPr>
@@ -1171,7 +1171,7 @@
           <p:cNvPr id="38" name="F1_0037_patch_31">
             <a:extLst>
               <a:ext uri="{FF2B5EF4-FFF2-40B4-BE49-F238E27FC236}">
-                <a16:creationId id="{045CB417-03C4-4F45-9697-9B1D31A9633A}"/>
+                <a16:creationId xmlns:a16="http://schemas.microsoft.com/office/drawing/2014/main" id="{045CB417-03C4-4F45-9697-9B1D31A9633A}"/>
               </a:ext>
             </a:extLst>
           </p:cNvPr>
@@ -1252,7 +1252,7 @@
         </p:nvCxnSpPr>
         <p:spPr>
           <a:xfrm flipH="1">
-            <a:off x="3616916" y="4831874"/>
+            <a:off x="3619069" y="4858808"/>
             <a:ext cx="928332" cy="211145"/>
           </a:xfrm>
           <a:prstGeom prst="line">
@@ -1273,7 +1273,7 @@
           <p:cNvPr id="645" name="F1_0644_text_17" descr="(a) Overall method">
             <a:extLst>
               <a:ext uri="{FF2B5EF4-FFF2-40B4-BE49-F238E27FC236}">
-                <a16:creationId id="{8C704559-CB63-43D9-B70C-9B6305EB995F}"/>
+                <a16:creationId xmlns:a16="http://schemas.microsoft.com/office/drawing/2014/main" id="{8C704559-CB63-43D9-B70C-9B6305EB995F}"/>
               </a:ext>
             </a:extLst>
           </p:cNvPr>
@@ -1339,8 +1339,8 @@
             <a:chExt cx="4151593" cy="436362"/>
           </a:xfrm>
         </p:grpSpPr>
-        <mc:AlternateContent>
-          <mc:Choice Requires="a14">
+        <mc:AlternateContent xmlns:mc="http://schemas.openxmlformats.org/markup-compatibility/2006">
+          <mc:Choice xmlns:a14="http://schemas.microsoft.com/office/drawing/2010/main" Requires="a14">
             <p:sp>
               <p:nvSpPr>
                 <p:cNvPr id="20054" name="Two forward runs with fixed response y"/>
@@ -1382,10 +1382,32 @@
                       <a:ea typeface="TimesNewRomanPSMT"/>
                       <a:cs typeface="TimesNewRomanPSMT"/>
                     </a:rPr>
-                    <a:t>Two forward runs with fixed response </a:t>
+                    <a:t>Two </a:t>
+                  </a:r>
+                  <a:r>
+                    <a:rPr lang="en-US" sz="2040" b="0" i="0" kern="1200" spc="0" dirty="0">
+                      <a:solidFill>
+                        <a:srgbClr val="245C89"/>
+                      </a:solidFill>
+                      <a:latin typeface="TimesNewRomanPSMT"/>
+                      <a:ea typeface="TimesNewRomanPSMT"/>
+                      <a:cs typeface="TimesNewRomanPSMT"/>
+                    </a:rPr>
+                    <a:t>forward runs </a:t>
+                  </a:r>
+                  <a:r>
+                    <a:rPr lang="en-US" sz="2040" b="0" i="0" kern="1200" spc="0" dirty="0">
+                      <a:solidFill>
+                        <a:srgbClr val="20252B"/>
+                      </a:solidFill>
+                      <a:latin typeface="TimesNewRomanPSMT"/>
+                      <a:ea typeface="TimesNewRomanPSMT"/>
+                      <a:cs typeface="TimesNewRomanPSMT"/>
+                    </a:rPr>
+                    <a:t>with fixed response </a:t>
                   </a:r>
                   <a14:m>
-                    <m:oMath>
+                    <m:oMath xmlns:m="http://schemas.openxmlformats.org/officeDocument/2006/math">
                       <m:r>
                         <a:rPr lang="en-US" sz="2040" b="0" i="1" smtClean="0">
                           <a:solidFill>
@@ -1459,13 +1481,13 @@
         </p:nvGrpSpPr>
         <p:grpSpPr>
           <a:xfrm>
-            <a:off x="555456" y="4586257"/>
+            <a:off x="1267435" y="4533138"/>
             <a:ext cx="2198838" cy="459477"/>
             <a:chOff x="571219" y="3684108"/>
             <a:chExt cx="2029879" cy="459477"/>
           </a:xfrm>
         </p:grpSpPr>
-        <mc:AlternateContent>
+        <mc:AlternateContent xmlns:mc="http://schemas.openxmlformats.org/markup-compatibility/2006" xmlns:a14="http://schemas.microsoft.com/office/drawing/2010/main">
           <mc:Choice Requires="a14">
             <p:sp>
               <p:nvSpPr>
@@ -1511,7 +1533,7 @@
                     <a:t>Displacement </a:t>
                   </a:r>
                   <a14:m>
-                    <m:oMath>
+                    <m:oMath xmlns:m="http://schemas.openxmlformats.org/officeDocument/2006/math">
                       <m:r>
                         <m:rPr>
                           <m:sty m:val="p"/>
@@ -1580,7 +1602,7 @@
               </p:txBody>
             </p:sp>
           </mc:Choice>
-          <mc:Fallback>
+          <mc:Fallback xmlns:ns7="http://schemas.microsoft.com/office/powerpoint/2010/main" xmlns:m="http://schemas.openxmlformats.org/officeDocument/2006/math" xmlns:a16="http://schemas.microsoft.com/office/drawing/2014/main" xmlns="">
             <p:sp>
               <p:nvSpPr>
                 <p:cNvPr id="20055" name="Displacement Delta e_i"/>
@@ -1620,8 +1642,8 @@
           </mc:Fallback>
         </mc:AlternateContent>
       </p:grpSp>
-      <mc:AlternateContent>
-        <mc:Choice Requires="a14">
+      <mc:AlternateContent xmlns:mc="http://schemas.openxmlformats.org/markup-compatibility/2006">
+        <mc:Choice xmlns:a14="http://schemas.microsoft.com/office/drawing/2010/main" Requires="a14">
           <p:sp>
             <p:nvSpPr>
               <p:cNvPr id="20026" name="Equation -" descr="-"/>
@@ -1630,7 +1652,7 @@
             </p:nvSpPr>
             <p:spPr>
               <a:xfrm>
-                <a:off x="1626422" y="4223494"/>
+                <a:off x="1477021" y="4251687"/>
                 <a:ext cx="303389" cy="822960"/>
               </a:xfrm>
               <a:prstGeom prst="rect">
@@ -1658,11 +1680,11 @@
                   </a:defRPr>
                 </a:pPr>
                 <a14:m>
-                  <m:oMathPara>
+                  <m:oMathPara xmlns:m="http://schemas.openxmlformats.org/officeDocument/2006/math">
                     <m:oMathParaPr>
                       <m:jc m:val="centerGroup"/>
                     </m:oMathParaPr>
-                    <m:oMath>
+                    <m:oMath xmlns:m="http://schemas.openxmlformats.org/officeDocument/2006/math">
                       <m:r>
                         <a:rPr lang="en-US" sz="2400" b="0" i="0" smtClean="0">
                           <a:solidFill>
@@ -1677,7 +1699,7 @@
                     </m:oMath>
                   </m:oMathPara>
                 </a14:m>
-                <a:endParaRPr lang="en-US" sz="2400" b="0" i="0">
+                <a:endParaRPr lang="en-US" sz="2400" b="0" i="0" dirty="0">
                   <a:solidFill>
                     <a:srgbClr val="20252B"/>
                   </a:solidFill>
@@ -1700,7 +1722,7 @@
             </p:nvSpPr>
             <p:spPr>
               <a:xfrm>
-                <a:off x="1626422" y="4223494"/>
+                <a:off x="1477021" y="4251687"/>
                 <a:ext cx="303389" cy="822960"/>
               </a:xfrm>
               <a:prstGeom prst="rect">
@@ -1709,7 +1731,7 @@
               <a:blipFill>
                 <a:blip r:embed="rId5"/>
                 <a:stretch>
-                  <a:fillRect l="-6000" r="-2000"/>
+                  <a:fillRect l="-4000" r="-4000"/>
                 </a:stretch>
               </a:blipFill>
               <a:ln>
@@ -1739,14 +1761,14 @@
         </p:nvGrpSpPr>
         <p:grpSpPr>
           <a:xfrm>
-            <a:off x="4974808" y="4290301"/>
+            <a:off x="3947224" y="4560908"/>
             <a:ext cx="384001" cy="453771"/>
             <a:chOff x="4515603" y="4619913"/>
             <a:chExt cx="354494" cy="453771"/>
           </a:xfrm>
         </p:grpSpPr>
-        <mc:AlternateContent>
-          <mc:Choice Requires="a14">
+        <mc:AlternateContent xmlns:mc="http://schemas.openxmlformats.org/markup-compatibility/2006">
+          <mc:Choice xmlns:a14="http://schemas.microsoft.com/office/drawing/2010/main" Requires="a14">
             <p:sp>
               <p:nvSpPr>
                 <p:cNvPr id="20027" name="Equation sub(m,sub(e,i))" descr="sub(m,sub(e,i))"/>
@@ -1782,85 +1804,101 @@
                       <a:cs typeface="Cambria Math" charset="0"/>
                     </a:defRPr>
                   </a:pPr>
+                  <a:r>
+                    <a:rPr lang="en-US" sz="2150" b="1" dirty="0">
+                      <a:solidFill>
+                        <a:srgbClr val="76579A"/>
+                      </a:solidFill>
+                      <a:latin typeface="TimesNewRomanPS-BoldMT"/>
+                      <a:ea typeface="TimesNewRomanPS-BoldMT"/>
+                      <a:cs typeface="TimesNewRomanPS-BoldMT"/>
+                    </a:rPr>
+                    <a:t>Slop</a:t>
+                  </a:r>
+                  <a:r>
+                    <a:rPr lang="en-US" sz="2300" b="0" dirty="0">
+                      <a:solidFill>
+                        <a:srgbClr val="67448F"/>
+                      </a:solidFill>
+                      <a:ea typeface="Cambria Math" charset="0"/>
+                      <a:cs typeface="Cambria Math" charset="0"/>
+                    </a:rPr>
+                    <a:t> </a:t>
+                  </a:r>
                   <a14:m>
-                    <m:oMathPara>
-                      <m:oMathParaPr>
-                        <m:jc m:val="centerGroup"/>
-                      </m:oMathParaPr>
-                      <m:oMath>
-                        <m:sSub>
-                          <m:sSubPr>
-                            <m:ctrlPr>
-                              <a:rPr lang="en-US" sz="2300" b="0" i="1" smtClean="0">
-                                <a:solidFill>
-                                  <a:srgbClr val="67448F"/>
-                                </a:solidFill>
-                                <a:latin typeface="Cambria Math" panose="02040503050406030204" pitchFamily="18" charset="0"/>
-                                <a:ea typeface="Cambria Math" charset="0"/>
-                                <a:cs typeface="Cambria Math" charset="0"/>
-                              </a:rPr>
-                            </m:ctrlPr>
-                          </m:sSubPr>
-                          <m:e>
-                            <m:r>
-                              <a:rPr lang="en-US" sz="2300" b="0" i="1" smtClean="0">
-                                <a:solidFill>
-                                  <a:srgbClr val="67448F"/>
-                                </a:solidFill>
-                                <a:latin typeface="Cambria Math" charset="0"/>
-                                <a:ea typeface="Cambria Math" charset="0"/>
-                                <a:cs typeface="Cambria Math" charset="0"/>
-                              </a:rPr>
-                              <m:t>𝑚</m:t>
-                            </m:r>
-                          </m:e>
-                          <m:sub>
-                            <m:sSub>
-                              <m:sSubPr>
-                                <m:ctrlPr>
-                                  <a:rPr lang="en-US" sz="2300" b="0" i="1" smtClean="0">
-                                    <a:solidFill>
-                                      <a:srgbClr val="67448F"/>
-                                    </a:solidFill>
-                                    <a:latin typeface="Cambria Math" panose="02040503050406030204" pitchFamily="18" charset="0"/>
-                                    <a:ea typeface="Cambria Math" charset="0"/>
-                                    <a:cs typeface="Cambria Math" charset="0"/>
-                                  </a:rPr>
-                                </m:ctrlPr>
-                              </m:sSubPr>
-                              <m:e>
-                                <m:r>
-                                  <a:rPr lang="en-US" sz="2300" b="0" i="1" smtClean="0">
-                                    <a:solidFill>
-                                      <a:srgbClr val="67448F"/>
-                                    </a:solidFill>
-                                    <a:latin typeface="Cambria Math" charset="0"/>
-                                    <a:ea typeface="Cambria Math" charset="0"/>
-                                    <a:cs typeface="Cambria Math" charset="0"/>
-                                  </a:rPr>
-                                  <m:t>𝑒</m:t>
-                                </m:r>
-                              </m:e>
-                              <m:sub>
-                                <m:r>
-                                  <a:rPr lang="en-US" sz="2300" b="0" i="1" smtClean="0">
-                                    <a:solidFill>
-                                      <a:srgbClr val="67448F"/>
-                                    </a:solidFill>
-                                    <a:latin typeface="Cambria Math" charset="0"/>
-                                    <a:ea typeface="Cambria Math" charset="0"/>
-                                    <a:cs typeface="Cambria Math" charset="0"/>
-                                  </a:rPr>
-                                  <m:t>𝑖</m:t>
-                                </m:r>
-                              </m:sub>
-                            </m:sSub>
-                          </m:sub>
-                        </m:sSub>
-                      </m:oMath>
-                    </m:oMathPara>
+                    <m:oMath xmlns:m="http://schemas.openxmlformats.org/officeDocument/2006/math">
+                      <m:sSub>
+                        <m:sSubPr>
+                          <m:ctrlPr>
+                            <a:rPr lang="en-US" sz="2300" b="0" i="1" smtClean="0">
+                              <a:solidFill>
+                                <a:srgbClr val="67448F"/>
+                              </a:solidFill>
+                              <a:latin typeface="Cambria Math" panose="02040503050406030204" pitchFamily="18" charset="0"/>
+                              <a:ea typeface="Cambria Math" charset="0"/>
+                              <a:cs typeface="Cambria Math" charset="0"/>
+                            </a:rPr>
+                          </m:ctrlPr>
+                        </m:sSubPr>
+                        <m:e>
+                          <m:r>
+                            <a:rPr lang="en-US" sz="2300" b="0" i="1" smtClean="0">
+                              <a:solidFill>
+                                <a:srgbClr val="67448F"/>
+                              </a:solidFill>
+                              <a:latin typeface="Cambria Math" charset="0"/>
+                              <a:ea typeface="Cambria Math" charset="0"/>
+                              <a:cs typeface="Cambria Math" charset="0"/>
+                            </a:rPr>
+                            <m:t>𝑚</m:t>
+                          </m:r>
+                        </m:e>
+                        <m:sub>
+                          <m:sSub>
+                            <m:sSubPr>
+                              <m:ctrlPr>
+                                <a:rPr lang="en-US" sz="2300" b="0" i="1" smtClean="0">
+                                  <a:solidFill>
+                                    <a:srgbClr val="67448F"/>
+                                  </a:solidFill>
+                                  <a:latin typeface="Cambria Math" panose="02040503050406030204" pitchFamily="18" charset="0"/>
+                                  <a:ea typeface="Cambria Math" charset="0"/>
+                                  <a:cs typeface="Cambria Math" charset="0"/>
+                                </a:rPr>
+                              </m:ctrlPr>
+                            </m:sSubPr>
+                            <m:e>
+                              <m:r>
+                                <a:rPr lang="en-US" sz="2300" b="0" i="1" smtClean="0">
+                                  <a:solidFill>
+                                    <a:srgbClr val="67448F"/>
+                                  </a:solidFill>
+                                  <a:latin typeface="Cambria Math" charset="0"/>
+                                  <a:ea typeface="Cambria Math" charset="0"/>
+                                  <a:cs typeface="Cambria Math" charset="0"/>
+                                </a:rPr>
+                                <m:t>𝑒</m:t>
+                              </m:r>
+                            </m:e>
+                            <m:sub>
+                              <m:r>
+                                <a:rPr lang="en-US" sz="2300" b="0" i="1" smtClean="0">
+                                  <a:solidFill>
+                                    <a:srgbClr val="67448F"/>
+                                  </a:solidFill>
+                                  <a:latin typeface="Cambria Math" charset="0"/>
+                                  <a:ea typeface="Cambria Math" charset="0"/>
+                                  <a:cs typeface="Cambria Math" charset="0"/>
+                                </a:rPr>
+                                <m:t>𝑖</m:t>
+                              </m:r>
+                            </m:sub>
+                          </m:sSub>
+                        </m:sub>
+                      </m:sSub>
+                    </m:oMath>
                   </a14:m>
-                  <a:endParaRPr lang="en-US" sz="2300" b="0" i="0">
+                  <a:endParaRPr lang="en-US" sz="2300" b="0" i="0" dirty="0">
                     <a:solidFill>
                       <a:srgbClr val="67448F"/>
                     </a:solidFill>
@@ -1892,7 +1930,7 @@
                 <a:blipFill>
                   <a:blip r:embed="rId6"/>
                   <a:stretch>
-                    <a:fillRect l="-16216" r="-10811"/>
+                    <a:fillRect l="-37838" t="-8527" r="-139189"/>
                   </a:stretch>
                 </a:blipFill>
                 <a:ln>
@@ -1929,7 +1967,7 @@
             <a:chExt cx="4539147" cy="437524"/>
           </a:xfrm>
         </p:grpSpPr>
-        <mc:AlternateContent>
+        <mc:AlternateContent xmlns:mc="http://schemas.openxmlformats.org/markup-compatibility/2006" xmlns:a14="http://schemas.microsoft.com/office/drawing/2010/main">
           <mc:Choice Requires="a14">
             <p:sp>
               <p:nvSpPr>
@@ -1975,7 +2013,7 @@
                     <a:t>Displacement </a:t>
                   </a:r>
                   <a14:m>
-                    <m:oMath>
+                    <m:oMath xmlns:m="http://schemas.openxmlformats.org/officeDocument/2006/math">
                       <m:r>
                         <m:rPr>
                           <m:sty m:val="p"/>
@@ -2026,7 +2064,7 @@
                     <a:t> </a:t>
                   </a:r>
                   <a14:m>
-                    <m:oMath>
+                    <m:oMath xmlns:m="http://schemas.openxmlformats.org/officeDocument/2006/math">
                       <m:r>
                         <a:rPr lang="en-US" sz="2040" b="0" i="0" smtClean="0">
                           <a:solidFill>
@@ -2052,7 +2090,7 @@
                     <a:t> slope </a:t>
                   </a:r>
                   <a14:m>
-                    <m:oMath>
+                    <m:oMath xmlns:m="http://schemas.openxmlformats.org/officeDocument/2006/math">
                       <m:sSub>
                         <m:sSubPr>
                           <m:ctrlPr>
@@ -2107,7 +2145,7 @@
                     <a:t> </a:t>
                   </a:r>
                   <a14:m>
-                    <m:oMath>
+                    <m:oMath xmlns:m="http://schemas.openxmlformats.org/officeDocument/2006/math">
                       <m:r>
                         <a:rPr lang="en-US" sz="2040" b="0" i="1" smtClean="0">
                           <a:solidFill>
@@ -2133,7 +2171,7 @@
                     <a:t> Displacement </a:t>
                   </a:r>
                   <a14:m>
-                    <m:oMath>
+                    <m:oMath xmlns:m="http://schemas.openxmlformats.org/officeDocument/2006/math">
                       <m:r>
                         <m:rPr>
                           <m:sty m:val="p"/>
@@ -2173,7 +2211,7 @@
               </p:txBody>
             </p:sp>
           </mc:Choice>
-          <mc:Fallback>
+          <mc:Fallback xmlns:ns7="http://schemas.microsoft.com/office/powerpoint/2010/main" xmlns:m="http://schemas.openxmlformats.org/officeDocument/2006/math" xmlns:a16="http://schemas.microsoft.com/office/drawing/2014/main" xmlns="">
             <p:sp>
               <p:nvSpPr>
                 <p:cNvPr id="20065" name="Displacement times slope equals displacement"/>
@@ -2221,13 +2259,13 @@
         </p:nvGrpSpPr>
         <p:grpSpPr>
           <a:xfrm>
-            <a:off x="1483888" y="5013547"/>
+            <a:off x="1538067" y="5081699"/>
             <a:ext cx="3520091" cy="490358"/>
             <a:chOff x="1262611" y="5513800"/>
             <a:chExt cx="3249607" cy="490358"/>
           </a:xfrm>
         </p:grpSpPr>
-        <mc:AlternateContent>
+        <mc:AlternateContent xmlns:mc="http://schemas.openxmlformats.org/markup-compatibility/2006" xmlns:a14="http://schemas.microsoft.com/office/drawing/2010/main">
           <mc:Choice Requires="a14">
             <p:sp>
               <p:nvSpPr>
@@ -2273,7 +2311,7 @@
                     <a:t>Token score </a:t>
                   </a:r>
                   <a14:m>
-                    <m:oMath>
+                    <m:oMath xmlns:m="http://schemas.openxmlformats.org/officeDocument/2006/math">
                       <m:sSub>
                         <m:sSubPr>
                           <m:ctrlPr>
@@ -2484,7 +2522,7 @@
               </p:txBody>
             </p:sp>
           </mc:Choice>
-          <mc:Fallback>
+          <mc:Fallback xmlns:ns7="http://schemas.microsoft.com/office/powerpoint/2010/main" xmlns:m="http://schemas.openxmlformats.org/officeDocument/2006/math" xmlns:a16="http://schemas.microsoft.com/office/drawing/2014/main" xmlns="">
             <p:sp>
               <p:nvSpPr>
                 <p:cNvPr id="20056" name="Token score A_i"/>
@@ -2529,7 +2567,7 @@
           <p:cNvPr id="43" name="F1_0042_patch_34">
             <a:extLst>
               <a:ext uri="{FF2B5EF4-FFF2-40B4-BE49-F238E27FC236}">
-                <a16:creationId id="{E3953975-90A5-4BC8-B452-D09BDC376BD4}"/>
+                <a16:creationId xmlns:a16="http://schemas.microsoft.com/office/drawing/2014/main" id="{E3953975-90A5-4BC8-B452-D09BDC376BD4}"/>
               </a:ext>
             </a:extLst>
           </p:cNvPr>
@@ -2650,7 +2688,7 @@
           <p:cNvPr id="48" name="F1_0047_patch_37">
             <a:extLst>
               <a:ext uri="{FF2B5EF4-FFF2-40B4-BE49-F238E27FC236}">
-                <a16:creationId id="{B5410729-AB4D-41AC-ACAD-023D650067AA}"/>
+                <a16:creationId xmlns:a16="http://schemas.microsoft.com/office/drawing/2014/main" id="{B5410729-AB4D-41AC-ACAD-023D650067AA}"/>
               </a:ext>
             </a:extLst>
           </p:cNvPr>
@@ -2704,7 +2742,7 @@
           <p:cNvPr id="49" name="F1_0048_patch_38">
             <a:extLst>
               <a:ext uri="{FF2B5EF4-FFF2-40B4-BE49-F238E27FC236}">
-                <a16:creationId id="{005632C2-E820-4877-BA92-FEDAA1D01342}"/>
+                <a16:creationId xmlns:a16="http://schemas.microsoft.com/office/drawing/2014/main" id="{005632C2-E820-4877-BA92-FEDAA1D01342}"/>
               </a:ext>
             </a:extLst>
           </p:cNvPr>
@@ -2758,7 +2796,7 @@
           <p:cNvPr id="50" name="F1_0049_patch_39">
             <a:extLst>
               <a:ext uri="{FF2B5EF4-FFF2-40B4-BE49-F238E27FC236}">
-                <a16:creationId id="{6807DEF6-0346-4A4E-B08E-D33F034BA45A}"/>
+                <a16:creationId xmlns:a16="http://schemas.microsoft.com/office/drawing/2014/main" id="{6807DEF6-0346-4A4E-B08E-D33F034BA45A}"/>
               </a:ext>
             </a:extLst>
           </p:cNvPr>
@@ -2812,7 +2850,7 @@
           <p:cNvPr id="51" name="F1_0050_patch_40">
             <a:extLst>
               <a:ext uri="{FF2B5EF4-FFF2-40B4-BE49-F238E27FC236}">
-                <a16:creationId id="{501FA254-2E65-4818-B47D-9B64FD98807B}"/>
+                <a16:creationId xmlns:a16="http://schemas.microsoft.com/office/drawing/2014/main" id="{501FA254-2E65-4818-B47D-9B64FD98807B}"/>
               </a:ext>
             </a:extLst>
           </p:cNvPr>
@@ -2866,7 +2904,7 @@
           <p:cNvPr id="52" name="F1_0051_patch_41">
             <a:extLst>
               <a:ext uri="{FF2B5EF4-FFF2-40B4-BE49-F238E27FC236}">
-                <a16:creationId id="{D853FBE2-5A78-4AC2-B8B2-6182C4961589}"/>
+                <a16:creationId xmlns:a16="http://schemas.microsoft.com/office/drawing/2014/main" id="{D853FBE2-5A78-4AC2-B8B2-6182C4961589}"/>
               </a:ext>
             </a:extLst>
           </p:cNvPr>
@@ -2920,7 +2958,7 @@
           <p:cNvPr id="53" name="F1_0052_patch_42">
             <a:extLst>
               <a:ext uri="{FF2B5EF4-FFF2-40B4-BE49-F238E27FC236}">
-                <a16:creationId id="{C66AE558-9611-4394-BD91-7CA415ED3096}"/>
+                <a16:creationId xmlns:a16="http://schemas.microsoft.com/office/drawing/2014/main" id="{C66AE558-9611-4394-BD91-7CA415ED3096}"/>
               </a:ext>
             </a:extLst>
           </p:cNvPr>
@@ -2974,7 +3012,7 @@
           <p:cNvPr id="54" name="F1_0053_patch_43">
             <a:extLst>
               <a:ext uri="{FF2B5EF4-FFF2-40B4-BE49-F238E27FC236}">
-                <a16:creationId id="{985A3274-7CD2-4027-8206-3D0A54744C55}"/>
+                <a16:creationId xmlns:a16="http://schemas.microsoft.com/office/drawing/2014/main" id="{985A3274-7CD2-4027-8206-3D0A54744C55}"/>
               </a:ext>
             </a:extLst>
           </p:cNvPr>
@@ -3028,7 +3066,7 @@
           <p:cNvPr id="55" name="F1_0054_patch_44">
             <a:extLst>
               <a:ext uri="{FF2B5EF4-FFF2-40B4-BE49-F238E27FC236}">
-                <a16:creationId id="{AD0838EF-A43A-4D1E-869A-A5A0FC8C0CB8}"/>
+                <a16:creationId xmlns:a16="http://schemas.microsoft.com/office/drawing/2014/main" id="{AD0838EF-A43A-4D1E-869A-A5A0FC8C0CB8}"/>
               </a:ext>
             </a:extLst>
           </p:cNvPr>
@@ -3082,7 +3120,7 @@
           <p:cNvPr id="56" name="F1_0055_patch_45">
             <a:extLst>
               <a:ext uri="{FF2B5EF4-FFF2-40B4-BE49-F238E27FC236}">
-                <a16:creationId id="{BC33FAA2-C1AF-4D5D-8B6A-608356A7E8A3}"/>
+                <a16:creationId xmlns:a16="http://schemas.microsoft.com/office/drawing/2014/main" id="{BC33FAA2-C1AF-4D5D-8B6A-608356A7E8A3}"/>
               </a:ext>
             </a:extLst>
           </p:cNvPr>
@@ -3136,7 +3174,7 @@
           <p:cNvPr id="57" name="F1_0056_patch_46">
             <a:extLst>
               <a:ext uri="{FF2B5EF4-FFF2-40B4-BE49-F238E27FC236}">
-                <a16:creationId id="{FB5717DA-DD5D-4401-8C07-1981F8E7F057}"/>
+                <a16:creationId xmlns:a16="http://schemas.microsoft.com/office/drawing/2014/main" id="{FB5717DA-DD5D-4401-8C07-1981F8E7F057}"/>
               </a:ext>
             </a:extLst>
           </p:cNvPr>
@@ -3190,7 +3228,7 @@
           <p:cNvPr id="58" name="F1_0057_patch_47">
             <a:extLst>
               <a:ext uri="{FF2B5EF4-FFF2-40B4-BE49-F238E27FC236}">
-                <a16:creationId id="{40226446-9CE4-41DC-882A-8D242E7218CA}"/>
+                <a16:creationId xmlns:a16="http://schemas.microsoft.com/office/drawing/2014/main" id="{40226446-9CE4-41DC-882A-8D242E7218CA}"/>
               </a:ext>
             </a:extLst>
           </p:cNvPr>
@@ -3244,7 +3282,7 @@
           <p:cNvPr id="59" name="F1_0058_patch_48">
             <a:extLst>
               <a:ext uri="{FF2B5EF4-FFF2-40B4-BE49-F238E27FC236}">
-                <a16:creationId id="{F6ECFFF0-FE28-4BB3-9942-696A48C5B2E8}"/>
+                <a16:creationId xmlns:a16="http://schemas.microsoft.com/office/drawing/2014/main" id="{F6ECFFF0-FE28-4BB3-9942-696A48C5B2E8}"/>
               </a:ext>
             </a:extLst>
           </p:cNvPr>
@@ -3298,7 +3336,7 @@
           <p:cNvPr id="60" name="F1_0059_patch_49">
             <a:extLst>
               <a:ext uri="{FF2B5EF4-FFF2-40B4-BE49-F238E27FC236}">
-                <a16:creationId id="{0233E531-D3FE-42DF-9B14-7F21728A8514}"/>
+                <a16:creationId xmlns:a16="http://schemas.microsoft.com/office/drawing/2014/main" id="{0233E531-D3FE-42DF-9B14-7F21728A8514}"/>
               </a:ext>
             </a:extLst>
           </p:cNvPr>
@@ -3352,7 +3390,7 @@
           <p:cNvPr id="61" name="F1_0060_patch_50">
             <a:extLst>
               <a:ext uri="{FF2B5EF4-FFF2-40B4-BE49-F238E27FC236}">
-                <a16:creationId id="{28F99A6B-C922-4391-B899-C5DB42C58ABE}"/>
+                <a16:creationId xmlns:a16="http://schemas.microsoft.com/office/drawing/2014/main" id="{28F99A6B-C922-4391-B899-C5DB42C58ABE}"/>
               </a:ext>
             </a:extLst>
           </p:cNvPr>
@@ -3406,7 +3444,7 @@
           <p:cNvPr id="62" name="F1_0061_patch_51">
             <a:extLst>
               <a:ext uri="{FF2B5EF4-FFF2-40B4-BE49-F238E27FC236}">
-                <a16:creationId id="{22A97234-319E-4F8F-9491-39EBBD80804A}"/>
+                <a16:creationId xmlns:a16="http://schemas.microsoft.com/office/drawing/2014/main" id="{22A97234-319E-4F8F-9491-39EBBD80804A}"/>
               </a:ext>
             </a:extLst>
           </p:cNvPr>
@@ -3460,7 +3498,7 @@
           <p:cNvPr id="63" name="F1_0062_patch_52">
             <a:extLst>
               <a:ext uri="{FF2B5EF4-FFF2-40B4-BE49-F238E27FC236}">
-                <a16:creationId id="{8C2DC2BE-3B7B-4163-B7DD-D2E0F728F147}"/>
+                <a16:creationId xmlns:a16="http://schemas.microsoft.com/office/drawing/2014/main" id="{8C2DC2BE-3B7B-4163-B7DD-D2E0F728F147}"/>
               </a:ext>
             </a:extLst>
           </p:cNvPr>
@@ -3514,7 +3552,7 @@
           <p:cNvPr id="64" name="F1_0063_patch_53">
             <a:extLst>
               <a:ext uri="{FF2B5EF4-FFF2-40B4-BE49-F238E27FC236}">
-                <a16:creationId id="{56CF1ADC-15ED-45FA-AB83-94D4CA361F91}"/>
+                <a16:creationId xmlns:a16="http://schemas.microsoft.com/office/drawing/2014/main" id="{56CF1ADC-15ED-45FA-AB83-94D4CA361F91}"/>
               </a:ext>
             </a:extLst>
           </p:cNvPr>
@@ -3568,7 +3606,7 @@
           <p:cNvPr id="65" name="F1_0064_patch_54">
             <a:extLst>
               <a:ext uri="{FF2B5EF4-FFF2-40B4-BE49-F238E27FC236}">
-                <a16:creationId id="{EA7C7F7F-0ED2-456A-B13B-24A12D7284DF}"/>
+                <a16:creationId xmlns:a16="http://schemas.microsoft.com/office/drawing/2014/main" id="{EA7C7F7F-0ED2-456A-B13B-24A12D7284DF}"/>
               </a:ext>
             </a:extLst>
           </p:cNvPr>
@@ -3622,7 +3660,7 @@
           <p:cNvPr id="66" name="F1_0065_patch_55">
             <a:extLst>
               <a:ext uri="{FF2B5EF4-FFF2-40B4-BE49-F238E27FC236}">
-                <a16:creationId id="{CA160572-45F9-482B-AFEA-6BFAAA00EA43}"/>
+                <a16:creationId xmlns:a16="http://schemas.microsoft.com/office/drawing/2014/main" id="{CA160572-45F9-482B-AFEA-6BFAAA00EA43}"/>
               </a:ext>
             </a:extLst>
           </p:cNvPr>
@@ -3676,7 +3714,7 @@
           <p:cNvPr id="67" name="F1_0066_patch_56">
             <a:extLst>
               <a:ext uri="{FF2B5EF4-FFF2-40B4-BE49-F238E27FC236}">
-                <a16:creationId id="{206D9FCE-6140-4E87-9200-4BAE97694225}"/>
+                <a16:creationId xmlns:a16="http://schemas.microsoft.com/office/drawing/2014/main" id="{206D9FCE-6140-4E87-9200-4BAE97694225}"/>
               </a:ext>
             </a:extLst>
           </p:cNvPr>
@@ -3730,7 +3768,7 @@
           <p:cNvPr id="68" name="F1_0067_patch_57">
             <a:extLst>
               <a:ext uri="{FF2B5EF4-FFF2-40B4-BE49-F238E27FC236}">
-                <a16:creationId id="{397270FF-6159-4C98-A7D9-EE75B56DDC07}"/>
+                <a16:creationId xmlns:a16="http://schemas.microsoft.com/office/drawing/2014/main" id="{397270FF-6159-4C98-A7D9-EE75B56DDC07}"/>
               </a:ext>
             </a:extLst>
           </p:cNvPr>
@@ -3784,7 +3822,7 @@
           <p:cNvPr id="69" name="F1_0068_patch_58">
             <a:extLst>
               <a:ext uri="{FF2B5EF4-FFF2-40B4-BE49-F238E27FC236}">
-                <a16:creationId id="{BC26A676-4268-45FE-B811-6B80E4E876C6}"/>
+                <a16:creationId xmlns:a16="http://schemas.microsoft.com/office/drawing/2014/main" id="{BC26A676-4268-45FE-B811-6B80E4E876C6}"/>
               </a:ext>
             </a:extLst>
           </p:cNvPr>
@@ -3838,7 +3876,7 @@
           <p:cNvPr id="70" name="F1_0069_patch_59">
             <a:extLst>
               <a:ext uri="{FF2B5EF4-FFF2-40B4-BE49-F238E27FC236}">
-                <a16:creationId id="{49971B0E-DA0B-45DF-B4F4-196311B0CB11}"/>
+                <a16:creationId xmlns:a16="http://schemas.microsoft.com/office/drawing/2014/main" id="{49971B0E-DA0B-45DF-B4F4-196311B0CB11}"/>
               </a:ext>
             </a:extLst>
           </p:cNvPr>
@@ -3892,7 +3930,7 @@
           <p:cNvPr id="71" name="F1_0070_patch_60">
             <a:extLst>
               <a:ext uri="{FF2B5EF4-FFF2-40B4-BE49-F238E27FC236}">
-                <a16:creationId id="{DC9B080A-75A9-4719-B3BF-ED342C2E8440}"/>
+                <a16:creationId xmlns:a16="http://schemas.microsoft.com/office/drawing/2014/main" id="{DC9B080A-75A9-4719-B3BF-ED342C2E8440}"/>
               </a:ext>
             </a:extLst>
           </p:cNvPr>
@@ -3946,7 +3984,7 @@
           <p:cNvPr id="72" name="F1_0071_patch_61">
             <a:extLst>
               <a:ext uri="{FF2B5EF4-FFF2-40B4-BE49-F238E27FC236}">
-                <a16:creationId id="{C728D8AB-B261-4D89-B383-8810D940C3D3}"/>
+                <a16:creationId xmlns:a16="http://schemas.microsoft.com/office/drawing/2014/main" id="{C728D8AB-B261-4D89-B383-8810D940C3D3}"/>
               </a:ext>
             </a:extLst>
           </p:cNvPr>
@@ -4000,7 +4038,7 @@
           <p:cNvPr id="73" name="F1_0072_patch_62">
             <a:extLst>
               <a:ext uri="{FF2B5EF4-FFF2-40B4-BE49-F238E27FC236}">
-                <a16:creationId id="{32EAB0BA-C511-4C94-ADCB-F9D1EE038554}"/>
+                <a16:creationId xmlns:a16="http://schemas.microsoft.com/office/drawing/2014/main" id="{32EAB0BA-C511-4C94-ADCB-F9D1EE038554}"/>
               </a:ext>
             </a:extLst>
           </p:cNvPr>
@@ -4054,7 +4092,7 @@
           <p:cNvPr id="74" name="F1_0073_patch_63">
             <a:extLst>
               <a:ext uri="{FF2B5EF4-FFF2-40B4-BE49-F238E27FC236}">
-                <a16:creationId id="{E34E3438-B761-4A25-96E6-D4975A1E4889}"/>
+                <a16:creationId xmlns:a16="http://schemas.microsoft.com/office/drawing/2014/main" id="{E34E3438-B761-4A25-96E6-D4975A1E4889}"/>
               </a:ext>
             </a:extLst>
           </p:cNvPr>
@@ -4108,7 +4146,7 @@
           <p:cNvPr id="75" name="F1_0074_patch_64">
             <a:extLst>
               <a:ext uri="{FF2B5EF4-FFF2-40B4-BE49-F238E27FC236}">
-                <a16:creationId id="{88CE8383-E66D-4EEB-B7AB-DE28F919F1F7}"/>
+                <a16:creationId xmlns:a16="http://schemas.microsoft.com/office/drawing/2014/main" id="{88CE8383-E66D-4EEB-B7AB-DE28F919F1F7}"/>
               </a:ext>
             </a:extLst>
           </p:cNvPr>
@@ -4162,7 +4200,7 @@
           <p:cNvPr id="76" name="F1_0075_patch_65">
             <a:extLst>
               <a:ext uri="{FF2B5EF4-FFF2-40B4-BE49-F238E27FC236}">
-                <a16:creationId id="{9B1F8C57-11CF-4B46-A2EB-B2775CA691BD}"/>
+                <a16:creationId xmlns:a16="http://schemas.microsoft.com/office/drawing/2014/main" id="{9B1F8C57-11CF-4B46-A2EB-B2775CA691BD}"/>
               </a:ext>
             </a:extLst>
           </p:cNvPr>
@@ -4216,7 +4254,7 @@
           <p:cNvPr id="77" name="F1_0076_patch_66">
             <a:extLst>
               <a:ext uri="{FF2B5EF4-FFF2-40B4-BE49-F238E27FC236}">
-                <a16:creationId id="{EF134169-84AB-40A1-95AE-5FA797446D44}"/>
+                <a16:creationId xmlns:a16="http://schemas.microsoft.com/office/drawing/2014/main" id="{EF134169-84AB-40A1-95AE-5FA797446D44}"/>
               </a:ext>
             </a:extLst>
           </p:cNvPr>
@@ -4270,7 +4308,7 @@
           <p:cNvPr id="78" name="F1_0077_patch_67">
             <a:extLst>
               <a:ext uri="{FF2B5EF4-FFF2-40B4-BE49-F238E27FC236}">
-                <a16:creationId id="{3D7A952C-F359-40E7-9E4B-FBA6C6F123F1}"/>
+                <a16:creationId xmlns:a16="http://schemas.microsoft.com/office/drawing/2014/main" id="{3D7A952C-F359-40E7-9E4B-FBA6C6F123F1}"/>
               </a:ext>
             </a:extLst>
           </p:cNvPr>
@@ -4324,7 +4362,7 @@
           <p:cNvPr id="79" name="F1_0078_patch_68">
             <a:extLst>
               <a:ext uri="{FF2B5EF4-FFF2-40B4-BE49-F238E27FC236}">
-                <a16:creationId id="{263E19F2-ED6F-4C27-BDF7-76148AF15E9B}"/>
+                <a16:creationId xmlns:a16="http://schemas.microsoft.com/office/drawing/2014/main" id="{263E19F2-ED6F-4C27-BDF7-76148AF15E9B}"/>
               </a:ext>
             </a:extLst>
           </p:cNvPr>
@@ -4474,7 +4512,7 @@
           <p:cNvPr id="622" name="F1_0621_line2d_2">
             <a:extLst>
               <a:ext uri="{FF2B5EF4-FFF2-40B4-BE49-F238E27FC236}">
-                <a16:creationId id="{89A6F831-0BEF-4E4A-926B-B99302B66F0E}"/>
+                <a16:creationId xmlns:a16="http://schemas.microsoft.com/office/drawing/2014/main" id="{89A6F831-0BEF-4E4A-926B-B99302B66F0E}"/>
               </a:ext>
             </a:extLst>
           </p:cNvPr>
@@ -4591,7 +4629,7 @@
           <p:cNvPr id="7" name="F1_0006_patch_5">
             <a:extLst>
               <a:ext uri="{FF2B5EF4-FFF2-40B4-BE49-F238E27FC236}">
-                <a16:creationId id="{9E9168DA-D5AE-4769-A622-5EB19B66F9A0}"/>
+                <a16:creationId xmlns:a16="http://schemas.microsoft.com/office/drawing/2014/main" id="{9E9168DA-D5AE-4769-A622-5EB19B66F9A0}"/>
               </a:ext>
             </a:extLst>
           </p:cNvPr>
@@ -4645,7 +4683,7 @@
           <p:cNvPr id="8" name="F1_0007_patch_6">
             <a:extLst>
               <a:ext uri="{FF2B5EF4-FFF2-40B4-BE49-F238E27FC236}">
-                <a16:creationId id="{1A36E21B-14E6-451E-8E8C-0442A3833C3A}"/>
+                <a16:creationId xmlns:a16="http://schemas.microsoft.com/office/drawing/2014/main" id="{1A36E21B-14E6-451E-8E8C-0442A3833C3A}"/>
               </a:ext>
             </a:extLst>
           </p:cNvPr>
@@ -4699,7 +4737,7 @@
           <p:cNvPr id="9" name="F1_0008_patch_7">
             <a:extLst>
               <a:ext uri="{FF2B5EF4-FFF2-40B4-BE49-F238E27FC236}">
-                <a16:creationId id="{D44AC510-6A91-464C-BE6E-CCE7CE1C4B1C}"/>
+                <a16:creationId xmlns:a16="http://schemas.microsoft.com/office/drawing/2014/main" id="{D44AC510-6A91-464C-BE6E-CCE7CE1C4B1C}"/>
               </a:ext>
             </a:extLst>
           </p:cNvPr>
@@ -4782,7 +4820,7 @@
           <p:cNvPr id="10" name="F1_0009_patch_8">
             <a:extLst>
               <a:ext uri="{FF2B5EF4-FFF2-40B4-BE49-F238E27FC236}">
-                <a16:creationId id="{E281A0C2-E280-47A8-9987-A9884727488F}"/>
+                <a16:creationId xmlns:a16="http://schemas.microsoft.com/office/drawing/2014/main" id="{E281A0C2-E280-47A8-9987-A9884727488F}"/>
               </a:ext>
             </a:extLst>
           </p:cNvPr>
@@ -4865,7 +4903,7 @@
           <p:cNvPr id="11" name="F1_0010_patch_9">
             <a:extLst>
               <a:ext uri="{FF2B5EF4-FFF2-40B4-BE49-F238E27FC236}">
-                <a16:creationId id="{439C2DDD-A2F4-46B8-80A3-D137FA08CCAE}"/>
+                <a16:creationId xmlns:a16="http://schemas.microsoft.com/office/drawing/2014/main" id="{439C2DDD-A2F4-46B8-80A3-D137FA08CCAE}"/>
               </a:ext>
             </a:extLst>
           </p:cNvPr>
@@ -4972,7 +5010,7 @@
           <p:cNvPr id="14" name="F1_0013_patch_11">
             <a:extLst>
               <a:ext uri="{FF2B5EF4-FFF2-40B4-BE49-F238E27FC236}">
-                <a16:creationId id="{BED0353F-D6AF-4611-BDDA-47153B33641C}"/>
+                <a16:creationId xmlns:a16="http://schemas.microsoft.com/office/drawing/2014/main" id="{BED0353F-D6AF-4611-BDDA-47153B33641C}"/>
               </a:ext>
             </a:extLst>
           </p:cNvPr>
@@ -5026,7 +5064,7 @@
           <p:cNvPr id="15" name="F1_0014_patch_12">
             <a:extLst>
               <a:ext uri="{FF2B5EF4-FFF2-40B4-BE49-F238E27FC236}">
-                <a16:creationId id="{87ACCB5B-7AB2-434B-9FF0-EA7B820CFC09}"/>
+                <a16:creationId xmlns:a16="http://schemas.microsoft.com/office/drawing/2014/main" id="{87ACCB5B-7AB2-434B-9FF0-EA7B820CFC09}"/>
               </a:ext>
             </a:extLst>
           </p:cNvPr>
@@ -5080,7 +5118,7 @@
           <p:cNvPr id="16" name="F1_0015_patch_13">
             <a:extLst>
               <a:ext uri="{FF2B5EF4-FFF2-40B4-BE49-F238E27FC236}">
-                <a16:creationId id="{B05A8A24-53AB-484A-88CE-22686975ED3A}"/>
+                <a16:creationId xmlns:a16="http://schemas.microsoft.com/office/drawing/2014/main" id="{B05A8A24-53AB-484A-88CE-22686975ED3A}"/>
               </a:ext>
             </a:extLst>
           </p:cNvPr>
@@ -5163,7 +5201,7 @@
           <p:cNvPr id="17" name="F1_0016_patch_14">
             <a:extLst>
               <a:ext uri="{FF2B5EF4-FFF2-40B4-BE49-F238E27FC236}">
-                <a16:creationId id="{7F0BE26A-F837-4BA5-8339-98102A580B6D}"/>
+                <a16:creationId xmlns:a16="http://schemas.microsoft.com/office/drawing/2014/main" id="{7F0BE26A-F837-4BA5-8339-98102A580B6D}"/>
               </a:ext>
             </a:extLst>
           </p:cNvPr>
@@ -5246,7 +5284,7 @@
           <p:cNvPr id="18" name="F1_0017_patch_15">
             <a:extLst>
               <a:ext uri="{FF2B5EF4-FFF2-40B4-BE49-F238E27FC236}">
-                <a16:creationId id="{34158BAE-2902-4CB4-B8AD-D547B32DB501}"/>
+                <a16:creationId xmlns:a16="http://schemas.microsoft.com/office/drawing/2014/main" id="{34158BAE-2902-4CB4-B8AD-D547B32DB501}"/>
               </a:ext>
             </a:extLst>
           </p:cNvPr>
@@ -5329,7 +5367,7 @@
           <p:cNvPr id="19" name="F1_0018_patch_16">
             <a:extLst>
               <a:ext uri="{FF2B5EF4-FFF2-40B4-BE49-F238E27FC236}">
-                <a16:creationId id="{295FDDBC-A1E3-4A04-9BCB-2A59C8F7C554}"/>
+                <a16:creationId xmlns:a16="http://schemas.microsoft.com/office/drawing/2014/main" id="{295FDDBC-A1E3-4A04-9BCB-2A59C8F7C554}"/>
               </a:ext>
             </a:extLst>
           </p:cNvPr>
@@ -5498,7 +5536,7 @@
           <p:cNvPr id="28" name="F1_0027_patch_21">
             <a:extLst>
               <a:ext uri="{FF2B5EF4-FFF2-40B4-BE49-F238E27FC236}">
-                <a16:creationId id="{76F9703F-2CA4-4B9C-AB25-D926BA308645}"/>
+                <a16:creationId xmlns:a16="http://schemas.microsoft.com/office/drawing/2014/main" id="{76F9703F-2CA4-4B9C-AB25-D926BA308645}"/>
               </a:ext>
             </a:extLst>
           </p:cNvPr>
@@ -5571,7 +5609,7 @@
           <p:cNvPr id="29" name="F1_0028_patch_22">
             <a:extLst>
               <a:ext uri="{FF2B5EF4-FFF2-40B4-BE49-F238E27FC236}">
-                <a16:creationId id="{F48848E6-D8F9-4307-944B-0668E8440316}"/>
+                <a16:creationId xmlns:a16="http://schemas.microsoft.com/office/drawing/2014/main" id="{F48848E6-D8F9-4307-944B-0668E8440316}"/>
               </a:ext>
             </a:extLst>
           </p:cNvPr>
@@ -5644,7 +5682,7 @@
           <p:cNvPr id="621" name="F1_0620_line2d_1">
             <a:extLst>
               <a:ext uri="{FF2B5EF4-FFF2-40B4-BE49-F238E27FC236}">
-                <a16:creationId id="{BE5C0A01-F26F-4416-B579-246E9269703F}"/>
+                <a16:creationId xmlns:a16="http://schemas.microsoft.com/office/drawing/2014/main" id="{BE5C0A01-F26F-4416-B579-246E9269703F}"/>
               </a:ext>
             </a:extLst>
           </p:cNvPr>
@@ -5701,7 +5739,7 @@
             <a:chExt cx="452555" cy="511572"/>
           </a:xfrm>
         </p:grpSpPr>
-        <mc:AlternateContent>
+        <mc:AlternateContent xmlns:mc="http://schemas.openxmlformats.org/markup-compatibility/2006" xmlns:a14="http://schemas.microsoft.com/office/drawing/2010/main">
           <mc:Choice Requires="a14">
             <p:sp>
               <p:nvSpPr>
@@ -5739,11 +5777,11 @@
                     </a:defRPr>
                   </a:pPr>
                   <a14:m>
-                    <m:oMathPara>
+                    <m:oMathPara xmlns:m="http://schemas.openxmlformats.org/officeDocument/2006/math">
                       <m:oMathParaPr>
                         <m:jc m:val="centerGroup"/>
                       </m:oMathParaPr>
-                      <m:oMath>
+                      <m:oMath xmlns:m="http://schemas.openxmlformats.org/officeDocument/2006/math">
                         <m:r>
                           <m:rPr>
                             <m:sty m:val="p"/>
@@ -5784,7 +5822,7 @@
               </p:txBody>
             </p:sp>
           </mc:Choice>
-          <mc:Fallback>
+          <mc:Fallback xmlns:ns7="http://schemas.microsoft.com/office/powerpoint/2010/main" xmlns:m="http://schemas.openxmlformats.org/officeDocument/2006/math" xmlns:a16="http://schemas.microsoft.com/office/drawing/2014/main" xmlns="">
             <p:sp>
               <p:nvSpPr>
                 <p:cNvPr id="20030" name="Equation ΔF" descr="ΔF"/>
@@ -5827,7 +5865,7 @@
           </mc:Fallback>
         </mc:AlternateContent>
       </p:grpSp>
-      <mc:AlternateContent>
+      <mc:AlternateContent xmlns:mc="http://schemas.openxmlformats.org/markup-compatibility/2006" xmlns:a14="http://schemas.microsoft.com/office/drawing/2010/main">
         <mc:Choice Requires="a14">
           <p:sp>
             <p:nvSpPr>
@@ -5865,11 +5903,11 @@
                   </a:defRPr>
                 </a:pPr>
                 <a14:m>
-                  <m:oMathPara>
+                  <m:oMathPara xmlns:m="http://schemas.openxmlformats.org/officeDocument/2006/math">
                     <m:oMathParaPr>
                       <m:jc m:val="centerGroup"/>
                     </m:oMathParaPr>
-                    <m:oMath>
+                    <m:oMath xmlns:m="http://schemas.openxmlformats.org/officeDocument/2006/math">
                       <m:r>
                         <a:rPr lang="en-US" sz="2100" b="0" i="0" smtClean="0">
                           <a:solidFill>
@@ -5896,7 +5934,7 @@
             </p:txBody>
           </p:sp>
         </mc:Choice>
-        <mc:Fallback>
+        <mc:Fallback xmlns:ns7="http://schemas.microsoft.com/office/powerpoint/2010/main" xmlns:m="http://schemas.openxmlformats.org/officeDocument/2006/math" xmlns:a16="http://schemas.microsoft.com/office/drawing/2014/main" xmlns="">
           <p:sp>
             <p:nvSpPr>
               <p:cNvPr id="20031" name="Equation +" descr="+"/>
@@ -5938,78 +5976,123 @@
           </p:sp>
         </mc:Fallback>
       </mc:AlternateContent>
-      <p:sp>
-        <p:nvSpPr>
-          <p:cNvPr id="666" name="Equation minus" descr="−"/>
-          <p:cNvSpPr txBox="1"/>
-          <p:nvPr/>
-        </p:nvSpPr>
-        <p:spPr>
-          <a:xfrm>
-            <a:off x="3644712" y="1122528"/>
-            <a:ext cx="275230" cy="720090"/>
-          </a:xfrm>
-          <a:prstGeom prst="rect">
-            <a:avLst/>
-          </a:prstGeom>
-          <a:noFill/>
-          <a:ln>
-            <a:noFill/>
-          </a:ln>
-        </p:spPr>
-        <p:txBody>
-          <a:bodyPr wrap="none" lIns="0" tIns="0" rIns="0" bIns="0" anchor="t">
-            <a:noAutofit/>
-          </a:bodyPr>
-          <a:lstStyle/>
-          <a:p>
-            <a:pPr algn="l">
-              <a:defRPr lang="en-US" sz="2100" b="0" i="0" smtClean="0">
-                <a:solidFill>
-                  <a:srgbClr val="657581"/>
-                </a:solidFill>
-                <a:latin typeface="Cambria Math" charset="0"/>
-                <a:ea typeface="Cambria Math" charset="0"/>
-                <a:cs typeface="Cambria Math" charset="0"/>
-              </a:defRPr>
-            </a:pPr>
-            <a14:m>
-              <m:oMathPara>
-                <m:oMathParaPr>
-                  <m:jc m:val="centerGroup"/>
-                </m:oMathParaPr>
-                <m:oMath>
-                  <m:r>
-                    <a:rPr lang="en-US" sz="2100" b="0" i="0" smtClean="0">
-                      <a:solidFill>
-                        <a:srgbClr val="657581"/>
-                      </a:solidFill>
-                      <a:latin typeface="Cambria Math" charset="0"/>
-                      <a:ea typeface="Cambria Math" charset="0"/>
-                      <a:cs typeface="Cambria Math" charset="0"/>
-                    </a:rPr>
-                    <m:t>−</m:t>
-                  </m:r>
-                </m:oMath>
-              </m:oMathPara>
-            </a14:m>
-            <a:endParaRPr lang="en-US" sz="2100" b="0" i="0">
-              <a:solidFill>
-                <a:srgbClr val="657581"/>
-              </a:solidFill>
-              <a:latin typeface="Cambria Math" charset="0"/>
-              <a:ea typeface="Cambria Math" charset="0"/>
-              <a:cs typeface="Cambria Math" charset="0"/>
-            </a:endParaRPr>
-          </a:p>
-        </p:txBody>
-      </p:sp>
+      <mc:AlternateContent xmlns:mc="http://schemas.openxmlformats.org/markup-compatibility/2006">
+        <mc:Choice xmlns:a14="http://schemas.microsoft.com/office/drawing/2010/main" Requires="a14">
+          <p:sp>
+            <p:nvSpPr>
+              <p:cNvPr id="666" name="Equation minus" descr="−"/>
+              <p:cNvSpPr txBox="1"/>
+              <p:nvPr/>
+            </p:nvSpPr>
+            <p:spPr>
+              <a:xfrm>
+                <a:off x="3644712" y="1122528"/>
+                <a:ext cx="275230" cy="720090"/>
+              </a:xfrm>
+              <a:prstGeom prst="rect">
+                <a:avLst/>
+              </a:prstGeom>
+              <a:noFill/>
+              <a:ln>
+                <a:noFill/>
+              </a:ln>
+            </p:spPr>
+            <p:txBody>
+              <a:bodyPr wrap="none" lIns="0" tIns="0" rIns="0" bIns="0" anchor="t">
+                <a:noAutofit/>
+              </a:bodyPr>
+              <a:lstStyle/>
+              <a:p>
+                <a:pPr algn="l">
+                  <a:defRPr lang="en-US" sz="2100" b="0" i="0" smtClean="0">
+                    <a:solidFill>
+                      <a:srgbClr val="657581"/>
+                    </a:solidFill>
+                    <a:latin typeface="Cambria Math" charset="0"/>
+                    <a:ea typeface="Cambria Math" charset="0"/>
+                    <a:cs typeface="Cambria Math" charset="0"/>
+                  </a:defRPr>
+                </a:pPr>
+                <a14:m>
+                  <m:oMathPara xmlns:m="http://schemas.openxmlformats.org/officeDocument/2006/math">
+                    <m:oMathParaPr>
+                      <m:jc m:val="centerGroup"/>
+                    </m:oMathParaPr>
+                    <m:oMath xmlns:m="http://schemas.openxmlformats.org/officeDocument/2006/math">
+                      <m:r>
+                        <a:rPr lang="en-US" sz="2100" b="0" i="0" smtClean="0">
+                          <a:solidFill>
+                            <a:srgbClr val="657581"/>
+                          </a:solidFill>
+                          <a:latin typeface="Cambria Math" charset="0"/>
+                          <a:ea typeface="Cambria Math" charset="0"/>
+                          <a:cs typeface="Cambria Math" charset="0"/>
+                        </a:rPr>
+                        <m:t>−</m:t>
+                      </m:r>
+                    </m:oMath>
+                  </m:oMathPara>
+                </a14:m>
+                <a:endParaRPr lang="en-US" sz="2100" b="0" i="0">
+                  <a:solidFill>
+                    <a:srgbClr val="657581"/>
+                  </a:solidFill>
+                  <a:latin typeface="Cambria Math" charset="0"/>
+                  <a:ea typeface="Cambria Math" charset="0"/>
+                  <a:cs typeface="Cambria Math" charset="0"/>
+                </a:endParaRPr>
+              </a:p>
+            </p:txBody>
+          </p:sp>
+        </mc:Choice>
+        <mc:Fallback>
+          <p:sp>
+            <p:nvSpPr>
+              <p:cNvPr id="666" name="Equation minus" descr="−"/>
+              <p:cNvSpPr txBox="1">
+                <a:spLocks noRot="1" noChangeAspect="1" noMove="1" noResize="1" noEditPoints="1" noAdjustHandles="1" noChangeArrowheads="1" noChangeShapeType="1" noTextEdit="1"/>
+              </p:cNvSpPr>
+              <p:nvPr/>
+            </p:nvSpPr>
+            <p:spPr>
+              <a:xfrm>
+                <a:off x="3644712" y="1122528"/>
+                <a:ext cx="275230" cy="720090"/>
+              </a:xfrm>
+              <a:prstGeom prst="rect">
+                <a:avLst/>
+              </a:prstGeom>
+              <a:blipFill>
+                <a:blip r:embed="rId11"/>
+                <a:stretch>
+                  <a:fillRect l="-4444" r="-2222"/>
+                </a:stretch>
+              </a:blipFill>
+              <a:ln>
+                <a:noFill/>
+              </a:ln>
+            </p:spPr>
+            <p:txBody>
+              <a:bodyPr/>
+              <a:lstStyle/>
+              <a:p>
+                <a:r>
+                  <a:rPr lang="zh-CN" altLang="en-US">
+                    <a:noFill/>
+                  </a:rPr>
+                  <a:t> </a:t>
+                </a:r>
+              </a:p>
+            </p:txBody>
+          </p:sp>
+        </mc:Fallback>
+      </mc:AlternateContent>
       <p:sp>
         <p:nvSpPr>
           <p:cNvPr id="667" name="F1_0666_text_24" descr="Later layers">
             <a:extLst>
               <a:ext uri="{FF2B5EF4-FFF2-40B4-BE49-F238E27FC236}">
-                <a16:creationId id="{7FBCEE7B-0F81-472E-815A-289F1A1682E8}"/>
+                <a16:creationId xmlns:a16="http://schemas.microsoft.com/office/drawing/2014/main" id="{7FBCEE7B-0F81-472E-815A-289F1A1682E8}"/>
               </a:ext>
             </a:extLst>
           </p:cNvPr>
@@ -6075,7 +6158,7 @@
             <a:chExt cx="1183882" cy="436362"/>
           </a:xfrm>
         </p:grpSpPr>
-        <mc:AlternateContent>
+        <mc:AlternateContent xmlns:mc="http://schemas.openxmlformats.org/markup-compatibility/2006" xmlns:a14="http://schemas.microsoft.com/office/drawing/2010/main">
           <mc:Choice Requires="a14">
             <p:sp>
               <p:nvSpPr>
@@ -6121,7 +6204,7 @@
                     <a:t>Operation </a:t>
                   </a:r>
                   <a14:m>
-                    <m:oMath>
+                    <m:oMath xmlns:m="http://schemas.openxmlformats.org/officeDocument/2006/math">
                       <m:r>
                         <a:rPr lang="en-US" sz="2040" b="0" i="1" smtClean="0">
                           <a:solidFill>
@@ -6147,7 +6230,7 @@
               </p:txBody>
             </p:sp>
           </mc:Choice>
-          <mc:Fallback>
+          <mc:Fallback xmlns:ns7="http://schemas.microsoft.com/office/powerpoint/2010/main" xmlns:m="http://schemas.openxmlformats.org/officeDocument/2006/math" xmlns:a16="http://schemas.microsoft.com/office/drawing/2014/main" xmlns="">
             <p:sp>
               <p:nvSpPr>
                 <p:cNvPr id="20057" name="Operation f (original)"/>
@@ -6165,7 +6248,7 @@
                   <a:avLst/>
                 </a:prstGeom>
                 <a:blipFill>
-                  <a:blip r:embed="rId11"/>
+                  <a:blip r:embed="rId12"/>
                   <a:stretch>
                     <a:fillRect l="-10156" t="-10256"/>
                   </a:stretch>
@@ -6192,7 +6275,7 @@
           <p:cNvPr id="670" name="F1_0669_text_26" descr="Later layers">
             <a:extLst>
               <a:ext uri="{FF2B5EF4-FFF2-40B4-BE49-F238E27FC236}">
-                <a16:creationId id="{4591887A-9EC2-4FF1-AD0B-D14EF9BEB388}"/>
+                <a16:creationId xmlns:a16="http://schemas.microsoft.com/office/drawing/2014/main" id="{4591887A-9EC2-4FF1-AD0B-D14EF9BEB388}"/>
               </a:ext>
             </a:extLst>
           </p:cNvPr>
@@ -6258,7 +6341,7 @@
             <a:chExt cx="1183882" cy="436362"/>
           </a:xfrm>
         </p:grpSpPr>
-        <mc:AlternateContent>
+        <mc:AlternateContent xmlns:mc="http://schemas.openxmlformats.org/markup-compatibility/2006" xmlns:a14="http://schemas.microsoft.com/office/drawing/2010/main">
           <mc:Choice Requires="a14">
             <p:sp>
               <p:nvSpPr>
@@ -6304,7 +6387,7 @@
                     <a:t>Operation </a:t>
                   </a:r>
                   <a14:m>
-                    <m:oMath>
+                    <m:oMath xmlns:m="http://schemas.openxmlformats.org/officeDocument/2006/math">
                       <m:r>
                         <a:rPr lang="en-US" sz="2040" b="0" i="1" smtClean="0">
                           <a:solidFill>
@@ -6330,7 +6413,7 @@
               </p:txBody>
             </p:sp>
           </mc:Choice>
-          <mc:Fallback>
+          <mc:Fallback xmlns:ns7="http://schemas.microsoft.com/office/powerpoint/2010/main" xmlns:m="http://schemas.openxmlformats.org/officeDocument/2006/math" xmlns:a16="http://schemas.microsoft.com/office/drawing/2014/main" xmlns="">
             <p:sp>
               <p:nvSpPr>
                 <p:cNvPr id="20058" name="Operation f (reference)"/>
@@ -6348,7 +6431,7 @@
                   <a:avLst/>
                 </a:prstGeom>
                 <a:blipFill>
-                  <a:blip r:embed="rId12"/>
+                  <a:blip r:embed="rId13"/>
                   <a:stretch>
                     <a:fillRect l="-10156" t="-10256"/>
                   </a:stretch>
@@ -6375,7 +6458,7 @@
           <p:cNvPr id="673" name="F1_0672_text_28" descr="Forward">
             <a:extLst>
               <a:ext uri="{FF2B5EF4-FFF2-40B4-BE49-F238E27FC236}">
-                <a16:creationId id="{96630C7D-B10E-4913-ADE8-2E108EB2F2D8}"/>
+                <a16:creationId xmlns:a16="http://schemas.microsoft.com/office/drawing/2014/main" id="{96630C7D-B10E-4913-ADE8-2E108EB2F2D8}"/>
               </a:ext>
             </a:extLst>
           </p:cNvPr>
@@ -6441,7 +6524,7 @@
             <a:chExt cx="889769" cy="436362"/>
           </a:xfrm>
         </p:grpSpPr>
-        <mc:AlternateContent>
+        <mc:AlternateContent xmlns:mc="http://schemas.openxmlformats.org/markup-compatibility/2006" xmlns:a14="http://schemas.microsoft.com/office/drawing/2010/main">
           <mc:Choice Requires="a14">
             <p:sp>
               <p:nvSpPr>
@@ -6487,7 +6570,7 @@
                     <a:t>Build </a:t>
                   </a:r>
                   <a14:m>
-                    <m:oMath>
+                    <m:oMath xmlns:m="http://schemas.openxmlformats.org/officeDocument/2006/math">
                       <m:sSub>
                         <m:sSubPr>
                           <m:ctrlPr>
@@ -6542,7 +6625,7 @@
               </p:txBody>
             </p:sp>
           </mc:Choice>
-          <mc:Fallback>
+          <mc:Fallback xmlns:ns7="http://schemas.microsoft.com/office/powerpoint/2010/main" xmlns:m="http://schemas.openxmlformats.org/officeDocument/2006/math" xmlns:a16="http://schemas.microsoft.com/office/drawing/2014/main" xmlns="">
             <p:sp>
               <p:nvSpPr>
                 <p:cNvPr id="20059" name="Build D_f"/>
@@ -6560,7 +6643,7 @@
                   <a:avLst/>
                 </a:prstGeom>
                 <a:blipFill>
-                  <a:blip r:embed="rId13"/>
+                  <a:blip r:embed="rId14"/>
                   <a:stretch>
                     <a:fillRect l="-12315" t="-10345"/>
                   </a:stretch>
@@ -6596,7 +6679,7 @@
             <a:chExt cx="1088513" cy="451600"/>
           </a:xfrm>
         </p:grpSpPr>
-        <mc:AlternateContent>
+        <mc:AlternateContent xmlns:mc="http://schemas.openxmlformats.org/markup-compatibility/2006" xmlns:a14="http://schemas.microsoft.com/office/drawing/2010/main">
           <mc:Choice Requires="a14">
             <p:sp>
               <p:nvSpPr>
@@ -6642,7 +6725,7 @@
                     <a:t>Apply </a:t>
                   </a:r>
                   <a14:m>
-                    <m:oMath>
+                    <m:oMath xmlns:m="http://schemas.openxmlformats.org/officeDocument/2006/math">
                       <m:sSubSup>
                         <m:sSubSupPr>
                           <m:ctrlPr>
@@ -6710,7 +6793,7 @@
               </p:txBody>
             </p:sp>
           </mc:Choice>
-          <mc:Fallback>
+          <mc:Fallback xmlns:ns7="http://schemas.microsoft.com/office/powerpoint/2010/main" xmlns:m="http://schemas.openxmlformats.org/officeDocument/2006/math" xmlns:a16="http://schemas.microsoft.com/office/drawing/2014/main" xmlns="">
             <p:sp>
               <p:nvSpPr>
                 <p:cNvPr id="20060" name="Apply D_f transpose"/>
@@ -6728,7 +6811,7 @@
                   <a:avLst/>
                 </a:prstGeom>
                 <a:blipFill>
-                  <a:blip r:embed="rId14"/>
+                  <a:blip r:embed="rId15"/>
                   <a:stretch>
                     <a:fillRect l="-10460" t="-8547"/>
                   </a:stretch>
@@ -6755,7 +6838,7 @@
           <p:cNvPr id="685" name="F1_0684_text_33" descr="EOS EOS ...">
             <a:extLst>
               <a:ext uri="{FF2B5EF4-FFF2-40B4-BE49-F238E27FC236}">
-                <a16:creationId id="{7F0EDF27-FEF2-4BAE-B395-EA2B342D41AE}"/>
+                <a16:creationId xmlns:a16="http://schemas.microsoft.com/office/drawing/2014/main" id="{7F0EDF27-FEF2-4BAE-B395-EA2B342D41AE}"/>
               </a:ext>
             </a:extLst>
           </p:cNvPr>
@@ -6812,7 +6895,7 @@
           <p:cNvPr id="686" name="F1_0685_text_34" descr="source words">
             <a:extLst>
               <a:ext uri="{FF2B5EF4-FFF2-40B4-BE49-F238E27FC236}">
-                <a16:creationId id="{5F573EA9-3764-46A8-9078-28C5D3639581}"/>
+                <a16:creationId xmlns:a16="http://schemas.microsoft.com/office/drawing/2014/main" id="{5F573EA9-3764-46A8-9078-28C5D3639581}"/>
               </a:ext>
             </a:extLst>
           </p:cNvPr>
@@ -6878,7 +6961,7 @@
             <a:chExt cx="1252800" cy="412552"/>
           </a:xfrm>
         </p:grpSpPr>
-        <mc:AlternateContent>
+        <mc:AlternateContent xmlns:mc="http://schemas.openxmlformats.org/markup-compatibility/2006" xmlns:a14="http://schemas.microsoft.com/office/drawing/2010/main">
           <mc:Choice Requires="a14">
             <p:sp>
               <p:nvSpPr>
@@ -6924,7 +7007,7 @@
                     <a:t>Reference </a:t>
                   </a:r>
                   <a14:m>
-                    <m:oMath>
+                    <m:oMath xmlns:m="http://schemas.openxmlformats.org/officeDocument/2006/math">
                       <m:sSub>
                         <m:sSubPr>
                           <m:ctrlPr>
@@ -6979,7 +7062,7 @@
               </p:txBody>
             </p:sp>
           </mc:Choice>
-          <mc:Fallback>
+          <mc:Fallback xmlns:ns7="http://schemas.microsoft.com/office/powerpoint/2010/main" xmlns:m="http://schemas.openxmlformats.org/officeDocument/2006/math" xmlns:a16="http://schemas.microsoft.com/office/drawing/2014/main" xmlns="">
             <p:sp>
               <p:nvSpPr>
                 <p:cNvPr id="20062" name="Reference x_0"/>
@@ -6997,7 +7080,7 @@
                   <a:avLst/>
                 </a:prstGeom>
                 <a:blipFill>
-                  <a:blip r:embed="rId15"/>
+                  <a:blip r:embed="rId16"/>
                   <a:stretch>
                     <a:fillRect l="-9328" t="-10526"/>
                   </a:stretch>
@@ -7033,7 +7116,7 @@
             <a:chExt cx="1054523" cy="436417"/>
           </a:xfrm>
         </p:grpSpPr>
-        <mc:AlternateContent>
+        <mc:AlternateContent xmlns:mc="http://schemas.openxmlformats.org/markup-compatibility/2006" xmlns:a14="http://schemas.microsoft.com/office/drawing/2010/main">
           <mc:Choice Requires="a14">
             <p:sp>
               <p:nvSpPr>
@@ -7079,7 +7162,7 @@
                     <a:t>Original </a:t>
                   </a:r>
                   <a14:m>
-                    <m:oMath>
+                    <m:oMath xmlns:m="http://schemas.openxmlformats.org/officeDocument/2006/math">
                       <m:sSub>
                         <m:sSubPr>
                           <m:ctrlPr>
@@ -7134,7 +7217,7 @@
               </p:txBody>
             </p:sp>
           </mc:Choice>
-          <mc:Fallback>
+          <mc:Fallback xmlns:ns7="http://schemas.microsoft.com/office/powerpoint/2010/main" xmlns:m="http://schemas.openxmlformats.org/officeDocument/2006/math" xmlns:a16="http://schemas.microsoft.com/office/drawing/2014/main" xmlns="">
             <p:sp>
               <p:nvSpPr>
                 <p:cNvPr id="20063" name="Original x_1"/>
@@ -7152,7 +7235,7 @@
                   <a:avLst/>
                 </a:prstGeom>
                 <a:blipFill>
-                  <a:blip r:embed="rId16"/>
+                  <a:blip r:embed="rId17"/>
                   <a:stretch>
                     <a:fillRect l="-10730" t="-10345"/>
                   </a:stretch>
@@ -7174,7 +7257,7 @@
           </mc:Fallback>
         </mc:AlternateContent>
       </p:grpSp>
-      <mc:AlternateContent>
+      <mc:AlternateContent xmlns:mc="http://schemas.openxmlformats.org/markup-compatibility/2006" xmlns:a14="http://schemas.microsoft.com/office/drawing/2010/main">
         <mc:Choice Requires="a14">
           <p:sp>
             <p:nvSpPr>
@@ -7242,7 +7325,7 @@
                   <a:t> </a:t>
                 </a:r>
                 <a14:m>
-                  <m:oMath>
+                  <m:oMath xmlns:m="http://schemas.openxmlformats.org/officeDocument/2006/math">
                     <m:sSub>
                       <m:sSubPr>
                         <m:ctrlPr>
@@ -7326,7 +7409,7 @@
             </p:txBody>
           </p:sp>
         </mc:Choice>
-        <mc:Fallback>
+        <mc:Fallback xmlns:ns7="http://schemas.microsoft.com/office/powerpoint/2010/main" xmlns:m="http://schemas.openxmlformats.org/officeDocument/2006/math" xmlns:a16="http://schemas.microsoft.com/office/drawing/2014/main" xmlns="">
           <p:sp>
             <p:nvSpPr>
               <p:cNvPr id="20061" name="Secant slope m_e_i"/>
@@ -7344,7 +7427,7 @@
                 <a:avLst/>
               </a:prstGeom>
               <a:blipFill>
-                <a:blip r:embed="rId17"/>
+                <a:blip r:embed="rId18"/>
                 <a:stretch>
                   <a:fillRect l="-5308" t="-3704"/>
                 </a:stretch>
@@ -7370,7 +7453,7 @@
           <p:cNvPr id="674" name="F1_0673_text_29" descr="Forward">
             <a:extLst>
               <a:ext uri="{FF2B5EF4-FFF2-40B4-BE49-F238E27FC236}">
-                <a16:creationId id="{DAD2062D-3263-47A0-A0D5-88A353EBA012}"/>
+                <a16:creationId xmlns:a16="http://schemas.microsoft.com/office/drawing/2014/main" id="{DAD2062D-3263-47A0-A0D5-88A353EBA012}"/>
               </a:ext>
             </a:extLst>
           </p:cNvPr>
@@ -7427,7 +7510,7 @@
           <p:cNvPr id="723" name="F1_0722_text_47" descr="Reverse-pass examples">
             <a:extLst>
               <a:ext uri="{FF2B5EF4-FFF2-40B4-BE49-F238E27FC236}">
-                <a16:creationId id="{7656B2B3-5B3D-4764-AF62-BABA6B485768}"/>
+                <a16:creationId xmlns:a16="http://schemas.microsoft.com/office/drawing/2014/main" id="{7656B2B3-5B3D-4764-AF62-BABA6B485768}"/>
               </a:ext>
             </a:extLst>
           </p:cNvPr>
@@ -7484,7 +7567,7 @@
           <p:cNvPr id="724" name="F1_0723_text_48" descr="Forward">
             <a:extLst>
               <a:ext uri="{FF2B5EF4-FFF2-40B4-BE49-F238E27FC236}">
-                <a16:creationId id="{7A9222F0-E3B9-44B5-88EA-143C2D3EAD20}"/>
+                <a16:creationId xmlns:a16="http://schemas.microsoft.com/office/drawing/2014/main" id="{7A9222F0-E3B9-44B5-88EA-143C2D3EAD20}"/>
               </a:ext>
             </a:extLst>
           </p:cNvPr>
@@ -7550,7 +7633,7 @@
             <a:chExt cx="1490555" cy="451600"/>
           </a:xfrm>
         </p:grpSpPr>
-        <mc:AlternateContent>
+        <mc:AlternateContent xmlns:mc="http://schemas.openxmlformats.org/markup-compatibility/2006" xmlns:a14="http://schemas.microsoft.com/office/drawing/2010/main">
           <mc:Choice Requires="a14">
             <p:sp>
               <p:nvSpPr>
@@ -7596,7 +7679,7 @@
                     <a:t>Backward </a:t>
                   </a:r>
                   <a14:m>
-                    <m:oMath>
+                    <m:oMath xmlns:m="http://schemas.openxmlformats.org/officeDocument/2006/math">
                       <m:sSubSup>
                         <m:sSubSupPr>
                           <m:ctrlPr>
@@ -7664,7 +7747,7 @@
               </p:txBody>
             </p:sp>
           </mc:Choice>
-          <mc:Fallback>
+          <mc:Fallback xmlns:ns7="http://schemas.microsoft.com/office/powerpoint/2010/main" xmlns:m="http://schemas.openxmlformats.org/officeDocument/2006/math" xmlns:a16="http://schemas.microsoft.com/office/drawing/2014/main" xmlns="">
             <p:sp>
               <p:nvSpPr>
                 <p:cNvPr id="20064" name="Backward D_f transpose"/>
@@ -7682,7 +7765,7 @@
                   <a:avLst/>
                 </a:prstGeom>
                 <a:blipFill>
-                  <a:blip r:embed="rId18"/>
+                  <a:blip r:embed="rId19"/>
                   <a:stretch>
                     <a:fillRect l="-9191" t="-8547"/>
                   </a:stretch>
@@ -7709,7 +7792,7 @@
           <p:cNvPr id="729" name="F1_0728_text_50" descr="(b) Attention product">
             <a:extLst>
               <a:ext uri="{FF2B5EF4-FFF2-40B4-BE49-F238E27FC236}">
-                <a16:creationId id="{41922B56-9CFE-431A-A45C-2E55136A846F}"/>
+                <a16:creationId xmlns:a16="http://schemas.microsoft.com/office/drawing/2014/main" id="{41922B56-9CFE-431A-A45C-2E55136A846F}"/>
               </a:ext>
             </a:extLst>
           </p:cNvPr>
@@ -7766,7 +7849,7 @@
           <p:cNvPr id="730" name="F1_0729_text_51" descr="Attention weights">
             <a:extLst>
               <a:ext uri="{FF2B5EF4-FFF2-40B4-BE49-F238E27FC236}">
-                <a16:creationId id="{1E25FFD9-F0CB-4B14-B63B-EDF45ECE3D80}"/>
+                <a16:creationId xmlns:a16="http://schemas.microsoft.com/office/drawing/2014/main" id="{1E25FFD9-F0CB-4B14-B63B-EDF45ECE3D80}"/>
               </a:ext>
             </a:extLst>
           </p:cNvPr>
@@ -7823,7 +7906,7 @@
           <p:cNvPr id="731" name="F1_0730_text_52" descr="Value vectors">
             <a:extLst>
               <a:ext uri="{FF2B5EF4-FFF2-40B4-BE49-F238E27FC236}">
-                <a16:creationId id="{D1EFCBEF-D83C-4D3E-9C4D-E91C1BE2B6B8}"/>
+                <a16:creationId xmlns:a16="http://schemas.microsoft.com/office/drawing/2014/main" id="{D1EFCBEF-D83C-4D3E-9C4D-E91C1BE2B6B8}"/>
               </a:ext>
             </a:extLst>
           </p:cNvPr>
@@ -7880,7 +7963,7 @@
           <p:cNvPr id="732" name="F1_0731_text_53" descr="Output">
             <a:extLst>
               <a:ext uri="{FF2B5EF4-FFF2-40B4-BE49-F238E27FC236}">
-                <a16:creationId id="{0CCA7B78-DD23-4F42-94B5-975DE8295182}"/>
+                <a16:creationId xmlns:a16="http://schemas.microsoft.com/office/drawing/2014/main" id="{0CCA7B78-DD23-4F42-94B5-975DE8295182}"/>
               </a:ext>
             </a:extLst>
           </p:cNvPr>
@@ -7932,7 +8015,7 @@
           </a:p>
         </p:txBody>
       </p:sp>
-      <mc:AlternateContent>
+      <mc:AlternateContent xmlns:mc="http://schemas.openxmlformats.org/markup-compatibility/2006" xmlns:a14="http://schemas.microsoft.com/office/drawing/2010/main">
         <mc:Choice Requires="a14">
           <p:sp>
             <p:nvSpPr>
@@ -7970,11 +8053,11 @@
                   </a:defRPr>
                 </a:pPr>
                 <a14:m>
-                  <m:oMathPara>
+                  <m:oMathPara xmlns:m="http://schemas.openxmlformats.org/officeDocument/2006/math">
                     <m:oMathParaPr>
                       <m:jc m:val="centerGroup"/>
                     </m:oMathParaPr>
-                    <m:oMath>
+                    <m:oMath xmlns:m="http://schemas.openxmlformats.org/officeDocument/2006/math">
                       <m:r>
                         <a:rPr lang="en-US" sz="2500" b="0" i="0" smtClean="0">
                           <a:solidFill>
@@ -8001,7 +8084,7 @@
             </p:txBody>
           </p:sp>
         </mc:Choice>
-        <mc:Fallback>
+        <mc:Fallback xmlns:ns7="http://schemas.microsoft.com/office/powerpoint/2010/main" xmlns:m="http://schemas.openxmlformats.org/officeDocument/2006/math" xmlns:a16="http://schemas.microsoft.com/office/drawing/2014/main" xmlns="">
           <p:sp>
             <p:nvSpPr>
               <p:cNvPr id="20040" name="Equation ×" descr="×"/>
@@ -8014,117 +8097,6 @@
               <a:xfrm>
                 <a:off x="8351944" y="1446164"/>
                 <a:ext cx="268916" cy="857250"/>
-              </a:xfrm>
-              <a:prstGeom prst="rect">
-                <a:avLst/>
-              </a:prstGeom>
-              <a:blipFill>
-                <a:blip r:embed="rId19"/>
-                <a:stretch>
-                  <a:fillRect/>
-                </a:stretch>
-              </a:blipFill>
-              <a:ln>
-                <a:noFill/>
-              </a:ln>
-            </p:spPr>
-            <p:txBody>
-              <a:bodyPr/>
-              <a:lstStyle/>
-              <a:p>
-                <a:r>
-                  <a:rPr lang="zh-CN" altLang="en-US">
-                    <a:noFill/>
-                  </a:rPr>
-                  <a:t> </a:t>
-                </a:r>
-              </a:p>
-            </p:txBody>
-          </p:sp>
-        </mc:Fallback>
-      </mc:AlternateContent>
-      <mc:AlternateContent>
-        <mc:Choice Requires="a14">
-          <p:sp>
-            <p:nvSpPr>
-              <p:cNvPr id="20041" name="Equation P" descr="P"/>
-              <p:cNvSpPr txBox="1"/>
-              <p:nvPr/>
-            </p:nvSpPr>
-            <p:spPr>
-              <a:xfrm>
-                <a:off x="7267138" y="1879614"/>
-                <a:ext cx="260231" cy="857250"/>
-              </a:xfrm>
-              <a:prstGeom prst="rect">
-                <a:avLst/>
-              </a:prstGeom>
-              <a:noFill/>
-              <a:ln>
-                <a:noFill/>
-              </a:ln>
-            </p:spPr>
-            <p:txBody>
-              <a:bodyPr wrap="none" lIns="0" tIns="0" rIns="0" bIns="0" anchor="t">
-                <a:noAutofit/>
-              </a:bodyPr>
-              <a:lstStyle/>
-              <a:p>
-                <a:pPr algn="l">
-                  <a:defRPr lang="en-US" sz="2500" b="0" i="0" smtClean="0">
-                    <a:solidFill>
-                      <a:srgbClr val="785823"/>
-                    </a:solidFill>
-                    <a:latin typeface="Cambria Math" charset="0"/>
-                    <a:ea typeface="Cambria Math" charset="0"/>
-                    <a:cs typeface="Cambria Math" charset="0"/>
-                  </a:defRPr>
-                </a:pPr>
-                <a14:m>
-                  <m:oMathPara>
-                    <m:oMathParaPr>
-                      <m:jc m:val="centerGroup"/>
-                    </m:oMathParaPr>
-                    <m:oMath>
-                      <m:r>
-                        <a:rPr lang="en-US" sz="2500" b="0" i="1" smtClean="0">
-                          <a:solidFill>
-                            <a:srgbClr val="785823"/>
-                          </a:solidFill>
-                          <a:latin typeface="Cambria Math" charset="0"/>
-                          <a:ea typeface="Cambria Math" charset="0"/>
-                          <a:cs typeface="Cambria Math" charset="0"/>
-                        </a:rPr>
-                        <m:t>𝑃</m:t>
-                      </m:r>
-                    </m:oMath>
-                  </m:oMathPara>
-                </a14:m>
-                <a:endParaRPr lang="en-US" sz="2500" b="0" i="0">
-                  <a:solidFill>
-                    <a:srgbClr val="785823"/>
-                  </a:solidFill>
-                  <a:latin typeface="Cambria Math" charset="0"/>
-                  <a:ea typeface="Cambria Math" charset="0"/>
-                  <a:cs typeface="Cambria Math" charset="0"/>
-                </a:endParaRPr>
-              </a:p>
-            </p:txBody>
-          </p:sp>
-        </mc:Choice>
-        <mc:Fallback>
-          <p:sp>
-            <p:nvSpPr>
-              <p:cNvPr id="20041" name="Equation P" descr="P"/>
-              <p:cNvSpPr txBox="1">
-                <a:spLocks noRot="1" noChangeAspect="1" noMove="1" noResize="1" noEditPoints="1" noAdjustHandles="1" noChangeArrowheads="1" noChangeShapeType="1" noTextEdit="1"/>
-              </p:cNvSpPr>
-              <p:nvPr/>
-            </p:nvSpPr>
-            <p:spPr>
-              <a:xfrm>
-                <a:off x="7267138" y="1879614"/>
-                <a:ext cx="260231" cy="857250"/>
               </a:xfrm>
               <a:prstGeom prst="rect">
                 <a:avLst/>
@@ -8154,7 +8126,118 @@
           </p:sp>
         </mc:Fallback>
       </mc:AlternateContent>
-      <mc:AlternateContent>
+      <mc:AlternateContent xmlns:mc="http://schemas.openxmlformats.org/markup-compatibility/2006" xmlns:a14="http://schemas.microsoft.com/office/drawing/2010/main">
+        <mc:Choice Requires="a14">
+          <p:sp>
+            <p:nvSpPr>
+              <p:cNvPr id="20041" name="Equation P" descr="P"/>
+              <p:cNvSpPr txBox="1"/>
+              <p:nvPr/>
+            </p:nvSpPr>
+            <p:spPr>
+              <a:xfrm>
+                <a:off x="7267138" y="1879614"/>
+                <a:ext cx="260231" cy="857250"/>
+              </a:xfrm>
+              <a:prstGeom prst="rect">
+                <a:avLst/>
+              </a:prstGeom>
+              <a:noFill/>
+              <a:ln>
+                <a:noFill/>
+              </a:ln>
+            </p:spPr>
+            <p:txBody>
+              <a:bodyPr wrap="none" lIns="0" tIns="0" rIns="0" bIns="0" anchor="t">
+                <a:noAutofit/>
+              </a:bodyPr>
+              <a:lstStyle/>
+              <a:p>
+                <a:pPr algn="l">
+                  <a:defRPr lang="en-US" sz="2500" b="0" i="0" smtClean="0">
+                    <a:solidFill>
+                      <a:srgbClr val="785823"/>
+                    </a:solidFill>
+                    <a:latin typeface="Cambria Math" charset="0"/>
+                    <a:ea typeface="Cambria Math" charset="0"/>
+                    <a:cs typeface="Cambria Math" charset="0"/>
+                  </a:defRPr>
+                </a:pPr>
+                <a14:m>
+                  <m:oMathPara xmlns:m="http://schemas.openxmlformats.org/officeDocument/2006/math">
+                    <m:oMathParaPr>
+                      <m:jc m:val="centerGroup"/>
+                    </m:oMathParaPr>
+                    <m:oMath xmlns:m="http://schemas.openxmlformats.org/officeDocument/2006/math">
+                      <m:r>
+                        <a:rPr lang="en-US" sz="2500" b="0" i="1" smtClean="0">
+                          <a:solidFill>
+                            <a:srgbClr val="785823"/>
+                          </a:solidFill>
+                          <a:latin typeface="Cambria Math" charset="0"/>
+                          <a:ea typeface="Cambria Math" charset="0"/>
+                          <a:cs typeface="Cambria Math" charset="0"/>
+                        </a:rPr>
+                        <m:t>𝑃</m:t>
+                      </m:r>
+                    </m:oMath>
+                  </m:oMathPara>
+                </a14:m>
+                <a:endParaRPr lang="en-US" sz="2500" b="0" i="0">
+                  <a:solidFill>
+                    <a:srgbClr val="785823"/>
+                  </a:solidFill>
+                  <a:latin typeface="Cambria Math" charset="0"/>
+                  <a:ea typeface="Cambria Math" charset="0"/>
+                  <a:cs typeface="Cambria Math" charset="0"/>
+                </a:endParaRPr>
+              </a:p>
+            </p:txBody>
+          </p:sp>
+        </mc:Choice>
+        <mc:Fallback xmlns:ns7="http://schemas.microsoft.com/office/powerpoint/2010/main" xmlns:m="http://schemas.openxmlformats.org/officeDocument/2006/math" xmlns:a16="http://schemas.microsoft.com/office/drawing/2014/main" xmlns="">
+          <p:sp>
+            <p:nvSpPr>
+              <p:cNvPr id="20041" name="Equation P" descr="P"/>
+              <p:cNvSpPr txBox="1">
+                <a:spLocks noRot="1" noChangeAspect="1" noMove="1" noResize="1" noEditPoints="1" noAdjustHandles="1" noChangeArrowheads="1" noChangeShapeType="1" noTextEdit="1"/>
+              </p:cNvSpPr>
+              <p:nvPr/>
+            </p:nvSpPr>
+            <p:spPr>
+              <a:xfrm>
+                <a:off x="7267138" y="1879614"/>
+                <a:ext cx="260231" cy="857250"/>
+              </a:xfrm>
+              <a:prstGeom prst="rect">
+                <a:avLst/>
+              </a:prstGeom>
+              <a:blipFill>
+                <a:blip r:embed="rId21"/>
+                <a:stretch>
+                  <a:fillRect/>
+                </a:stretch>
+              </a:blipFill>
+              <a:ln>
+                <a:noFill/>
+              </a:ln>
+            </p:spPr>
+            <p:txBody>
+              <a:bodyPr/>
+              <a:lstStyle/>
+              <a:p>
+                <a:r>
+                  <a:rPr lang="zh-CN" altLang="en-US">
+                    <a:noFill/>
+                  </a:rPr>
+                  <a:t> </a:t>
+                </a:r>
+              </a:p>
+            </p:txBody>
+          </p:sp>
+        </mc:Fallback>
+      </mc:AlternateContent>
+      <mc:AlternateContent xmlns:mc="http://schemas.openxmlformats.org/markup-compatibility/2006" xmlns:a14="http://schemas.microsoft.com/office/drawing/2010/main">
         <mc:Choice Requires="a14">
           <p:sp>
             <p:nvSpPr>
@@ -8192,11 +8275,11 @@
                   </a:defRPr>
                 </a:pPr>
                 <a14:m>
-                  <m:oMathPara>
+                  <m:oMathPara xmlns:m="http://schemas.openxmlformats.org/officeDocument/2006/math">
                     <m:oMathParaPr>
                       <m:jc m:val="centerGroup"/>
                     </m:oMathParaPr>
-                    <m:oMath>
+                    <m:oMath xmlns:m="http://schemas.openxmlformats.org/officeDocument/2006/math">
                       <m:r>
                         <a:rPr lang="en-US" sz="2500" b="0" i="1" smtClean="0">
                           <a:solidFill>
@@ -8223,7 +8306,7 @@
             </p:txBody>
           </p:sp>
         </mc:Choice>
-        <mc:Fallback>
+        <mc:Fallback xmlns:ns7="http://schemas.microsoft.com/office/powerpoint/2010/main" xmlns:m="http://schemas.openxmlformats.org/officeDocument/2006/math" xmlns:a16="http://schemas.microsoft.com/office/drawing/2014/main" xmlns="">
           <p:sp>
             <p:nvSpPr>
               <p:cNvPr id="20042" name="Equation V" descr="V"/>
@@ -8241,7 +8324,7 @@
                 <a:avLst/>
               </a:prstGeom>
               <a:blipFill>
-                <a:blip r:embed="rId21"/>
+                <a:blip r:embed="rId22"/>
                 <a:stretch>
                   <a:fillRect/>
                 </a:stretch>
@@ -8279,7 +8362,7 @@
             <a:chExt cx="886555" cy="492385"/>
           </a:xfrm>
         </p:grpSpPr>
-        <mc:AlternateContent>
+        <mc:AlternateContent xmlns:mc="http://schemas.openxmlformats.org/markup-compatibility/2006" xmlns:a14="http://schemas.microsoft.com/office/drawing/2010/main">
           <mc:Choice Requires="a14">
             <p:sp>
               <p:nvSpPr>
@@ -8317,11 +8400,11 @@
                     </a:defRPr>
                   </a:pPr>
                   <a14:m>
-                    <m:oMathPara>
+                    <m:oMathPara xmlns:m="http://schemas.openxmlformats.org/officeDocument/2006/math">
                       <m:oMathParaPr>
                         <m:jc m:val="centerGroup"/>
                       </m:oMathParaPr>
-                      <m:oMath>
+                      <m:oMath xmlns:m="http://schemas.openxmlformats.org/officeDocument/2006/math">
                         <m:r>
                           <a:rPr lang="en-US" sz="2500" b="0" i="1" smtClean="0">
                             <a:solidFill>
@@ -8370,7 +8453,7 @@
               </p:txBody>
             </p:sp>
           </mc:Choice>
-          <mc:Fallback>
+          <mc:Fallback xmlns:ns7="http://schemas.microsoft.com/office/powerpoint/2010/main" xmlns:m="http://schemas.openxmlformats.org/officeDocument/2006/math" xmlns:a16="http://schemas.microsoft.com/office/drawing/2014/main" xmlns="">
             <p:sp>
               <p:nvSpPr>
                 <p:cNvPr id="20043" name="Equation Y=PV" descr="Y=PV"/>
@@ -8388,7 +8471,7 @@
                   <a:avLst/>
                 </a:prstGeom>
                 <a:blipFill>
-                  <a:blip r:embed="rId22"/>
+                  <a:blip r:embed="rId23"/>
                   <a:stretch>
                     <a:fillRect r="-11409"/>
                   </a:stretch>
@@ -8427,7 +8510,7 @@
             <a:chExt cx="363400" cy="472948"/>
           </a:xfrm>
         </p:grpSpPr>
-        <mc:AlternateContent>
+        <mc:AlternateContent xmlns:mc="http://schemas.openxmlformats.org/markup-compatibility/2006" xmlns:a14="http://schemas.microsoft.com/office/drawing/2010/main">
           <mc:Choice Requires="a14">
             <p:sp>
               <p:nvSpPr>
@@ -8465,11 +8548,11 @@
                     </a:defRPr>
                   </a:pPr>
                   <a14:m>
-                    <m:oMathPara>
+                    <m:oMathPara xmlns:m="http://schemas.openxmlformats.org/officeDocument/2006/math">
                       <m:oMathParaPr>
                         <m:jc m:val="centerGroup"/>
                       </m:oMathParaPr>
-                      <m:oMath>
+                      <m:oMath xmlns:m="http://schemas.openxmlformats.org/officeDocument/2006/math">
                         <m:sSub>
                           <m:sSubPr>
                             <m:ctrlPr>
@@ -8525,7 +8608,7 @@
               </p:txBody>
             </p:sp>
           </mc:Choice>
-          <mc:Fallback>
+          <mc:Fallback xmlns:ns7="http://schemas.microsoft.com/office/powerpoint/2010/main" xmlns:m="http://schemas.openxmlformats.org/officeDocument/2006/math" xmlns:a16="http://schemas.microsoft.com/office/drawing/2014/main" xmlns="">
             <p:sp>
               <p:nvSpPr>
                 <p:cNvPr id="20044" name="Equation sub(m,P)" descr="sub(m,P)"/>
@@ -8543,7 +8626,7 @@
                   <a:avLst/>
                 </a:prstGeom>
                 <a:blipFill>
-                  <a:blip r:embed="rId23"/>
+                  <a:blip r:embed="rId24"/>
                   <a:stretch>
                     <a:fillRect l="-17910" r="-16418"/>
                   </a:stretch>
@@ -8582,7 +8665,7 @@
             <a:chExt cx="363400" cy="472948"/>
           </a:xfrm>
         </p:grpSpPr>
-        <mc:AlternateContent>
+        <mc:AlternateContent xmlns:mc="http://schemas.openxmlformats.org/markup-compatibility/2006" xmlns:a14="http://schemas.microsoft.com/office/drawing/2010/main">
           <mc:Choice Requires="a14">
             <p:sp>
               <p:nvSpPr>
@@ -8620,11 +8703,11 @@
                     </a:defRPr>
                   </a:pPr>
                   <a14:m>
-                    <m:oMathPara>
+                    <m:oMathPara xmlns:m="http://schemas.openxmlformats.org/officeDocument/2006/math">
                       <m:oMathParaPr>
                         <m:jc m:val="centerGroup"/>
                       </m:oMathParaPr>
-                      <m:oMath>
+                      <m:oMath xmlns:m="http://schemas.openxmlformats.org/officeDocument/2006/math">
                         <m:sSub>
                           <m:sSubPr>
                             <m:ctrlPr>
@@ -8680,7 +8763,7 @@
               </p:txBody>
             </p:sp>
           </mc:Choice>
-          <mc:Fallback>
+          <mc:Fallback xmlns:ns7="http://schemas.microsoft.com/office/powerpoint/2010/main" xmlns:m="http://schemas.openxmlformats.org/officeDocument/2006/math" xmlns:a16="http://schemas.microsoft.com/office/drawing/2014/main" xmlns="">
             <p:sp>
               <p:nvSpPr>
                 <p:cNvPr id="20045" name="Equation sub(m,V)" descr="sub(m,V)"/>
@@ -8698,7 +8781,7 @@
                   <a:avLst/>
                 </a:prstGeom>
                 <a:blipFill>
-                  <a:blip r:embed="rId24"/>
+                  <a:blip r:embed="rId25"/>
                   <a:stretch>
                     <a:fillRect l="-17910" r="-16418"/>
                   </a:stretch>
@@ -8737,7 +8820,7 @@
             <a:chExt cx="351693" cy="472948"/>
           </a:xfrm>
         </p:grpSpPr>
-        <mc:AlternateContent>
+        <mc:AlternateContent xmlns:mc="http://schemas.openxmlformats.org/markup-compatibility/2006" xmlns:a14="http://schemas.microsoft.com/office/drawing/2010/main">
           <mc:Choice Requires="a14">
             <p:sp>
               <p:nvSpPr>
@@ -8775,11 +8858,11 @@
                     </a:defRPr>
                   </a:pPr>
                   <a14:m>
-                    <m:oMathPara>
+                    <m:oMathPara xmlns:m="http://schemas.openxmlformats.org/officeDocument/2006/math">
                       <m:oMathParaPr>
                         <m:jc m:val="centerGroup"/>
                       </m:oMathParaPr>
-                      <m:oMath>
+                      <m:oMath xmlns:m="http://schemas.openxmlformats.org/officeDocument/2006/math">
                         <m:sSub>
                           <m:sSubPr>
                             <m:ctrlPr>
@@ -8835,7 +8918,7 @@
               </p:txBody>
             </p:sp>
           </mc:Choice>
-          <mc:Fallback>
+          <mc:Fallback xmlns:ns7="http://schemas.microsoft.com/office/powerpoint/2010/main" xmlns:m="http://schemas.openxmlformats.org/officeDocument/2006/math" xmlns:a16="http://schemas.microsoft.com/office/drawing/2014/main" xmlns="">
             <p:sp>
               <p:nvSpPr>
                 <p:cNvPr id="20046" name="Equation sub(m,Y)" descr="sub(m,Y)"/>
@@ -8853,7 +8936,7 @@
                   <a:avLst/>
                 </a:prstGeom>
                 <a:blipFill>
-                  <a:blip r:embed="rId25"/>
+                  <a:blip r:embed="rId26"/>
                   <a:stretch>
                     <a:fillRect l="-18462" r="-18462"/>
                   </a:stretch>
@@ -8897,7 +8980,7 @@
             <p:cNvPr id="88" name="F1_0087_patch_73">
               <a:extLst>
                 <a:ext uri="{FF2B5EF4-FFF2-40B4-BE49-F238E27FC236}">
-                  <a16:creationId id="{78C7F20C-7091-428C-94AE-504D177FE6D5}"/>
+                  <a16:creationId xmlns:a16="http://schemas.microsoft.com/office/drawing/2014/main" id="{78C7F20C-7091-428C-94AE-504D177FE6D5}"/>
                 </a:ext>
               </a:extLst>
             </p:cNvPr>
@@ -8951,7 +9034,7 @@
             <p:cNvPr id="89" name="F1_0088_patch_74">
               <a:extLst>
                 <a:ext uri="{FF2B5EF4-FFF2-40B4-BE49-F238E27FC236}">
-                  <a16:creationId id="{ADA1D8A9-7C1A-4C78-820E-774837A77FA9}"/>
+                  <a16:creationId xmlns:a16="http://schemas.microsoft.com/office/drawing/2014/main" id="{ADA1D8A9-7C1A-4C78-820E-774837A77FA9}"/>
                 </a:ext>
               </a:extLst>
             </p:cNvPr>
@@ -9005,7 +9088,7 @@
             <p:cNvPr id="90" name="F1_0089_patch_75">
               <a:extLst>
                 <a:ext uri="{FF2B5EF4-FFF2-40B4-BE49-F238E27FC236}">
-                  <a16:creationId id="{EEDA6760-C5C1-4BE6-979C-642F384B9BA1}"/>
+                  <a16:creationId xmlns:a16="http://schemas.microsoft.com/office/drawing/2014/main" id="{EEDA6760-C5C1-4BE6-979C-642F384B9BA1}"/>
                 </a:ext>
               </a:extLst>
             </p:cNvPr>
@@ -9059,7 +9142,7 @@
             <p:cNvPr id="91" name="F1_0090_patch_76">
               <a:extLst>
                 <a:ext uri="{FF2B5EF4-FFF2-40B4-BE49-F238E27FC236}">
-                  <a16:creationId id="{BCD1851A-446B-4ECF-87E5-BE5B58D39728}"/>
+                  <a16:creationId xmlns:a16="http://schemas.microsoft.com/office/drawing/2014/main" id="{BCD1851A-446B-4ECF-87E5-BE5B58D39728}"/>
                 </a:ext>
               </a:extLst>
             </p:cNvPr>
@@ -9113,7 +9196,7 @@
             <p:cNvPr id="92" name="F1_0091_patch_77">
               <a:extLst>
                 <a:ext uri="{FF2B5EF4-FFF2-40B4-BE49-F238E27FC236}">
-                  <a16:creationId id="{1FF75DF7-8BD4-453E-954B-1B294BC116A4}"/>
+                  <a16:creationId xmlns:a16="http://schemas.microsoft.com/office/drawing/2014/main" id="{1FF75DF7-8BD4-453E-954B-1B294BC116A4}"/>
                 </a:ext>
               </a:extLst>
             </p:cNvPr>
@@ -9167,7 +9250,7 @@
             <p:cNvPr id="93" name="F1_0092_patch_78">
               <a:extLst>
                 <a:ext uri="{FF2B5EF4-FFF2-40B4-BE49-F238E27FC236}">
-                  <a16:creationId id="{C1B37BBE-E32E-41D8-99F1-E70E093D0F99}"/>
+                  <a16:creationId xmlns:a16="http://schemas.microsoft.com/office/drawing/2014/main" id="{C1B37BBE-E32E-41D8-99F1-E70E093D0F99}"/>
                 </a:ext>
               </a:extLst>
             </p:cNvPr>
@@ -9221,7 +9304,7 @@
             <p:cNvPr id="94" name="F1_0093_patch_79">
               <a:extLst>
                 <a:ext uri="{FF2B5EF4-FFF2-40B4-BE49-F238E27FC236}">
-                  <a16:creationId id="{A1EAAC15-710E-474C-8DB7-581A1F4CB418}"/>
+                  <a16:creationId xmlns:a16="http://schemas.microsoft.com/office/drawing/2014/main" id="{A1EAAC15-710E-474C-8DB7-581A1F4CB418}"/>
                 </a:ext>
               </a:extLst>
             </p:cNvPr>
@@ -9275,7 +9358,7 @@
             <p:cNvPr id="95" name="F1_0094_patch_80">
               <a:extLst>
                 <a:ext uri="{FF2B5EF4-FFF2-40B4-BE49-F238E27FC236}">
-                  <a16:creationId id="{36AB94F0-1DFF-48AC-9675-6A2BEB6E0289}"/>
+                  <a16:creationId xmlns:a16="http://schemas.microsoft.com/office/drawing/2014/main" id="{36AB94F0-1DFF-48AC-9675-6A2BEB6E0289}"/>
                 </a:ext>
               </a:extLst>
             </p:cNvPr>
@@ -9329,7 +9412,7 @@
             <p:cNvPr id="96" name="F1_0095_patch_81">
               <a:extLst>
                 <a:ext uri="{FF2B5EF4-FFF2-40B4-BE49-F238E27FC236}">
-                  <a16:creationId id="{334CC6B0-AAFB-4592-AA9A-0137BC4383CD}"/>
+                  <a16:creationId xmlns:a16="http://schemas.microsoft.com/office/drawing/2014/main" id="{334CC6B0-AAFB-4592-AA9A-0137BC4383CD}"/>
                 </a:ext>
               </a:extLst>
             </p:cNvPr>
@@ -9383,7 +9466,7 @@
             <p:cNvPr id="97" name="F1_0096_patch_82">
               <a:extLst>
                 <a:ext uri="{FF2B5EF4-FFF2-40B4-BE49-F238E27FC236}">
-                  <a16:creationId id="{E418D0A3-99C2-44C1-8256-3D2E2A976CDA}"/>
+                  <a16:creationId xmlns:a16="http://schemas.microsoft.com/office/drawing/2014/main" id="{E418D0A3-99C2-44C1-8256-3D2E2A976CDA}"/>
                 </a:ext>
               </a:extLst>
             </p:cNvPr>
@@ -9437,7 +9520,7 @@
             <p:cNvPr id="98" name="F1_0097_patch_83">
               <a:extLst>
                 <a:ext uri="{FF2B5EF4-FFF2-40B4-BE49-F238E27FC236}">
-                  <a16:creationId id="{7C7ED34B-1B44-4CFE-BF4F-4F7A6E9C327F}"/>
+                  <a16:creationId xmlns:a16="http://schemas.microsoft.com/office/drawing/2014/main" id="{7C7ED34B-1B44-4CFE-BF4F-4F7A6E9C327F}"/>
                 </a:ext>
               </a:extLst>
             </p:cNvPr>
@@ -9491,7 +9574,7 @@
             <p:cNvPr id="99" name="F1_0098_patch_84">
               <a:extLst>
                 <a:ext uri="{FF2B5EF4-FFF2-40B4-BE49-F238E27FC236}">
-                  <a16:creationId id="{83A96EB1-7617-47D1-B4DD-492C4A7AD928}"/>
+                  <a16:creationId xmlns:a16="http://schemas.microsoft.com/office/drawing/2014/main" id="{83A96EB1-7617-47D1-B4DD-492C4A7AD928}"/>
                 </a:ext>
               </a:extLst>
             </p:cNvPr>
@@ -9545,7 +9628,7 @@
             <p:cNvPr id="100" name="F1_0099_patch_85">
               <a:extLst>
                 <a:ext uri="{FF2B5EF4-FFF2-40B4-BE49-F238E27FC236}">
-                  <a16:creationId id="{BE840576-6936-4800-9285-EDF8D9F4A32F}"/>
+                  <a16:creationId xmlns:a16="http://schemas.microsoft.com/office/drawing/2014/main" id="{BE840576-6936-4800-9285-EDF8D9F4A32F}"/>
                 </a:ext>
               </a:extLst>
             </p:cNvPr>
@@ -9599,7 +9682,7 @@
             <p:cNvPr id="101" name="F1_0100_patch_86">
               <a:extLst>
                 <a:ext uri="{FF2B5EF4-FFF2-40B4-BE49-F238E27FC236}">
-                  <a16:creationId id="{15162D66-E482-4A7D-ACAB-12E2D41184A5}"/>
+                  <a16:creationId xmlns:a16="http://schemas.microsoft.com/office/drawing/2014/main" id="{15162D66-E482-4A7D-ACAB-12E2D41184A5}"/>
                 </a:ext>
               </a:extLst>
             </p:cNvPr>
@@ -9653,7 +9736,7 @@
             <p:cNvPr id="102" name="F1_0101_patch_87">
               <a:extLst>
                 <a:ext uri="{FF2B5EF4-FFF2-40B4-BE49-F238E27FC236}">
-                  <a16:creationId id="{5D7B1C71-756B-4F14-AF6D-629A1EA1F8B9}"/>
+                  <a16:creationId xmlns:a16="http://schemas.microsoft.com/office/drawing/2014/main" id="{5D7B1C71-756B-4F14-AF6D-629A1EA1F8B9}"/>
                 </a:ext>
               </a:extLst>
             </p:cNvPr>
@@ -9707,7 +9790,7 @@
             <p:cNvPr id="103" name="F1_0102_patch_88">
               <a:extLst>
                 <a:ext uri="{FF2B5EF4-FFF2-40B4-BE49-F238E27FC236}">
-                  <a16:creationId id="{5255C928-104F-4C52-8405-A541482FD930}"/>
+                  <a16:creationId xmlns:a16="http://schemas.microsoft.com/office/drawing/2014/main" id="{5255C928-104F-4C52-8405-A541482FD930}"/>
                 </a:ext>
               </a:extLst>
             </p:cNvPr>
@@ -9761,7 +9844,7 @@
             <p:cNvPr id="104" name="F1_0103_patch_89">
               <a:extLst>
                 <a:ext uri="{FF2B5EF4-FFF2-40B4-BE49-F238E27FC236}">
-                  <a16:creationId id="{371D963F-D21E-4516-90A1-4B6E99C9AAC5}"/>
+                  <a16:creationId xmlns:a16="http://schemas.microsoft.com/office/drawing/2014/main" id="{371D963F-D21E-4516-90A1-4B6E99C9AAC5}"/>
                 </a:ext>
               </a:extLst>
             </p:cNvPr>
@@ -9815,7 +9898,7 @@
             <p:cNvPr id="105" name="F1_0104_patch_90">
               <a:extLst>
                 <a:ext uri="{FF2B5EF4-FFF2-40B4-BE49-F238E27FC236}">
-                  <a16:creationId id="{3DC617F5-155E-4FB9-8DB0-C34AB32C246C}"/>
+                  <a16:creationId xmlns:a16="http://schemas.microsoft.com/office/drawing/2014/main" id="{3DC617F5-155E-4FB9-8DB0-C34AB32C246C}"/>
                 </a:ext>
               </a:extLst>
             </p:cNvPr>
@@ -9869,7 +9952,7 @@
             <p:cNvPr id="106" name="F1_0105_patch_91">
               <a:extLst>
                 <a:ext uri="{FF2B5EF4-FFF2-40B4-BE49-F238E27FC236}">
-                  <a16:creationId id="{6BE4612E-9047-453E-818E-71011936FE9B}"/>
+                  <a16:creationId xmlns:a16="http://schemas.microsoft.com/office/drawing/2014/main" id="{6BE4612E-9047-453E-818E-71011936FE9B}"/>
                 </a:ext>
               </a:extLst>
             </p:cNvPr>
@@ -9923,7 +10006,7 @@
             <p:cNvPr id="107" name="F1_0106_patch_92">
               <a:extLst>
                 <a:ext uri="{FF2B5EF4-FFF2-40B4-BE49-F238E27FC236}">
-                  <a16:creationId id="{C6ACE2B1-77D5-4C8F-8280-4C4C699CBE79}"/>
+                  <a16:creationId xmlns:a16="http://schemas.microsoft.com/office/drawing/2014/main" id="{C6ACE2B1-77D5-4C8F-8280-4C4C699CBE79}"/>
                 </a:ext>
               </a:extLst>
             </p:cNvPr>
@@ -9977,7 +10060,7 @@
             <p:cNvPr id="108" name="F1_0107_patch_93">
               <a:extLst>
                 <a:ext uri="{FF2B5EF4-FFF2-40B4-BE49-F238E27FC236}">
-                  <a16:creationId id="{C2FA211D-3310-4482-A580-12F192BACAAC}"/>
+                  <a16:creationId xmlns:a16="http://schemas.microsoft.com/office/drawing/2014/main" id="{C2FA211D-3310-4482-A580-12F192BACAAC}"/>
                 </a:ext>
               </a:extLst>
             </p:cNvPr>
@@ -10031,7 +10114,7 @@
             <p:cNvPr id="109" name="F1_0108_patch_94">
               <a:extLst>
                 <a:ext uri="{FF2B5EF4-FFF2-40B4-BE49-F238E27FC236}">
-                  <a16:creationId id="{E9A8CC58-7A7B-4CC8-9EF4-11B7EB370AEB}"/>
+                  <a16:creationId xmlns:a16="http://schemas.microsoft.com/office/drawing/2014/main" id="{E9A8CC58-7A7B-4CC8-9EF4-11B7EB370AEB}"/>
                 </a:ext>
               </a:extLst>
             </p:cNvPr>
@@ -10085,7 +10168,7 @@
             <p:cNvPr id="110" name="F1_0109_patch_95">
               <a:extLst>
                 <a:ext uri="{FF2B5EF4-FFF2-40B4-BE49-F238E27FC236}">
-                  <a16:creationId id="{4E7C90AC-78A3-4CFC-8069-63257F706CE2}"/>
+                  <a16:creationId xmlns:a16="http://schemas.microsoft.com/office/drawing/2014/main" id="{4E7C90AC-78A3-4CFC-8069-63257F706CE2}"/>
                 </a:ext>
               </a:extLst>
             </p:cNvPr>
@@ -10139,7 +10222,7 @@
             <p:cNvPr id="111" name="F1_0110_patch_96">
               <a:extLst>
                 <a:ext uri="{FF2B5EF4-FFF2-40B4-BE49-F238E27FC236}">
-                  <a16:creationId id="{D5EAD31C-25CA-4762-B175-BBB8F04B6F7C}"/>
+                  <a16:creationId xmlns:a16="http://schemas.microsoft.com/office/drawing/2014/main" id="{D5EAD31C-25CA-4762-B175-BBB8F04B6F7C}"/>
                 </a:ext>
               </a:extLst>
             </p:cNvPr>
@@ -10193,7 +10276,7 @@
             <p:cNvPr id="112" name="F1_0111_patch_97">
               <a:extLst>
                 <a:ext uri="{FF2B5EF4-FFF2-40B4-BE49-F238E27FC236}">
-                  <a16:creationId id="{4F9BD259-8B65-446D-9324-9AE8E8B8CDD4}"/>
+                  <a16:creationId xmlns:a16="http://schemas.microsoft.com/office/drawing/2014/main" id="{4F9BD259-8B65-446D-9324-9AE8E8B8CDD4}"/>
                 </a:ext>
               </a:extLst>
             </p:cNvPr>
@@ -10247,7 +10330,7 @@
             <p:cNvPr id="113" name="F1_0112_patch_98">
               <a:extLst>
                 <a:ext uri="{FF2B5EF4-FFF2-40B4-BE49-F238E27FC236}">
-                  <a16:creationId id="{8F092272-F97E-46E5-B1B1-79514A9B7C78}"/>
+                  <a16:creationId xmlns:a16="http://schemas.microsoft.com/office/drawing/2014/main" id="{8F092272-F97E-46E5-B1B1-79514A9B7C78}"/>
                 </a:ext>
               </a:extLst>
             </p:cNvPr>
@@ -10301,7 +10384,7 @@
             <p:cNvPr id="114" name="F1_0113_patch_99">
               <a:extLst>
                 <a:ext uri="{FF2B5EF4-FFF2-40B4-BE49-F238E27FC236}">
-                  <a16:creationId id="{B0196A16-C376-4FBF-BC0F-DA39CCC4C9F4}"/>
+                  <a16:creationId xmlns:a16="http://schemas.microsoft.com/office/drawing/2014/main" id="{B0196A16-C376-4FBF-BC0F-DA39CCC4C9F4}"/>
                 </a:ext>
               </a:extLst>
             </p:cNvPr>
@@ -10355,7 +10438,7 @@
             <p:cNvPr id="115" name="F1_0114_patch_100">
               <a:extLst>
                 <a:ext uri="{FF2B5EF4-FFF2-40B4-BE49-F238E27FC236}">
-                  <a16:creationId id="{12A089A3-3C2A-45BB-AECE-C70109AD431D}"/>
+                  <a16:creationId xmlns:a16="http://schemas.microsoft.com/office/drawing/2014/main" id="{12A089A3-3C2A-45BB-AECE-C70109AD431D}"/>
                 </a:ext>
               </a:extLst>
             </p:cNvPr>
@@ -10409,7 +10492,7 @@
             <p:cNvPr id="116" name="F1_0115_patch_101">
               <a:extLst>
                 <a:ext uri="{FF2B5EF4-FFF2-40B4-BE49-F238E27FC236}">
-                  <a16:creationId id="{FCF1E046-5BD3-4B4E-8462-7C0F7AC55E67}"/>
+                  <a16:creationId xmlns:a16="http://schemas.microsoft.com/office/drawing/2014/main" id="{FCF1E046-5BD3-4B4E-8462-7C0F7AC55E67}"/>
                 </a:ext>
               </a:extLst>
             </p:cNvPr>
@@ -10463,7 +10546,7 @@
             <p:cNvPr id="117" name="F1_0116_patch_102">
               <a:extLst>
                 <a:ext uri="{FF2B5EF4-FFF2-40B4-BE49-F238E27FC236}">
-                  <a16:creationId id="{950BBB39-4D35-4E88-BA22-F93996E8188C}"/>
+                  <a16:creationId xmlns:a16="http://schemas.microsoft.com/office/drawing/2014/main" id="{950BBB39-4D35-4E88-BA22-F93996E8188C}"/>
                 </a:ext>
               </a:extLst>
             </p:cNvPr>
@@ -10517,7 +10600,7 @@
             <p:cNvPr id="118" name="F1_0117_patch_103">
               <a:extLst>
                 <a:ext uri="{FF2B5EF4-FFF2-40B4-BE49-F238E27FC236}">
-                  <a16:creationId id="{64E84C9A-B6B1-430D-94F6-9F450E2F59EC}"/>
+                  <a16:creationId xmlns:a16="http://schemas.microsoft.com/office/drawing/2014/main" id="{64E84C9A-B6B1-430D-94F6-9F450E2F59EC}"/>
                 </a:ext>
               </a:extLst>
             </p:cNvPr>
@@ -10571,7 +10654,7 @@
             <p:cNvPr id="119" name="F1_0118_patch_104">
               <a:extLst>
                 <a:ext uri="{FF2B5EF4-FFF2-40B4-BE49-F238E27FC236}">
-                  <a16:creationId id="{3D0F0623-C333-4532-96A6-3E9CDD102C7E}"/>
+                  <a16:creationId xmlns:a16="http://schemas.microsoft.com/office/drawing/2014/main" id="{3D0F0623-C333-4532-96A6-3E9CDD102C7E}"/>
                 </a:ext>
               </a:extLst>
             </p:cNvPr>
@@ -10625,7 +10708,7 @@
             <p:cNvPr id="120" name="F1_0119_patch_105">
               <a:extLst>
                 <a:ext uri="{FF2B5EF4-FFF2-40B4-BE49-F238E27FC236}">
-                  <a16:creationId id="{C53E47D8-6792-4B4E-AB35-3E22030211AE}"/>
+                  <a16:creationId xmlns:a16="http://schemas.microsoft.com/office/drawing/2014/main" id="{C53E47D8-6792-4B4E-AB35-3E22030211AE}"/>
                 </a:ext>
               </a:extLst>
             </p:cNvPr>
@@ -10679,7 +10762,7 @@
             <p:cNvPr id="121" name="F1_0120_patch_106">
               <a:extLst>
                 <a:ext uri="{FF2B5EF4-FFF2-40B4-BE49-F238E27FC236}">
-                  <a16:creationId id="{F619146C-3E02-4BF4-9C85-35AF7D1CCE5D}"/>
+                  <a16:creationId xmlns:a16="http://schemas.microsoft.com/office/drawing/2014/main" id="{F619146C-3E02-4BF4-9C85-35AF7D1CCE5D}"/>
                 </a:ext>
               </a:extLst>
             </p:cNvPr>
@@ -10733,7 +10816,7 @@
             <p:cNvPr id="122" name="F1_0121_patch_107">
               <a:extLst>
                 <a:ext uri="{FF2B5EF4-FFF2-40B4-BE49-F238E27FC236}">
-                  <a16:creationId id="{22C25E2D-9E4C-4BE5-BE75-808A29BCF73B}"/>
+                  <a16:creationId xmlns:a16="http://schemas.microsoft.com/office/drawing/2014/main" id="{22C25E2D-9E4C-4BE5-BE75-808A29BCF73B}"/>
                 </a:ext>
               </a:extLst>
             </p:cNvPr>
@@ -10787,7 +10870,7 @@
             <p:cNvPr id="123" name="F1_0122_patch_108">
               <a:extLst>
                 <a:ext uri="{FF2B5EF4-FFF2-40B4-BE49-F238E27FC236}">
-                  <a16:creationId id="{69B0013C-F245-4A9D-8F34-61A618327F3A}"/>
+                  <a16:creationId xmlns:a16="http://schemas.microsoft.com/office/drawing/2014/main" id="{69B0013C-F245-4A9D-8F34-61A618327F3A}"/>
                 </a:ext>
               </a:extLst>
             </p:cNvPr>
@@ -11009,7 +11092,7 @@
             <p:cNvPr id="745" name="F1_0744_text_61" descr="(c) Gated DeltaNet">
               <a:extLst>
                 <a:ext uri="{FF2B5EF4-FFF2-40B4-BE49-F238E27FC236}">
-                  <a16:creationId id="{9FE5DB9E-04E3-4002-A4A2-CE335F802CAF}"/>
+                  <a16:creationId xmlns:a16="http://schemas.microsoft.com/office/drawing/2014/main" id="{9FE5DB9E-04E3-4002-A4A2-CE335F802CAF}"/>
                 </a:ext>
               </a:extLst>
             </p:cNvPr>
@@ -11066,7 +11149,7 @@
             <p:cNvPr id="746" name="F1_0745_text_62" descr="Memory">
               <a:extLst>
                 <a:ext uri="{FF2B5EF4-FFF2-40B4-BE49-F238E27FC236}">
-                  <a16:creationId id="{0B7539FB-8359-46FF-9547-BB0C6CD69F66}"/>
+                  <a16:creationId xmlns:a16="http://schemas.microsoft.com/office/drawing/2014/main" id="{0B7539FB-8359-46FF-9547-BB0C6CD69F66}"/>
                 </a:ext>
               </a:extLst>
             </p:cNvPr>
@@ -11123,7 +11206,7 @@
             <p:cNvPr id="747" name="F1_0746_text_63" descr="Memory">
               <a:extLst>
                 <a:ext uri="{FF2B5EF4-FFF2-40B4-BE49-F238E27FC236}">
-                  <a16:creationId id="{A91D114F-93C7-4E2E-A0F8-39F309E492CA}"/>
+                  <a16:creationId xmlns:a16="http://schemas.microsoft.com/office/drawing/2014/main" id="{A91D114F-93C7-4E2E-A0F8-39F309E492CA}"/>
                 </a:ext>
               </a:extLst>
             </p:cNvPr>
@@ -11180,7 +11263,7 @@
             <p:cNvPr id="748" name="F1_0747_text_64" descr="Readout">
               <a:extLst>
                 <a:ext uri="{FF2B5EF4-FFF2-40B4-BE49-F238E27FC236}">
-                  <a16:creationId id="{2D5A3875-3CE7-473E-B440-DEBEFBD0509B}"/>
+                  <a16:creationId xmlns:a16="http://schemas.microsoft.com/office/drawing/2014/main" id="{2D5A3875-3CE7-473E-B440-DEBEFBD0509B}"/>
                 </a:ext>
               </a:extLst>
             </p:cNvPr>
@@ -11237,7 +11320,7 @@
             <p:cNvPr id="749" name="F1_0748_text_65" descr="Value, key, gates">
               <a:extLst>
                 <a:ext uri="{FF2B5EF4-FFF2-40B4-BE49-F238E27FC236}">
-                  <a16:creationId id="{EA3BCB32-A258-43D9-A5A0-7A728428FD40}"/>
+                  <a16:creationId xmlns:a16="http://schemas.microsoft.com/office/drawing/2014/main" id="{EA3BCB32-A258-43D9-A5A0-7A728428FD40}"/>
                 </a:ext>
               </a:extLst>
             </p:cNvPr>
@@ -11294,7 +11377,7 @@
             <p:cNvPr id="750" name="F1_0749_text_66" descr="Update">
               <a:extLst>
                 <a:ext uri="{FF2B5EF4-FFF2-40B4-BE49-F238E27FC236}">
-                  <a16:creationId id="{1A6A9A21-3499-48C3-8EAF-B6483A4C7C30}"/>
+                  <a16:creationId xmlns:a16="http://schemas.microsoft.com/office/drawing/2014/main" id="{1A6A9A21-3499-48C3-8EAF-B6483A4C7C30}"/>
                 </a:ext>
               </a:extLst>
             </p:cNvPr>
@@ -11351,7 +11434,7 @@
             <p:cNvPr id="751" name="F1_0750_text_67" descr="Query">
               <a:extLst>
                 <a:ext uri="{FF2B5EF4-FFF2-40B4-BE49-F238E27FC236}">
-                  <a16:creationId id="{E70CF21D-E70C-40C1-B3E8-EF3830211C42}"/>
+                  <a16:creationId xmlns:a16="http://schemas.microsoft.com/office/drawing/2014/main" id="{E70CF21D-E70C-40C1-B3E8-EF3830211C42}"/>
                 </a:ext>
               </a:extLst>
             </p:cNvPr>
@@ -11408,7 +11491,7 @@
             <p:cNvPr id="752" name="F1_0751_text_68" descr="Read">
               <a:extLst>
                 <a:ext uri="{FF2B5EF4-FFF2-40B4-BE49-F238E27FC236}">
-                  <a16:creationId id="{97344ACD-5CF4-4428-9961-9981418B7C6C}"/>
+                  <a16:creationId xmlns:a16="http://schemas.microsoft.com/office/drawing/2014/main" id="{97344ACD-5CF4-4428-9961-9981418B7C6C}"/>
                 </a:ext>
               </a:extLst>
             </p:cNvPr>
@@ -11474,7 +11557,7 @@
               <a:chExt cx="539239" cy="472948"/>
             </a:xfrm>
           </p:grpSpPr>
-          <mc:AlternateContent>
+          <mc:AlternateContent xmlns:mc="http://schemas.openxmlformats.org/markup-compatibility/2006" xmlns:a14="http://schemas.microsoft.com/office/drawing/2010/main">
             <mc:Choice Requires="a14">
               <p:sp>
                 <p:nvSpPr>
@@ -11512,11 +11595,11 @@
                       </a:defRPr>
                     </a:pPr>
                     <a14:m>
-                      <m:oMathPara>
+                      <m:oMathPara xmlns:m="http://schemas.openxmlformats.org/officeDocument/2006/math">
                         <m:oMathParaPr>
                           <m:jc m:val="centerGroup"/>
                         </m:oMathParaPr>
-                        <m:oMath>
+                        <m:oMath xmlns:m="http://schemas.openxmlformats.org/officeDocument/2006/math">
                           <m:sSub>
                             <m:sSubPr>
                               <m:ctrlPr>
@@ -11583,7 +11666,7 @@
                 </p:txBody>
               </p:sp>
             </mc:Choice>
-            <mc:Fallback>
+            <mc:Fallback xmlns:ns7="http://schemas.microsoft.com/office/powerpoint/2010/main" xmlns:m="http://schemas.openxmlformats.org/officeDocument/2006/math" xmlns:a16="http://schemas.microsoft.com/office/drawing/2014/main" xmlns="">
               <p:sp>
                 <p:nvSpPr>
                   <p:cNvPr id="20047" name="Equation sub(S,t−1)" descr="sub(S,t−1)"/>
@@ -11601,7 +11684,7 @@
                     <a:avLst/>
                   </a:prstGeom>
                   <a:blipFill>
-                    <a:blip r:embed="rId26"/>
+                    <a:blip r:embed="rId27"/>
                     <a:stretch>
                       <a:fillRect l="-18085" r="-9574"/>
                     </a:stretch>
@@ -11640,7 +11723,7 @@
               <a:chExt cx="224694" cy="472948"/>
             </a:xfrm>
           </p:grpSpPr>
-          <mc:AlternateContent>
+          <mc:AlternateContent xmlns:mc="http://schemas.openxmlformats.org/markup-compatibility/2006" xmlns:a14="http://schemas.microsoft.com/office/drawing/2010/main">
             <mc:Choice Requires="a14">
               <p:sp>
                 <p:nvSpPr>
@@ -11678,11 +11761,11 @@
                       </a:defRPr>
                     </a:pPr>
                     <a14:m>
-                      <m:oMathPara>
+                      <m:oMathPara xmlns:m="http://schemas.openxmlformats.org/officeDocument/2006/math">
                         <m:oMathParaPr>
                           <m:jc m:val="centerGroup"/>
                         </m:oMathParaPr>
-                        <m:oMath>
+                        <m:oMath xmlns:m="http://schemas.openxmlformats.org/officeDocument/2006/math">
                           <m:sSub>
                             <m:sSubPr>
                               <m:ctrlPr>
@@ -11738,7 +11821,7 @@
                 </p:txBody>
               </p:sp>
             </mc:Choice>
-            <mc:Fallback>
+            <mc:Fallback xmlns:ns7="http://schemas.microsoft.com/office/powerpoint/2010/main" xmlns:m="http://schemas.openxmlformats.org/officeDocument/2006/math" xmlns:a16="http://schemas.microsoft.com/office/drawing/2014/main" xmlns="">
               <p:sp>
                 <p:nvSpPr>
                   <p:cNvPr id="20048" name="Equation sub(S,t)" descr="sub(S,t)"/>
@@ -11756,7 +11839,7 @@
                     <a:avLst/>
                   </a:prstGeom>
                   <a:blipFill>
-                    <a:blip r:embed="rId27"/>
+                    <a:blip r:embed="rId28"/>
                     <a:stretch>
                       <a:fillRect l="-37778" r="-17778"/>
                     </a:stretch>
@@ -11795,7 +11878,7 @@
               <a:chExt cx="224694" cy="472948"/>
             </a:xfrm>
           </p:grpSpPr>
-          <mc:AlternateContent>
+          <mc:AlternateContent xmlns:mc="http://schemas.openxmlformats.org/markup-compatibility/2006" xmlns:a14="http://schemas.microsoft.com/office/drawing/2010/main">
             <mc:Choice Requires="a14">
               <p:sp>
                 <p:nvSpPr>
@@ -11833,11 +11916,11 @@
                       </a:defRPr>
                     </a:pPr>
                     <a14:m>
-                      <m:oMathPara>
+                      <m:oMathPara xmlns:m="http://schemas.openxmlformats.org/officeDocument/2006/math">
                         <m:oMathParaPr>
                           <m:jc m:val="centerGroup"/>
                         </m:oMathParaPr>
-                        <m:oMath>
+                        <m:oMath xmlns:m="http://schemas.openxmlformats.org/officeDocument/2006/math">
                           <m:sSub>
                             <m:sSubPr>
                               <m:ctrlPr>
@@ -11893,7 +11976,7 @@
                 </p:txBody>
               </p:sp>
             </mc:Choice>
-            <mc:Fallback>
+            <mc:Fallback xmlns:ns7="http://schemas.microsoft.com/office/powerpoint/2010/main" xmlns:m="http://schemas.openxmlformats.org/officeDocument/2006/math" xmlns:a16="http://schemas.microsoft.com/office/drawing/2014/main" xmlns="">
               <p:sp>
                 <p:nvSpPr>
                   <p:cNvPr id="20049" name="Equation sub(o,t)" descr="sub(o,t)"/>
@@ -11911,7 +11994,7 @@
                     <a:avLst/>
                   </a:prstGeom>
                   <a:blipFill>
-                    <a:blip r:embed="rId28"/>
+                    <a:blip r:embed="rId29"/>
                     <a:stretch>
                       <a:fillRect l="-28889" r="-17778"/>
                     </a:stretch>
@@ -11950,7 +12033,7 @@
               <a:chExt cx="577018" cy="453771"/>
             </a:xfrm>
           </p:grpSpPr>
-          <mc:AlternateContent>
+          <mc:AlternateContent xmlns:mc="http://schemas.openxmlformats.org/markup-compatibility/2006" xmlns:a14="http://schemas.microsoft.com/office/drawing/2010/main">
             <mc:Choice Requires="a14">
               <p:sp>
                 <p:nvSpPr>
@@ -11988,11 +12071,11 @@
                       </a:defRPr>
                     </a:pPr>
                     <a14:m>
-                      <m:oMathPara>
+                      <m:oMathPara xmlns:m="http://schemas.openxmlformats.org/officeDocument/2006/math">
                         <m:oMathParaPr>
                           <m:jc m:val="centerGroup"/>
                         </m:oMathParaPr>
-                        <m:oMath>
+                        <m:oMath xmlns:m="http://schemas.openxmlformats.org/officeDocument/2006/math">
                           <m:sSub>
                             <m:sSubPr>
                               <m:ctrlPr>
@@ -12088,7 +12171,7 @@
                 </p:txBody>
               </p:sp>
             </mc:Choice>
-            <mc:Fallback>
+            <mc:Fallback xmlns:ns7="http://schemas.microsoft.com/office/powerpoint/2010/main" xmlns:m="http://schemas.openxmlformats.org/officeDocument/2006/math" xmlns:a16="http://schemas.microsoft.com/office/drawing/2014/main" xmlns="">
               <p:sp>
                 <p:nvSpPr>
                   <p:cNvPr id="20050" name="Equation sub(m,sub(S,t−1))" descr="sub(m,sub(S,t−1))"/>
@@ -12106,7 +12189,7 @@
                     <a:avLst/>
                   </a:prstGeom>
                   <a:blipFill>
-                    <a:blip r:embed="rId29"/>
+                    <a:blip r:embed="rId30"/>
                     <a:stretch>
                       <a:fillRect l="-12000" r="-18000"/>
                     </a:stretch>
@@ -12145,7 +12228,7 @@
               <a:chExt cx="365944" cy="453771"/>
             </a:xfrm>
           </p:grpSpPr>
-          <mc:AlternateContent>
+          <mc:AlternateContent xmlns:mc="http://schemas.openxmlformats.org/markup-compatibility/2006" xmlns:a14="http://schemas.microsoft.com/office/drawing/2010/main">
             <mc:Choice Requires="a14">
               <p:sp>
                 <p:nvSpPr>
@@ -12183,11 +12266,11 @@
                       </a:defRPr>
                     </a:pPr>
                     <a14:m>
-                      <m:oMathPara>
+                      <m:oMathPara xmlns:m="http://schemas.openxmlformats.org/officeDocument/2006/math">
                         <m:oMathParaPr>
                           <m:jc m:val="centerGroup"/>
                         </m:oMathParaPr>
-                        <m:oMath>
+                        <m:oMath xmlns:m="http://schemas.openxmlformats.org/officeDocument/2006/math">
                           <m:sSub>
                             <m:sSubPr>
                               <m:ctrlPr>
@@ -12272,7 +12355,7 @@
                 </p:txBody>
               </p:sp>
             </mc:Choice>
-            <mc:Fallback>
+            <mc:Fallback xmlns:ns7="http://schemas.microsoft.com/office/powerpoint/2010/main" xmlns:m="http://schemas.openxmlformats.org/officeDocument/2006/math" xmlns:a16="http://schemas.microsoft.com/office/drawing/2014/main" xmlns="">
               <p:sp>
                 <p:nvSpPr>
                   <p:cNvPr id="20051" name="Equation sub(m,sub(S,t))" descr="sub(m,sub(S,t))"/>
@@ -12290,7 +12373,7 @@
                     <a:avLst/>
                   </a:prstGeom>
                   <a:blipFill>
-                    <a:blip r:embed="rId30"/>
+                    <a:blip r:embed="rId31"/>
                     <a:stretch>
                       <a:fillRect l="-17910" r="-19403"/>
                     </a:stretch>
@@ -12329,7 +12412,7 @@
               <a:chExt cx="365944" cy="453771"/>
             </a:xfrm>
           </p:grpSpPr>
-          <mc:AlternateContent>
+          <mc:AlternateContent xmlns:mc="http://schemas.openxmlformats.org/markup-compatibility/2006" xmlns:a14="http://schemas.microsoft.com/office/drawing/2010/main">
             <mc:Choice Requires="a14">
               <p:sp>
                 <p:nvSpPr>
@@ -12367,11 +12450,11 @@
                       </a:defRPr>
                     </a:pPr>
                     <a14:m>
-                      <m:oMathPara>
+                      <m:oMathPara xmlns:m="http://schemas.openxmlformats.org/officeDocument/2006/math">
                         <m:oMathParaPr>
                           <m:jc m:val="centerGroup"/>
                         </m:oMathParaPr>
-                        <m:oMath>
+                        <m:oMath xmlns:m="http://schemas.openxmlformats.org/officeDocument/2006/math">
                           <m:sSub>
                             <m:sSubPr>
                               <m:ctrlPr>
@@ -12456,7 +12539,7 @@
                 </p:txBody>
               </p:sp>
             </mc:Choice>
-            <mc:Fallback>
+            <mc:Fallback xmlns:ns7="http://schemas.microsoft.com/office/powerpoint/2010/main" xmlns:m="http://schemas.openxmlformats.org/officeDocument/2006/math" xmlns:a16="http://schemas.microsoft.com/office/drawing/2014/main" xmlns="">
               <p:sp>
                 <p:nvSpPr>
                   <p:cNvPr id="20052" name="Equation sub(m,sub(o,t))" descr="sub(m,sub(o,t))"/>
@@ -12474,7 +12557,7 @@
                     <a:avLst/>
                   </a:prstGeom>
                   <a:blipFill>
-                    <a:blip r:embed="rId31"/>
+                    <a:blip r:embed="rId32"/>
                     <a:stretch>
                       <a:fillRect l="-17910" r="-25373"/>
                     </a:stretch>
@@ -12504,7 +12587,7 @@
             <p:cNvPr id="772" name="F1_0771_text_75" descr="Value, key, gate slopes">
               <a:extLst>
                 <a:ext uri="{FF2B5EF4-FFF2-40B4-BE49-F238E27FC236}">
-                  <a16:creationId id="{BFE8C971-8531-4B76-84BB-659CD21CDBDA}"/>
+                  <a16:creationId xmlns:a16="http://schemas.microsoft.com/office/drawing/2014/main" id="{BFE8C971-8531-4B76-84BB-659CD21CDBDA}"/>
                 </a:ext>
               </a:extLst>
             </p:cNvPr>
@@ -12561,7 +12644,7 @@
             <p:cNvPr id="773" name="F1_0772_text_76" descr="Query slopes">
               <a:extLst>
                 <a:ext uri="{FF2B5EF4-FFF2-40B4-BE49-F238E27FC236}">
-                  <a16:creationId id="{BBDD02D3-AC8F-4A0C-9917-210F1D3CD79F}"/>
+                  <a16:creationId xmlns:a16="http://schemas.microsoft.com/office/drawing/2014/main" id="{BBDD02D3-AC8F-4A0C-9917-210F1D3CD79F}"/>
                 </a:ext>
               </a:extLst>
             </p:cNvPr>
@@ -12633,7 +12716,7 @@
             <p:cNvPr id="138" name="F1_0137_patch_116">
               <a:extLst>
                 <a:ext uri="{FF2B5EF4-FFF2-40B4-BE49-F238E27FC236}">
-                  <a16:creationId id="{1D23F93E-11D0-4EEE-A953-1F0987F2B7EF}"/>
+                  <a16:creationId xmlns:a16="http://schemas.microsoft.com/office/drawing/2014/main" id="{1D23F93E-11D0-4EEE-A953-1F0987F2B7EF}"/>
                 </a:ext>
               </a:extLst>
             </p:cNvPr>
@@ -12685,7 +12768,7 @@
             <p:cNvPr id="139" name="F1_0138_patch_117">
               <a:extLst>
                 <a:ext uri="{FF2B5EF4-FFF2-40B4-BE49-F238E27FC236}">
-                  <a16:creationId id="{122EBC82-48B8-4FFD-BC64-322BECF19C7C}"/>
+                  <a16:creationId xmlns:a16="http://schemas.microsoft.com/office/drawing/2014/main" id="{122EBC82-48B8-4FFD-BC64-322BECF19C7C}"/>
                 </a:ext>
               </a:extLst>
             </p:cNvPr>
@@ -12737,7 +12820,7 @@
             <p:cNvPr id="140" name="F1_0139_patch_118">
               <a:extLst>
                 <a:ext uri="{FF2B5EF4-FFF2-40B4-BE49-F238E27FC236}">
-                  <a16:creationId id="{E0AB3FB9-EA7E-40B5-9FE9-DE25B7922CBC}"/>
+                  <a16:creationId xmlns:a16="http://schemas.microsoft.com/office/drawing/2014/main" id="{E0AB3FB9-EA7E-40B5-9FE9-DE25B7922CBC}"/>
                 </a:ext>
               </a:extLst>
             </p:cNvPr>
@@ -12789,7 +12872,7 @@
             <p:cNvPr id="141" name="F1_0140_patch_119">
               <a:extLst>
                 <a:ext uri="{FF2B5EF4-FFF2-40B4-BE49-F238E27FC236}">
-                  <a16:creationId id="{49678398-A47F-4A90-A89E-FB1595DAA9D7}"/>
+                  <a16:creationId xmlns:a16="http://schemas.microsoft.com/office/drawing/2014/main" id="{49678398-A47F-4A90-A89E-FB1595DAA9D7}"/>
                 </a:ext>
               </a:extLst>
             </p:cNvPr>
@@ -12841,7 +12924,7 @@
             <p:cNvPr id="142" name="F1_0141_patch_120">
               <a:extLst>
                 <a:ext uri="{FF2B5EF4-FFF2-40B4-BE49-F238E27FC236}">
-                  <a16:creationId id="{485E473B-B949-4EAA-A53A-A8A49C173DEC}"/>
+                  <a16:creationId xmlns:a16="http://schemas.microsoft.com/office/drawing/2014/main" id="{485E473B-B949-4EAA-A53A-A8A49C173DEC}"/>
                 </a:ext>
               </a:extLst>
             </p:cNvPr>
@@ -12893,7 +12976,7 @@
             <p:cNvPr id="143" name="F1_0142_patch_121">
               <a:extLst>
                 <a:ext uri="{FF2B5EF4-FFF2-40B4-BE49-F238E27FC236}">
-                  <a16:creationId id="{7BD32AEF-00F4-48B1-8392-90282067C29D}"/>
+                  <a16:creationId xmlns:a16="http://schemas.microsoft.com/office/drawing/2014/main" id="{7BD32AEF-00F4-48B1-8392-90282067C29D}"/>
                 </a:ext>
               </a:extLst>
             </p:cNvPr>
@@ -12945,7 +13028,7 @@
             <p:cNvPr id="144" name="F1_0143_patch_122">
               <a:extLst>
                 <a:ext uri="{FF2B5EF4-FFF2-40B4-BE49-F238E27FC236}">
-                  <a16:creationId id="{52D54DD4-14BC-4FEC-BC4B-E30A700FC951}"/>
+                  <a16:creationId xmlns:a16="http://schemas.microsoft.com/office/drawing/2014/main" id="{52D54DD4-14BC-4FEC-BC4B-E30A700FC951}"/>
                 </a:ext>
               </a:extLst>
             </p:cNvPr>
@@ -12997,7 +13080,7 @@
             <p:cNvPr id="145" name="F1_0144_patch_123">
               <a:extLst>
                 <a:ext uri="{FF2B5EF4-FFF2-40B4-BE49-F238E27FC236}">
-                  <a16:creationId id="{C00C4680-6F28-417C-A038-5B45E01D5BE9}"/>
+                  <a16:creationId xmlns:a16="http://schemas.microsoft.com/office/drawing/2014/main" id="{C00C4680-6F28-417C-A038-5B45E01D5BE9}"/>
                 </a:ext>
               </a:extLst>
             </p:cNvPr>
@@ -13049,7 +13132,7 @@
             <p:cNvPr id="146" name="F1_0145_patch_124">
               <a:extLst>
                 <a:ext uri="{FF2B5EF4-FFF2-40B4-BE49-F238E27FC236}">
-                  <a16:creationId id="{D2CF9408-B7BE-487F-BDE6-C1CD8369E57F}"/>
+                  <a16:creationId xmlns:a16="http://schemas.microsoft.com/office/drawing/2014/main" id="{D2CF9408-B7BE-487F-BDE6-C1CD8369E57F}"/>
                 </a:ext>
               </a:extLst>
             </p:cNvPr>
@@ -13101,7 +13184,7 @@
             <p:cNvPr id="147" name="F1_0146_patch_125">
               <a:extLst>
                 <a:ext uri="{FF2B5EF4-FFF2-40B4-BE49-F238E27FC236}">
-                  <a16:creationId id="{DFB2AA45-E48B-4765-9320-AAD57E5A703D}"/>
+                  <a16:creationId xmlns:a16="http://schemas.microsoft.com/office/drawing/2014/main" id="{DFB2AA45-E48B-4765-9320-AAD57E5A703D}"/>
                 </a:ext>
               </a:extLst>
             </p:cNvPr>
@@ -13153,7 +13236,7 @@
             <p:cNvPr id="148" name="F1_0147_patch_126">
               <a:extLst>
                 <a:ext uri="{FF2B5EF4-FFF2-40B4-BE49-F238E27FC236}">
-                  <a16:creationId id="{61261D91-CCA2-432C-A3A0-231FF5934652}"/>
+                  <a16:creationId xmlns:a16="http://schemas.microsoft.com/office/drawing/2014/main" id="{61261D91-CCA2-432C-A3A0-231FF5934652}"/>
                 </a:ext>
               </a:extLst>
             </p:cNvPr>
@@ -13205,7 +13288,7 @@
             <p:cNvPr id="149" name="F1_0148_patch_127">
               <a:extLst>
                 <a:ext uri="{FF2B5EF4-FFF2-40B4-BE49-F238E27FC236}">
-                  <a16:creationId id="{19B9F91E-3D78-4117-9430-864D712BC6C8}"/>
+                  <a16:creationId xmlns:a16="http://schemas.microsoft.com/office/drawing/2014/main" id="{19B9F91E-3D78-4117-9430-864D712BC6C8}"/>
                 </a:ext>
               </a:extLst>
             </p:cNvPr>
@@ -13257,7 +13340,7 @@
             <p:cNvPr id="150" name="F1_0149_patch_128">
               <a:extLst>
                 <a:ext uri="{FF2B5EF4-FFF2-40B4-BE49-F238E27FC236}">
-                  <a16:creationId id="{EE4C2874-B6D2-466E-A31A-C1767C9320C3}"/>
+                  <a16:creationId xmlns:a16="http://schemas.microsoft.com/office/drawing/2014/main" id="{EE4C2874-B6D2-466E-A31A-C1767C9320C3}"/>
                 </a:ext>
               </a:extLst>
             </p:cNvPr>
@@ -13309,7 +13392,7 @@
             <p:cNvPr id="151" name="F1_0150_patch_129">
               <a:extLst>
                 <a:ext uri="{FF2B5EF4-FFF2-40B4-BE49-F238E27FC236}">
-                  <a16:creationId id="{B36506B7-4449-43CE-997B-0F8C8CA6EA20}"/>
+                  <a16:creationId xmlns:a16="http://schemas.microsoft.com/office/drawing/2014/main" id="{B36506B7-4449-43CE-997B-0F8C8CA6EA20}"/>
                 </a:ext>
               </a:extLst>
             </p:cNvPr>
@@ -13361,7 +13444,7 @@
             <p:cNvPr id="152" name="F1_0151_patch_130">
               <a:extLst>
                 <a:ext uri="{FF2B5EF4-FFF2-40B4-BE49-F238E27FC236}">
-                  <a16:creationId id="{F25E9053-A079-4DBB-AEBA-DEEB2CD42F4A}"/>
+                  <a16:creationId xmlns:a16="http://schemas.microsoft.com/office/drawing/2014/main" id="{F25E9053-A079-4DBB-AEBA-DEEB2CD42F4A}"/>
                 </a:ext>
               </a:extLst>
             </p:cNvPr>
@@ -13413,7 +13496,7 @@
             <p:cNvPr id="153" name="F1_0152_patch_131">
               <a:extLst>
                 <a:ext uri="{FF2B5EF4-FFF2-40B4-BE49-F238E27FC236}">
-                  <a16:creationId id="{B5E757AE-1271-4718-B4C7-9366572A8E4A}"/>
+                  <a16:creationId xmlns:a16="http://schemas.microsoft.com/office/drawing/2014/main" id="{B5E757AE-1271-4718-B4C7-9366572A8E4A}"/>
                 </a:ext>
               </a:extLst>
             </p:cNvPr>
@@ -13465,7 +13548,7 @@
             <p:cNvPr id="154" name="F1_0153_patch_132">
               <a:extLst>
                 <a:ext uri="{FF2B5EF4-FFF2-40B4-BE49-F238E27FC236}">
-                  <a16:creationId id="{82240CB2-92AE-420F-9F18-E890B8BD40AF}"/>
+                  <a16:creationId xmlns:a16="http://schemas.microsoft.com/office/drawing/2014/main" id="{82240CB2-92AE-420F-9F18-E890B8BD40AF}"/>
                 </a:ext>
               </a:extLst>
             </p:cNvPr>
@@ -13538,7 +13621,7 @@
             <p:cNvPr id="155" name="F1_0154_patch_133">
               <a:extLst>
                 <a:ext uri="{FF2B5EF4-FFF2-40B4-BE49-F238E27FC236}">
-                  <a16:creationId id="{218A9445-FC72-47E3-8105-547CD0B239A3}"/>
+                  <a16:creationId xmlns:a16="http://schemas.microsoft.com/office/drawing/2014/main" id="{218A9445-FC72-47E3-8105-547CD0B239A3}"/>
                 </a:ext>
               </a:extLst>
             </p:cNvPr>
@@ -13590,7 +13673,7 @@
             <p:cNvPr id="156" name="F1_0155_patch_134">
               <a:extLst>
                 <a:ext uri="{FF2B5EF4-FFF2-40B4-BE49-F238E27FC236}">
-                  <a16:creationId id="{BFAC4CD3-C4CD-4FAE-B55F-F9C3FCB961F9}"/>
+                  <a16:creationId xmlns:a16="http://schemas.microsoft.com/office/drawing/2014/main" id="{BFAC4CD3-C4CD-4FAE-B55F-F9C3FCB961F9}"/>
                 </a:ext>
               </a:extLst>
             </p:cNvPr>
@@ -13642,7 +13725,7 @@
             <p:cNvPr id="157" name="F1_0156_patch_135">
               <a:extLst>
                 <a:ext uri="{FF2B5EF4-FFF2-40B4-BE49-F238E27FC236}">
-                  <a16:creationId id="{CBD40EB8-EF95-4DA8-981C-C764C859390D}"/>
+                  <a16:creationId xmlns:a16="http://schemas.microsoft.com/office/drawing/2014/main" id="{CBD40EB8-EF95-4DA8-981C-C764C859390D}"/>
                 </a:ext>
               </a:extLst>
             </p:cNvPr>
@@ -13694,7 +13777,7 @@
             <p:cNvPr id="158" name="F1_0157_patch_136">
               <a:extLst>
                 <a:ext uri="{FF2B5EF4-FFF2-40B4-BE49-F238E27FC236}">
-                  <a16:creationId id="{99C501B3-3C9D-4E14-B7A8-976FE83F0B5D}"/>
+                  <a16:creationId xmlns:a16="http://schemas.microsoft.com/office/drawing/2014/main" id="{99C501B3-3C9D-4E14-B7A8-976FE83F0B5D}"/>
                 </a:ext>
               </a:extLst>
             </p:cNvPr>
@@ -13746,7 +13829,7 @@
             <p:cNvPr id="159" name="F1_0158_patch_137">
               <a:extLst>
                 <a:ext uri="{FF2B5EF4-FFF2-40B4-BE49-F238E27FC236}">
-                  <a16:creationId id="{84545556-A1D5-4410-84B2-625C4D57044B}"/>
+                  <a16:creationId xmlns:a16="http://schemas.microsoft.com/office/drawing/2014/main" id="{84545556-A1D5-4410-84B2-625C4D57044B}"/>
                 </a:ext>
               </a:extLst>
             </p:cNvPr>
@@ -13798,7 +13881,7 @@
             <p:cNvPr id="160" name="F1_0159_patch_138">
               <a:extLst>
                 <a:ext uri="{FF2B5EF4-FFF2-40B4-BE49-F238E27FC236}">
-                  <a16:creationId id="{912A1139-4A54-4310-8CC3-C395AD715F5A}"/>
+                  <a16:creationId xmlns:a16="http://schemas.microsoft.com/office/drawing/2014/main" id="{912A1139-4A54-4310-8CC3-C395AD715F5A}"/>
                 </a:ext>
               </a:extLst>
             </p:cNvPr>
@@ -13850,7 +13933,7 @@
             <p:cNvPr id="161" name="F1_0160_patch_139">
               <a:extLst>
                 <a:ext uri="{FF2B5EF4-FFF2-40B4-BE49-F238E27FC236}">
-                  <a16:creationId id="{336A2A72-31A0-4486-93F3-C337B636257D}"/>
+                  <a16:creationId xmlns:a16="http://schemas.microsoft.com/office/drawing/2014/main" id="{336A2A72-31A0-4486-93F3-C337B636257D}"/>
                 </a:ext>
               </a:extLst>
             </p:cNvPr>
@@ -13902,7 +13985,7 @@
             <p:cNvPr id="162" name="F1_0161_patch_140">
               <a:extLst>
                 <a:ext uri="{FF2B5EF4-FFF2-40B4-BE49-F238E27FC236}">
-                  <a16:creationId id="{F7BFEB97-7E35-4F6E-9317-E609985EA707}"/>
+                  <a16:creationId xmlns:a16="http://schemas.microsoft.com/office/drawing/2014/main" id="{F7BFEB97-7E35-4F6E-9317-E609985EA707}"/>
                 </a:ext>
               </a:extLst>
             </p:cNvPr>
@@ -13954,7 +14037,7 @@
             <p:cNvPr id="163" name="F1_0162_patch_141">
               <a:extLst>
                 <a:ext uri="{FF2B5EF4-FFF2-40B4-BE49-F238E27FC236}">
-                  <a16:creationId id="{6B27C50E-53C9-4D97-B0A5-08D3AA573BE6}"/>
+                  <a16:creationId xmlns:a16="http://schemas.microsoft.com/office/drawing/2014/main" id="{6B27C50E-53C9-4D97-B0A5-08D3AA573BE6}"/>
                 </a:ext>
               </a:extLst>
             </p:cNvPr>
@@ -14006,7 +14089,7 @@
             <p:cNvPr id="164" name="F1_0163_patch_142">
               <a:extLst>
                 <a:ext uri="{FF2B5EF4-FFF2-40B4-BE49-F238E27FC236}">
-                  <a16:creationId id="{BD9222DF-5DF4-4881-B0ED-D6B4136B00D1}"/>
+                  <a16:creationId xmlns:a16="http://schemas.microsoft.com/office/drawing/2014/main" id="{BD9222DF-5DF4-4881-B0ED-D6B4136B00D1}"/>
                 </a:ext>
               </a:extLst>
             </p:cNvPr>
@@ -14058,7 +14141,7 @@
             <p:cNvPr id="165" name="F1_0164_patch_143">
               <a:extLst>
                 <a:ext uri="{FF2B5EF4-FFF2-40B4-BE49-F238E27FC236}">
-                  <a16:creationId id="{4808B751-CB86-4413-83EE-AC109EB7F19C}"/>
+                  <a16:creationId xmlns:a16="http://schemas.microsoft.com/office/drawing/2014/main" id="{4808B751-CB86-4413-83EE-AC109EB7F19C}"/>
                 </a:ext>
               </a:extLst>
             </p:cNvPr>
@@ -14110,7 +14193,7 @@
             <p:cNvPr id="166" name="F1_0165_patch_144">
               <a:extLst>
                 <a:ext uri="{FF2B5EF4-FFF2-40B4-BE49-F238E27FC236}">
-                  <a16:creationId id="{D6B95F09-879B-4A74-9D0C-26588E6CD776}"/>
+                  <a16:creationId xmlns:a16="http://schemas.microsoft.com/office/drawing/2014/main" id="{D6B95F09-879B-4A74-9D0C-26588E6CD776}"/>
                 </a:ext>
               </a:extLst>
             </p:cNvPr>
@@ -14162,7 +14245,7 @@
             <p:cNvPr id="167" name="F1_0166_patch_145">
               <a:extLst>
                 <a:ext uri="{FF2B5EF4-FFF2-40B4-BE49-F238E27FC236}">
-                  <a16:creationId id="{3D1D7879-3B34-4753-9ACD-B5218DB564E3}"/>
+                  <a16:creationId xmlns:a16="http://schemas.microsoft.com/office/drawing/2014/main" id="{3D1D7879-3B34-4753-9ACD-B5218DB564E3}"/>
                 </a:ext>
               </a:extLst>
             </p:cNvPr>
@@ -14214,7 +14297,7 @@
             <p:cNvPr id="168" name="F1_0167_patch_146">
               <a:extLst>
                 <a:ext uri="{FF2B5EF4-FFF2-40B4-BE49-F238E27FC236}">
-                  <a16:creationId id="{AB93BE66-2A39-43A5-BA98-AE6976EFD4BF}"/>
+                  <a16:creationId xmlns:a16="http://schemas.microsoft.com/office/drawing/2014/main" id="{AB93BE66-2A39-43A5-BA98-AE6976EFD4BF}"/>
                 </a:ext>
               </a:extLst>
             </p:cNvPr>
@@ -14266,7 +14349,7 @@
             <p:cNvPr id="169" name="F1_0168_patch_147">
               <a:extLst>
                 <a:ext uri="{FF2B5EF4-FFF2-40B4-BE49-F238E27FC236}">
-                  <a16:creationId id="{BBC21274-3186-4649-B9E0-F75AB2278E94}"/>
+                  <a16:creationId xmlns:a16="http://schemas.microsoft.com/office/drawing/2014/main" id="{BBC21274-3186-4649-B9E0-F75AB2278E94}"/>
                 </a:ext>
               </a:extLst>
             </p:cNvPr>
@@ -14318,7 +14401,7 @@
             <p:cNvPr id="170" name="F1_0169_patch_148">
               <a:extLst>
                 <a:ext uri="{FF2B5EF4-FFF2-40B4-BE49-F238E27FC236}">
-                  <a16:creationId id="{34AC68AA-EEAF-4C0B-BA5A-1817BDFCB3D2}"/>
+                  <a16:creationId xmlns:a16="http://schemas.microsoft.com/office/drawing/2014/main" id="{34AC68AA-EEAF-4C0B-BA5A-1817BDFCB3D2}"/>
                 </a:ext>
               </a:extLst>
             </p:cNvPr>
@@ -14370,7 +14453,7 @@
             <p:cNvPr id="171" name="F1_0170_patch_149">
               <a:extLst>
                 <a:ext uri="{FF2B5EF4-FFF2-40B4-BE49-F238E27FC236}">
-                  <a16:creationId id="{C68AA189-9082-4DE2-B4C8-5E9A864E2F8C}"/>
+                  <a16:creationId xmlns:a16="http://schemas.microsoft.com/office/drawing/2014/main" id="{C68AA189-9082-4DE2-B4C8-5E9A864E2F8C}"/>
                 </a:ext>
               </a:extLst>
             </p:cNvPr>
@@ -14422,7 +14505,7 @@
             <p:cNvPr id="172" name="F1_0171_patch_150">
               <a:extLst>
                 <a:ext uri="{FF2B5EF4-FFF2-40B4-BE49-F238E27FC236}">
-                  <a16:creationId id="{B9AD7913-2FA8-4D01-ADDD-3DA340AC7E19}"/>
+                  <a16:creationId xmlns:a16="http://schemas.microsoft.com/office/drawing/2014/main" id="{B9AD7913-2FA8-4D01-ADDD-3DA340AC7E19}"/>
                 </a:ext>
               </a:extLst>
             </p:cNvPr>
@@ -14474,7 +14557,7 @@
             <p:cNvPr id="173" name="F1_0172_patch_151">
               <a:extLst>
                 <a:ext uri="{FF2B5EF4-FFF2-40B4-BE49-F238E27FC236}">
-                  <a16:creationId id="{2665D364-C545-416F-96BA-2563234EF700}"/>
+                  <a16:creationId xmlns:a16="http://schemas.microsoft.com/office/drawing/2014/main" id="{2665D364-C545-416F-96BA-2563234EF700}"/>
                 </a:ext>
               </a:extLst>
             </p:cNvPr>
@@ -14526,7 +14609,7 @@
             <p:cNvPr id="174" name="F1_0173_patch_152">
               <a:extLst>
                 <a:ext uri="{FF2B5EF4-FFF2-40B4-BE49-F238E27FC236}">
-                  <a16:creationId id="{E45C78F8-1752-4C65-909B-603AC4DFF8F6}"/>
+                  <a16:creationId xmlns:a16="http://schemas.microsoft.com/office/drawing/2014/main" id="{E45C78F8-1752-4C65-909B-603AC4DFF8F6}"/>
                 </a:ext>
               </a:extLst>
             </p:cNvPr>
@@ -14578,7 +14661,7 @@
             <p:cNvPr id="175" name="F1_0174_patch_153">
               <a:extLst>
                 <a:ext uri="{FF2B5EF4-FFF2-40B4-BE49-F238E27FC236}">
-                  <a16:creationId id="{08FDD4DD-D680-40A0-B203-A35452B5F4C6}"/>
+                  <a16:creationId xmlns:a16="http://schemas.microsoft.com/office/drawing/2014/main" id="{08FDD4DD-D680-40A0-B203-A35452B5F4C6}"/>
                 </a:ext>
               </a:extLst>
             </p:cNvPr>
@@ -14630,7 +14713,7 @@
             <p:cNvPr id="176" name="F1_0175_patch_154">
               <a:extLst>
                 <a:ext uri="{FF2B5EF4-FFF2-40B4-BE49-F238E27FC236}">
-                  <a16:creationId id="{0EB7C5E9-42AC-40C0-96B5-4D2407CB81DC}"/>
+                  <a16:creationId xmlns:a16="http://schemas.microsoft.com/office/drawing/2014/main" id="{0EB7C5E9-42AC-40C0-96B5-4D2407CB81DC}"/>
                 </a:ext>
               </a:extLst>
             </p:cNvPr>
@@ -14682,7 +14765,7 @@
             <p:cNvPr id="177" name="F1_0176_patch_155">
               <a:extLst>
                 <a:ext uri="{FF2B5EF4-FFF2-40B4-BE49-F238E27FC236}">
-                  <a16:creationId id="{ED3B6EAF-3B73-4CF6-BE5F-CA8ED43752C2}"/>
+                  <a16:creationId xmlns:a16="http://schemas.microsoft.com/office/drawing/2014/main" id="{ED3B6EAF-3B73-4CF6-BE5F-CA8ED43752C2}"/>
                 </a:ext>
               </a:extLst>
             </p:cNvPr>
@@ -14734,7 +14817,7 @@
             <p:cNvPr id="178" name="F1_0177_patch_156">
               <a:extLst>
                 <a:ext uri="{FF2B5EF4-FFF2-40B4-BE49-F238E27FC236}">
-                  <a16:creationId id="{7A64E3BA-0B51-4252-8F42-E9A1381AA708}"/>
+                  <a16:creationId xmlns:a16="http://schemas.microsoft.com/office/drawing/2014/main" id="{7A64E3BA-0B51-4252-8F42-E9A1381AA708}"/>
                 </a:ext>
               </a:extLst>
             </p:cNvPr>
@@ -14786,7 +14869,7 @@
             <p:cNvPr id="179" name="F1_0178_patch_157">
               <a:extLst>
                 <a:ext uri="{FF2B5EF4-FFF2-40B4-BE49-F238E27FC236}">
-                  <a16:creationId id="{E4500A39-282B-4B20-96F3-DA699B314FF4}"/>
+                  <a16:creationId xmlns:a16="http://schemas.microsoft.com/office/drawing/2014/main" id="{E4500A39-282B-4B20-96F3-DA699B314FF4}"/>
                 </a:ext>
               </a:extLst>
             </p:cNvPr>
@@ -14838,7 +14921,7 @@
             <p:cNvPr id="180" name="F1_0179_patch_158">
               <a:extLst>
                 <a:ext uri="{FF2B5EF4-FFF2-40B4-BE49-F238E27FC236}">
-                  <a16:creationId id="{3B55A44C-0B8C-4162-8850-5846E9031D90}"/>
+                  <a16:creationId xmlns:a16="http://schemas.microsoft.com/office/drawing/2014/main" id="{3B55A44C-0B8C-4162-8850-5846E9031D90}"/>
                 </a:ext>
               </a:extLst>
             </p:cNvPr>
@@ -14890,7 +14973,7 @@
             <p:cNvPr id="181" name="F1_0180_patch_159">
               <a:extLst>
                 <a:ext uri="{FF2B5EF4-FFF2-40B4-BE49-F238E27FC236}">
-                  <a16:creationId id="{75233DDB-2A0E-46D8-BAB3-A42F01BA4607}"/>
+                  <a16:creationId xmlns:a16="http://schemas.microsoft.com/office/drawing/2014/main" id="{75233DDB-2A0E-46D8-BAB3-A42F01BA4607}"/>
                 </a:ext>
               </a:extLst>
             </p:cNvPr>
@@ -14942,7 +15025,7 @@
             <p:cNvPr id="182" name="F1_0181_patch_160">
               <a:extLst>
                 <a:ext uri="{FF2B5EF4-FFF2-40B4-BE49-F238E27FC236}">
-                  <a16:creationId id="{382FF376-8F10-4948-A734-130755E35EDB}"/>
+                  <a16:creationId xmlns:a16="http://schemas.microsoft.com/office/drawing/2014/main" id="{382FF376-8F10-4948-A734-130755E35EDB}"/>
                 </a:ext>
               </a:extLst>
             </p:cNvPr>
@@ -14994,7 +15077,7 @@
             <p:cNvPr id="183" name="F1_0182_patch_161">
               <a:extLst>
                 <a:ext uri="{FF2B5EF4-FFF2-40B4-BE49-F238E27FC236}">
-                  <a16:creationId id="{C344352E-CCE4-4EEB-A98E-BA4B357215E3}"/>
+                  <a16:creationId xmlns:a16="http://schemas.microsoft.com/office/drawing/2014/main" id="{C344352E-CCE4-4EEB-A98E-BA4B357215E3}"/>
                 </a:ext>
               </a:extLst>
             </p:cNvPr>
@@ -15046,7 +15129,7 @@
             <p:cNvPr id="184" name="F1_0183_patch_162">
               <a:extLst>
                 <a:ext uri="{FF2B5EF4-FFF2-40B4-BE49-F238E27FC236}">
-                  <a16:creationId id="{8FE56A7B-2F28-40AD-BD76-0D13BBD062F3}"/>
+                  <a16:creationId xmlns:a16="http://schemas.microsoft.com/office/drawing/2014/main" id="{8FE56A7B-2F28-40AD-BD76-0D13BBD062F3}"/>
                 </a:ext>
               </a:extLst>
             </p:cNvPr>
@@ -15098,7 +15181,7 @@
             <p:cNvPr id="185" name="F1_0184_patch_163">
               <a:extLst>
                 <a:ext uri="{FF2B5EF4-FFF2-40B4-BE49-F238E27FC236}">
-                  <a16:creationId id="{62935E35-1218-4F9A-98B8-057057E34E64}"/>
+                  <a16:creationId xmlns:a16="http://schemas.microsoft.com/office/drawing/2014/main" id="{62935E35-1218-4F9A-98B8-057057E34E64}"/>
                 </a:ext>
               </a:extLst>
             </p:cNvPr>
@@ -15150,7 +15233,7 @@
             <p:cNvPr id="186" name="F1_0185_patch_164">
               <a:extLst>
                 <a:ext uri="{FF2B5EF4-FFF2-40B4-BE49-F238E27FC236}">
-                  <a16:creationId id="{B6EA4F45-82E8-44FA-8280-3AF77C46A921}"/>
+                  <a16:creationId xmlns:a16="http://schemas.microsoft.com/office/drawing/2014/main" id="{B6EA4F45-82E8-44FA-8280-3AF77C46A921}"/>
                 </a:ext>
               </a:extLst>
             </p:cNvPr>
@@ -15202,7 +15285,7 @@
             <p:cNvPr id="187" name="F1_0186_patch_165">
               <a:extLst>
                 <a:ext uri="{FF2B5EF4-FFF2-40B4-BE49-F238E27FC236}">
-                  <a16:creationId id="{6DB036B8-65BF-44E0-A99D-720670E249E8}"/>
+                  <a16:creationId xmlns:a16="http://schemas.microsoft.com/office/drawing/2014/main" id="{6DB036B8-65BF-44E0-A99D-720670E249E8}"/>
                 </a:ext>
               </a:extLst>
             </p:cNvPr>
@@ -15254,7 +15337,7 @@
             <p:cNvPr id="188" name="F1_0187_patch_166">
               <a:extLst>
                 <a:ext uri="{FF2B5EF4-FFF2-40B4-BE49-F238E27FC236}">
-                  <a16:creationId id="{752FAA0B-6D92-4960-86E8-BF241D316248}"/>
+                  <a16:creationId xmlns:a16="http://schemas.microsoft.com/office/drawing/2014/main" id="{752FAA0B-6D92-4960-86E8-BF241D316248}"/>
                 </a:ext>
               </a:extLst>
             </p:cNvPr>
@@ -15306,7 +15389,7 @@
             <p:cNvPr id="189" name="F1_0188_patch_167">
               <a:extLst>
                 <a:ext uri="{FF2B5EF4-FFF2-40B4-BE49-F238E27FC236}">
-                  <a16:creationId id="{AC662A74-F54A-430D-89DD-52DC2D5A6681}"/>
+                  <a16:creationId xmlns:a16="http://schemas.microsoft.com/office/drawing/2014/main" id="{AC662A74-F54A-430D-89DD-52DC2D5A6681}"/>
                 </a:ext>
               </a:extLst>
             </p:cNvPr>
@@ -15358,7 +15441,7 @@
             <p:cNvPr id="190" name="F1_0189_patch_168">
               <a:extLst>
                 <a:ext uri="{FF2B5EF4-FFF2-40B4-BE49-F238E27FC236}">
-                  <a16:creationId id="{E60C45A6-B9C7-4DD8-9C77-20403772108A}"/>
+                  <a16:creationId xmlns:a16="http://schemas.microsoft.com/office/drawing/2014/main" id="{E60C45A6-B9C7-4DD8-9C77-20403772108A}"/>
                 </a:ext>
               </a:extLst>
             </p:cNvPr>
@@ -15410,7 +15493,7 @@
             <p:cNvPr id="191" name="F1_0190_patch_169">
               <a:extLst>
                 <a:ext uri="{FF2B5EF4-FFF2-40B4-BE49-F238E27FC236}">
-                  <a16:creationId id="{C323F09B-7D62-4958-B5C0-46A8DCC71117}"/>
+                  <a16:creationId xmlns:a16="http://schemas.microsoft.com/office/drawing/2014/main" id="{C323F09B-7D62-4958-B5C0-46A8DCC71117}"/>
                 </a:ext>
               </a:extLst>
             </p:cNvPr>
@@ -15462,7 +15545,7 @@
             <p:cNvPr id="192" name="F1_0191_patch_170">
               <a:extLst>
                 <a:ext uri="{FF2B5EF4-FFF2-40B4-BE49-F238E27FC236}">
-                  <a16:creationId id="{760A04E1-15A8-4520-995D-AB630AEB00F0}"/>
+                  <a16:creationId xmlns:a16="http://schemas.microsoft.com/office/drawing/2014/main" id="{760A04E1-15A8-4520-995D-AB630AEB00F0}"/>
                 </a:ext>
               </a:extLst>
             </p:cNvPr>
@@ -15514,7 +15597,7 @@
             <p:cNvPr id="193" name="F1_0192_patch_171">
               <a:extLst>
                 <a:ext uri="{FF2B5EF4-FFF2-40B4-BE49-F238E27FC236}">
-                  <a16:creationId id="{52C5C4F5-11A7-4826-A92E-D784E2933FFF}"/>
+                  <a16:creationId xmlns:a16="http://schemas.microsoft.com/office/drawing/2014/main" id="{52C5C4F5-11A7-4826-A92E-D784E2933FFF}"/>
                 </a:ext>
               </a:extLst>
             </p:cNvPr>
@@ -15566,7 +15649,7 @@
             <p:cNvPr id="194" name="F1_0193_patch_172">
               <a:extLst>
                 <a:ext uri="{FF2B5EF4-FFF2-40B4-BE49-F238E27FC236}">
-                  <a16:creationId id="{2BA1630B-C9E0-4024-B1A1-98B847246CD0}"/>
+                  <a16:creationId xmlns:a16="http://schemas.microsoft.com/office/drawing/2014/main" id="{2BA1630B-C9E0-4024-B1A1-98B847246CD0}"/>
                 </a:ext>
               </a:extLst>
             </p:cNvPr>
@@ -15618,7 +15701,7 @@
             <p:cNvPr id="195" name="F1_0194_patch_173">
               <a:extLst>
                 <a:ext uri="{FF2B5EF4-FFF2-40B4-BE49-F238E27FC236}">
-                  <a16:creationId id="{7E73B832-96C8-40A4-85A1-7DDD51403849}"/>
+                  <a16:creationId xmlns:a16="http://schemas.microsoft.com/office/drawing/2014/main" id="{7E73B832-96C8-40A4-85A1-7DDD51403849}"/>
                 </a:ext>
               </a:extLst>
             </p:cNvPr>
@@ -15670,7 +15753,7 @@
             <p:cNvPr id="196" name="F1_0195_patch_174">
               <a:extLst>
                 <a:ext uri="{FF2B5EF4-FFF2-40B4-BE49-F238E27FC236}">
-                  <a16:creationId id="{43BA513E-664C-4A23-B6E0-3F05F14C0178}"/>
+                  <a16:creationId xmlns:a16="http://schemas.microsoft.com/office/drawing/2014/main" id="{43BA513E-664C-4A23-B6E0-3F05F14C0178}"/>
                 </a:ext>
               </a:extLst>
             </p:cNvPr>
@@ -15722,7 +15805,7 @@
             <p:cNvPr id="197" name="F1_0196_patch_175">
               <a:extLst>
                 <a:ext uri="{FF2B5EF4-FFF2-40B4-BE49-F238E27FC236}">
-                  <a16:creationId id="{7CF89BCB-F957-49C8-BFBF-AB44CAAB0F3D}"/>
+                  <a16:creationId xmlns:a16="http://schemas.microsoft.com/office/drawing/2014/main" id="{7CF89BCB-F957-49C8-BFBF-AB44CAAB0F3D}"/>
                 </a:ext>
               </a:extLst>
             </p:cNvPr>
@@ -15774,7 +15857,7 @@
             <p:cNvPr id="198" name="F1_0197_patch_176">
               <a:extLst>
                 <a:ext uri="{FF2B5EF4-FFF2-40B4-BE49-F238E27FC236}">
-                  <a16:creationId id="{5C656CE9-D7C1-4CF4-83E3-A5E3D0AC14BE}"/>
+                  <a16:creationId xmlns:a16="http://schemas.microsoft.com/office/drawing/2014/main" id="{5C656CE9-D7C1-4CF4-83E3-A5E3D0AC14BE}"/>
                 </a:ext>
               </a:extLst>
             </p:cNvPr>
@@ -15826,7 +15909,7 @@
             <p:cNvPr id="199" name="F1_0198_patch_177">
               <a:extLst>
                 <a:ext uri="{FF2B5EF4-FFF2-40B4-BE49-F238E27FC236}">
-                  <a16:creationId id="{A64AEF69-96A0-4E2B-86F3-95CDEE80B08C}"/>
+                  <a16:creationId xmlns:a16="http://schemas.microsoft.com/office/drawing/2014/main" id="{A64AEF69-96A0-4E2B-86F3-95CDEE80B08C}"/>
                 </a:ext>
               </a:extLst>
             </p:cNvPr>
@@ -15878,7 +15961,7 @@
             <p:cNvPr id="200" name="F1_0199_patch_178">
               <a:extLst>
                 <a:ext uri="{FF2B5EF4-FFF2-40B4-BE49-F238E27FC236}">
-                  <a16:creationId id="{50B5DD61-7CFE-47C4-8AB2-3F22D8A86048}"/>
+                  <a16:creationId xmlns:a16="http://schemas.microsoft.com/office/drawing/2014/main" id="{50B5DD61-7CFE-47C4-8AB2-3F22D8A86048}"/>
                 </a:ext>
               </a:extLst>
             </p:cNvPr>
@@ -15930,7 +16013,7 @@
             <p:cNvPr id="201" name="F1_0200_patch_179">
               <a:extLst>
                 <a:ext uri="{FF2B5EF4-FFF2-40B4-BE49-F238E27FC236}">
-                  <a16:creationId id="{73CB34B9-457C-447E-8E2F-298A8DE95053}"/>
+                  <a16:creationId xmlns:a16="http://schemas.microsoft.com/office/drawing/2014/main" id="{73CB34B9-457C-447E-8E2F-298A8DE95053}"/>
                 </a:ext>
               </a:extLst>
             </p:cNvPr>
@@ -15982,7 +16065,7 @@
             <p:cNvPr id="202" name="F1_0201_patch_180">
               <a:extLst>
                 <a:ext uri="{FF2B5EF4-FFF2-40B4-BE49-F238E27FC236}">
-                  <a16:creationId id="{85338311-07D8-4C13-9457-CD295FFE2909}"/>
+                  <a16:creationId xmlns:a16="http://schemas.microsoft.com/office/drawing/2014/main" id="{85338311-07D8-4C13-9457-CD295FFE2909}"/>
                 </a:ext>
               </a:extLst>
             </p:cNvPr>
@@ -16034,7 +16117,7 @@
             <p:cNvPr id="203" name="F1_0202_patch_181">
               <a:extLst>
                 <a:ext uri="{FF2B5EF4-FFF2-40B4-BE49-F238E27FC236}">
-                  <a16:creationId id="{A28A7243-FD5F-4CF2-A503-D934B1079098}"/>
+                  <a16:creationId xmlns:a16="http://schemas.microsoft.com/office/drawing/2014/main" id="{A28A7243-FD5F-4CF2-A503-D934B1079098}"/>
                 </a:ext>
               </a:extLst>
             </p:cNvPr>
@@ -16086,7 +16169,7 @@
             <p:cNvPr id="204" name="F1_0203_patch_182">
               <a:extLst>
                 <a:ext uri="{FF2B5EF4-FFF2-40B4-BE49-F238E27FC236}">
-                  <a16:creationId id="{9DEEC98E-E48E-4207-817D-3BA6585272A1}"/>
+                  <a16:creationId xmlns:a16="http://schemas.microsoft.com/office/drawing/2014/main" id="{9DEEC98E-E48E-4207-817D-3BA6585272A1}"/>
                 </a:ext>
               </a:extLst>
             </p:cNvPr>
@@ -16138,7 +16221,7 @@
             <p:cNvPr id="205" name="F1_0204_patch_183">
               <a:extLst>
                 <a:ext uri="{FF2B5EF4-FFF2-40B4-BE49-F238E27FC236}">
-                  <a16:creationId id="{67379DFA-6A26-4B3A-A2CA-E2E4FB116975}"/>
+                  <a16:creationId xmlns:a16="http://schemas.microsoft.com/office/drawing/2014/main" id="{67379DFA-6A26-4B3A-A2CA-E2E4FB116975}"/>
                 </a:ext>
               </a:extLst>
             </p:cNvPr>
@@ -16190,7 +16273,7 @@
             <p:cNvPr id="206" name="F1_0205_patch_184">
               <a:extLst>
                 <a:ext uri="{FF2B5EF4-FFF2-40B4-BE49-F238E27FC236}">
-                  <a16:creationId id="{FF7240F2-2CCA-439C-9EDF-AB31BB49CCD7}"/>
+                  <a16:creationId xmlns:a16="http://schemas.microsoft.com/office/drawing/2014/main" id="{FF7240F2-2CCA-439C-9EDF-AB31BB49CCD7}"/>
                 </a:ext>
               </a:extLst>
             </p:cNvPr>
@@ -16242,7 +16325,7 @@
             <p:cNvPr id="207" name="F1_0206_patch_185">
               <a:extLst>
                 <a:ext uri="{FF2B5EF4-FFF2-40B4-BE49-F238E27FC236}">
-                  <a16:creationId id="{BF8A6BA2-D33C-4155-9F0C-BCE34BC26328}"/>
+                  <a16:creationId xmlns:a16="http://schemas.microsoft.com/office/drawing/2014/main" id="{BF8A6BA2-D33C-4155-9F0C-BCE34BC26328}"/>
                 </a:ext>
               </a:extLst>
             </p:cNvPr>
@@ -16294,7 +16377,7 @@
             <p:cNvPr id="208" name="F1_0207_patch_186">
               <a:extLst>
                 <a:ext uri="{FF2B5EF4-FFF2-40B4-BE49-F238E27FC236}">
-                  <a16:creationId id="{E9E8C4BD-4211-4F8D-9F0D-C57F3B86B621}"/>
+                  <a16:creationId xmlns:a16="http://schemas.microsoft.com/office/drawing/2014/main" id="{E9E8C4BD-4211-4F8D-9F0D-C57F3B86B621}"/>
                 </a:ext>
               </a:extLst>
             </p:cNvPr>
@@ -16346,7 +16429,7 @@
             <p:cNvPr id="209" name="F1_0208_patch_187">
               <a:extLst>
                 <a:ext uri="{FF2B5EF4-FFF2-40B4-BE49-F238E27FC236}">
-                  <a16:creationId id="{AD1848D3-05AA-4F90-83A7-E40ECFFAA1EE}"/>
+                  <a16:creationId xmlns:a16="http://schemas.microsoft.com/office/drawing/2014/main" id="{AD1848D3-05AA-4F90-83A7-E40ECFFAA1EE}"/>
                 </a:ext>
               </a:extLst>
             </p:cNvPr>
@@ -16398,7 +16481,7 @@
             <p:cNvPr id="210" name="F1_0209_patch_188">
               <a:extLst>
                 <a:ext uri="{FF2B5EF4-FFF2-40B4-BE49-F238E27FC236}">
-                  <a16:creationId id="{A0B62836-E542-45EC-8C24-B3947FD87C31}"/>
+                  <a16:creationId xmlns:a16="http://schemas.microsoft.com/office/drawing/2014/main" id="{A0B62836-E542-45EC-8C24-B3947FD87C31}"/>
                 </a:ext>
               </a:extLst>
             </p:cNvPr>
@@ -16450,7 +16533,7 @@
             <p:cNvPr id="211" name="F1_0210_patch_189">
               <a:extLst>
                 <a:ext uri="{FF2B5EF4-FFF2-40B4-BE49-F238E27FC236}">
-                  <a16:creationId id="{85280E6C-6394-45C8-88CB-F7A452F2BBC3}"/>
+                  <a16:creationId xmlns:a16="http://schemas.microsoft.com/office/drawing/2014/main" id="{85280E6C-6394-45C8-88CB-F7A452F2BBC3}"/>
                 </a:ext>
               </a:extLst>
             </p:cNvPr>
@@ -16502,7 +16585,7 @@
             <p:cNvPr id="212" name="F1_0211_patch_190">
               <a:extLst>
                 <a:ext uri="{FF2B5EF4-FFF2-40B4-BE49-F238E27FC236}">
-                  <a16:creationId id="{BEC961CC-C20A-4DA0-8D8E-3D9FA360639B}"/>
+                  <a16:creationId xmlns:a16="http://schemas.microsoft.com/office/drawing/2014/main" id="{BEC961CC-C20A-4DA0-8D8E-3D9FA360639B}"/>
                 </a:ext>
               </a:extLst>
             </p:cNvPr>
@@ -16554,7 +16637,7 @@
             <p:cNvPr id="213" name="F1_0212_patch_191">
               <a:extLst>
                 <a:ext uri="{FF2B5EF4-FFF2-40B4-BE49-F238E27FC236}">
-                  <a16:creationId id="{5456DF09-806F-4BFF-B362-BA3B18BE2317}"/>
+                  <a16:creationId xmlns:a16="http://schemas.microsoft.com/office/drawing/2014/main" id="{5456DF09-806F-4BFF-B362-BA3B18BE2317}"/>
                 </a:ext>
               </a:extLst>
             </p:cNvPr>
@@ -16606,7 +16689,7 @@
             <p:cNvPr id="214" name="F1_0213_patch_192">
               <a:extLst>
                 <a:ext uri="{FF2B5EF4-FFF2-40B4-BE49-F238E27FC236}">
-                  <a16:creationId id="{25E2521F-E9DF-4D4A-8C9E-DB7519F4A030}"/>
+                  <a16:creationId xmlns:a16="http://schemas.microsoft.com/office/drawing/2014/main" id="{25E2521F-E9DF-4D4A-8C9E-DB7519F4A030}"/>
                 </a:ext>
               </a:extLst>
             </p:cNvPr>
@@ -16658,7 +16741,7 @@
             <p:cNvPr id="215" name="F1_0214_patch_193">
               <a:extLst>
                 <a:ext uri="{FF2B5EF4-FFF2-40B4-BE49-F238E27FC236}">
-                  <a16:creationId id="{6DB47505-D160-490C-87AE-2B6F70BF077F}"/>
+                  <a16:creationId xmlns:a16="http://schemas.microsoft.com/office/drawing/2014/main" id="{6DB47505-D160-490C-87AE-2B6F70BF077F}"/>
                 </a:ext>
               </a:extLst>
             </p:cNvPr>
@@ -16710,7 +16793,7 @@
             <p:cNvPr id="216" name="F1_0215_patch_194">
               <a:extLst>
                 <a:ext uri="{FF2B5EF4-FFF2-40B4-BE49-F238E27FC236}">
-                  <a16:creationId id="{A6DFFBD5-1EBD-4731-8667-A9856E7635CC}"/>
+                  <a16:creationId xmlns:a16="http://schemas.microsoft.com/office/drawing/2014/main" id="{A6DFFBD5-1EBD-4731-8667-A9856E7635CC}"/>
                 </a:ext>
               </a:extLst>
             </p:cNvPr>
@@ -16762,7 +16845,7 @@
             <p:cNvPr id="217" name="F1_0216_patch_195">
               <a:extLst>
                 <a:ext uri="{FF2B5EF4-FFF2-40B4-BE49-F238E27FC236}">
-                  <a16:creationId id="{5BEACFF5-C358-408C-BFF8-59775BFA5E93}"/>
+                  <a16:creationId xmlns:a16="http://schemas.microsoft.com/office/drawing/2014/main" id="{5BEACFF5-C358-408C-BFF8-59775BFA5E93}"/>
                 </a:ext>
               </a:extLst>
             </p:cNvPr>
@@ -16814,7 +16897,7 @@
             <p:cNvPr id="218" name="F1_0217_patch_196">
               <a:extLst>
                 <a:ext uri="{FF2B5EF4-FFF2-40B4-BE49-F238E27FC236}">
-                  <a16:creationId id="{EE35258B-D4D6-4C12-B520-4667040FA259}"/>
+                  <a16:creationId xmlns:a16="http://schemas.microsoft.com/office/drawing/2014/main" id="{EE35258B-D4D6-4C12-B520-4667040FA259}"/>
                 </a:ext>
               </a:extLst>
             </p:cNvPr>
@@ -16866,7 +16949,7 @@
             <p:cNvPr id="219" name="F1_0218_patch_197">
               <a:extLst>
                 <a:ext uri="{FF2B5EF4-FFF2-40B4-BE49-F238E27FC236}">
-                  <a16:creationId id="{8D3275AB-81B7-47BD-B9F2-9FAD4070B1BE}"/>
+                  <a16:creationId xmlns:a16="http://schemas.microsoft.com/office/drawing/2014/main" id="{8D3275AB-81B7-47BD-B9F2-9FAD4070B1BE}"/>
                 </a:ext>
               </a:extLst>
             </p:cNvPr>
@@ -16918,7 +17001,7 @@
             <p:cNvPr id="220" name="F1_0219_patch_198">
               <a:extLst>
                 <a:ext uri="{FF2B5EF4-FFF2-40B4-BE49-F238E27FC236}">
-                  <a16:creationId id="{3D8B3D8F-718A-4580-8B44-5F2BF498DED7}"/>
+                  <a16:creationId xmlns:a16="http://schemas.microsoft.com/office/drawing/2014/main" id="{3D8B3D8F-718A-4580-8B44-5F2BF498DED7}"/>
                 </a:ext>
               </a:extLst>
             </p:cNvPr>
@@ -16970,7 +17053,7 @@
             <p:cNvPr id="221" name="F1_0220_patch_199">
               <a:extLst>
                 <a:ext uri="{FF2B5EF4-FFF2-40B4-BE49-F238E27FC236}">
-                  <a16:creationId id="{B07E2AA3-5197-4B05-BB76-1F87D7C06E7D}"/>
+                  <a16:creationId xmlns:a16="http://schemas.microsoft.com/office/drawing/2014/main" id="{B07E2AA3-5197-4B05-BB76-1F87D7C06E7D}"/>
                 </a:ext>
               </a:extLst>
             </p:cNvPr>
@@ -17022,7 +17105,7 @@
             <p:cNvPr id="222" name="F1_0221_patch_200">
               <a:extLst>
                 <a:ext uri="{FF2B5EF4-FFF2-40B4-BE49-F238E27FC236}">
-                  <a16:creationId id="{614EBAD3-F419-4B63-9A4E-C428557F51CE}"/>
+                  <a16:creationId xmlns:a16="http://schemas.microsoft.com/office/drawing/2014/main" id="{614EBAD3-F419-4B63-9A4E-C428557F51CE}"/>
                 </a:ext>
               </a:extLst>
             </p:cNvPr>
@@ -17074,7 +17157,7 @@
             <p:cNvPr id="223" name="F1_0222_patch_201">
               <a:extLst>
                 <a:ext uri="{FF2B5EF4-FFF2-40B4-BE49-F238E27FC236}">
-                  <a16:creationId id="{7719F042-A4E3-49CF-90F4-37926CA013E3}"/>
+                  <a16:creationId xmlns:a16="http://schemas.microsoft.com/office/drawing/2014/main" id="{7719F042-A4E3-49CF-90F4-37926CA013E3}"/>
                 </a:ext>
               </a:extLst>
             </p:cNvPr>
@@ -17126,7 +17209,7 @@
             <p:cNvPr id="224" name="F1_0223_patch_202">
               <a:extLst>
                 <a:ext uri="{FF2B5EF4-FFF2-40B4-BE49-F238E27FC236}">
-                  <a16:creationId id="{B5DF415F-9228-49B6-89E3-FA1397362830}"/>
+                  <a16:creationId xmlns:a16="http://schemas.microsoft.com/office/drawing/2014/main" id="{B5DF415F-9228-49B6-89E3-FA1397362830}"/>
                 </a:ext>
               </a:extLst>
             </p:cNvPr>
@@ -17178,7 +17261,7 @@
             <p:cNvPr id="225" name="F1_0224_patch_203">
               <a:extLst>
                 <a:ext uri="{FF2B5EF4-FFF2-40B4-BE49-F238E27FC236}">
-                  <a16:creationId id="{F7D2E25D-EC30-4D2A-8422-3F7A13CB7A1A}"/>
+                  <a16:creationId xmlns:a16="http://schemas.microsoft.com/office/drawing/2014/main" id="{F7D2E25D-EC30-4D2A-8422-3F7A13CB7A1A}"/>
                 </a:ext>
               </a:extLst>
             </p:cNvPr>
@@ -17230,7 +17313,7 @@
             <p:cNvPr id="226" name="F1_0225_patch_204">
               <a:extLst>
                 <a:ext uri="{FF2B5EF4-FFF2-40B4-BE49-F238E27FC236}">
-                  <a16:creationId id="{60979A43-7C12-4EC7-AE9B-CE761D041E25}"/>
+                  <a16:creationId xmlns:a16="http://schemas.microsoft.com/office/drawing/2014/main" id="{60979A43-7C12-4EC7-AE9B-CE761D041E25}"/>
                 </a:ext>
               </a:extLst>
             </p:cNvPr>
@@ -17282,7 +17365,7 @@
             <p:cNvPr id="227" name="F1_0226_patch_205">
               <a:extLst>
                 <a:ext uri="{FF2B5EF4-FFF2-40B4-BE49-F238E27FC236}">
-                  <a16:creationId id="{2EAF2259-A04E-4D81-8995-48DE720FF136}"/>
+                  <a16:creationId xmlns:a16="http://schemas.microsoft.com/office/drawing/2014/main" id="{2EAF2259-A04E-4D81-8995-48DE720FF136}"/>
                 </a:ext>
               </a:extLst>
             </p:cNvPr>
@@ -17334,7 +17417,7 @@
             <p:cNvPr id="228" name="F1_0227_patch_206">
               <a:extLst>
                 <a:ext uri="{FF2B5EF4-FFF2-40B4-BE49-F238E27FC236}">
-                  <a16:creationId id="{9A37B847-ED87-45B8-B40D-F4A81430C556}"/>
+                  <a16:creationId xmlns:a16="http://schemas.microsoft.com/office/drawing/2014/main" id="{9A37B847-ED87-45B8-B40D-F4A81430C556}"/>
                 </a:ext>
               </a:extLst>
             </p:cNvPr>
@@ -17386,7 +17469,7 @@
             <p:cNvPr id="229" name="F1_0228_patch_207">
               <a:extLst>
                 <a:ext uri="{FF2B5EF4-FFF2-40B4-BE49-F238E27FC236}">
-                  <a16:creationId id="{648A2CC5-BCCF-4E02-884F-0BCFEA0801CF}"/>
+                  <a16:creationId xmlns:a16="http://schemas.microsoft.com/office/drawing/2014/main" id="{648A2CC5-BCCF-4E02-884F-0BCFEA0801CF}"/>
                 </a:ext>
               </a:extLst>
             </p:cNvPr>
@@ -17438,7 +17521,7 @@
             <p:cNvPr id="230" name="F1_0229_patch_208">
               <a:extLst>
                 <a:ext uri="{FF2B5EF4-FFF2-40B4-BE49-F238E27FC236}">
-                  <a16:creationId id="{1BC8E798-9B00-4526-94DD-65541446FCBD}"/>
+                  <a16:creationId xmlns:a16="http://schemas.microsoft.com/office/drawing/2014/main" id="{1BC8E798-9B00-4526-94DD-65541446FCBD}"/>
                 </a:ext>
               </a:extLst>
             </p:cNvPr>
@@ -17490,7 +17573,7 @@
             <p:cNvPr id="231" name="F1_0230_patch_209">
               <a:extLst>
                 <a:ext uri="{FF2B5EF4-FFF2-40B4-BE49-F238E27FC236}">
-                  <a16:creationId id="{E8276FDA-29DF-4C0A-977C-ABE54D52A63C}"/>
+                  <a16:creationId xmlns:a16="http://schemas.microsoft.com/office/drawing/2014/main" id="{E8276FDA-29DF-4C0A-977C-ABE54D52A63C}"/>
                 </a:ext>
               </a:extLst>
             </p:cNvPr>
@@ -17542,7 +17625,7 @@
             <p:cNvPr id="232" name="F1_0231_patch_210">
               <a:extLst>
                 <a:ext uri="{FF2B5EF4-FFF2-40B4-BE49-F238E27FC236}">
-                  <a16:creationId id="{0E6BC13B-52BC-4CC7-835E-B83F96F66D40}"/>
+                  <a16:creationId xmlns:a16="http://schemas.microsoft.com/office/drawing/2014/main" id="{0E6BC13B-52BC-4CC7-835E-B83F96F66D40}"/>
                 </a:ext>
               </a:extLst>
             </p:cNvPr>
@@ -17594,7 +17677,7 @@
             <p:cNvPr id="233" name="F1_0232_patch_211">
               <a:extLst>
                 <a:ext uri="{FF2B5EF4-FFF2-40B4-BE49-F238E27FC236}">
-                  <a16:creationId id="{CCF136C7-0744-4BDB-9AA2-71F512BA860F}"/>
+                  <a16:creationId xmlns:a16="http://schemas.microsoft.com/office/drawing/2014/main" id="{CCF136C7-0744-4BDB-9AA2-71F512BA860F}"/>
                 </a:ext>
               </a:extLst>
             </p:cNvPr>
@@ -17646,7 +17729,7 @@
             <p:cNvPr id="234" name="F1_0233_patch_212">
               <a:extLst>
                 <a:ext uri="{FF2B5EF4-FFF2-40B4-BE49-F238E27FC236}">
-                  <a16:creationId id="{A8271D1D-3C8D-40B3-81EE-0114BF1687DF}"/>
+                  <a16:creationId xmlns:a16="http://schemas.microsoft.com/office/drawing/2014/main" id="{A8271D1D-3C8D-40B3-81EE-0114BF1687DF}"/>
                 </a:ext>
               </a:extLst>
             </p:cNvPr>
@@ -17698,7 +17781,7 @@
             <p:cNvPr id="235" name="F1_0234_patch_213">
               <a:extLst>
                 <a:ext uri="{FF2B5EF4-FFF2-40B4-BE49-F238E27FC236}">
-                  <a16:creationId id="{82921B79-9FB8-41DE-92F6-358B2BF95C37}"/>
+                  <a16:creationId xmlns:a16="http://schemas.microsoft.com/office/drawing/2014/main" id="{82921B79-9FB8-41DE-92F6-358B2BF95C37}"/>
                 </a:ext>
               </a:extLst>
             </p:cNvPr>
@@ -17750,7 +17833,7 @@
             <p:cNvPr id="236" name="F1_0235_patch_214">
               <a:extLst>
                 <a:ext uri="{FF2B5EF4-FFF2-40B4-BE49-F238E27FC236}">
-                  <a16:creationId id="{7FADD602-D747-4BB7-85DC-9D608447F9A5}"/>
+                  <a16:creationId xmlns:a16="http://schemas.microsoft.com/office/drawing/2014/main" id="{7FADD602-D747-4BB7-85DC-9D608447F9A5}"/>
                 </a:ext>
               </a:extLst>
             </p:cNvPr>
@@ -17802,7 +17885,7 @@
             <p:cNvPr id="237" name="F1_0236_patch_215">
               <a:extLst>
                 <a:ext uri="{FF2B5EF4-FFF2-40B4-BE49-F238E27FC236}">
-                  <a16:creationId id="{54223FB4-9A11-42E0-92E1-3CD3CD3195B0}"/>
+                  <a16:creationId xmlns:a16="http://schemas.microsoft.com/office/drawing/2014/main" id="{54223FB4-9A11-42E0-92E1-3CD3CD3195B0}"/>
                 </a:ext>
               </a:extLst>
             </p:cNvPr>
@@ -17854,7 +17937,7 @@
             <p:cNvPr id="238" name="F1_0237_patch_216">
               <a:extLst>
                 <a:ext uri="{FF2B5EF4-FFF2-40B4-BE49-F238E27FC236}">
-                  <a16:creationId id="{47F43D1B-F743-4463-83B0-AA3F869A4403}"/>
+                  <a16:creationId xmlns:a16="http://schemas.microsoft.com/office/drawing/2014/main" id="{47F43D1B-F743-4463-83B0-AA3F869A4403}"/>
                 </a:ext>
               </a:extLst>
             </p:cNvPr>
@@ -17906,7 +17989,7 @@
             <p:cNvPr id="239" name="F1_0238_patch_217">
               <a:extLst>
                 <a:ext uri="{FF2B5EF4-FFF2-40B4-BE49-F238E27FC236}">
-                  <a16:creationId id="{A250F442-A6AA-4555-A2CB-8BDCDE92FF05}"/>
+                  <a16:creationId xmlns:a16="http://schemas.microsoft.com/office/drawing/2014/main" id="{A250F442-A6AA-4555-A2CB-8BDCDE92FF05}"/>
                 </a:ext>
               </a:extLst>
             </p:cNvPr>
@@ -17958,7 +18041,7 @@
             <p:cNvPr id="240" name="F1_0239_patch_218">
               <a:extLst>
                 <a:ext uri="{FF2B5EF4-FFF2-40B4-BE49-F238E27FC236}">
-                  <a16:creationId id="{55AF1143-80EE-4D39-A74A-F6ED2DB0B857}"/>
+                  <a16:creationId xmlns:a16="http://schemas.microsoft.com/office/drawing/2014/main" id="{55AF1143-80EE-4D39-A74A-F6ED2DB0B857}"/>
                 </a:ext>
               </a:extLst>
             </p:cNvPr>
@@ -18010,7 +18093,7 @@
             <p:cNvPr id="241" name="F1_0240_patch_219">
               <a:extLst>
                 <a:ext uri="{FF2B5EF4-FFF2-40B4-BE49-F238E27FC236}">
-                  <a16:creationId id="{B307A01B-2FFA-4F45-96EB-16D1BCC01896}"/>
+                  <a16:creationId xmlns:a16="http://schemas.microsoft.com/office/drawing/2014/main" id="{B307A01B-2FFA-4F45-96EB-16D1BCC01896}"/>
                 </a:ext>
               </a:extLst>
             </p:cNvPr>
@@ -18062,7 +18145,7 @@
             <p:cNvPr id="242" name="F1_0241_patch_220">
               <a:extLst>
                 <a:ext uri="{FF2B5EF4-FFF2-40B4-BE49-F238E27FC236}">
-                  <a16:creationId id="{12B00F6B-A0E0-44F9-BF15-5A087C62D94A}"/>
+                  <a16:creationId xmlns:a16="http://schemas.microsoft.com/office/drawing/2014/main" id="{12B00F6B-A0E0-44F9-BF15-5A087C62D94A}"/>
                 </a:ext>
               </a:extLst>
             </p:cNvPr>
@@ -18114,7 +18197,7 @@
             <p:cNvPr id="243" name="F1_0242_patch_221">
               <a:extLst>
                 <a:ext uri="{FF2B5EF4-FFF2-40B4-BE49-F238E27FC236}">
-                  <a16:creationId id="{FDB71430-8CFC-4A0B-9B68-E420FC53D82F}"/>
+                  <a16:creationId xmlns:a16="http://schemas.microsoft.com/office/drawing/2014/main" id="{FDB71430-8CFC-4A0B-9B68-E420FC53D82F}"/>
                 </a:ext>
               </a:extLst>
             </p:cNvPr>
@@ -18166,7 +18249,7 @@
             <p:cNvPr id="244" name="F1_0243_patch_222">
               <a:extLst>
                 <a:ext uri="{FF2B5EF4-FFF2-40B4-BE49-F238E27FC236}">
-                  <a16:creationId id="{A98DD3C2-A3E1-4085-A8E5-43589426E6C0}"/>
+                  <a16:creationId xmlns:a16="http://schemas.microsoft.com/office/drawing/2014/main" id="{A98DD3C2-A3E1-4085-A8E5-43589426E6C0}"/>
                 </a:ext>
               </a:extLst>
             </p:cNvPr>
@@ -18218,7 +18301,7 @@
             <p:cNvPr id="245" name="F1_0244_patch_223">
               <a:extLst>
                 <a:ext uri="{FF2B5EF4-FFF2-40B4-BE49-F238E27FC236}">
-                  <a16:creationId id="{55DCC3B5-93FF-4105-B494-6E83ACA9C48D}"/>
+                  <a16:creationId xmlns:a16="http://schemas.microsoft.com/office/drawing/2014/main" id="{55DCC3B5-93FF-4105-B494-6E83ACA9C48D}"/>
                 </a:ext>
               </a:extLst>
             </p:cNvPr>
@@ -18270,7 +18353,7 @@
             <p:cNvPr id="246" name="F1_0245_patch_224">
               <a:extLst>
                 <a:ext uri="{FF2B5EF4-FFF2-40B4-BE49-F238E27FC236}">
-                  <a16:creationId id="{53A2AC31-7B72-4DF4-886D-29CC0C454D83}"/>
+                  <a16:creationId xmlns:a16="http://schemas.microsoft.com/office/drawing/2014/main" id="{53A2AC31-7B72-4DF4-886D-29CC0C454D83}"/>
                 </a:ext>
               </a:extLst>
             </p:cNvPr>
@@ -18322,7 +18405,7 @@
             <p:cNvPr id="247" name="F1_0246_patch_225">
               <a:extLst>
                 <a:ext uri="{FF2B5EF4-FFF2-40B4-BE49-F238E27FC236}">
-                  <a16:creationId id="{FC32C044-6D85-4BED-B143-FB3E4C59029B}"/>
+                  <a16:creationId xmlns:a16="http://schemas.microsoft.com/office/drawing/2014/main" id="{FC32C044-6D85-4BED-B143-FB3E4C59029B}"/>
                 </a:ext>
               </a:extLst>
             </p:cNvPr>
@@ -18374,7 +18457,7 @@
             <p:cNvPr id="248" name="F1_0247_patch_226">
               <a:extLst>
                 <a:ext uri="{FF2B5EF4-FFF2-40B4-BE49-F238E27FC236}">
-                  <a16:creationId id="{0573D9D8-BCFE-47FC-8035-47B7D6BAB3B5}"/>
+                  <a16:creationId xmlns:a16="http://schemas.microsoft.com/office/drawing/2014/main" id="{0573D9D8-BCFE-47FC-8035-47B7D6BAB3B5}"/>
                 </a:ext>
               </a:extLst>
             </p:cNvPr>
@@ -18426,7 +18509,7 @@
             <p:cNvPr id="249" name="F1_0248_patch_227">
               <a:extLst>
                 <a:ext uri="{FF2B5EF4-FFF2-40B4-BE49-F238E27FC236}">
-                  <a16:creationId id="{707BD19B-BF86-4EB8-A79D-72D075AD6964}"/>
+                  <a16:creationId xmlns:a16="http://schemas.microsoft.com/office/drawing/2014/main" id="{707BD19B-BF86-4EB8-A79D-72D075AD6964}"/>
                 </a:ext>
               </a:extLst>
             </p:cNvPr>
@@ -18478,7 +18561,7 @@
             <p:cNvPr id="250" name="F1_0249_patch_228">
               <a:extLst>
                 <a:ext uri="{FF2B5EF4-FFF2-40B4-BE49-F238E27FC236}">
-                  <a16:creationId id="{9B40C600-E2A8-4C43-B481-7C1C9C1C6668}"/>
+                  <a16:creationId xmlns:a16="http://schemas.microsoft.com/office/drawing/2014/main" id="{9B40C600-E2A8-4C43-B481-7C1C9C1C6668}"/>
                 </a:ext>
               </a:extLst>
             </p:cNvPr>
@@ -18530,7 +18613,7 @@
             <p:cNvPr id="251" name="F1_0250_patch_229">
               <a:extLst>
                 <a:ext uri="{FF2B5EF4-FFF2-40B4-BE49-F238E27FC236}">
-                  <a16:creationId id="{0175740B-E528-43D6-89BA-C2436D6EE025}"/>
+                  <a16:creationId xmlns:a16="http://schemas.microsoft.com/office/drawing/2014/main" id="{0175740B-E528-43D6-89BA-C2436D6EE025}"/>
                 </a:ext>
               </a:extLst>
             </p:cNvPr>
@@ -18582,7 +18665,7 @@
             <p:cNvPr id="252" name="F1_0251_patch_230">
               <a:extLst>
                 <a:ext uri="{FF2B5EF4-FFF2-40B4-BE49-F238E27FC236}">
-                  <a16:creationId id="{A652B231-5386-4E2D-A6FE-A4A4F9868470}"/>
+                  <a16:creationId xmlns:a16="http://schemas.microsoft.com/office/drawing/2014/main" id="{A652B231-5386-4E2D-A6FE-A4A4F9868470}"/>
                 </a:ext>
               </a:extLst>
             </p:cNvPr>
@@ -18634,7 +18717,7 @@
             <p:cNvPr id="253" name="F1_0252_patch_231">
               <a:extLst>
                 <a:ext uri="{FF2B5EF4-FFF2-40B4-BE49-F238E27FC236}">
-                  <a16:creationId id="{C8F66339-152F-48C5-A3BF-EAA253A066FB}"/>
+                  <a16:creationId xmlns:a16="http://schemas.microsoft.com/office/drawing/2014/main" id="{C8F66339-152F-48C5-A3BF-EAA253A066FB}"/>
                 </a:ext>
               </a:extLst>
             </p:cNvPr>
@@ -18686,7 +18769,7 @@
             <p:cNvPr id="254" name="F1_0253_patch_232">
               <a:extLst>
                 <a:ext uri="{FF2B5EF4-FFF2-40B4-BE49-F238E27FC236}">
-                  <a16:creationId id="{06DB4ACF-3A5F-475C-B264-3453EED7CEB0}"/>
+                  <a16:creationId xmlns:a16="http://schemas.microsoft.com/office/drawing/2014/main" id="{06DB4ACF-3A5F-475C-B264-3453EED7CEB0}"/>
                 </a:ext>
               </a:extLst>
             </p:cNvPr>
@@ -18738,7 +18821,7 @@
             <p:cNvPr id="255" name="F1_0254_patch_233">
               <a:extLst>
                 <a:ext uri="{FF2B5EF4-FFF2-40B4-BE49-F238E27FC236}">
-                  <a16:creationId id="{5C01DACA-47BE-4584-AB33-D495018AD274}"/>
+                  <a16:creationId xmlns:a16="http://schemas.microsoft.com/office/drawing/2014/main" id="{5C01DACA-47BE-4584-AB33-D495018AD274}"/>
                 </a:ext>
               </a:extLst>
             </p:cNvPr>
@@ -18790,7 +18873,7 @@
             <p:cNvPr id="256" name="F1_0255_patch_234">
               <a:extLst>
                 <a:ext uri="{FF2B5EF4-FFF2-40B4-BE49-F238E27FC236}">
-                  <a16:creationId id="{97DFCD03-3B45-44D8-95A6-1BB10E94708E}"/>
+                  <a16:creationId xmlns:a16="http://schemas.microsoft.com/office/drawing/2014/main" id="{97DFCD03-3B45-44D8-95A6-1BB10E94708E}"/>
                 </a:ext>
               </a:extLst>
             </p:cNvPr>
@@ -18842,7 +18925,7 @@
             <p:cNvPr id="257" name="F1_0256_patch_235">
               <a:extLst>
                 <a:ext uri="{FF2B5EF4-FFF2-40B4-BE49-F238E27FC236}">
-                  <a16:creationId id="{B5E59033-B12C-4A8D-956B-2EEC81FA615D}"/>
+                  <a16:creationId xmlns:a16="http://schemas.microsoft.com/office/drawing/2014/main" id="{B5E59033-B12C-4A8D-956B-2EEC81FA615D}"/>
                 </a:ext>
               </a:extLst>
             </p:cNvPr>
@@ -18894,7 +18977,7 @@
             <p:cNvPr id="258" name="F1_0257_patch_236">
               <a:extLst>
                 <a:ext uri="{FF2B5EF4-FFF2-40B4-BE49-F238E27FC236}">
-                  <a16:creationId id="{FD1FBB6C-B842-4D1E-A99A-6F514CE77F82}"/>
+                  <a16:creationId xmlns:a16="http://schemas.microsoft.com/office/drawing/2014/main" id="{FD1FBB6C-B842-4D1E-A99A-6F514CE77F82}"/>
                 </a:ext>
               </a:extLst>
             </p:cNvPr>
@@ -18946,7 +19029,7 @@
             <p:cNvPr id="259" name="F1_0258_patch_237">
               <a:extLst>
                 <a:ext uri="{FF2B5EF4-FFF2-40B4-BE49-F238E27FC236}">
-                  <a16:creationId id="{82309917-0F55-49EA-BF85-A92FAAB12379}"/>
+                  <a16:creationId xmlns:a16="http://schemas.microsoft.com/office/drawing/2014/main" id="{82309917-0F55-49EA-BF85-A92FAAB12379}"/>
                 </a:ext>
               </a:extLst>
             </p:cNvPr>
@@ -18998,7 +19081,7 @@
             <p:cNvPr id="260" name="F1_0259_patch_238">
               <a:extLst>
                 <a:ext uri="{FF2B5EF4-FFF2-40B4-BE49-F238E27FC236}">
-                  <a16:creationId id="{3509B40F-0FF1-4C80-BB1C-D6365EB37411}"/>
+                  <a16:creationId xmlns:a16="http://schemas.microsoft.com/office/drawing/2014/main" id="{3509B40F-0FF1-4C80-BB1C-D6365EB37411}"/>
                 </a:ext>
               </a:extLst>
             </p:cNvPr>
@@ -19050,7 +19133,7 @@
             <p:cNvPr id="261" name="F1_0260_patch_239">
               <a:extLst>
                 <a:ext uri="{FF2B5EF4-FFF2-40B4-BE49-F238E27FC236}">
-                  <a16:creationId id="{61C59295-A20D-4C98-BA6B-4BF0B898EF3A}"/>
+                  <a16:creationId xmlns:a16="http://schemas.microsoft.com/office/drawing/2014/main" id="{61C59295-A20D-4C98-BA6B-4BF0B898EF3A}"/>
                 </a:ext>
               </a:extLst>
             </p:cNvPr>
@@ -19102,7 +19185,7 @@
             <p:cNvPr id="262" name="F1_0261_patch_240">
               <a:extLst>
                 <a:ext uri="{FF2B5EF4-FFF2-40B4-BE49-F238E27FC236}">
-                  <a16:creationId id="{B261607F-B3FA-4246-8854-73F775B12337}"/>
+                  <a16:creationId xmlns:a16="http://schemas.microsoft.com/office/drawing/2014/main" id="{B261607F-B3FA-4246-8854-73F775B12337}"/>
                 </a:ext>
               </a:extLst>
             </p:cNvPr>
@@ -19154,7 +19237,7 @@
             <p:cNvPr id="263" name="F1_0262_patch_241">
               <a:extLst>
                 <a:ext uri="{FF2B5EF4-FFF2-40B4-BE49-F238E27FC236}">
-                  <a16:creationId id="{0A2F952E-E877-4B0C-9263-7F9CCC28026F}"/>
+                  <a16:creationId xmlns:a16="http://schemas.microsoft.com/office/drawing/2014/main" id="{0A2F952E-E877-4B0C-9263-7F9CCC28026F}"/>
                 </a:ext>
               </a:extLst>
             </p:cNvPr>
@@ -19206,7 +19289,7 @@
             <p:cNvPr id="264" name="F1_0263_patch_242">
               <a:extLst>
                 <a:ext uri="{FF2B5EF4-FFF2-40B4-BE49-F238E27FC236}">
-                  <a16:creationId id="{EDC8D135-0A20-4F8E-B56C-6BD30A2DA468}"/>
+                  <a16:creationId xmlns:a16="http://schemas.microsoft.com/office/drawing/2014/main" id="{EDC8D135-0A20-4F8E-B56C-6BD30A2DA468}"/>
                 </a:ext>
               </a:extLst>
             </p:cNvPr>
@@ -19258,7 +19341,7 @@
             <p:cNvPr id="265" name="F1_0264_patch_243">
               <a:extLst>
                 <a:ext uri="{FF2B5EF4-FFF2-40B4-BE49-F238E27FC236}">
-                  <a16:creationId id="{027E4B93-1076-43C6-8B44-7E100AD1B8F0}"/>
+                  <a16:creationId xmlns:a16="http://schemas.microsoft.com/office/drawing/2014/main" id="{027E4B93-1076-43C6-8B44-7E100AD1B8F0}"/>
                 </a:ext>
               </a:extLst>
             </p:cNvPr>
@@ -19310,7 +19393,7 @@
             <p:cNvPr id="266" name="F1_0265_patch_244">
               <a:extLst>
                 <a:ext uri="{FF2B5EF4-FFF2-40B4-BE49-F238E27FC236}">
-                  <a16:creationId id="{ED078CEF-6823-470B-A447-C45990B724CD}"/>
+                  <a16:creationId xmlns:a16="http://schemas.microsoft.com/office/drawing/2014/main" id="{ED078CEF-6823-470B-A447-C45990B724CD}"/>
                 </a:ext>
               </a:extLst>
             </p:cNvPr>
@@ -19362,7 +19445,7 @@
             <p:cNvPr id="267" name="F1_0266_patch_245">
               <a:extLst>
                 <a:ext uri="{FF2B5EF4-FFF2-40B4-BE49-F238E27FC236}">
-                  <a16:creationId id="{43FCD39F-A522-4966-8B13-8B803E9BF52B}"/>
+                  <a16:creationId xmlns:a16="http://schemas.microsoft.com/office/drawing/2014/main" id="{43FCD39F-A522-4966-8B13-8B803E9BF52B}"/>
                 </a:ext>
               </a:extLst>
             </p:cNvPr>
@@ -19414,7 +19497,7 @@
             <p:cNvPr id="268" name="F1_0267_patch_246">
               <a:extLst>
                 <a:ext uri="{FF2B5EF4-FFF2-40B4-BE49-F238E27FC236}">
-                  <a16:creationId id="{33B4367F-CDF7-4B2F-8823-FC2FFC4325FB}"/>
+                  <a16:creationId xmlns:a16="http://schemas.microsoft.com/office/drawing/2014/main" id="{33B4367F-CDF7-4B2F-8823-FC2FFC4325FB}"/>
                 </a:ext>
               </a:extLst>
             </p:cNvPr>
@@ -19466,7 +19549,7 @@
             <p:cNvPr id="269" name="F1_0268_patch_247">
               <a:extLst>
                 <a:ext uri="{FF2B5EF4-FFF2-40B4-BE49-F238E27FC236}">
-                  <a16:creationId id="{F295E6A0-F583-4AAC-B82F-6A3CF46AED72}"/>
+                  <a16:creationId xmlns:a16="http://schemas.microsoft.com/office/drawing/2014/main" id="{F295E6A0-F583-4AAC-B82F-6A3CF46AED72}"/>
                 </a:ext>
               </a:extLst>
             </p:cNvPr>
@@ -19518,7 +19601,7 @@
             <p:cNvPr id="270" name="F1_0269_patch_248">
               <a:extLst>
                 <a:ext uri="{FF2B5EF4-FFF2-40B4-BE49-F238E27FC236}">
-                  <a16:creationId id="{8619F929-EEB5-4CE9-8730-CC3BAE288FFD}"/>
+                  <a16:creationId xmlns:a16="http://schemas.microsoft.com/office/drawing/2014/main" id="{8619F929-EEB5-4CE9-8730-CC3BAE288FFD}"/>
                 </a:ext>
               </a:extLst>
             </p:cNvPr>
@@ -19570,7 +19653,7 @@
             <p:cNvPr id="271" name="F1_0270_patch_249">
               <a:extLst>
                 <a:ext uri="{FF2B5EF4-FFF2-40B4-BE49-F238E27FC236}">
-                  <a16:creationId id="{E5D8B93B-5745-4187-9EB1-06F506BB7CC9}"/>
+                  <a16:creationId xmlns:a16="http://schemas.microsoft.com/office/drawing/2014/main" id="{E5D8B93B-5745-4187-9EB1-06F506BB7CC9}"/>
                 </a:ext>
               </a:extLst>
             </p:cNvPr>
@@ -19622,7 +19705,7 @@
             <p:cNvPr id="272" name="F1_0271_patch_250">
               <a:extLst>
                 <a:ext uri="{FF2B5EF4-FFF2-40B4-BE49-F238E27FC236}">
-                  <a16:creationId id="{BB3D1A76-1EC7-4F3D-9043-4C14A7FE1AE9}"/>
+                  <a16:creationId xmlns:a16="http://schemas.microsoft.com/office/drawing/2014/main" id="{BB3D1A76-1EC7-4F3D-9043-4C14A7FE1AE9}"/>
                 </a:ext>
               </a:extLst>
             </p:cNvPr>
@@ -19674,7 +19757,7 @@
             <p:cNvPr id="273" name="F1_0272_patch_251">
               <a:extLst>
                 <a:ext uri="{FF2B5EF4-FFF2-40B4-BE49-F238E27FC236}">
-                  <a16:creationId id="{65D781DE-6349-431F-8B4C-E4A1BA812447}"/>
+                  <a16:creationId xmlns:a16="http://schemas.microsoft.com/office/drawing/2014/main" id="{65D781DE-6349-431F-8B4C-E4A1BA812447}"/>
                 </a:ext>
               </a:extLst>
             </p:cNvPr>
@@ -19726,7 +19809,7 @@
             <p:cNvPr id="274" name="F1_0273_patch_252">
               <a:extLst>
                 <a:ext uri="{FF2B5EF4-FFF2-40B4-BE49-F238E27FC236}">
-                  <a16:creationId id="{AD6E91C2-4885-4040-80F0-631D3F0F2C6C}"/>
+                  <a16:creationId xmlns:a16="http://schemas.microsoft.com/office/drawing/2014/main" id="{AD6E91C2-4885-4040-80F0-631D3F0F2C6C}"/>
                 </a:ext>
               </a:extLst>
             </p:cNvPr>
@@ -19778,7 +19861,7 @@
             <p:cNvPr id="275" name="F1_0274_patch_253">
               <a:extLst>
                 <a:ext uri="{FF2B5EF4-FFF2-40B4-BE49-F238E27FC236}">
-                  <a16:creationId id="{47447011-466D-458B-9EC6-34C8B63F2825}"/>
+                  <a16:creationId xmlns:a16="http://schemas.microsoft.com/office/drawing/2014/main" id="{47447011-466D-458B-9EC6-34C8B63F2825}"/>
                 </a:ext>
               </a:extLst>
             </p:cNvPr>
@@ -19830,7 +19913,7 @@
             <p:cNvPr id="276" name="F1_0275_patch_254">
               <a:extLst>
                 <a:ext uri="{FF2B5EF4-FFF2-40B4-BE49-F238E27FC236}">
-                  <a16:creationId id="{FDC1F62E-B82F-4CAC-9B13-55FE82B59929}"/>
+                  <a16:creationId xmlns:a16="http://schemas.microsoft.com/office/drawing/2014/main" id="{FDC1F62E-B82F-4CAC-9B13-55FE82B59929}"/>
                 </a:ext>
               </a:extLst>
             </p:cNvPr>
@@ -19882,7 +19965,7 @@
             <p:cNvPr id="277" name="F1_0276_patch_255">
               <a:extLst>
                 <a:ext uri="{FF2B5EF4-FFF2-40B4-BE49-F238E27FC236}">
-                  <a16:creationId id="{54FCE1A5-72AE-4FE6-9F3F-FD16E37C9B6C}"/>
+                  <a16:creationId xmlns:a16="http://schemas.microsoft.com/office/drawing/2014/main" id="{54FCE1A5-72AE-4FE6-9F3F-FD16E37C9B6C}"/>
                 </a:ext>
               </a:extLst>
             </p:cNvPr>
@@ -19934,7 +20017,7 @@
             <p:cNvPr id="278" name="F1_0277_patch_256">
               <a:extLst>
                 <a:ext uri="{FF2B5EF4-FFF2-40B4-BE49-F238E27FC236}">
-                  <a16:creationId id="{02759397-81EE-4467-9E58-34A60D0661FB}"/>
+                  <a16:creationId xmlns:a16="http://schemas.microsoft.com/office/drawing/2014/main" id="{02759397-81EE-4467-9E58-34A60D0661FB}"/>
                 </a:ext>
               </a:extLst>
             </p:cNvPr>
@@ -19986,7 +20069,7 @@
             <p:cNvPr id="279" name="F1_0278_patch_257">
               <a:extLst>
                 <a:ext uri="{FF2B5EF4-FFF2-40B4-BE49-F238E27FC236}">
-                  <a16:creationId id="{3B8F9BAA-3DAE-472B-80A1-64960A30827B}"/>
+                  <a16:creationId xmlns:a16="http://schemas.microsoft.com/office/drawing/2014/main" id="{3B8F9BAA-3DAE-472B-80A1-64960A30827B}"/>
                 </a:ext>
               </a:extLst>
             </p:cNvPr>
@@ -20038,7 +20121,7 @@
             <p:cNvPr id="280" name="F1_0279_patch_258">
               <a:extLst>
                 <a:ext uri="{FF2B5EF4-FFF2-40B4-BE49-F238E27FC236}">
-                  <a16:creationId id="{ADAE7A9A-3873-40AD-BF7B-B85CD84C8EAC}"/>
+                  <a16:creationId xmlns:a16="http://schemas.microsoft.com/office/drawing/2014/main" id="{ADAE7A9A-3873-40AD-BF7B-B85CD84C8EAC}"/>
                 </a:ext>
               </a:extLst>
             </p:cNvPr>
@@ -20090,7 +20173,7 @@
             <p:cNvPr id="281" name="F1_0280_patch_259">
               <a:extLst>
                 <a:ext uri="{FF2B5EF4-FFF2-40B4-BE49-F238E27FC236}">
-                  <a16:creationId id="{37F00C3A-A024-43BA-9B5F-7265D50E9151}"/>
+                  <a16:creationId xmlns:a16="http://schemas.microsoft.com/office/drawing/2014/main" id="{37F00C3A-A024-43BA-9B5F-7265D50E9151}"/>
                 </a:ext>
               </a:extLst>
             </p:cNvPr>
@@ -20142,7 +20225,7 @@
             <p:cNvPr id="282" name="F1_0281_patch_260">
               <a:extLst>
                 <a:ext uri="{FF2B5EF4-FFF2-40B4-BE49-F238E27FC236}">
-                  <a16:creationId id="{492F3CF1-DB28-4197-89EC-4A7463A169BC}"/>
+                  <a16:creationId xmlns:a16="http://schemas.microsoft.com/office/drawing/2014/main" id="{492F3CF1-DB28-4197-89EC-4A7463A169BC}"/>
                 </a:ext>
               </a:extLst>
             </p:cNvPr>
@@ -20194,7 +20277,7 @@
             <p:cNvPr id="283" name="F1_0282_patch_261">
               <a:extLst>
                 <a:ext uri="{FF2B5EF4-FFF2-40B4-BE49-F238E27FC236}">
-                  <a16:creationId id="{489A7A30-C37F-412D-ACF9-3CF7CF31E033}"/>
+                  <a16:creationId xmlns:a16="http://schemas.microsoft.com/office/drawing/2014/main" id="{489A7A30-C37F-412D-ACF9-3CF7CF31E033}"/>
                 </a:ext>
               </a:extLst>
             </p:cNvPr>
@@ -20246,7 +20329,7 @@
             <p:cNvPr id="284" name="F1_0283_patch_262">
               <a:extLst>
                 <a:ext uri="{FF2B5EF4-FFF2-40B4-BE49-F238E27FC236}">
-                  <a16:creationId id="{097137D5-CE6D-4FB2-9385-93860D70D357}"/>
+                  <a16:creationId xmlns:a16="http://schemas.microsoft.com/office/drawing/2014/main" id="{097137D5-CE6D-4FB2-9385-93860D70D357}"/>
                 </a:ext>
               </a:extLst>
             </p:cNvPr>
@@ -20298,7 +20381,7 @@
             <p:cNvPr id="285" name="F1_0284_patch_263">
               <a:extLst>
                 <a:ext uri="{FF2B5EF4-FFF2-40B4-BE49-F238E27FC236}">
-                  <a16:creationId id="{833B0D24-FCBD-44FC-A6F8-12377CA41BD4}"/>
+                  <a16:creationId xmlns:a16="http://schemas.microsoft.com/office/drawing/2014/main" id="{833B0D24-FCBD-44FC-A6F8-12377CA41BD4}"/>
                 </a:ext>
               </a:extLst>
             </p:cNvPr>
@@ -20350,7 +20433,7 @@
             <p:cNvPr id="286" name="F1_0285_patch_264">
               <a:extLst>
                 <a:ext uri="{FF2B5EF4-FFF2-40B4-BE49-F238E27FC236}">
-                  <a16:creationId id="{3F191B5E-E004-4C4D-8D22-5984E5EFB90B}"/>
+                  <a16:creationId xmlns:a16="http://schemas.microsoft.com/office/drawing/2014/main" id="{3F191B5E-E004-4C4D-8D22-5984E5EFB90B}"/>
                 </a:ext>
               </a:extLst>
             </p:cNvPr>
@@ -20402,7 +20485,7 @@
             <p:cNvPr id="287" name="F1_0286_patch_265">
               <a:extLst>
                 <a:ext uri="{FF2B5EF4-FFF2-40B4-BE49-F238E27FC236}">
-                  <a16:creationId id="{1CBA9156-07D0-4FB8-9423-3AF61C799A10}"/>
+                  <a16:creationId xmlns:a16="http://schemas.microsoft.com/office/drawing/2014/main" id="{1CBA9156-07D0-4FB8-9423-3AF61C799A10}"/>
                 </a:ext>
               </a:extLst>
             </p:cNvPr>
@@ -20454,7 +20537,7 @@
             <p:cNvPr id="288" name="F1_0287_patch_266">
               <a:extLst>
                 <a:ext uri="{FF2B5EF4-FFF2-40B4-BE49-F238E27FC236}">
-                  <a16:creationId id="{0C2098FB-EB98-412A-A3B6-1B0F46723BE5}"/>
+                  <a16:creationId xmlns:a16="http://schemas.microsoft.com/office/drawing/2014/main" id="{0C2098FB-EB98-412A-A3B6-1B0F46723BE5}"/>
                 </a:ext>
               </a:extLst>
             </p:cNvPr>
@@ -20506,7 +20589,7 @@
             <p:cNvPr id="289" name="F1_0288_patch_267">
               <a:extLst>
                 <a:ext uri="{FF2B5EF4-FFF2-40B4-BE49-F238E27FC236}">
-                  <a16:creationId id="{869E3E10-3DD2-49A2-8903-D112984C576E}"/>
+                  <a16:creationId xmlns:a16="http://schemas.microsoft.com/office/drawing/2014/main" id="{869E3E10-3DD2-49A2-8903-D112984C576E}"/>
                 </a:ext>
               </a:extLst>
             </p:cNvPr>
@@ -20558,7 +20641,7 @@
             <p:cNvPr id="290" name="F1_0289_patch_268">
               <a:extLst>
                 <a:ext uri="{FF2B5EF4-FFF2-40B4-BE49-F238E27FC236}">
-                  <a16:creationId id="{46EBC8F9-F58E-4F48-9CDE-AB396B11FCB9}"/>
+                  <a16:creationId xmlns:a16="http://schemas.microsoft.com/office/drawing/2014/main" id="{46EBC8F9-F58E-4F48-9CDE-AB396B11FCB9}"/>
                 </a:ext>
               </a:extLst>
             </p:cNvPr>
@@ -20610,7 +20693,7 @@
             <p:cNvPr id="291" name="F1_0290_patch_269">
               <a:extLst>
                 <a:ext uri="{FF2B5EF4-FFF2-40B4-BE49-F238E27FC236}">
-                  <a16:creationId id="{7927AE01-CE29-4AF5-8D0F-E158CBFF5BE3}"/>
+                  <a16:creationId xmlns:a16="http://schemas.microsoft.com/office/drawing/2014/main" id="{7927AE01-CE29-4AF5-8D0F-E158CBFF5BE3}"/>
                 </a:ext>
               </a:extLst>
             </p:cNvPr>
@@ -20662,7 +20745,7 @@
             <p:cNvPr id="292" name="F1_0291_patch_270">
               <a:extLst>
                 <a:ext uri="{FF2B5EF4-FFF2-40B4-BE49-F238E27FC236}">
-                  <a16:creationId id="{553127C1-9089-4673-B36E-26B7DCCFD4EB}"/>
+                  <a16:creationId xmlns:a16="http://schemas.microsoft.com/office/drawing/2014/main" id="{553127C1-9089-4673-B36E-26B7DCCFD4EB}"/>
                 </a:ext>
               </a:extLst>
             </p:cNvPr>
@@ -20714,7 +20797,7 @@
             <p:cNvPr id="293" name="F1_0292_patch_271">
               <a:extLst>
                 <a:ext uri="{FF2B5EF4-FFF2-40B4-BE49-F238E27FC236}">
-                  <a16:creationId id="{E3134A80-6F16-4E97-91E1-C2A4EB1FB028}"/>
+                  <a16:creationId xmlns:a16="http://schemas.microsoft.com/office/drawing/2014/main" id="{E3134A80-6F16-4E97-91E1-C2A4EB1FB028}"/>
                 </a:ext>
               </a:extLst>
             </p:cNvPr>
@@ -20766,7 +20849,7 @@
             <p:cNvPr id="294" name="F1_0293_patch_272">
               <a:extLst>
                 <a:ext uri="{FF2B5EF4-FFF2-40B4-BE49-F238E27FC236}">
-                  <a16:creationId id="{C539F8C7-AA1C-4CFD-99CB-B60DB3D64413}"/>
+                  <a16:creationId xmlns:a16="http://schemas.microsoft.com/office/drawing/2014/main" id="{C539F8C7-AA1C-4CFD-99CB-B60DB3D64413}"/>
                 </a:ext>
               </a:extLst>
             </p:cNvPr>
@@ -20818,7 +20901,7 @@
             <p:cNvPr id="295" name="F1_0294_patch_273">
               <a:extLst>
                 <a:ext uri="{FF2B5EF4-FFF2-40B4-BE49-F238E27FC236}">
-                  <a16:creationId id="{CEB43B98-7482-46FC-99F7-3DB743CF1CE7}"/>
+                  <a16:creationId xmlns:a16="http://schemas.microsoft.com/office/drawing/2014/main" id="{CEB43B98-7482-46FC-99F7-3DB743CF1CE7}"/>
                 </a:ext>
               </a:extLst>
             </p:cNvPr>
@@ -20870,7 +20953,7 @@
             <p:cNvPr id="296" name="F1_0295_patch_274">
               <a:extLst>
                 <a:ext uri="{FF2B5EF4-FFF2-40B4-BE49-F238E27FC236}">
-                  <a16:creationId id="{BA7C711E-E8B6-42B4-BB50-ACEEE4A210D0}"/>
+                  <a16:creationId xmlns:a16="http://schemas.microsoft.com/office/drawing/2014/main" id="{BA7C711E-E8B6-42B4-BB50-ACEEE4A210D0}"/>
                 </a:ext>
               </a:extLst>
             </p:cNvPr>
@@ -20922,7 +21005,7 @@
             <p:cNvPr id="297" name="F1_0296_patch_275">
               <a:extLst>
                 <a:ext uri="{FF2B5EF4-FFF2-40B4-BE49-F238E27FC236}">
-                  <a16:creationId id="{D8769997-CA76-4834-9561-BA6598255FD4}"/>
+                  <a16:creationId xmlns:a16="http://schemas.microsoft.com/office/drawing/2014/main" id="{D8769997-CA76-4834-9561-BA6598255FD4}"/>
                 </a:ext>
               </a:extLst>
             </p:cNvPr>
@@ -20974,7 +21057,7 @@
             <p:cNvPr id="298" name="F1_0297_patch_276">
               <a:extLst>
                 <a:ext uri="{FF2B5EF4-FFF2-40B4-BE49-F238E27FC236}">
-                  <a16:creationId id="{5B180924-668F-451B-A9FB-71F38F8162BA}"/>
+                  <a16:creationId xmlns:a16="http://schemas.microsoft.com/office/drawing/2014/main" id="{5B180924-668F-451B-A9FB-71F38F8162BA}"/>
                 </a:ext>
               </a:extLst>
             </p:cNvPr>
@@ -21026,7 +21109,7 @@
             <p:cNvPr id="299" name="F1_0298_patch_277">
               <a:extLst>
                 <a:ext uri="{FF2B5EF4-FFF2-40B4-BE49-F238E27FC236}">
-                  <a16:creationId id="{D77D65D1-2249-4A19-A46C-61E8AA10D7B2}"/>
+                  <a16:creationId xmlns:a16="http://schemas.microsoft.com/office/drawing/2014/main" id="{D77D65D1-2249-4A19-A46C-61E8AA10D7B2}"/>
                 </a:ext>
               </a:extLst>
             </p:cNvPr>
@@ -21078,7 +21161,7 @@
             <p:cNvPr id="300" name="F1_0299_patch_278">
               <a:extLst>
                 <a:ext uri="{FF2B5EF4-FFF2-40B4-BE49-F238E27FC236}">
-                  <a16:creationId id="{7AC11B46-9474-4A7E-A348-E24E1309EA1B}"/>
+                  <a16:creationId xmlns:a16="http://schemas.microsoft.com/office/drawing/2014/main" id="{7AC11B46-9474-4A7E-A348-E24E1309EA1B}"/>
                 </a:ext>
               </a:extLst>
             </p:cNvPr>
@@ -21130,7 +21213,7 @@
             <p:cNvPr id="301" name="F1_0300_patch_279">
               <a:extLst>
                 <a:ext uri="{FF2B5EF4-FFF2-40B4-BE49-F238E27FC236}">
-                  <a16:creationId id="{4D675EE1-67E4-4F23-8BF6-1DD2968CC781}"/>
+                  <a16:creationId xmlns:a16="http://schemas.microsoft.com/office/drawing/2014/main" id="{4D675EE1-67E4-4F23-8BF6-1DD2968CC781}"/>
                 </a:ext>
               </a:extLst>
             </p:cNvPr>
@@ -21182,7 +21265,7 @@
             <p:cNvPr id="302" name="F1_0301_patch_280">
               <a:extLst>
                 <a:ext uri="{FF2B5EF4-FFF2-40B4-BE49-F238E27FC236}">
-                  <a16:creationId id="{677B3934-83F8-4487-ABA0-EF2337DDC392}"/>
+                  <a16:creationId xmlns:a16="http://schemas.microsoft.com/office/drawing/2014/main" id="{677B3934-83F8-4487-ABA0-EF2337DDC392}"/>
                 </a:ext>
               </a:extLst>
             </p:cNvPr>
@@ -21234,7 +21317,7 @@
             <p:cNvPr id="303" name="F1_0302_patch_281">
               <a:extLst>
                 <a:ext uri="{FF2B5EF4-FFF2-40B4-BE49-F238E27FC236}">
-                  <a16:creationId id="{763B1072-A528-41CC-911C-A7581BB462DD}"/>
+                  <a16:creationId xmlns:a16="http://schemas.microsoft.com/office/drawing/2014/main" id="{763B1072-A528-41CC-911C-A7581BB462DD}"/>
                 </a:ext>
               </a:extLst>
             </p:cNvPr>
@@ -21286,7 +21369,7 @@
             <p:cNvPr id="304" name="F1_0303_patch_282">
               <a:extLst>
                 <a:ext uri="{FF2B5EF4-FFF2-40B4-BE49-F238E27FC236}">
-                  <a16:creationId id="{2603C852-22E5-4545-ABDD-E20822BDDB25}"/>
+                  <a16:creationId xmlns:a16="http://schemas.microsoft.com/office/drawing/2014/main" id="{2603C852-22E5-4545-ABDD-E20822BDDB25}"/>
                 </a:ext>
               </a:extLst>
             </p:cNvPr>
@@ -21338,7 +21421,7 @@
             <p:cNvPr id="305" name="F1_0304_patch_283">
               <a:extLst>
                 <a:ext uri="{FF2B5EF4-FFF2-40B4-BE49-F238E27FC236}">
-                  <a16:creationId id="{6E3A3224-3A14-4EFF-8B56-10E40CB43C92}"/>
+                  <a16:creationId xmlns:a16="http://schemas.microsoft.com/office/drawing/2014/main" id="{6E3A3224-3A14-4EFF-8B56-10E40CB43C92}"/>
                 </a:ext>
               </a:extLst>
             </p:cNvPr>
@@ -21390,7 +21473,7 @@
             <p:cNvPr id="306" name="F1_0305_patch_284">
               <a:extLst>
                 <a:ext uri="{FF2B5EF4-FFF2-40B4-BE49-F238E27FC236}">
-                  <a16:creationId id="{8CCF3A1A-196F-4418-A7B4-2562F1A347C3}"/>
+                  <a16:creationId xmlns:a16="http://schemas.microsoft.com/office/drawing/2014/main" id="{8CCF3A1A-196F-4418-A7B4-2562F1A347C3}"/>
                 </a:ext>
               </a:extLst>
             </p:cNvPr>
@@ -21442,7 +21525,7 @@
             <p:cNvPr id="307" name="F1_0306_patch_285">
               <a:extLst>
                 <a:ext uri="{FF2B5EF4-FFF2-40B4-BE49-F238E27FC236}">
-                  <a16:creationId id="{80A8E5B8-B566-4ED6-BEAF-46A9E894EC2B}"/>
+                  <a16:creationId xmlns:a16="http://schemas.microsoft.com/office/drawing/2014/main" id="{80A8E5B8-B566-4ED6-BEAF-46A9E894EC2B}"/>
                 </a:ext>
               </a:extLst>
             </p:cNvPr>
@@ -21494,7 +21577,7 @@
             <p:cNvPr id="308" name="F1_0307_patch_286">
               <a:extLst>
                 <a:ext uri="{FF2B5EF4-FFF2-40B4-BE49-F238E27FC236}">
-                  <a16:creationId id="{48A9301B-4864-41C9-B230-2DB35993D2B0}"/>
+                  <a16:creationId xmlns:a16="http://schemas.microsoft.com/office/drawing/2014/main" id="{48A9301B-4864-41C9-B230-2DB35993D2B0}"/>
                 </a:ext>
               </a:extLst>
             </p:cNvPr>
@@ -21546,7 +21629,7 @@
             <p:cNvPr id="309" name="F1_0308_patch_287">
               <a:extLst>
                 <a:ext uri="{FF2B5EF4-FFF2-40B4-BE49-F238E27FC236}">
-                  <a16:creationId id="{2A5923F8-04D5-4DDA-A8EF-7056865E5407}"/>
+                  <a16:creationId xmlns:a16="http://schemas.microsoft.com/office/drawing/2014/main" id="{2A5923F8-04D5-4DDA-A8EF-7056865E5407}"/>
                 </a:ext>
               </a:extLst>
             </p:cNvPr>
@@ -21598,7 +21681,7 @@
             <p:cNvPr id="310" name="F1_0309_patch_288">
               <a:extLst>
                 <a:ext uri="{FF2B5EF4-FFF2-40B4-BE49-F238E27FC236}">
-                  <a16:creationId id="{F4EF7FB0-B835-45F6-80D3-79AE03F3963C}"/>
+                  <a16:creationId xmlns:a16="http://schemas.microsoft.com/office/drawing/2014/main" id="{F4EF7FB0-B835-45F6-80D3-79AE03F3963C}"/>
                 </a:ext>
               </a:extLst>
             </p:cNvPr>
@@ -21650,7 +21733,7 @@
             <p:cNvPr id="311" name="F1_0310_patch_289">
               <a:extLst>
                 <a:ext uri="{FF2B5EF4-FFF2-40B4-BE49-F238E27FC236}">
-                  <a16:creationId id="{F469CD83-4105-4D7A-A57E-3059C41C75B2}"/>
+                  <a16:creationId xmlns:a16="http://schemas.microsoft.com/office/drawing/2014/main" id="{F469CD83-4105-4D7A-A57E-3059C41C75B2}"/>
                 </a:ext>
               </a:extLst>
             </p:cNvPr>
@@ -21702,7 +21785,7 @@
             <p:cNvPr id="312" name="F1_0311_patch_290">
               <a:extLst>
                 <a:ext uri="{FF2B5EF4-FFF2-40B4-BE49-F238E27FC236}">
-                  <a16:creationId id="{2B72E0A5-3571-4EC1-BF1F-65A4592423B6}"/>
+                  <a16:creationId xmlns:a16="http://schemas.microsoft.com/office/drawing/2014/main" id="{2B72E0A5-3571-4EC1-BF1F-65A4592423B6}"/>
                 </a:ext>
               </a:extLst>
             </p:cNvPr>
@@ -21754,7 +21837,7 @@
             <p:cNvPr id="313" name="F1_0312_patch_291">
               <a:extLst>
                 <a:ext uri="{FF2B5EF4-FFF2-40B4-BE49-F238E27FC236}">
-                  <a16:creationId id="{FC919F77-1A31-4BD5-B782-D1CC7F514182}"/>
+                  <a16:creationId xmlns:a16="http://schemas.microsoft.com/office/drawing/2014/main" id="{FC919F77-1A31-4BD5-B782-D1CC7F514182}"/>
                 </a:ext>
               </a:extLst>
             </p:cNvPr>
@@ -21806,7 +21889,7 @@
             <p:cNvPr id="314" name="F1_0313_patch_292">
               <a:extLst>
                 <a:ext uri="{FF2B5EF4-FFF2-40B4-BE49-F238E27FC236}">
-                  <a16:creationId id="{A9A782CC-1571-47E7-898C-28A7D531EB3F}"/>
+                  <a16:creationId xmlns:a16="http://schemas.microsoft.com/office/drawing/2014/main" id="{A9A782CC-1571-47E7-898C-28A7D531EB3F}"/>
                 </a:ext>
               </a:extLst>
             </p:cNvPr>
@@ -21858,7 +21941,7 @@
             <p:cNvPr id="315" name="F1_0314_patch_293">
               <a:extLst>
                 <a:ext uri="{FF2B5EF4-FFF2-40B4-BE49-F238E27FC236}">
-                  <a16:creationId id="{3B6290A5-B372-48FC-8180-C0B95C69A6CD}"/>
+                  <a16:creationId xmlns:a16="http://schemas.microsoft.com/office/drawing/2014/main" id="{3B6290A5-B372-48FC-8180-C0B95C69A6CD}"/>
                 </a:ext>
               </a:extLst>
             </p:cNvPr>
@@ -21910,7 +21993,7 @@
             <p:cNvPr id="316" name="F1_0315_patch_294">
               <a:extLst>
                 <a:ext uri="{FF2B5EF4-FFF2-40B4-BE49-F238E27FC236}">
-                  <a16:creationId id="{3FC84E0E-2DC7-4EF0-8A58-3C7658F81246}"/>
+                  <a16:creationId xmlns:a16="http://schemas.microsoft.com/office/drawing/2014/main" id="{3FC84E0E-2DC7-4EF0-8A58-3C7658F81246}"/>
                 </a:ext>
               </a:extLst>
             </p:cNvPr>
@@ -21962,7 +22045,7 @@
             <p:cNvPr id="317" name="F1_0316_patch_295">
               <a:extLst>
                 <a:ext uri="{FF2B5EF4-FFF2-40B4-BE49-F238E27FC236}">
-                  <a16:creationId id="{C63BEB42-0CC0-41D8-83B6-59D6B2C358ED}"/>
+                  <a16:creationId xmlns:a16="http://schemas.microsoft.com/office/drawing/2014/main" id="{C63BEB42-0CC0-41D8-83B6-59D6B2C358ED}"/>
                 </a:ext>
               </a:extLst>
             </p:cNvPr>
@@ -22014,7 +22097,7 @@
             <p:cNvPr id="318" name="F1_0317_patch_296">
               <a:extLst>
                 <a:ext uri="{FF2B5EF4-FFF2-40B4-BE49-F238E27FC236}">
-                  <a16:creationId id="{F1A47F37-4FC1-4755-92E0-D65835F2F990}"/>
+                  <a16:creationId xmlns:a16="http://schemas.microsoft.com/office/drawing/2014/main" id="{F1A47F37-4FC1-4755-92E0-D65835F2F990}"/>
                 </a:ext>
               </a:extLst>
             </p:cNvPr>
@@ -22066,7 +22149,7 @@
             <p:cNvPr id="319" name="F1_0318_patch_297">
               <a:extLst>
                 <a:ext uri="{FF2B5EF4-FFF2-40B4-BE49-F238E27FC236}">
-                  <a16:creationId id="{C6D12CB3-9DFE-4B03-B0A5-EDD6CBB49606}"/>
+                  <a16:creationId xmlns:a16="http://schemas.microsoft.com/office/drawing/2014/main" id="{C6D12CB3-9DFE-4B03-B0A5-EDD6CBB49606}"/>
                 </a:ext>
               </a:extLst>
             </p:cNvPr>
@@ -22118,7 +22201,7 @@
             <p:cNvPr id="320" name="F1_0319_patch_298">
               <a:extLst>
                 <a:ext uri="{FF2B5EF4-FFF2-40B4-BE49-F238E27FC236}">
-                  <a16:creationId id="{D38FC4F4-1A34-4A08-AF08-833DBB75D718}"/>
+                  <a16:creationId xmlns:a16="http://schemas.microsoft.com/office/drawing/2014/main" id="{D38FC4F4-1A34-4A08-AF08-833DBB75D718}"/>
                 </a:ext>
               </a:extLst>
             </p:cNvPr>
@@ -22170,7 +22253,7 @@
             <p:cNvPr id="321" name="F1_0320_patch_299">
               <a:extLst>
                 <a:ext uri="{FF2B5EF4-FFF2-40B4-BE49-F238E27FC236}">
-                  <a16:creationId id="{993826B4-CD8A-4497-A30F-AA320698C922}"/>
+                  <a16:creationId xmlns:a16="http://schemas.microsoft.com/office/drawing/2014/main" id="{993826B4-CD8A-4497-A30F-AA320698C922}"/>
                 </a:ext>
               </a:extLst>
             </p:cNvPr>
@@ -22222,7 +22305,7 @@
             <p:cNvPr id="322" name="F1_0321_patch_300">
               <a:extLst>
                 <a:ext uri="{FF2B5EF4-FFF2-40B4-BE49-F238E27FC236}">
-                  <a16:creationId id="{F9193E2B-11D8-43D0-A7FF-30F928DF0138}"/>
+                  <a16:creationId xmlns:a16="http://schemas.microsoft.com/office/drawing/2014/main" id="{F9193E2B-11D8-43D0-A7FF-30F928DF0138}"/>
                 </a:ext>
               </a:extLst>
             </p:cNvPr>
@@ -22274,7 +22357,7 @@
             <p:cNvPr id="323" name="F1_0322_patch_301">
               <a:extLst>
                 <a:ext uri="{FF2B5EF4-FFF2-40B4-BE49-F238E27FC236}">
-                  <a16:creationId id="{1E0A138B-5F45-4E13-B4DC-4CBE5A40CA98}"/>
+                  <a16:creationId xmlns:a16="http://schemas.microsoft.com/office/drawing/2014/main" id="{1E0A138B-5F45-4E13-B4DC-4CBE5A40CA98}"/>
                 </a:ext>
               </a:extLst>
             </p:cNvPr>
@@ -22326,7 +22409,7 @@
             <p:cNvPr id="324" name="F1_0323_patch_302">
               <a:extLst>
                 <a:ext uri="{FF2B5EF4-FFF2-40B4-BE49-F238E27FC236}">
-                  <a16:creationId id="{3CC5447F-1FCC-4284-AC24-7A4412E23B4A}"/>
+                  <a16:creationId xmlns:a16="http://schemas.microsoft.com/office/drawing/2014/main" id="{3CC5447F-1FCC-4284-AC24-7A4412E23B4A}"/>
                 </a:ext>
               </a:extLst>
             </p:cNvPr>
@@ -22378,7 +22461,7 @@
             <p:cNvPr id="325" name="F1_0324_patch_303">
               <a:extLst>
                 <a:ext uri="{FF2B5EF4-FFF2-40B4-BE49-F238E27FC236}">
-                  <a16:creationId id="{9083D7C7-3A5E-4D84-BA16-8150CA1B6DF6}"/>
+                  <a16:creationId xmlns:a16="http://schemas.microsoft.com/office/drawing/2014/main" id="{9083D7C7-3A5E-4D84-BA16-8150CA1B6DF6}"/>
                 </a:ext>
               </a:extLst>
             </p:cNvPr>
@@ -22430,7 +22513,7 @@
             <p:cNvPr id="326" name="F1_0325_patch_304">
               <a:extLst>
                 <a:ext uri="{FF2B5EF4-FFF2-40B4-BE49-F238E27FC236}">
-                  <a16:creationId id="{610E3AC0-1BEE-447A-A665-1C042E1EB615}"/>
+                  <a16:creationId xmlns:a16="http://schemas.microsoft.com/office/drawing/2014/main" id="{610E3AC0-1BEE-447A-A665-1C042E1EB615}"/>
                 </a:ext>
               </a:extLst>
             </p:cNvPr>
@@ -22482,7 +22565,7 @@
             <p:cNvPr id="327" name="F1_0326_patch_305">
               <a:extLst>
                 <a:ext uri="{FF2B5EF4-FFF2-40B4-BE49-F238E27FC236}">
-                  <a16:creationId id="{7CA95EC9-73E8-4D7F-ADB0-A6E1AA808DAA}"/>
+                  <a16:creationId xmlns:a16="http://schemas.microsoft.com/office/drawing/2014/main" id="{7CA95EC9-73E8-4D7F-ADB0-A6E1AA808DAA}"/>
                 </a:ext>
               </a:extLst>
             </p:cNvPr>
@@ -22534,7 +22617,7 @@
             <p:cNvPr id="328" name="F1_0327_patch_306">
               <a:extLst>
                 <a:ext uri="{FF2B5EF4-FFF2-40B4-BE49-F238E27FC236}">
-                  <a16:creationId id="{1FC2B89E-64A5-4D5C-87EE-EB4672A47D57}"/>
+                  <a16:creationId xmlns:a16="http://schemas.microsoft.com/office/drawing/2014/main" id="{1FC2B89E-64A5-4D5C-87EE-EB4672A47D57}"/>
                 </a:ext>
               </a:extLst>
             </p:cNvPr>
@@ -22586,7 +22669,7 @@
             <p:cNvPr id="329" name="F1_0328_patch_307">
               <a:extLst>
                 <a:ext uri="{FF2B5EF4-FFF2-40B4-BE49-F238E27FC236}">
-                  <a16:creationId id="{7A18DEF0-7119-4C6C-8234-3E50F39CBC53}"/>
+                  <a16:creationId xmlns:a16="http://schemas.microsoft.com/office/drawing/2014/main" id="{7A18DEF0-7119-4C6C-8234-3E50F39CBC53}"/>
                 </a:ext>
               </a:extLst>
             </p:cNvPr>
@@ -22638,7 +22721,7 @@
             <p:cNvPr id="330" name="F1_0329_patch_308">
               <a:extLst>
                 <a:ext uri="{FF2B5EF4-FFF2-40B4-BE49-F238E27FC236}">
-                  <a16:creationId id="{0A2282B0-68D5-4204-A5A1-3AA3D4A4C332}"/>
+                  <a16:creationId xmlns:a16="http://schemas.microsoft.com/office/drawing/2014/main" id="{0A2282B0-68D5-4204-A5A1-3AA3D4A4C332}"/>
                 </a:ext>
               </a:extLst>
             </p:cNvPr>
@@ -22690,7 +22773,7 @@
             <p:cNvPr id="331" name="F1_0330_patch_309">
               <a:extLst>
                 <a:ext uri="{FF2B5EF4-FFF2-40B4-BE49-F238E27FC236}">
-                  <a16:creationId id="{6771E607-5164-403D-BF15-7AF56D41B766}"/>
+                  <a16:creationId xmlns:a16="http://schemas.microsoft.com/office/drawing/2014/main" id="{6771E607-5164-403D-BF15-7AF56D41B766}"/>
                 </a:ext>
               </a:extLst>
             </p:cNvPr>
@@ -22742,7 +22825,7 @@
             <p:cNvPr id="332" name="F1_0331_patch_310">
               <a:extLst>
                 <a:ext uri="{FF2B5EF4-FFF2-40B4-BE49-F238E27FC236}">
-                  <a16:creationId id="{5D157243-4F7C-4AAA-9FE9-08720C499661}"/>
+                  <a16:creationId xmlns:a16="http://schemas.microsoft.com/office/drawing/2014/main" id="{5D157243-4F7C-4AAA-9FE9-08720C499661}"/>
                 </a:ext>
               </a:extLst>
             </p:cNvPr>
@@ -22794,7 +22877,7 @@
             <p:cNvPr id="333" name="F1_0332_patch_311">
               <a:extLst>
                 <a:ext uri="{FF2B5EF4-FFF2-40B4-BE49-F238E27FC236}">
-                  <a16:creationId id="{24BDE208-5AF1-4958-92C6-712064FF62A8}"/>
+                  <a16:creationId xmlns:a16="http://schemas.microsoft.com/office/drawing/2014/main" id="{24BDE208-5AF1-4958-92C6-712064FF62A8}"/>
                 </a:ext>
               </a:extLst>
             </p:cNvPr>
@@ -22846,7 +22929,7 @@
             <p:cNvPr id="334" name="F1_0333_patch_312">
               <a:extLst>
                 <a:ext uri="{FF2B5EF4-FFF2-40B4-BE49-F238E27FC236}">
-                  <a16:creationId id="{9F0FA432-757D-4E0C-9C51-2C6D50E21144}"/>
+                  <a16:creationId xmlns:a16="http://schemas.microsoft.com/office/drawing/2014/main" id="{9F0FA432-757D-4E0C-9C51-2C6D50E21144}"/>
                 </a:ext>
               </a:extLst>
             </p:cNvPr>
@@ -22898,7 +22981,7 @@
             <p:cNvPr id="335" name="F1_0334_patch_313">
               <a:extLst>
                 <a:ext uri="{FF2B5EF4-FFF2-40B4-BE49-F238E27FC236}">
-                  <a16:creationId id="{F89519A4-5A1F-48C0-9B12-456CC8D9F692}"/>
+                  <a16:creationId xmlns:a16="http://schemas.microsoft.com/office/drawing/2014/main" id="{F89519A4-5A1F-48C0-9B12-456CC8D9F692}"/>
                 </a:ext>
               </a:extLst>
             </p:cNvPr>
@@ -22950,7 +23033,7 @@
             <p:cNvPr id="336" name="F1_0335_patch_314">
               <a:extLst>
                 <a:ext uri="{FF2B5EF4-FFF2-40B4-BE49-F238E27FC236}">
-                  <a16:creationId id="{187EAAA7-7B6A-490F-81FA-66A07098BB33}"/>
+                  <a16:creationId xmlns:a16="http://schemas.microsoft.com/office/drawing/2014/main" id="{187EAAA7-7B6A-490F-81FA-66A07098BB33}"/>
                 </a:ext>
               </a:extLst>
             </p:cNvPr>
@@ -23002,7 +23085,7 @@
             <p:cNvPr id="337" name="F1_0336_patch_315">
               <a:extLst>
                 <a:ext uri="{FF2B5EF4-FFF2-40B4-BE49-F238E27FC236}">
-                  <a16:creationId id="{B55C7C8D-2EA8-424C-90D0-6966C14F0441}"/>
+                  <a16:creationId xmlns:a16="http://schemas.microsoft.com/office/drawing/2014/main" id="{B55C7C8D-2EA8-424C-90D0-6966C14F0441}"/>
                 </a:ext>
               </a:extLst>
             </p:cNvPr>
@@ -23054,7 +23137,7 @@
             <p:cNvPr id="338" name="F1_0337_patch_316">
               <a:extLst>
                 <a:ext uri="{FF2B5EF4-FFF2-40B4-BE49-F238E27FC236}">
-                  <a16:creationId id="{ACCFEABF-51A4-495F-84B2-2F7FFB8AB678}"/>
+                  <a16:creationId xmlns:a16="http://schemas.microsoft.com/office/drawing/2014/main" id="{ACCFEABF-51A4-495F-84B2-2F7FFB8AB678}"/>
                 </a:ext>
               </a:extLst>
             </p:cNvPr>
@@ -23106,7 +23189,7 @@
             <p:cNvPr id="339" name="F1_0338_patch_317">
               <a:extLst>
                 <a:ext uri="{FF2B5EF4-FFF2-40B4-BE49-F238E27FC236}">
-                  <a16:creationId id="{8FCFA47F-F3E9-4758-94D0-7034C7CB542B}"/>
+                  <a16:creationId xmlns:a16="http://schemas.microsoft.com/office/drawing/2014/main" id="{8FCFA47F-F3E9-4758-94D0-7034C7CB542B}"/>
                 </a:ext>
               </a:extLst>
             </p:cNvPr>
@@ -23158,7 +23241,7 @@
             <p:cNvPr id="340" name="F1_0339_patch_318">
               <a:extLst>
                 <a:ext uri="{FF2B5EF4-FFF2-40B4-BE49-F238E27FC236}">
-                  <a16:creationId id="{F25B02BC-C4EB-465B-95C1-FF9DA7B67FF4}"/>
+                  <a16:creationId xmlns:a16="http://schemas.microsoft.com/office/drawing/2014/main" id="{F25B02BC-C4EB-465B-95C1-FF9DA7B67FF4}"/>
                 </a:ext>
               </a:extLst>
             </p:cNvPr>
@@ -23210,7 +23293,7 @@
             <p:cNvPr id="341" name="F1_0340_patch_319">
               <a:extLst>
                 <a:ext uri="{FF2B5EF4-FFF2-40B4-BE49-F238E27FC236}">
-                  <a16:creationId id="{6B683659-40DC-48F6-99C2-845F55CDA2D1}"/>
+                  <a16:creationId xmlns:a16="http://schemas.microsoft.com/office/drawing/2014/main" id="{6B683659-40DC-48F6-99C2-845F55CDA2D1}"/>
                 </a:ext>
               </a:extLst>
             </p:cNvPr>
@@ -23262,7 +23345,7 @@
             <p:cNvPr id="342" name="F1_0341_patch_320">
               <a:extLst>
                 <a:ext uri="{FF2B5EF4-FFF2-40B4-BE49-F238E27FC236}">
-                  <a16:creationId id="{F2F66C83-00DA-4F07-AAE6-704A684A3D92}"/>
+                  <a16:creationId xmlns:a16="http://schemas.microsoft.com/office/drawing/2014/main" id="{F2F66C83-00DA-4F07-AAE6-704A684A3D92}"/>
                 </a:ext>
               </a:extLst>
             </p:cNvPr>
@@ -23314,7 +23397,7 @@
             <p:cNvPr id="343" name="F1_0342_patch_321">
               <a:extLst>
                 <a:ext uri="{FF2B5EF4-FFF2-40B4-BE49-F238E27FC236}">
-                  <a16:creationId id="{BDF7D80C-B552-420D-A67B-FF00403EFAB4}"/>
+                  <a16:creationId xmlns:a16="http://schemas.microsoft.com/office/drawing/2014/main" id="{BDF7D80C-B552-420D-A67B-FF00403EFAB4}"/>
                 </a:ext>
               </a:extLst>
             </p:cNvPr>
@@ -23366,7 +23449,7 @@
             <p:cNvPr id="344" name="F1_0343_patch_322">
               <a:extLst>
                 <a:ext uri="{FF2B5EF4-FFF2-40B4-BE49-F238E27FC236}">
-                  <a16:creationId id="{32521686-2410-4A2E-8701-C9656AE58EA2}"/>
+                  <a16:creationId xmlns:a16="http://schemas.microsoft.com/office/drawing/2014/main" id="{32521686-2410-4A2E-8701-C9656AE58EA2}"/>
                 </a:ext>
               </a:extLst>
             </p:cNvPr>
@@ -23418,7 +23501,7 @@
             <p:cNvPr id="345" name="F1_0344_patch_323">
               <a:extLst>
                 <a:ext uri="{FF2B5EF4-FFF2-40B4-BE49-F238E27FC236}">
-                  <a16:creationId id="{36096347-F443-4CC4-8A67-BEF5C2AEBBF2}"/>
+                  <a16:creationId xmlns:a16="http://schemas.microsoft.com/office/drawing/2014/main" id="{36096347-F443-4CC4-8A67-BEF5C2AEBBF2}"/>
                 </a:ext>
               </a:extLst>
             </p:cNvPr>
@@ -23470,7 +23553,7 @@
             <p:cNvPr id="346" name="F1_0345_patch_324">
               <a:extLst>
                 <a:ext uri="{FF2B5EF4-FFF2-40B4-BE49-F238E27FC236}">
-                  <a16:creationId id="{7B36A3AC-4895-49AF-92CA-D3BD7679ED7D}"/>
+                  <a16:creationId xmlns:a16="http://schemas.microsoft.com/office/drawing/2014/main" id="{7B36A3AC-4895-49AF-92CA-D3BD7679ED7D}"/>
                 </a:ext>
               </a:extLst>
             </p:cNvPr>
@@ -23522,7 +23605,7 @@
             <p:cNvPr id="347" name="F1_0346_patch_325">
               <a:extLst>
                 <a:ext uri="{FF2B5EF4-FFF2-40B4-BE49-F238E27FC236}">
-                  <a16:creationId id="{6C8EE373-5EDD-472C-AAEF-DAB71541B464}"/>
+                  <a16:creationId xmlns:a16="http://schemas.microsoft.com/office/drawing/2014/main" id="{6C8EE373-5EDD-472C-AAEF-DAB71541B464}"/>
                 </a:ext>
               </a:extLst>
             </p:cNvPr>
@@ -23574,7 +23657,7 @@
             <p:cNvPr id="348" name="F1_0347_patch_326">
               <a:extLst>
                 <a:ext uri="{FF2B5EF4-FFF2-40B4-BE49-F238E27FC236}">
-                  <a16:creationId id="{27701BE0-8F6C-4AF6-A83D-0821106A1D09}"/>
+                  <a16:creationId xmlns:a16="http://schemas.microsoft.com/office/drawing/2014/main" id="{27701BE0-8F6C-4AF6-A83D-0821106A1D09}"/>
                 </a:ext>
               </a:extLst>
             </p:cNvPr>
@@ -23626,7 +23709,7 @@
             <p:cNvPr id="349" name="F1_0348_patch_327">
               <a:extLst>
                 <a:ext uri="{FF2B5EF4-FFF2-40B4-BE49-F238E27FC236}">
-                  <a16:creationId id="{F6C393AA-399A-4D9C-AB9A-3A298B804F32}"/>
+                  <a16:creationId xmlns:a16="http://schemas.microsoft.com/office/drawing/2014/main" id="{F6C393AA-399A-4D9C-AB9A-3A298B804F32}"/>
                 </a:ext>
               </a:extLst>
             </p:cNvPr>
@@ -23678,7 +23761,7 @@
             <p:cNvPr id="350" name="F1_0349_patch_328">
               <a:extLst>
                 <a:ext uri="{FF2B5EF4-FFF2-40B4-BE49-F238E27FC236}">
-                  <a16:creationId id="{35238ED7-21E5-40B8-B754-ECA4FB399397}"/>
+                  <a16:creationId xmlns:a16="http://schemas.microsoft.com/office/drawing/2014/main" id="{35238ED7-21E5-40B8-B754-ECA4FB399397}"/>
                 </a:ext>
               </a:extLst>
             </p:cNvPr>
@@ -23730,7 +23813,7 @@
             <p:cNvPr id="351" name="F1_0350_patch_329">
               <a:extLst>
                 <a:ext uri="{FF2B5EF4-FFF2-40B4-BE49-F238E27FC236}">
-                  <a16:creationId id="{098D344B-30B8-4C82-B0B5-67B88B492409}"/>
+                  <a16:creationId xmlns:a16="http://schemas.microsoft.com/office/drawing/2014/main" id="{098D344B-30B8-4C82-B0B5-67B88B492409}"/>
                 </a:ext>
               </a:extLst>
             </p:cNvPr>
@@ -23782,7 +23865,7 @@
             <p:cNvPr id="352" name="F1_0351_patch_330">
               <a:extLst>
                 <a:ext uri="{FF2B5EF4-FFF2-40B4-BE49-F238E27FC236}">
-                  <a16:creationId id="{D6A3E316-C592-475E-9704-A3DC778DABF6}"/>
+                  <a16:creationId xmlns:a16="http://schemas.microsoft.com/office/drawing/2014/main" id="{D6A3E316-C592-475E-9704-A3DC778DABF6}"/>
                 </a:ext>
               </a:extLst>
             </p:cNvPr>
@@ -23834,7 +23917,7 @@
             <p:cNvPr id="353" name="F1_0352_patch_331">
               <a:extLst>
                 <a:ext uri="{FF2B5EF4-FFF2-40B4-BE49-F238E27FC236}">
-                  <a16:creationId id="{87B7A563-8A51-4647-9B51-6464110F55B2}"/>
+                  <a16:creationId xmlns:a16="http://schemas.microsoft.com/office/drawing/2014/main" id="{87B7A563-8A51-4647-9B51-6464110F55B2}"/>
                 </a:ext>
               </a:extLst>
             </p:cNvPr>
@@ -23886,7 +23969,7 @@
             <p:cNvPr id="354" name="F1_0353_patch_332">
               <a:extLst>
                 <a:ext uri="{FF2B5EF4-FFF2-40B4-BE49-F238E27FC236}">
-                  <a16:creationId id="{69135346-7C28-4C00-BA69-91CE3737587F}"/>
+                  <a16:creationId xmlns:a16="http://schemas.microsoft.com/office/drawing/2014/main" id="{69135346-7C28-4C00-BA69-91CE3737587F}"/>
                 </a:ext>
               </a:extLst>
             </p:cNvPr>
@@ -23938,7 +24021,7 @@
             <p:cNvPr id="355" name="F1_0354_patch_333">
               <a:extLst>
                 <a:ext uri="{FF2B5EF4-FFF2-40B4-BE49-F238E27FC236}">
-                  <a16:creationId id="{126ECA61-8379-4A22-9351-45B681A9401A}"/>
+                  <a16:creationId xmlns:a16="http://schemas.microsoft.com/office/drawing/2014/main" id="{126ECA61-8379-4A22-9351-45B681A9401A}"/>
                 </a:ext>
               </a:extLst>
             </p:cNvPr>
@@ -23990,7 +24073,7 @@
             <p:cNvPr id="356" name="F1_0355_patch_334">
               <a:extLst>
                 <a:ext uri="{FF2B5EF4-FFF2-40B4-BE49-F238E27FC236}">
-                  <a16:creationId id="{BA24B6B6-FA54-42DF-A805-42A01587AAF2}"/>
+                  <a16:creationId xmlns:a16="http://schemas.microsoft.com/office/drawing/2014/main" id="{BA24B6B6-FA54-42DF-A805-42A01587AAF2}"/>
                 </a:ext>
               </a:extLst>
             </p:cNvPr>
@@ -24042,7 +24125,7 @@
             <p:cNvPr id="357" name="F1_0356_patch_335">
               <a:extLst>
                 <a:ext uri="{FF2B5EF4-FFF2-40B4-BE49-F238E27FC236}">
-                  <a16:creationId id="{877EA0B7-0EAC-42AA-B2DB-492CE2AE07E8}"/>
+                  <a16:creationId xmlns:a16="http://schemas.microsoft.com/office/drawing/2014/main" id="{877EA0B7-0EAC-42AA-B2DB-492CE2AE07E8}"/>
                 </a:ext>
               </a:extLst>
             </p:cNvPr>
@@ -24094,7 +24177,7 @@
             <p:cNvPr id="358" name="F1_0357_patch_336">
               <a:extLst>
                 <a:ext uri="{FF2B5EF4-FFF2-40B4-BE49-F238E27FC236}">
-                  <a16:creationId id="{BCEA2726-C5FC-4666-9D73-77E0AA219F68}"/>
+                  <a16:creationId xmlns:a16="http://schemas.microsoft.com/office/drawing/2014/main" id="{BCEA2726-C5FC-4666-9D73-77E0AA219F68}"/>
                 </a:ext>
               </a:extLst>
             </p:cNvPr>
@@ -24146,7 +24229,7 @@
             <p:cNvPr id="359" name="F1_0358_patch_337">
               <a:extLst>
                 <a:ext uri="{FF2B5EF4-FFF2-40B4-BE49-F238E27FC236}">
-                  <a16:creationId id="{973A7D20-50E6-44DC-BC3D-97545E0C6FBF}"/>
+                  <a16:creationId xmlns:a16="http://schemas.microsoft.com/office/drawing/2014/main" id="{973A7D20-50E6-44DC-BC3D-97545E0C6FBF}"/>
                 </a:ext>
               </a:extLst>
             </p:cNvPr>
@@ -24198,7 +24281,7 @@
             <p:cNvPr id="360" name="F1_0359_patch_338">
               <a:extLst>
                 <a:ext uri="{FF2B5EF4-FFF2-40B4-BE49-F238E27FC236}">
-                  <a16:creationId id="{C79C56B5-1B4A-40CD-A00F-24303A55521B}"/>
+                  <a16:creationId xmlns:a16="http://schemas.microsoft.com/office/drawing/2014/main" id="{C79C56B5-1B4A-40CD-A00F-24303A55521B}"/>
                 </a:ext>
               </a:extLst>
             </p:cNvPr>
@@ -24250,7 +24333,7 @@
             <p:cNvPr id="361" name="F1_0360_patch_339">
               <a:extLst>
                 <a:ext uri="{FF2B5EF4-FFF2-40B4-BE49-F238E27FC236}">
-                  <a16:creationId id="{08EB88B7-C6B8-4E37-B261-4759DA5C9C8D}"/>
+                  <a16:creationId xmlns:a16="http://schemas.microsoft.com/office/drawing/2014/main" id="{08EB88B7-C6B8-4E37-B261-4759DA5C9C8D}"/>
                 </a:ext>
               </a:extLst>
             </p:cNvPr>
@@ -24302,7 +24385,7 @@
             <p:cNvPr id="362" name="F1_0361_patch_340">
               <a:extLst>
                 <a:ext uri="{FF2B5EF4-FFF2-40B4-BE49-F238E27FC236}">
-                  <a16:creationId id="{410342BC-60B5-4432-8B0D-5E75779BC4F7}"/>
+                  <a16:creationId xmlns:a16="http://schemas.microsoft.com/office/drawing/2014/main" id="{410342BC-60B5-4432-8B0D-5E75779BC4F7}"/>
                 </a:ext>
               </a:extLst>
             </p:cNvPr>
@@ -24354,7 +24437,7 @@
             <p:cNvPr id="363" name="F1_0362_patch_341">
               <a:extLst>
                 <a:ext uri="{FF2B5EF4-FFF2-40B4-BE49-F238E27FC236}">
-                  <a16:creationId id="{E8778008-F226-4B26-8BE8-33F4878EFE40}"/>
+                  <a16:creationId xmlns:a16="http://schemas.microsoft.com/office/drawing/2014/main" id="{E8778008-F226-4B26-8BE8-33F4878EFE40}"/>
                 </a:ext>
               </a:extLst>
             </p:cNvPr>
@@ -24406,7 +24489,7 @@
             <p:cNvPr id="364" name="F1_0363_patch_342">
               <a:extLst>
                 <a:ext uri="{FF2B5EF4-FFF2-40B4-BE49-F238E27FC236}">
-                  <a16:creationId id="{81A0ABCD-3667-43A6-8F8D-485FDDD09616}"/>
+                  <a16:creationId xmlns:a16="http://schemas.microsoft.com/office/drawing/2014/main" id="{81A0ABCD-3667-43A6-8F8D-485FDDD09616}"/>
                 </a:ext>
               </a:extLst>
             </p:cNvPr>
@@ -24458,7 +24541,7 @@
             <p:cNvPr id="365" name="F1_0364_patch_343">
               <a:extLst>
                 <a:ext uri="{FF2B5EF4-FFF2-40B4-BE49-F238E27FC236}">
-                  <a16:creationId id="{A752F9AF-62AB-44EC-9D51-594CC334126F}"/>
+                  <a16:creationId xmlns:a16="http://schemas.microsoft.com/office/drawing/2014/main" id="{A752F9AF-62AB-44EC-9D51-594CC334126F}"/>
                 </a:ext>
               </a:extLst>
             </p:cNvPr>
@@ -24510,7 +24593,7 @@
             <p:cNvPr id="366" name="F1_0365_patch_344">
               <a:extLst>
                 <a:ext uri="{FF2B5EF4-FFF2-40B4-BE49-F238E27FC236}">
-                  <a16:creationId id="{FE9EE0F0-9957-450F-8B9E-54671515639A}"/>
+                  <a16:creationId xmlns:a16="http://schemas.microsoft.com/office/drawing/2014/main" id="{FE9EE0F0-9957-450F-8B9E-54671515639A}"/>
                 </a:ext>
               </a:extLst>
             </p:cNvPr>
@@ -24562,7 +24645,7 @@
             <p:cNvPr id="367" name="F1_0366_patch_345">
               <a:extLst>
                 <a:ext uri="{FF2B5EF4-FFF2-40B4-BE49-F238E27FC236}">
-                  <a16:creationId id="{EB65CE4F-E73A-4E8F-9DAF-495BEE8EFFD8}"/>
+                  <a16:creationId xmlns:a16="http://schemas.microsoft.com/office/drawing/2014/main" id="{EB65CE4F-E73A-4E8F-9DAF-495BEE8EFFD8}"/>
                 </a:ext>
               </a:extLst>
             </p:cNvPr>
@@ -24614,7 +24697,7 @@
             <p:cNvPr id="368" name="F1_0367_patch_346">
               <a:extLst>
                 <a:ext uri="{FF2B5EF4-FFF2-40B4-BE49-F238E27FC236}">
-                  <a16:creationId id="{94C4ABBA-8ACC-4711-8065-C5D328632DE0}"/>
+                  <a16:creationId xmlns:a16="http://schemas.microsoft.com/office/drawing/2014/main" id="{94C4ABBA-8ACC-4711-8065-C5D328632DE0}"/>
                 </a:ext>
               </a:extLst>
             </p:cNvPr>
@@ -24666,7 +24749,7 @@
             <p:cNvPr id="369" name="F1_0368_patch_347">
               <a:extLst>
                 <a:ext uri="{FF2B5EF4-FFF2-40B4-BE49-F238E27FC236}">
-                  <a16:creationId id="{B9FDBD20-F741-4007-92DC-F50FBCC66E03}"/>
+                  <a16:creationId xmlns:a16="http://schemas.microsoft.com/office/drawing/2014/main" id="{B9FDBD20-F741-4007-92DC-F50FBCC66E03}"/>
                 </a:ext>
               </a:extLst>
             </p:cNvPr>
@@ -24718,7 +24801,7 @@
             <p:cNvPr id="370" name="F1_0369_patch_348">
               <a:extLst>
                 <a:ext uri="{FF2B5EF4-FFF2-40B4-BE49-F238E27FC236}">
-                  <a16:creationId id="{475C0376-7171-48B0-9A55-5BEBE31C2B32}"/>
+                  <a16:creationId xmlns:a16="http://schemas.microsoft.com/office/drawing/2014/main" id="{475C0376-7171-48B0-9A55-5BEBE31C2B32}"/>
                 </a:ext>
               </a:extLst>
             </p:cNvPr>
@@ -24770,7 +24853,7 @@
             <p:cNvPr id="371" name="F1_0370_patch_349">
               <a:extLst>
                 <a:ext uri="{FF2B5EF4-FFF2-40B4-BE49-F238E27FC236}">
-                  <a16:creationId id="{363177A1-5FAA-47E5-BB6B-A5B657907C0E}"/>
+                  <a16:creationId xmlns:a16="http://schemas.microsoft.com/office/drawing/2014/main" id="{363177A1-5FAA-47E5-BB6B-A5B657907C0E}"/>
                 </a:ext>
               </a:extLst>
             </p:cNvPr>
@@ -24822,7 +24905,7 @@
             <p:cNvPr id="372" name="F1_0371_patch_350">
               <a:extLst>
                 <a:ext uri="{FF2B5EF4-FFF2-40B4-BE49-F238E27FC236}">
-                  <a16:creationId id="{D91247CD-211A-40C5-9899-8FD8C07FF3AB}"/>
+                  <a16:creationId xmlns:a16="http://schemas.microsoft.com/office/drawing/2014/main" id="{D91247CD-211A-40C5-9899-8FD8C07FF3AB}"/>
                 </a:ext>
               </a:extLst>
             </p:cNvPr>
@@ -24874,7 +24957,7 @@
             <p:cNvPr id="373" name="F1_0372_patch_351">
               <a:extLst>
                 <a:ext uri="{FF2B5EF4-FFF2-40B4-BE49-F238E27FC236}">
-                  <a16:creationId id="{BF907C3D-3D8E-4905-9616-DE90095293C3}"/>
+                  <a16:creationId xmlns:a16="http://schemas.microsoft.com/office/drawing/2014/main" id="{BF907C3D-3D8E-4905-9616-DE90095293C3}"/>
                 </a:ext>
               </a:extLst>
             </p:cNvPr>
@@ -24926,7 +25009,7 @@
             <p:cNvPr id="374" name="F1_0373_patch_352">
               <a:extLst>
                 <a:ext uri="{FF2B5EF4-FFF2-40B4-BE49-F238E27FC236}">
-                  <a16:creationId id="{5AB1AA5E-8B62-4412-9317-CE06170FE6C6}"/>
+                  <a16:creationId xmlns:a16="http://schemas.microsoft.com/office/drawing/2014/main" id="{5AB1AA5E-8B62-4412-9317-CE06170FE6C6}"/>
                 </a:ext>
               </a:extLst>
             </p:cNvPr>
@@ -24978,7 +25061,7 @@
             <p:cNvPr id="375" name="F1_0374_patch_353">
               <a:extLst>
                 <a:ext uri="{FF2B5EF4-FFF2-40B4-BE49-F238E27FC236}">
-                  <a16:creationId id="{49D81421-330B-4239-9719-EC6BA7972999}"/>
+                  <a16:creationId xmlns:a16="http://schemas.microsoft.com/office/drawing/2014/main" id="{49D81421-330B-4239-9719-EC6BA7972999}"/>
                 </a:ext>
               </a:extLst>
             </p:cNvPr>
@@ -25030,7 +25113,7 @@
             <p:cNvPr id="376" name="F1_0375_patch_354">
               <a:extLst>
                 <a:ext uri="{FF2B5EF4-FFF2-40B4-BE49-F238E27FC236}">
-                  <a16:creationId id="{DCFEFA9A-7EDB-4498-87BA-AF134C70FF56}"/>
+                  <a16:creationId xmlns:a16="http://schemas.microsoft.com/office/drawing/2014/main" id="{DCFEFA9A-7EDB-4498-87BA-AF134C70FF56}"/>
                 </a:ext>
               </a:extLst>
             </p:cNvPr>
@@ -25082,7 +25165,7 @@
             <p:cNvPr id="377" name="F1_0376_patch_355">
               <a:extLst>
                 <a:ext uri="{FF2B5EF4-FFF2-40B4-BE49-F238E27FC236}">
-                  <a16:creationId id="{299F1343-57D7-4AB7-AA55-F212CC007C0E}"/>
+                  <a16:creationId xmlns:a16="http://schemas.microsoft.com/office/drawing/2014/main" id="{299F1343-57D7-4AB7-AA55-F212CC007C0E}"/>
                 </a:ext>
               </a:extLst>
             </p:cNvPr>
@@ -25134,7 +25217,7 @@
             <p:cNvPr id="378" name="F1_0377_patch_356">
               <a:extLst>
                 <a:ext uri="{FF2B5EF4-FFF2-40B4-BE49-F238E27FC236}">
-                  <a16:creationId id="{48C650F6-5F48-4DDA-81B9-46556F4AC862}"/>
+                  <a16:creationId xmlns:a16="http://schemas.microsoft.com/office/drawing/2014/main" id="{48C650F6-5F48-4DDA-81B9-46556F4AC862}"/>
                 </a:ext>
               </a:extLst>
             </p:cNvPr>
@@ -25186,7 +25269,7 @@
             <p:cNvPr id="379" name="F1_0378_patch_357">
               <a:extLst>
                 <a:ext uri="{FF2B5EF4-FFF2-40B4-BE49-F238E27FC236}">
-                  <a16:creationId id="{CC499B65-97B4-4A91-9F3E-9EEFDCB0EFF2}"/>
+                  <a16:creationId xmlns:a16="http://schemas.microsoft.com/office/drawing/2014/main" id="{CC499B65-97B4-4A91-9F3E-9EEFDCB0EFF2}"/>
                 </a:ext>
               </a:extLst>
             </p:cNvPr>
@@ -25238,7 +25321,7 @@
             <p:cNvPr id="380" name="F1_0379_patch_358">
               <a:extLst>
                 <a:ext uri="{FF2B5EF4-FFF2-40B4-BE49-F238E27FC236}">
-                  <a16:creationId id="{A20FF693-3C87-474D-AA02-4BD74C5B54E2}"/>
+                  <a16:creationId xmlns:a16="http://schemas.microsoft.com/office/drawing/2014/main" id="{A20FF693-3C87-474D-AA02-4BD74C5B54E2}"/>
                 </a:ext>
               </a:extLst>
             </p:cNvPr>
@@ -25290,7 +25373,7 @@
             <p:cNvPr id="381" name="F1_0380_patch_359">
               <a:extLst>
                 <a:ext uri="{FF2B5EF4-FFF2-40B4-BE49-F238E27FC236}">
-                  <a16:creationId id="{4F91D958-EFEF-413F-BFAD-3A8E88B69BAD}"/>
+                  <a16:creationId xmlns:a16="http://schemas.microsoft.com/office/drawing/2014/main" id="{4F91D958-EFEF-413F-BFAD-3A8E88B69BAD}"/>
                 </a:ext>
               </a:extLst>
             </p:cNvPr>
@@ -25342,7 +25425,7 @@
             <p:cNvPr id="382" name="F1_0381_patch_360">
               <a:extLst>
                 <a:ext uri="{FF2B5EF4-FFF2-40B4-BE49-F238E27FC236}">
-                  <a16:creationId id="{5317F241-534C-40C2-AE33-A8D6D87B65DE}"/>
+                  <a16:creationId xmlns:a16="http://schemas.microsoft.com/office/drawing/2014/main" id="{5317F241-534C-40C2-AE33-A8D6D87B65DE}"/>
                 </a:ext>
               </a:extLst>
             </p:cNvPr>
@@ -25394,7 +25477,7 @@
             <p:cNvPr id="383" name="F1_0382_patch_361">
               <a:extLst>
                 <a:ext uri="{FF2B5EF4-FFF2-40B4-BE49-F238E27FC236}">
-                  <a16:creationId id="{5F63EB21-5ED0-4E44-A117-F71B0F292729}"/>
+                  <a16:creationId xmlns:a16="http://schemas.microsoft.com/office/drawing/2014/main" id="{5F63EB21-5ED0-4E44-A117-F71B0F292729}"/>
                 </a:ext>
               </a:extLst>
             </p:cNvPr>
@@ -25446,7 +25529,7 @@
             <p:cNvPr id="384" name="F1_0383_patch_362">
               <a:extLst>
                 <a:ext uri="{FF2B5EF4-FFF2-40B4-BE49-F238E27FC236}">
-                  <a16:creationId id="{AA13D0E3-0FBD-4C3D-96C9-88600528159E}"/>
+                  <a16:creationId xmlns:a16="http://schemas.microsoft.com/office/drawing/2014/main" id="{AA13D0E3-0FBD-4C3D-96C9-88600528159E}"/>
                 </a:ext>
               </a:extLst>
             </p:cNvPr>
@@ -25498,7 +25581,7 @@
             <p:cNvPr id="385" name="F1_0384_patch_363">
               <a:extLst>
                 <a:ext uri="{FF2B5EF4-FFF2-40B4-BE49-F238E27FC236}">
-                  <a16:creationId id="{B952DAB6-117E-42F8-AD34-676E1C237D25}"/>
+                  <a16:creationId xmlns:a16="http://schemas.microsoft.com/office/drawing/2014/main" id="{B952DAB6-117E-42F8-AD34-676E1C237D25}"/>
                 </a:ext>
               </a:extLst>
             </p:cNvPr>
@@ -25550,7 +25633,7 @@
             <p:cNvPr id="386" name="F1_0385_patch_364">
               <a:extLst>
                 <a:ext uri="{FF2B5EF4-FFF2-40B4-BE49-F238E27FC236}">
-                  <a16:creationId id="{C5A7A5A6-DD85-4CEF-8B92-90B826AEADF0}"/>
+                  <a16:creationId xmlns:a16="http://schemas.microsoft.com/office/drawing/2014/main" id="{C5A7A5A6-DD85-4CEF-8B92-90B826AEADF0}"/>
                 </a:ext>
               </a:extLst>
             </p:cNvPr>
@@ -25602,7 +25685,7 @@
             <p:cNvPr id="387" name="F1_0386_patch_365">
               <a:extLst>
                 <a:ext uri="{FF2B5EF4-FFF2-40B4-BE49-F238E27FC236}">
-                  <a16:creationId id="{0CFF5A62-394E-429C-90EE-83891941EBDE}"/>
+                  <a16:creationId xmlns:a16="http://schemas.microsoft.com/office/drawing/2014/main" id="{0CFF5A62-394E-429C-90EE-83891941EBDE}"/>
                 </a:ext>
               </a:extLst>
             </p:cNvPr>
@@ -25654,7 +25737,7 @@
             <p:cNvPr id="388" name="F1_0387_patch_366">
               <a:extLst>
                 <a:ext uri="{FF2B5EF4-FFF2-40B4-BE49-F238E27FC236}">
-                  <a16:creationId id="{3B342821-8357-419D-B1E0-77721F29398B}"/>
+                  <a16:creationId xmlns:a16="http://schemas.microsoft.com/office/drawing/2014/main" id="{3B342821-8357-419D-B1E0-77721F29398B}"/>
                 </a:ext>
               </a:extLst>
             </p:cNvPr>
@@ -25706,7 +25789,7 @@
             <p:cNvPr id="389" name="F1_0388_patch_367">
               <a:extLst>
                 <a:ext uri="{FF2B5EF4-FFF2-40B4-BE49-F238E27FC236}">
-                  <a16:creationId id="{5521B187-8C7D-4757-BBE5-05CAE4E3C7B5}"/>
+                  <a16:creationId xmlns:a16="http://schemas.microsoft.com/office/drawing/2014/main" id="{5521B187-8C7D-4757-BBE5-05CAE4E3C7B5}"/>
                 </a:ext>
               </a:extLst>
             </p:cNvPr>
@@ -25758,7 +25841,7 @@
             <p:cNvPr id="390" name="F1_0389_patch_368">
               <a:extLst>
                 <a:ext uri="{FF2B5EF4-FFF2-40B4-BE49-F238E27FC236}">
-                  <a16:creationId id="{EFD09CAF-0A7C-4347-AE34-F53EC6ED831F}"/>
+                  <a16:creationId xmlns:a16="http://schemas.microsoft.com/office/drawing/2014/main" id="{EFD09CAF-0A7C-4347-AE34-F53EC6ED831F}"/>
                 </a:ext>
               </a:extLst>
             </p:cNvPr>
@@ -25810,7 +25893,7 @@
             <p:cNvPr id="391" name="F1_0390_patch_369">
               <a:extLst>
                 <a:ext uri="{FF2B5EF4-FFF2-40B4-BE49-F238E27FC236}">
-                  <a16:creationId id="{4EE4CC05-F0E3-414D-9A0C-694403CAEE6F}"/>
+                  <a16:creationId xmlns:a16="http://schemas.microsoft.com/office/drawing/2014/main" id="{4EE4CC05-F0E3-414D-9A0C-694403CAEE6F}"/>
                 </a:ext>
               </a:extLst>
             </p:cNvPr>
@@ -25862,7 +25945,7 @@
             <p:cNvPr id="392" name="F1_0391_patch_370">
               <a:extLst>
                 <a:ext uri="{FF2B5EF4-FFF2-40B4-BE49-F238E27FC236}">
-                  <a16:creationId id="{02F94618-7CD0-4A39-98E2-909B5EFD47DC}"/>
+                  <a16:creationId xmlns:a16="http://schemas.microsoft.com/office/drawing/2014/main" id="{02F94618-7CD0-4A39-98E2-909B5EFD47DC}"/>
                 </a:ext>
               </a:extLst>
             </p:cNvPr>
@@ -25914,7 +25997,7 @@
             <p:cNvPr id="393" name="F1_0392_patch_371">
               <a:extLst>
                 <a:ext uri="{FF2B5EF4-FFF2-40B4-BE49-F238E27FC236}">
-                  <a16:creationId id="{2C673F0A-7277-4828-9CEF-877DDA1ABC10}"/>
+                  <a16:creationId xmlns:a16="http://schemas.microsoft.com/office/drawing/2014/main" id="{2C673F0A-7277-4828-9CEF-877DDA1ABC10}"/>
                 </a:ext>
               </a:extLst>
             </p:cNvPr>
@@ -25966,7 +26049,7 @@
             <p:cNvPr id="394" name="F1_0393_patch_372">
               <a:extLst>
                 <a:ext uri="{FF2B5EF4-FFF2-40B4-BE49-F238E27FC236}">
-                  <a16:creationId id="{5934BFF7-58FE-4727-9096-07F747D2F116}"/>
+                  <a16:creationId xmlns:a16="http://schemas.microsoft.com/office/drawing/2014/main" id="{5934BFF7-58FE-4727-9096-07F747D2F116}"/>
                 </a:ext>
               </a:extLst>
             </p:cNvPr>
@@ -26018,7 +26101,7 @@
             <p:cNvPr id="395" name="F1_0394_patch_373">
               <a:extLst>
                 <a:ext uri="{FF2B5EF4-FFF2-40B4-BE49-F238E27FC236}">
-                  <a16:creationId id="{72B8DF8B-6581-42C5-A533-9FD96AA878EA}"/>
+                  <a16:creationId xmlns:a16="http://schemas.microsoft.com/office/drawing/2014/main" id="{72B8DF8B-6581-42C5-A533-9FD96AA878EA}"/>
                 </a:ext>
               </a:extLst>
             </p:cNvPr>
@@ -26070,7 +26153,7 @@
             <p:cNvPr id="396" name="F1_0395_patch_374">
               <a:extLst>
                 <a:ext uri="{FF2B5EF4-FFF2-40B4-BE49-F238E27FC236}">
-                  <a16:creationId id="{500132F6-7872-4A60-819D-E35ADDF73E39}"/>
+                  <a16:creationId xmlns:a16="http://schemas.microsoft.com/office/drawing/2014/main" id="{500132F6-7872-4A60-819D-E35ADDF73E39}"/>
                 </a:ext>
               </a:extLst>
             </p:cNvPr>
@@ -26122,7 +26205,7 @@
             <p:cNvPr id="397" name="F1_0396_patch_375">
               <a:extLst>
                 <a:ext uri="{FF2B5EF4-FFF2-40B4-BE49-F238E27FC236}">
-                  <a16:creationId id="{5C6FD5D6-273B-4D72-B6E1-FD0ADF24E269}"/>
+                  <a16:creationId xmlns:a16="http://schemas.microsoft.com/office/drawing/2014/main" id="{5C6FD5D6-273B-4D72-B6E1-FD0ADF24E269}"/>
                 </a:ext>
               </a:extLst>
             </p:cNvPr>
@@ -26174,7 +26257,7 @@
             <p:cNvPr id="398" name="F1_0397_patch_376">
               <a:extLst>
                 <a:ext uri="{FF2B5EF4-FFF2-40B4-BE49-F238E27FC236}">
-                  <a16:creationId id="{DE3528ED-706E-4C66-8FFE-6959315C912A}"/>
+                  <a16:creationId xmlns:a16="http://schemas.microsoft.com/office/drawing/2014/main" id="{DE3528ED-706E-4C66-8FFE-6959315C912A}"/>
                 </a:ext>
               </a:extLst>
             </p:cNvPr>
@@ -26226,7 +26309,7 @@
             <p:cNvPr id="399" name="F1_0398_patch_377">
               <a:extLst>
                 <a:ext uri="{FF2B5EF4-FFF2-40B4-BE49-F238E27FC236}">
-                  <a16:creationId id="{F832E90A-6E07-48DA-9889-45AF8B36ED38}"/>
+                  <a16:creationId xmlns:a16="http://schemas.microsoft.com/office/drawing/2014/main" id="{F832E90A-6E07-48DA-9889-45AF8B36ED38}"/>
                 </a:ext>
               </a:extLst>
             </p:cNvPr>
@@ -26278,7 +26361,7 @@
             <p:cNvPr id="400" name="F1_0399_patch_378">
               <a:extLst>
                 <a:ext uri="{FF2B5EF4-FFF2-40B4-BE49-F238E27FC236}">
-                  <a16:creationId id="{88238BF8-8A76-483D-82DC-2111B7F7441F}"/>
+                  <a16:creationId xmlns:a16="http://schemas.microsoft.com/office/drawing/2014/main" id="{88238BF8-8A76-483D-82DC-2111B7F7441F}"/>
                 </a:ext>
               </a:extLst>
             </p:cNvPr>
@@ -26330,7 +26413,7 @@
             <p:cNvPr id="401" name="F1_0400_patch_379">
               <a:extLst>
                 <a:ext uri="{FF2B5EF4-FFF2-40B4-BE49-F238E27FC236}">
-                  <a16:creationId id="{5645E3B5-4A82-4E2B-B756-7A14FF1D2C9D}"/>
+                  <a16:creationId xmlns:a16="http://schemas.microsoft.com/office/drawing/2014/main" id="{5645E3B5-4A82-4E2B-B756-7A14FF1D2C9D}"/>
                 </a:ext>
               </a:extLst>
             </p:cNvPr>
@@ -26382,7 +26465,7 @@
             <p:cNvPr id="402" name="F1_0401_patch_380">
               <a:extLst>
                 <a:ext uri="{FF2B5EF4-FFF2-40B4-BE49-F238E27FC236}">
-                  <a16:creationId id="{FFB10ECD-5CA6-49F9-A406-C52283A541B1}"/>
+                  <a16:creationId xmlns:a16="http://schemas.microsoft.com/office/drawing/2014/main" id="{FFB10ECD-5CA6-49F9-A406-C52283A541B1}"/>
                 </a:ext>
               </a:extLst>
             </p:cNvPr>
@@ -26434,7 +26517,7 @@
             <p:cNvPr id="403" name="F1_0402_patch_381">
               <a:extLst>
                 <a:ext uri="{FF2B5EF4-FFF2-40B4-BE49-F238E27FC236}">
-                  <a16:creationId id="{C2457E25-7539-4F5D-85BE-B9C062A19DD0}"/>
+                  <a16:creationId xmlns:a16="http://schemas.microsoft.com/office/drawing/2014/main" id="{C2457E25-7539-4F5D-85BE-B9C062A19DD0}"/>
                 </a:ext>
               </a:extLst>
             </p:cNvPr>
@@ -26486,7 +26569,7 @@
             <p:cNvPr id="404" name="F1_0403_patch_382">
               <a:extLst>
                 <a:ext uri="{FF2B5EF4-FFF2-40B4-BE49-F238E27FC236}">
-                  <a16:creationId id="{2F0DED82-D924-4CF8-80A1-43F25220379D}"/>
+                  <a16:creationId xmlns:a16="http://schemas.microsoft.com/office/drawing/2014/main" id="{2F0DED82-D924-4CF8-80A1-43F25220379D}"/>
                 </a:ext>
               </a:extLst>
             </p:cNvPr>
@@ -26538,7 +26621,7 @@
             <p:cNvPr id="405" name="F1_0404_patch_383">
               <a:extLst>
                 <a:ext uri="{FF2B5EF4-FFF2-40B4-BE49-F238E27FC236}">
-                  <a16:creationId id="{3A523884-FF14-4C65-8158-4928367F3197}"/>
+                  <a16:creationId xmlns:a16="http://schemas.microsoft.com/office/drawing/2014/main" id="{3A523884-FF14-4C65-8158-4928367F3197}"/>
                 </a:ext>
               </a:extLst>
             </p:cNvPr>
@@ -26590,7 +26673,7 @@
             <p:cNvPr id="406" name="F1_0405_patch_384">
               <a:extLst>
                 <a:ext uri="{FF2B5EF4-FFF2-40B4-BE49-F238E27FC236}">
-                  <a16:creationId id="{85D4B3C5-FCD9-4B1D-ABFF-FD4523BDEEBA}"/>
+                  <a16:creationId xmlns:a16="http://schemas.microsoft.com/office/drawing/2014/main" id="{85D4B3C5-FCD9-4B1D-ABFF-FD4523BDEEBA}"/>
                 </a:ext>
               </a:extLst>
             </p:cNvPr>
@@ -26642,7 +26725,7 @@
             <p:cNvPr id="407" name="F1_0406_patch_385">
               <a:extLst>
                 <a:ext uri="{FF2B5EF4-FFF2-40B4-BE49-F238E27FC236}">
-                  <a16:creationId id="{CB442335-334C-4C39-8472-0F48C021649B}"/>
+                  <a16:creationId xmlns:a16="http://schemas.microsoft.com/office/drawing/2014/main" id="{CB442335-334C-4C39-8472-0F48C021649B}"/>
                 </a:ext>
               </a:extLst>
             </p:cNvPr>
@@ -26694,7 +26777,7 @@
             <p:cNvPr id="408" name="F1_0407_patch_386">
               <a:extLst>
                 <a:ext uri="{FF2B5EF4-FFF2-40B4-BE49-F238E27FC236}">
-                  <a16:creationId id="{0C5B426E-7D61-422F-9E4B-E2EB87BB0ADD}"/>
+                  <a16:creationId xmlns:a16="http://schemas.microsoft.com/office/drawing/2014/main" id="{0C5B426E-7D61-422F-9E4B-E2EB87BB0ADD}"/>
                 </a:ext>
               </a:extLst>
             </p:cNvPr>
@@ -26746,7 +26829,7 @@
             <p:cNvPr id="409" name="F1_0408_patch_387">
               <a:extLst>
                 <a:ext uri="{FF2B5EF4-FFF2-40B4-BE49-F238E27FC236}">
-                  <a16:creationId id="{C09C8031-6134-493D-9675-119F698BCA24}"/>
+                  <a16:creationId xmlns:a16="http://schemas.microsoft.com/office/drawing/2014/main" id="{C09C8031-6134-493D-9675-119F698BCA24}"/>
                 </a:ext>
               </a:extLst>
             </p:cNvPr>
@@ -26798,7 +26881,7 @@
             <p:cNvPr id="410" name="F1_0409_patch_388">
               <a:extLst>
                 <a:ext uri="{FF2B5EF4-FFF2-40B4-BE49-F238E27FC236}">
-                  <a16:creationId id="{AAD7C2A4-31B4-424D-B20F-9079BFDC5235}"/>
+                  <a16:creationId xmlns:a16="http://schemas.microsoft.com/office/drawing/2014/main" id="{AAD7C2A4-31B4-424D-B20F-9079BFDC5235}"/>
                 </a:ext>
               </a:extLst>
             </p:cNvPr>
@@ -26850,7 +26933,7 @@
             <p:cNvPr id="411" name="F1_0410_patch_389">
               <a:extLst>
                 <a:ext uri="{FF2B5EF4-FFF2-40B4-BE49-F238E27FC236}">
-                  <a16:creationId id="{B4EBCD86-8059-4DED-9B80-CC7462531C5E}"/>
+                  <a16:creationId xmlns:a16="http://schemas.microsoft.com/office/drawing/2014/main" id="{B4EBCD86-8059-4DED-9B80-CC7462531C5E}"/>
                 </a:ext>
               </a:extLst>
             </p:cNvPr>
@@ -26902,7 +26985,7 @@
             <p:cNvPr id="412" name="F1_0411_patch_390">
               <a:extLst>
                 <a:ext uri="{FF2B5EF4-FFF2-40B4-BE49-F238E27FC236}">
-                  <a16:creationId id="{281B4B28-E7BE-41A1-8D1B-EBDF6B925FF1}"/>
+                  <a16:creationId xmlns:a16="http://schemas.microsoft.com/office/drawing/2014/main" id="{281B4B28-E7BE-41A1-8D1B-EBDF6B925FF1}"/>
                 </a:ext>
               </a:extLst>
             </p:cNvPr>
@@ -26954,7 +27037,7 @@
             <p:cNvPr id="413" name="F1_0412_patch_391">
               <a:extLst>
                 <a:ext uri="{FF2B5EF4-FFF2-40B4-BE49-F238E27FC236}">
-                  <a16:creationId id="{44E2EFC2-4EF8-4C12-A460-B51C522C6DE0}"/>
+                  <a16:creationId xmlns:a16="http://schemas.microsoft.com/office/drawing/2014/main" id="{44E2EFC2-4EF8-4C12-A460-B51C522C6DE0}"/>
                 </a:ext>
               </a:extLst>
             </p:cNvPr>
@@ -27006,7 +27089,7 @@
             <p:cNvPr id="414" name="F1_0413_patch_392">
               <a:extLst>
                 <a:ext uri="{FF2B5EF4-FFF2-40B4-BE49-F238E27FC236}">
-                  <a16:creationId id="{25152989-D249-42B3-BE9C-39C16EA063D9}"/>
+                  <a16:creationId xmlns:a16="http://schemas.microsoft.com/office/drawing/2014/main" id="{25152989-D249-42B3-BE9C-39C16EA063D9}"/>
                 </a:ext>
               </a:extLst>
             </p:cNvPr>
@@ -27058,7 +27141,7 @@
             <p:cNvPr id="415" name="F1_0414_patch_393">
               <a:extLst>
                 <a:ext uri="{FF2B5EF4-FFF2-40B4-BE49-F238E27FC236}">
-                  <a16:creationId id="{E0485C94-DC36-4120-BBA5-107F1A2A058A}"/>
+                  <a16:creationId xmlns:a16="http://schemas.microsoft.com/office/drawing/2014/main" id="{E0485C94-DC36-4120-BBA5-107F1A2A058A}"/>
                 </a:ext>
               </a:extLst>
             </p:cNvPr>
@@ -27110,7 +27193,7 @@
             <p:cNvPr id="416" name="F1_0415_patch_394">
               <a:extLst>
                 <a:ext uri="{FF2B5EF4-FFF2-40B4-BE49-F238E27FC236}">
-                  <a16:creationId id="{6F58E840-5613-4080-B92C-9F4848241A1C}"/>
+                  <a16:creationId xmlns:a16="http://schemas.microsoft.com/office/drawing/2014/main" id="{6F58E840-5613-4080-B92C-9F4848241A1C}"/>
                 </a:ext>
               </a:extLst>
             </p:cNvPr>
@@ -27162,7 +27245,7 @@
             <p:cNvPr id="417" name="F1_0416_patch_395">
               <a:extLst>
                 <a:ext uri="{FF2B5EF4-FFF2-40B4-BE49-F238E27FC236}">
-                  <a16:creationId id="{4645882F-99AE-4E54-BDAB-6DA6724D35B7}"/>
+                  <a16:creationId xmlns:a16="http://schemas.microsoft.com/office/drawing/2014/main" id="{4645882F-99AE-4E54-BDAB-6DA6724D35B7}"/>
                 </a:ext>
               </a:extLst>
             </p:cNvPr>
@@ -27214,7 +27297,7 @@
             <p:cNvPr id="418" name="F1_0417_patch_396">
               <a:extLst>
                 <a:ext uri="{FF2B5EF4-FFF2-40B4-BE49-F238E27FC236}">
-                  <a16:creationId id="{27DD0A23-64D2-4193-AEBC-C28272F6D355}"/>
+                  <a16:creationId xmlns:a16="http://schemas.microsoft.com/office/drawing/2014/main" id="{27DD0A23-64D2-4193-AEBC-C28272F6D355}"/>
                 </a:ext>
               </a:extLst>
             </p:cNvPr>
@@ -27266,7 +27349,7 @@
             <p:cNvPr id="419" name="F1_0418_patch_397">
               <a:extLst>
                 <a:ext uri="{FF2B5EF4-FFF2-40B4-BE49-F238E27FC236}">
-                  <a16:creationId id="{DA965D1A-153F-4A49-B428-A0D3C40D2F1B}"/>
+                  <a16:creationId xmlns:a16="http://schemas.microsoft.com/office/drawing/2014/main" id="{DA965D1A-153F-4A49-B428-A0D3C40D2F1B}"/>
                 </a:ext>
               </a:extLst>
             </p:cNvPr>
@@ -27318,7 +27401,7 @@
             <p:cNvPr id="420" name="F1_0419_patch_398">
               <a:extLst>
                 <a:ext uri="{FF2B5EF4-FFF2-40B4-BE49-F238E27FC236}">
-                  <a16:creationId id="{2048DCC1-AAF3-4CAC-BED0-D73E5C6318EC}"/>
+                  <a16:creationId xmlns:a16="http://schemas.microsoft.com/office/drawing/2014/main" id="{2048DCC1-AAF3-4CAC-BED0-D73E5C6318EC}"/>
                 </a:ext>
               </a:extLst>
             </p:cNvPr>
@@ -27370,7 +27453,7 @@
             <p:cNvPr id="421" name="F1_0420_patch_399">
               <a:extLst>
                 <a:ext uri="{FF2B5EF4-FFF2-40B4-BE49-F238E27FC236}">
-                  <a16:creationId id="{6775B01B-66C9-435E-B0F9-C2BAA7747AC0}"/>
+                  <a16:creationId xmlns:a16="http://schemas.microsoft.com/office/drawing/2014/main" id="{6775B01B-66C9-435E-B0F9-C2BAA7747AC0}"/>
                 </a:ext>
               </a:extLst>
             </p:cNvPr>
@@ -27422,7 +27505,7 @@
             <p:cNvPr id="422" name="F1_0421_patch_400">
               <a:extLst>
                 <a:ext uri="{FF2B5EF4-FFF2-40B4-BE49-F238E27FC236}">
-                  <a16:creationId id="{8B80D8A7-4F23-4C58-A073-61C9C2DA1B30}"/>
+                  <a16:creationId xmlns:a16="http://schemas.microsoft.com/office/drawing/2014/main" id="{8B80D8A7-4F23-4C58-A073-61C9C2DA1B30}"/>
                 </a:ext>
               </a:extLst>
             </p:cNvPr>
@@ -27474,7 +27557,7 @@
             <p:cNvPr id="423" name="F1_0422_patch_401">
               <a:extLst>
                 <a:ext uri="{FF2B5EF4-FFF2-40B4-BE49-F238E27FC236}">
-                  <a16:creationId id="{9F9D1823-A22E-4FDA-9D6E-32E2C32312E4}"/>
+                  <a16:creationId xmlns:a16="http://schemas.microsoft.com/office/drawing/2014/main" id="{9F9D1823-A22E-4FDA-9D6E-32E2C32312E4}"/>
                 </a:ext>
               </a:extLst>
             </p:cNvPr>
@@ -27526,7 +27609,7 @@
             <p:cNvPr id="424" name="F1_0423_patch_402">
               <a:extLst>
                 <a:ext uri="{FF2B5EF4-FFF2-40B4-BE49-F238E27FC236}">
-                  <a16:creationId id="{A0E74112-46A5-484A-8FEB-CF2B2AD1D7D6}"/>
+                  <a16:creationId xmlns:a16="http://schemas.microsoft.com/office/drawing/2014/main" id="{A0E74112-46A5-484A-8FEB-CF2B2AD1D7D6}"/>
                 </a:ext>
               </a:extLst>
             </p:cNvPr>
@@ -27578,7 +27661,7 @@
             <p:cNvPr id="425" name="F1_0424_patch_403">
               <a:extLst>
                 <a:ext uri="{FF2B5EF4-FFF2-40B4-BE49-F238E27FC236}">
-                  <a16:creationId id="{F6DC0B5D-5099-4FBE-85A4-C1832BF48F45}"/>
+                  <a16:creationId xmlns:a16="http://schemas.microsoft.com/office/drawing/2014/main" id="{F6DC0B5D-5099-4FBE-85A4-C1832BF48F45}"/>
                 </a:ext>
               </a:extLst>
             </p:cNvPr>
@@ -27630,7 +27713,7 @@
             <p:cNvPr id="426" name="F1_0425_patch_404">
               <a:extLst>
                 <a:ext uri="{FF2B5EF4-FFF2-40B4-BE49-F238E27FC236}">
-                  <a16:creationId id="{E63D9A1F-95C9-4D46-90AC-E82AAA9C0475}"/>
+                  <a16:creationId xmlns:a16="http://schemas.microsoft.com/office/drawing/2014/main" id="{E63D9A1F-95C9-4D46-90AC-E82AAA9C0475}"/>
                 </a:ext>
               </a:extLst>
             </p:cNvPr>
@@ -27682,7 +27765,7 @@
             <p:cNvPr id="427" name="F1_0426_patch_405">
               <a:extLst>
                 <a:ext uri="{FF2B5EF4-FFF2-40B4-BE49-F238E27FC236}">
-                  <a16:creationId id="{097AC317-CF82-4433-9F0A-689D36C095B9}"/>
+                  <a16:creationId xmlns:a16="http://schemas.microsoft.com/office/drawing/2014/main" id="{097AC317-CF82-4433-9F0A-689D36C095B9}"/>
                 </a:ext>
               </a:extLst>
             </p:cNvPr>
@@ -27734,7 +27817,7 @@
             <p:cNvPr id="428" name="F1_0427_patch_406">
               <a:extLst>
                 <a:ext uri="{FF2B5EF4-FFF2-40B4-BE49-F238E27FC236}">
-                  <a16:creationId id="{DE6A6823-214D-4321-A835-CE61655607A3}"/>
+                  <a16:creationId xmlns:a16="http://schemas.microsoft.com/office/drawing/2014/main" id="{DE6A6823-214D-4321-A835-CE61655607A3}"/>
                 </a:ext>
               </a:extLst>
             </p:cNvPr>
@@ -27786,7 +27869,7 @@
             <p:cNvPr id="429" name="F1_0428_patch_407">
               <a:extLst>
                 <a:ext uri="{FF2B5EF4-FFF2-40B4-BE49-F238E27FC236}">
-                  <a16:creationId id="{36055ED5-10BE-46F6-B6F3-4B86CB855227}"/>
+                  <a16:creationId xmlns:a16="http://schemas.microsoft.com/office/drawing/2014/main" id="{36055ED5-10BE-46F6-B6F3-4B86CB855227}"/>
                 </a:ext>
               </a:extLst>
             </p:cNvPr>
@@ -27838,7 +27921,7 @@
             <p:cNvPr id="430" name="F1_0429_patch_408">
               <a:extLst>
                 <a:ext uri="{FF2B5EF4-FFF2-40B4-BE49-F238E27FC236}">
-                  <a16:creationId id="{634F47BC-3661-4AD8-AF1E-A8E8D5068B15}"/>
+                  <a16:creationId xmlns:a16="http://schemas.microsoft.com/office/drawing/2014/main" id="{634F47BC-3661-4AD8-AF1E-A8E8D5068B15}"/>
                 </a:ext>
               </a:extLst>
             </p:cNvPr>
@@ -27890,7 +27973,7 @@
             <p:cNvPr id="431" name="F1_0430_patch_409">
               <a:extLst>
                 <a:ext uri="{FF2B5EF4-FFF2-40B4-BE49-F238E27FC236}">
-                  <a16:creationId id="{F91BC199-3C16-4BD2-BE12-697AC00FEBC7}"/>
+                  <a16:creationId xmlns:a16="http://schemas.microsoft.com/office/drawing/2014/main" id="{F91BC199-3C16-4BD2-BE12-697AC00FEBC7}"/>
                 </a:ext>
               </a:extLst>
             </p:cNvPr>
@@ -27942,7 +28025,7 @@
             <p:cNvPr id="432" name="F1_0431_patch_410">
               <a:extLst>
                 <a:ext uri="{FF2B5EF4-FFF2-40B4-BE49-F238E27FC236}">
-                  <a16:creationId id="{8F36F0C7-FF21-4020-9944-F9CD7F5AE52B}"/>
+                  <a16:creationId xmlns:a16="http://schemas.microsoft.com/office/drawing/2014/main" id="{8F36F0C7-FF21-4020-9944-F9CD7F5AE52B}"/>
                 </a:ext>
               </a:extLst>
             </p:cNvPr>
@@ -27994,7 +28077,7 @@
             <p:cNvPr id="433" name="F1_0432_patch_411">
               <a:extLst>
                 <a:ext uri="{FF2B5EF4-FFF2-40B4-BE49-F238E27FC236}">
-                  <a16:creationId id="{6672C401-70D3-445F-A910-0F8E02F38730}"/>
+                  <a16:creationId xmlns:a16="http://schemas.microsoft.com/office/drawing/2014/main" id="{6672C401-70D3-445F-A910-0F8E02F38730}"/>
                 </a:ext>
               </a:extLst>
             </p:cNvPr>
@@ -28046,7 +28129,7 @@
             <p:cNvPr id="434" name="F1_0433_patch_412">
               <a:extLst>
                 <a:ext uri="{FF2B5EF4-FFF2-40B4-BE49-F238E27FC236}">
-                  <a16:creationId id="{DCF4A7D7-D007-40C3-AF8F-0D3F42CF2AF6}"/>
+                  <a16:creationId xmlns:a16="http://schemas.microsoft.com/office/drawing/2014/main" id="{DCF4A7D7-D007-40C3-AF8F-0D3F42CF2AF6}"/>
                 </a:ext>
               </a:extLst>
             </p:cNvPr>
@@ -28098,7 +28181,7 @@
             <p:cNvPr id="435" name="F1_0434_patch_413">
               <a:extLst>
                 <a:ext uri="{FF2B5EF4-FFF2-40B4-BE49-F238E27FC236}">
-                  <a16:creationId id="{9108611C-0AC4-4EDF-AD67-5EF2156871A2}"/>
+                  <a16:creationId xmlns:a16="http://schemas.microsoft.com/office/drawing/2014/main" id="{9108611C-0AC4-4EDF-AD67-5EF2156871A2}"/>
                 </a:ext>
               </a:extLst>
             </p:cNvPr>
@@ -28150,7 +28233,7 @@
             <p:cNvPr id="436" name="F1_0435_patch_414">
               <a:extLst>
                 <a:ext uri="{FF2B5EF4-FFF2-40B4-BE49-F238E27FC236}">
-                  <a16:creationId id="{F3707CEE-ACCA-42FE-B3F3-4C0D811CC366}"/>
+                  <a16:creationId xmlns:a16="http://schemas.microsoft.com/office/drawing/2014/main" id="{F3707CEE-ACCA-42FE-B3F3-4C0D811CC366}"/>
                 </a:ext>
               </a:extLst>
             </p:cNvPr>
@@ -28202,7 +28285,7 @@
             <p:cNvPr id="437" name="F1_0436_patch_415">
               <a:extLst>
                 <a:ext uri="{FF2B5EF4-FFF2-40B4-BE49-F238E27FC236}">
-                  <a16:creationId id="{04784F78-43E5-4117-B344-F9E4E139825F}"/>
+                  <a16:creationId xmlns:a16="http://schemas.microsoft.com/office/drawing/2014/main" id="{04784F78-43E5-4117-B344-F9E4E139825F}"/>
                 </a:ext>
               </a:extLst>
             </p:cNvPr>
@@ -28254,7 +28337,7 @@
             <p:cNvPr id="438" name="F1_0437_patch_416">
               <a:extLst>
                 <a:ext uri="{FF2B5EF4-FFF2-40B4-BE49-F238E27FC236}">
-                  <a16:creationId id="{8EBDA97E-CCDB-4414-B058-A5053DC819F8}"/>
+                  <a16:creationId xmlns:a16="http://schemas.microsoft.com/office/drawing/2014/main" id="{8EBDA97E-CCDB-4414-B058-A5053DC819F8}"/>
                 </a:ext>
               </a:extLst>
             </p:cNvPr>
@@ -28306,7 +28389,7 @@
             <p:cNvPr id="439" name="F1_0438_patch_417">
               <a:extLst>
                 <a:ext uri="{FF2B5EF4-FFF2-40B4-BE49-F238E27FC236}">
-                  <a16:creationId id="{98DF3CC2-6E8A-4864-B9C1-9F7716AF3717}"/>
+                  <a16:creationId xmlns:a16="http://schemas.microsoft.com/office/drawing/2014/main" id="{98DF3CC2-6E8A-4864-B9C1-9F7716AF3717}"/>
                 </a:ext>
               </a:extLst>
             </p:cNvPr>
@@ -28358,7 +28441,7 @@
             <p:cNvPr id="440" name="F1_0439_patch_418">
               <a:extLst>
                 <a:ext uri="{FF2B5EF4-FFF2-40B4-BE49-F238E27FC236}">
-                  <a16:creationId id="{06147CE4-DD8A-489A-A227-6CB6CB8D3D18}"/>
+                  <a16:creationId xmlns:a16="http://schemas.microsoft.com/office/drawing/2014/main" id="{06147CE4-DD8A-489A-A227-6CB6CB8D3D18}"/>
                 </a:ext>
               </a:extLst>
             </p:cNvPr>
@@ -28410,7 +28493,7 @@
             <p:cNvPr id="441" name="F1_0440_patch_419">
               <a:extLst>
                 <a:ext uri="{FF2B5EF4-FFF2-40B4-BE49-F238E27FC236}">
-                  <a16:creationId id="{063ACF3F-5BA2-477F-9B26-566E08F61079}"/>
+                  <a16:creationId xmlns:a16="http://schemas.microsoft.com/office/drawing/2014/main" id="{063ACF3F-5BA2-477F-9B26-566E08F61079}"/>
                 </a:ext>
               </a:extLst>
             </p:cNvPr>
@@ -28462,7 +28545,7 @@
             <p:cNvPr id="442" name="F1_0441_patch_420">
               <a:extLst>
                 <a:ext uri="{FF2B5EF4-FFF2-40B4-BE49-F238E27FC236}">
-                  <a16:creationId id="{3AB65E65-7F22-4DBF-AC90-A52656476351}"/>
+                  <a16:creationId xmlns:a16="http://schemas.microsoft.com/office/drawing/2014/main" id="{3AB65E65-7F22-4DBF-AC90-A52656476351}"/>
                 </a:ext>
               </a:extLst>
             </p:cNvPr>
@@ -28514,7 +28597,7 @@
             <p:cNvPr id="443" name="F1_0442_patch_421">
               <a:extLst>
                 <a:ext uri="{FF2B5EF4-FFF2-40B4-BE49-F238E27FC236}">
-                  <a16:creationId id="{8DBCF3E1-9485-4EA9-B8F9-3E48D1BA69F3}"/>
+                  <a16:creationId xmlns:a16="http://schemas.microsoft.com/office/drawing/2014/main" id="{8DBCF3E1-9485-4EA9-B8F9-3E48D1BA69F3}"/>
                 </a:ext>
               </a:extLst>
             </p:cNvPr>
@@ -28566,7 +28649,7 @@
             <p:cNvPr id="444" name="F1_0443_patch_422">
               <a:extLst>
                 <a:ext uri="{FF2B5EF4-FFF2-40B4-BE49-F238E27FC236}">
-                  <a16:creationId id="{7708A859-F656-45E4-874A-D6460061CA20}"/>
+                  <a16:creationId xmlns:a16="http://schemas.microsoft.com/office/drawing/2014/main" id="{7708A859-F656-45E4-874A-D6460061CA20}"/>
                 </a:ext>
               </a:extLst>
             </p:cNvPr>
@@ -28618,7 +28701,7 @@
             <p:cNvPr id="445" name="F1_0444_patch_423">
               <a:extLst>
                 <a:ext uri="{FF2B5EF4-FFF2-40B4-BE49-F238E27FC236}">
-                  <a16:creationId id="{BC6938F8-F1AB-4923-8F21-93960C615877}"/>
+                  <a16:creationId xmlns:a16="http://schemas.microsoft.com/office/drawing/2014/main" id="{BC6938F8-F1AB-4923-8F21-93960C615877}"/>
                 </a:ext>
               </a:extLst>
             </p:cNvPr>
@@ -28670,7 +28753,7 @@
             <p:cNvPr id="446" name="F1_0445_patch_424">
               <a:extLst>
                 <a:ext uri="{FF2B5EF4-FFF2-40B4-BE49-F238E27FC236}">
-                  <a16:creationId id="{CB7871FF-7FE3-4CB8-B6FC-47A83CFE59AE}"/>
+                  <a16:creationId xmlns:a16="http://schemas.microsoft.com/office/drawing/2014/main" id="{CB7871FF-7FE3-4CB8-B6FC-47A83CFE59AE}"/>
                 </a:ext>
               </a:extLst>
             </p:cNvPr>
@@ -28722,7 +28805,7 @@
             <p:cNvPr id="447" name="F1_0446_patch_425">
               <a:extLst>
                 <a:ext uri="{FF2B5EF4-FFF2-40B4-BE49-F238E27FC236}">
-                  <a16:creationId id="{D383414C-88B5-4E17-BCA6-41FC5E2952D3}"/>
+                  <a16:creationId xmlns:a16="http://schemas.microsoft.com/office/drawing/2014/main" id="{D383414C-88B5-4E17-BCA6-41FC5E2952D3}"/>
                 </a:ext>
               </a:extLst>
             </p:cNvPr>
@@ -28774,7 +28857,7 @@
             <p:cNvPr id="448" name="F1_0447_patch_426">
               <a:extLst>
                 <a:ext uri="{FF2B5EF4-FFF2-40B4-BE49-F238E27FC236}">
-                  <a16:creationId id="{783EC7FE-D667-45F1-BA06-D27C994C3F97}"/>
+                  <a16:creationId xmlns:a16="http://schemas.microsoft.com/office/drawing/2014/main" id="{783EC7FE-D667-45F1-BA06-D27C994C3F97}"/>
                 </a:ext>
               </a:extLst>
             </p:cNvPr>
@@ -28826,7 +28909,7 @@
             <p:cNvPr id="449" name="F1_0448_patch_427">
               <a:extLst>
                 <a:ext uri="{FF2B5EF4-FFF2-40B4-BE49-F238E27FC236}">
-                  <a16:creationId id="{C6AC8840-C19E-4505-829A-429169BE41E8}"/>
+                  <a16:creationId xmlns:a16="http://schemas.microsoft.com/office/drawing/2014/main" id="{C6AC8840-C19E-4505-829A-429169BE41E8}"/>
                 </a:ext>
               </a:extLst>
             </p:cNvPr>
@@ -28878,7 +28961,7 @@
             <p:cNvPr id="450" name="F1_0449_patch_428">
               <a:extLst>
                 <a:ext uri="{FF2B5EF4-FFF2-40B4-BE49-F238E27FC236}">
-                  <a16:creationId id="{5FF8C589-92D7-446D-8D64-395BEEBD06AB}"/>
+                  <a16:creationId xmlns:a16="http://schemas.microsoft.com/office/drawing/2014/main" id="{5FF8C589-92D7-446D-8D64-395BEEBD06AB}"/>
                 </a:ext>
               </a:extLst>
             </p:cNvPr>
@@ -28930,7 +29013,7 @@
             <p:cNvPr id="451" name="F1_0450_patch_429">
               <a:extLst>
                 <a:ext uri="{FF2B5EF4-FFF2-40B4-BE49-F238E27FC236}">
-                  <a16:creationId id="{0D3A86D8-65E1-41A2-B1B1-4753CF1A9E24}"/>
+                  <a16:creationId xmlns:a16="http://schemas.microsoft.com/office/drawing/2014/main" id="{0D3A86D8-65E1-41A2-B1B1-4753CF1A9E24}"/>
                 </a:ext>
               </a:extLst>
             </p:cNvPr>
@@ -28982,7 +29065,7 @@
             <p:cNvPr id="452" name="F1_0451_patch_430">
               <a:extLst>
                 <a:ext uri="{FF2B5EF4-FFF2-40B4-BE49-F238E27FC236}">
-                  <a16:creationId id="{8790830B-3303-4D6E-BAD8-4BCC0814C3D1}"/>
+                  <a16:creationId xmlns:a16="http://schemas.microsoft.com/office/drawing/2014/main" id="{8790830B-3303-4D6E-BAD8-4BCC0814C3D1}"/>
                 </a:ext>
               </a:extLst>
             </p:cNvPr>
@@ -29034,7 +29117,7 @@
             <p:cNvPr id="453" name="F1_0452_patch_431">
               <a:extLst>
                 <a:ext uri="{FF2B5EF4-FFF2-40B4-BE49-F238E27FC236}">
-                  <a16:creationId id="{58686922-F358-4305-AAAE-A0A218992106}"/>
+                  <a16:creationId xmlns:a16="http://schemas.microsoft.com/office/drawing/2014/main" id="{58686922-F358-4305-AAAE-A0A218992106}"/>
                 </a:ext>
               </a:extLst>
             </p:cNvPr>
@@ -29086,7 +29169,7 @@
             <p:cNvPr id="454" name="F1_0453_patch_432">
               <a:extLst>
                 <a:ext uri="{FF2B5EF4-FFF2-40B4-BE49-F238E27FC236}">
-                  <a16:creationId id="{726E7691-8B35-4FDF-A76F-FF08306A082B}"/>
+                  <a16:creationId xmlns:a16="http://schemas.microsoft.com/office/drawing/2014/main" id="{726E7691-8B35-4FDF-A76F-FF08306A082B}"/>
                 </a:ext>
               </a:extLst>
             </p:cNvPr>
@@ -29138,7 +29221,7 @@
             <p:cNvPr id="455" name="F1_0454_patch_433">
               <a:extLst>
                 <a:ext uri="{FF2B5EF4-FFF2-40B4-BE49-F238E27FC236}">
-                  <a16:creationId id="{E4921236-BA16-41D9-8875-E453DBB2D87F}"/>
+                  <a16:creationId xmlns:a16="http://schemas.microsoft.com/office/drawing/2014/main" id="{E4921236-BA16-41D9-8875-E453DBB2D87F}"/>
                 </a:ext>
               </a:extLst>
             </p:cNvPr>
@@ -29190,7 +29273,7 @@
             <p:cNvPr id="456" name="F1_0455_patch_434">
               <a:extLst>
                 <a:ext uri="{FF2B5EF4-FFF2-40B4-BE49-F238E27FC236}">
-                  <a16:creationId id="{1B4BE7FF-66C9-439C-940B-995B9F7484B8}"/>
+                  <a16:creationId xmlns:a16="http://schemas.microsoft.com/office/drawing/2014/main" id="{1B4BE7FF-66C9-439C-940B-995B9F7484B8}"/>
                 </a:ext>
               </a:extLst>
             </p:cNvPr>
@@ -29242,7 +29325,7 @@
             <p:cNvPr id="457" name="F1_0456_patch_435">
               <a:extLst>
                 <a:ext uri="{FF2B5EF4-FFF2-40B4-BE49-F238E27FC236}">
-                  <a16:creationId id="{B6A4A73F-A1B3-4039-95B0-7B00BFD01ED7}"/>
+                  <a16:creationId xmlns:a16="http://schemas.microsoft.com/office/drawing/2014/main" id="{B6A4A73F-A1B3-4039-95B0-7B00BFD01ED7}"/>
                 </a:ext>
               </a:extLst>
             </p:cNvPr>
@@ -29294,7 +29377,7 @@
             <p:cNvPr id="458" name="F1_0457_patch_436">
               <a:extLst>
                 <a:ext uri="{FF2B5EF4-FFF2-40B4-BE49-F238E27FC236}">
-                  <a16:creationId id="{93D152D3-F360-4289-A534-9CD0EDC6C9A4}"/>
+                  <a16:creationId xmlns:a16="http://schemas.microsoft.com/office/drawing/2014/main" id="{93D152D3-F360-4289-A534-9CD0EDC6C9A4}"/>
                 </a:ext>
               </a:extLst>
             </p:cNvPr>
@@ -29346,7 +29429,7 @@
             <p:cNvPr id="459" name="F1_0458_patch_437">
               <a:extLst>
                 <a:ext uri="{FF2B5EF4-FFF2-40B4-BE49-F238E27FC236}">
-                  <a16:creationId id="{E97DB077-7AFB-4BB5-A31F-A6257676C664}"/>
+                  <a16:creationId xmlns:a16="http://schemas.microsoft.com/office/drawing/2014/main" id="{E97DB077-7AFB-4BB5-A31F-A6257676C664}"/>
                 </a:ext>
               </a:extLst>
             </p:cNvPr>
@@ -29398,7 +29481,7 @@
             <p:cNvPr id="460" name="F1_0459_patch_438">
               <a:extLst>
                 <a:ext uri="{FF2B5EF4-FFF2-40B4-BE49-F238E27FC236}">
-                  <a16:creationId id="{96B9E5EA-B2A0-402D-91CB-DE1ED98F1455}"/>
+                  <a16:creationId xmlns:a16="http://schemas.microsoft.com/office/drawing/2014/main" id="{96B9E5EA-B2A0-402D-91CB-DE1ED98F1455}"/>
                 </a:ext>
               </a:extLst>
             </p:cNvPr>
@@ -29450,7 +29533,7 @@
             <p:cNvPr id="461" name="F1_0460_patch_439">
               <a:extLst>
                 <a:ext uri="{FF2B5EF4-FFF2-40B4-BE49-F238E27FC236}">
-                  <a16:creationId id="{122A8C74-357D-4AB9-92DC-2F9EA3ADD3D9}"/>
+                  <a16:creationId xmlns:a16="http://schemas.microsoft.com/office/drawing/2014/main" id="{122A8C74-357D-4AB9-92DC-2F9EA3ADD3D9}"/>
                 </a:ext>
               </a:extLst>
             </p:cNvPr>
@@ -29502,7 +29585,7 @@
             <p:cNvPr id="462" name="F1_0461_patch_440">
               <a:extLst>
                 <a:ext uri="{FF2B5EF4-FFF2-40B4-BE49-F238E27FC236}">
-                  <a16:creationId id="{172DE9E9-70B4-49B4-BFBD-5AC57F54DA49}"/>
+                  <a16:creationId xmlns:a16="http://schemas.microsoft.com/office/drawing/2014/main" id="{172DE9E9-70B4-49B4-BFBD-5AC57F54DA49}"/>
                 </a:ext>
               </a:extLst>
             </p:cNvPr>
@@ -29554,7 +29637,7 @@
             <p:cNvPr id="463" name="F1_0462_patch_441">
               <a:extLst>
                 <a:ext uri="{FF2B5EF4-FFF2-40B4-BE49-F238E27FC236}">
-                  <a16:creationId id="{6B38B296-BB16-46AE-A164-E48C0AA7ABCD}"/>
+                  <a16:creationId xmlns:a16="http://schemas.microsoft.com/office/drawing/2014/main" id="{6B38B296-BB16-46AE-A164-E48C0AA7ABCD}"/>
                 </a:ext>
               </a:extLst>
             </p:cNvPr>
@@ -29606,7 +29689,7 @@
             <p:cNvPr id="464" name="F1_0463_patch_442">
               <a:extLst>
                 <a:ext uri="{FF2B5EF4-FFF2-40B4-BE49-F238E27FC236}">
-                  <a16:creationId id="{38718C9F-95ED-4C32-A9D4-B97A61C0F0A0}"/>
+                  <a16:creationId xmlns:a16="http://schemas.microsoft.com/office/drawing/2014/main" id="{38718C9F-95ED-4C32-A9D4-B97A61C0F0A0}"/>
                 </a:ext>
               </a:extLst>
             </p:cNvPr>
@@ -29658,7 +29741,7 @@
             <p:cNvPr id="465" name="F1_0464_patch_443">
               <a:extLst>
                 <a:ext uri="{FF2B5EF4-FFF2-40B4-BE49-F238E27FC236}">
-                  <a16:creationId id="{FA76C2F0-0738-4C2D-BBC7-85D5E5F55E9C}"/>
+                  <a16:creationId xmlns:a16="http://schemas.microsoft.com/office/drawing/2014/main" id="{FA76C2F0-0738-4C2D-BBC7-85D5E5F55E9C}"/>
                 </a:ext>
               </a:extLst>
             </p:cNvPr>
@@ -29710,7 +29793,7 @@
             <p:cNvPr id="466" name="F1_0465_patch_444">
               <a:extLst>
                 <a:ext uri="{FF2B5EF4-FFF2-40B4-BE49-F238E27FC236}">
-                  <a16:creationId id="{38B88999-1EDA-4FA3-9511-E628F83576E2}"/>
+                  <a16:creationId xmlns:a16="http://schemas.microsoft.com/office/drawing/2014/main" id="{38B88999-1EDA-4FA3-9511-E628F83576E2}"/>
                 </a:ext>
               </a:extLst>
             </p:cNvPr>
@@ -29762,7 +29845,7 @@
             <p:cNvPr id="467" name="F1_0466_patch_445">
               <a:extLst>
                 <a:ext uri="{FF2B5EF4-FFF2-40B4-BE49-F238E27FC236}">
-                  <a16:creationId id="{9247407A-D525-40C9-9147-99F7A9740E7B}"/>
+                  <a16:creationId xmlns:a16="http://schemas.microsoft.com/office/drawing/2014/main" id="{9247407A-D525-40C9-9147-99F7A9740E7B}"/>
                 </a:ext>
               </a:extLst>
             </p:cNvPr>
@@ -29814,7 +29897,7 @@
             <p:cNvPr id="468" name="F1_0467_patch_446">
               <a:extLst>
                 <a:ext uri="{FF2B5EF4-FFF2-40B4-BE49-F238E27FC236}">
-                  <a16:creationId id="{1028E388-52C2-490D-882D-04068D418947}"/>
+                  <a16:creationId xmlns:a16="http://schemas.microsoft.com/office/drawing/2014/main" id="{1028E388-52C2-490D-882D-04068D418947}"/>
                 </a:ext>
               </a:extLst>
             </p:cNvPr>
@@ -29866,7 +29949,7 @@
             <p:cNvPr id="469" name="F1_0468_patch_447">
               <a:extLst>
                 <a:ext uri="{FF2B5EF4-FFF2-40B4-BE49-F238E27FC236}">
-                  <a16:creationId id="{9283AC1F-F778-412D-8CC6-095A912AB53C}"/>
+                  <a16:creationId xmlns:a16="http://schemas.microsoft.com/office/drawing/2014/main" id="{9283AC1F-F778-412D-8CC6-095A912AB53C}"/>
                 </a:ext>
               </a:extLst>
             </p:cNvPr>
@@ -29918,7 +30001,7 @@
             <p:cNvPr id="470" name="F1_0469_patch_448">
               <a:extLst>
                 <a:ext uri="{FF2B5EF4-FFF2-40B4-BE49-F238E27FC236}">
-                  <a16:creationId id="{4C08A5D6-8409-41A9-81B7-1CA57DE2EF63}"/>
+                  <a16:creationId xmlns:a16="http://schemas.microsoft.com/office/drawing/2014/main" id="{4C08A5D6-8409-41A9-81B7-1CA57DE2EF63}"/>
                 </a:ext>
               </a:extLst>
             </p:cNvPr>
@@ -29970,7 +30053,7 @@
             <p:cNvPr id="471" name="F1_0470_patch_449">
               <a:extLst>
                 <a:ext uri="{FF2B5EF4-FFF2-40B4-BE49-F238E27FC236}">
-                  <a16:creationId id="{030EC766-F632-4C46-A5CF-EBC09C483CBA}"/>
+                  <a16:creationId xmlns:a16="http://schemas.microsoft.com/office/drawing/2014/main" id="{030EC766-F632-4C46-A5CF-EBC09C483CBA}"/>
                 </a:ext>
               </a:extLst>
             </p:cNvPr>
@@ -30022,7 +30105,7 @@
             <p:cNvPr id="472" name="F1_0471_patch_450">
               <a:extLst>
                 <a:ext uri="{FF2B5EF4-FFF2-40B4-BE49-F238E27FC236}">
-                  <a16:creationId id="{0D033FC9-CFD7-4B15-967F-E41B5FDA8BF9}"/>
+                  <a16:creationId xmlns:a16="http://schemas.microsoft.com/office/drawing/2014/main" id="{0D033FC9-CFD7-4B15-967F-E41B5FDA8BF9}"/>
                 </a:ext>
               </a:extLst>
             </p:cNvPr>
@@ -30074,7 +30157,7 @@
             <p:cNvPr id="473" name="F1_0472_patch_451">
               <a:extLst>
                 <a:ext uri="{FF2B5EF4-FFF2-40B4-BE49-F238E27FC236}">
-                  <a16:creationId id="{D120654C-7162-49E1-8424-94D83595FCE5}"/>
+                  <a16:creationId xmlns:a16="http://schemas.microsoft.com/office/drawing/2014/main" id="{D120654C-7162-49E1-8424-94D83595FCE5}"/>
                 </a:ext>
               </a:extLst>
             </p:cNvPr>
@@ -30126,7 +30209,7 @@
             <p:cNvPr id="474" name="F1_0473_patch_452">
               <a:extLst>
                 <a:ext uri="{FF2B5EF4-FFF2-40B4-BE49-F238E27FC236}">
-                  <a16:creationId id="{02350BCE-4819-42E6-9C3D-B256702F3918}"/>
+                  <a16:creationId xmlns:a16="http://schemas.microsoft.com/office/drawing/2014/main" id="{02350BCE-4819-42E6-9C3D-B256702F3918}"/>
                 </a:ext>
               </a:extLst>
             </p:cNvPr>
@@ -30178,7 +30261,7 @@
             <p:cNvPr id="475" name="F1_0474_patch_453">
               <a:extLst>
                 <a:ext uri="{FF2B5EF4-FFF2-40B4-BE49-F238E27FC236}">
-                  <a16:creationId id="{65D138F8-0CFA-4561-839A-595B6A687E59}"/>
+                  <a16:creationId xmlns:a16="http://schemas.microsoft.com/office/drawing/2014/main" id="{65D138F8-0CFA-4561-839A-595B6A687E59}"/>
                 </a:ext>
               </a:extLst>
             </p:cNvPr>
@@ -30230,7 +30313,7 @@
             <p:cNvPr id="476" name="F1_0475_patch_454">
               <a:extLst>
                 <a:ext uri="{FF2B5EF4-FFF2-40B4-BE49-F238E27FC236}">
-                  <a16:creationId id="{6142A892-44E1-4A07-AFE2-283D11034F8C}"/>
+                  <a16:creationId xmlns:a16="http://schemas.microsoft.com/office/drawing/2014/main" id="{6142A892-44E1-4A07-AFE2-283D11034F8C}"/>
                 </a:ext>
               </a:extLst>
             </p:cNvPr>
@@ -30282,7 +30365,7 @@
             <p:cNvPr id="477" name="F1_0476_patch_455">
               <a:extLst>
                 <a:ext uri="{FF2B5EF4-FFF2-40B4-BE49-F238E27FC236}">
-                  <a16:creationId id="{A153F04F-1427-425E-B0AE-60FCC69D274C}"/>
+                  <a16:creationId xmlns:a16="http://schemas.microsoft.com/office/drawing/2014/main" id="{A153F04F-1427-425E-B0AE-60FCC69D274C}"/>
                 </a:ext>
               </a:extLst>
             </p:cNvPr>
@@ -30334,7 +30417,7 @@
             <p:cNvPr id="478" name="F1_0477_patch_456">
               <a:extLst>
                 <a:ext uri="{FF2B5EF4-FFF2-40B4-BE49-F238E27FC236}">
-                  <a16:creationId id="{BBAD3FB8-FAA6-4083-A72F-49C13C58E27B}"/>
+                  <a16:creationId xmlns:a16="http://schemas.microsoft.com/office/drawing/2014/main" id="{BBAD3FB8-FAA6-4083-A72F-49C13C58E27B}"/>
                 </a:ext>
               </a:extLst>
             </p:cNvPr>
@@ -30386,7 +30469,7 @@
             <p:cNvPr id="479" name="F1_0478_patch_457">
               <a:extLst>
                 <a:ext uri="{FF2B5EF4-FFF2-40B4-BE49-F238E27FC236}">
-                  <a16:creationId id="{A4884F10-19EB-4AA3-8DE1-A7A2A30D41FE}"/>
+                  <a16:creationId xmlns:a16="http://schemas.microsoft.com/office/drawing/2014/main" id="{A4884F10-19EB-4AA3-8DE1-A7A2A30D41FE}"/>
                 </a:ext>
               </a:extLst>
             </p:cNvPr>
@@ -30438,7 +30521,7 @@
             <p:cNvPr id="480" name="F1_0479_patch_458">
               <a:extLst>
                 <a:ext uri="{FF2B5EF4-FFF2-40B4-BE49-F238E27FC236}">
-                  <a16:creationId id="{A3679EB7-0AF9-466F-B33A-FA98A7803B76}"/>
+                  <a16:creationId xmlns:a16="http://schemas.microsoft.com/office/drawing/2014/main" id="{A3679EB7-0AF9-466F-B33A-FA98A7803B76}"/>
                 </a:ext>
               </a:extLst>
             </p:cNvPr>
@@ -30490,7 +30573,7 @@
             <p:cNvPr id="481" name="F1_0480_patch_459">
               <a:extLst>
                 <a:ext uri="{FF2B5EF4-FFF2-40B4-BE49-F238E27FC236}">
-                  <a16:creationId id="{64D82901-2EFD-4ADB-B627-3BA201B254A5}"/>
+                  <a16:creationId xmlns:a16="http://schemas.microsoft.com/office/drawing/2014/main" id="{64D82901-2EFD-4ADB-B627-3BA201B254A5}"/>
                 </a:ext>
               </a:extLst>
             </p:cNvPr>
@@ -30542,7 +30625,7 @@
             <p:cNvPr id="482" name="F1_0481_patch_460">
               <a:extLst>
                 <a:ext uri="{FF2B5EF4-FFF2-40B4-BE49-F238E27FC236}">
-                  <a16:creationId id="{BD97C085-3DE1-4A9C-B653-46B5572B60FC}"/>
+                  <a16:creationId xmlns:a16="http://schemas.microsoft.com/office/drawing/2014/main" id="{BD97C085-3DE1-4A9C-B653-46B5572B60FC}"/>
                 </a:ext>
               </a:extLst>
             </p:cNvPr>
@@ -30594,7 +30677,7 @@
             <p:cNvPr id="483" name="F1_0482_patch_461">
               <a:extLst>
                 <a:ext uri="{FF2B5EF4-FFF2-40B4-BE49-F238E27FC236}">
-                  <a16:creationId id="{66CD8647-CB46-4A53-8D50-578876AD42F8}"/>
+                  <a16:creationId xmlns:a16="http://schemas.microsoft.com/office/drawing/2014/main" id="{66CD8647-CB46-4A53-8D50-578876AD42F8}"/>
                 </a:ext>
               </a:extLst>
             </p:cNvPr>
@@ -30646,7 +30729,7 @@
             <p:cNvPr id="484" name="F1_0483_patch_462">
               <a:extLst>
                 <a:ext uri="{FF2B5EF4-FFF2-40B4-BE49-F238E27FC236}">
-                  <a16:creationId id="{DD840F3C-C280-4B86-968F-33DBAA1F3EBC}"/>
+                  <a16:creationId xmlns:a16="http://schemas.microsoft.com/office/drawing/2014/main" id="{DD840F3C-C280-4B86-968F-33DBAA1F3EBC}"/>
                 </a:ext>
               </a:extLst>
             </p:cNvPr>
@@ -30698,7 +30781,7 @@
             <p:cNvPr id="485" name="F1_0484_patch_463">
               <a:extLst>
                 <a:ext uri="{FF2B5EF4-FFF2-40B4-BE49-F238E27FC236}">
-                  <a16:creationId id="{11D8F2A8-EBA2-4078-BA93-13EBA7CDA40E}"/>
+                  <a16:creationId xmlns:a16="http://schemas.microsoft.com/office/drawing/2014/main" id="{11D8F2A8-EBA2-4078-BA93-13EBA7CDA40E}"/>
                 </a:ext>
               </a:extLst>
             </p:cNvPr>
@@ -30750,7 +30833,7 @@
             <p:cNvPr id="486" name="F1_0485_patch_464">
               <a:extLst>
                 <a:ext uri="{FF2B5EF4-FFF2-40B4-BE49-F238E27FC236}">
-                  <a16:creationId id="{B1EE870A-5FB9-46C1-96D4-E281A7FA3F79}"/>
+                  <a16:creationId xmlns:a16="http://schemas.microsoft.com/office/drawing/2014/main" id="{B1EE870A-5FB9-46C1-96D4-E281A7FA3F79}"/>
                 </a:ext>
               </a:extLst>
             </p:cNvPr>
@@ -30802,7 +30885,7 @@
             <p:cNvPr id="487" name="F1_0486_patch_465">
               <a:extLst>
                 <a:ext uri="{FF2B5EF4-FFF2-40B4-BE49-F238E27FC236}">
-                  <a16:creationId id="{F8AAAC1E-49C8-43FF-8C63-F7D8C014D7BA}"/>
+                  <a16:creationId xmlns:a16="http://schemas.microsoft.com/office/drawing/2014/main" id="{F8AAAC1E-49C8-43FF-8C63-F7D8C014D7BA}"/>
                 </a:ext>
               </a:extLst>
             </p:cNvPr>
@@ -30854,7 +30937,7 @@
             <p:cNvPr id="488" name="F1_0487_patch_466">
               <a:extLst>
                 <a:ext uri="{FF2B5EF4-FFF2-40B4-BE49-F238E27FC236}">
-                  <a16:creationId id="{FA78B341-0523-4F97-945F-26A72154CA3E}"/>
+                  <a16:creationId xmlns:a16="http://schemas.microsoft.com/office/drawing/2014/main" id="{FA78B341-0523-4F97-945F-26A72154CA3E}"/>
                 </a:ext>
               </a:extLst>
             </p:cNvPr>
@@ -30906,7 +30989,7 @@
             <p:cNvPr id="489" name="F1_0488_patch_467">
               <a:extLst>
                 <a:ext uri="{FF2B5EF4-FFF2-40B4-BE49-F238E27FC236}">
-                  <a16:creationId id="{940AAD48-F118-4EB4-B292-C2DCF0333148}"/>
+                  <a16:creationId xmlns:a16="http://schemas.microsoft.com/office/drawing/2014/main" id="{940AAD48-F118-4EB4-B292-C2DCF0333148}"/>
                 </a:ext>
               </a:extLst>
             </p:cNvPr>
@@ -30958,7 +31041,7 @@
             <p:cNvPr id="490" name="F1_0489_patch_468">
               <a:extLst>
                 <a:ext uri="{FF2B5EF4-FFF2-40B4-BE49-F238E27FC236}">
-                  <a16:creationId id="{6AA5CE3E-0BB0-49C8-93E7-531770922AC5}"/>
+                  <a16:creationId xmlns:a16="http://schemas.microsoft.com/office/drawing/2014/main" id="{6AA5CE3E-0BB0-49C8-93E7-531770922AC5}"/>
                 </a:ext>
               </a:extLst>
             </p:cNvPr>
@@ -31010,7 +31093,7 @@
             <p:cNvPr id="491" name="F1_0490_patch_469">
               <a:extLst>
                 <a:ext uri="{FF2B5EF4-FFF2-40B4-BE49-F238E27FC236}">
-                  <a16:creationId id="{6D972C97-B5A5-4886-8C7A-D0046A2E93E5}"/>
+                  <a16:creationId xmlns:a16="http://schemas.microsoft.com/office/drawing/2014/main" id="{6D972C97-B5A5-4886-8C7A-D0046A2E93E5}"/>
                 </a:ext>
               </a:extLst>
             </p:cNvPr>
@@ -31062,7 +31145,7 @@
             <p:cNvPr id="492" name="F1_0491_patch_470">
               <a:extLst>
                 <a:ext uri="{FF2B5EF4-FFF2-40B4-BE49-F238E27FC236}">
-                  <a16:creationId id="{F0EC24DF-F073-441D-B7B1-3EF5378C8BA0}"/>
+                  <a16:creationId xmlns:a16="http://schemas.microsoft.com/office/drawing/2014/main" id="{F0EC24DF-F073-441D-B7B1-3EF5378C8BA0}"/>
                 </a:ext>
               </a:extLst>
             </p:cNvPr>
@@ -31114,7 +31197,7 @@
             <p:cNvPr id="493" name="F1_0492_patch_471">
               <a:extLst>
                 <a:ext uri="{FF2B5EF4-FFF2-40B4-BE49-F238E27FC236}">
-                  <a16:creationId id="{2D2CD40E-9593-45E2-B32F-F145B3F0522D}"/>
+                  <a16:creationId xmlns:a16="http://schemas.microsoft.com/office/drawing/2014/main" id="{2D2CD40E-9593-45E2-B32F-F145B3F0522D}"/>
                 </a:ext>
               </a:extLst>
             </p:cNvPr>
@@ -31166,7 +31249,7 @@
             <p:cNvPr id="494" name="F1_0493_patch_472">
               <a:extLst>
                 <a:ext uri="{FF2B5EF4-FFF2-40B4-BE49-F238E27FC236}">
-                  <a16:creationId id="{750C8D45-7F7B-46DC-B573-5327B0B1234A}"/>
+                  <a16:creationId xmlns:a16="http://schemas.microsoft.com/office/drawing/2014/main" id="{750C8D45-7F7B-46DC-B573-5327B0B1234A}"/>
                 </a:ext>
               </a:extLst>
             </p:cNvPr>
@@ -31218,7 +31301,7 @@
             <p:cNvPr id="495" name="F1_0494_patch_473">
               <a:extLst>
                 <a:ext uri="{FF2B5EF4-FFF2-40B4-BE49-F238E27FC236}">
-                  <a16:creationId id="{1596426F-A9F9-4F1D-8F94-B66BD8AA8432}"/>
+                  <a16:creationId xmlns:a16="http://schemas.microsoft.com/office/drawing/2014/main" id="{1596426F-A9F9-4F1D-8F94-B66BD8AA8432}"/>
                 </a:ext>
               </a:extLst>
             </p:cNvPr>
@@ -31270,7 +31353,7 @@
             <p:cNvPr id="496" name="F1_0495_patch_474">
               <a:extLst>
                 <a:ext uri="{FF2B5EF4-FFF2-40B4-BE49-F238E27FC236}">
-                  <a16:creationId id="{7EE73487-0238-432A-A74F-CA907DCFF37C}"/>
+                  <a16:creationId xmlns:a16="http://schemas.microsoft.com/office/drawing/2014/main" id="{7EE73487-0238-432A-A74F-CA907DCFF37C}"/>
                 </a:ext>
               </a:extLst>
             </p:cNvPr>
@@ -31322,7 +31405,7 @@
             <p:cNvPr id="497" name="F1_0496_patch_475">
               <a:extLst>
                 <a:ext uri="{FF2B5EF4-FFF2-40B4-BE49-F238E27FC236}">
-                  <a16:creationId id="{59667D66-F590-4F0F-9308-C1E028C9275C}"/>
+                  <a16:creationId xmlns:a16="http://schemas.microsoft.com/office/drawing/2014/main" id="{59667D66-F590-4F0F-9308-C1E028C9275C}"/>
                 </a:ext>
               </a:extLst>
             </p:cNvPr>
@@ -31374,7 +31457,7 @@
             <p:cNvPr id="498" name="F1_0497_patch_476">
               <a:extLst>
                 <a:ext uri="{FF2B5EF4-FFF2-40B4-BE49-F238E27FC236}">
-                  <a16:creationId id="{0EBDB95F-D50A-403F-BB9E-70FED022599E}"/>
+                  <a16:creationId xmlns:a16="http://schemas.microsoft.com/office/drawing/2014/main" id="{0EBDB95F-D50A-403F-BB9E-70FED022599E}"/>
                 </a:ext>
               </a:extLst>
             </p:cNvPr>
@@ -31426,7 +31509,7 @@
             <p:cNvPr id="499" name="F1_0498_patch_477">
               <a:extLst>
                 <a:ext uri="{FF2B5EF4-FFF2-40B4-BE49-F238E27FC236}">
-                  <a16:creationId id="{8C1D0035-7AC8-47AC-97B7-D5589DF2E860}"/>
+                  <a16:creationId xmlns:a16="http://schemas.microsoft.com/office/drawing/2014/main" id="{8C1D0035-7AC8-47AC-97B7-D5589DF2E860}"/>
                 </a:ext>
               </a:extLst>
             </p:cNvPr>
@@ -31478,7 +31561,7 @@
             <p:cNvPr id="500" name="F1_0499_patch_478">
               <a:extLst>
                 <a:ext uri="{FF2B5EF4-FFF2-40B4-BE49-F238E27FC236}">
-                  <a16:creationId id="{50B1D927-C77F-40F8-BEC2-D9C63B7C6ABE}"/>
+                  <a16:creationId xmlns:a16="http://schemas.microsoft.com/office/drawing/2014/main" id="{50B1D927-C77F-40F8-BEC2-D9C63B7C6ABE}"/>
                 </a:ext>
               </a:extLst>
             </p:cNvPr>
@@ -31530,7 +31613,7 @@
             <p:cNvPr id="501" name="F1_0500_patch_479">
               <a:extLst>
                 <a:ext uri="{FF2B5EF4-FFF2-40B4-BE49-F238E27FC236}">
-                  <a16:creationId id="{9DBCCA4D-D63B-48AF-AFD4-8C6E1393F6B8}"/>
+                  <a16:creationId xmlns:a16="http://schemas.microsoft.com/office/drawing/2014/main" id="{9DBCCA4D-D63B-48AF-AFD4-8C6E1393F6B8}"/>
                 </a:ext>
               </a:extLst>
             </p:cNvPr>
@@ -31582,7 +31665,7 @@
             <p:cNvPr id="502" name="F1_0501_patch_480">
               <a:extLst>
                 <a:ext uri="{FF2B5EF4-FFF2-40B4-BE49-F238E27FC236}">
-                  <a16:creationId id="{AADFCA68-A6B5-4763-AF61-35C3D4FF5624}"/>
+                  <a16:creationId xmlns:a16="http://schemas.microsoft.com/office/drawing/2014/main" id="{AADFCA68-A6B5-4763-AF61-35C3D4FF5624}"/>
                 </a:ext>
               </a:extLst>
             </p:cNvPr>
@@ -31634,7 +31717,7 @@
             <p:cNvPr id="503" name="F1_0502_patch_481">
               <a:extLst>
                 <a:ext uri="{FF2B5EF4-FFF2-40B4-BE49-F238E27FC236}">
-                  <a16:creationId id="{AE591EA7-46A4-4ABA-8EB3-58A27E2E89F0}"/>
+                  <a16:creationId xmlns:a16="http://schemas.microsoft.com/office/drawing/2014/main" id="{AE591EA7-46A4-4ABA-8EB3-58A27E2E89F0}"/>
                 </a:ext>
               </a:extLst>
             </p:cNvPr>
@@ -31686,7 +31769,7 @@
             <p:cNvPr id="504" name="F1_0503_patch_482">
               <a:extLst>
                 <a:ext uri="{FF2B5EF4-FFF2-40B4-BE49-F238E27FC236}">
-                  <a16:creationId id="{700415D5-7CDA-46B5-BBC2-9FB276260281}"/>
+                  <a16:creationId xmlns:a16="http://schemas.microsoft.com/office/drawing/2014/main" id="{700415D5-7CDA-46B5-BBC2-9FB276260281}"/>
                 </a:ext>
               </a:extLst>
             </p:cNvPr>
@@ -31738,7 +31821,7 @@
             <p:cNvPr id="505" name="F1_0504_patch_483">
               <a:extLst>
                 <a:ext uri="{FF2B5EF4-FFF2-40B4-BE49-F238E27FC236}">
-                  <a16:creationId id="{E0A3A6CD-1DC9-423A-856A-02DE2E8D4E2B}"/>
+                  <a16:creationId xmlns:a16="http://schemas.microsoft.com/office/drawing/2014/main" id="{E0A3A6CD-1DC9-423A-856A-02DE2E8D4E2B}"/>
                 </a:ext>
               </a:extLst>
             </p:cNvPr>
@@ -31790,7 +31873,7 @@
             <p:cNvPr id="506" name="F1_0505_patch_484">
               <a:extLst>
                 <a:ext uri="{FF2B5EF4-FFF2-40B4-BE49-F238E27FC236}">
-                  <a16:creationId id="{C343FABC-246E-4015-903F-220EFE1AED68}"/>
+                  <a16:creationId xmlns:a16="http://schemas.microsoft.com/office/drawing/2014/main" id="{C343FABC-246E-4015-903F-220EFE1AED68}"/>
                 </a:ext>
               </a:extLst>
             </p:cNvPr>
@@ -31842,7 +31925,7 @@
             <p:cNvPr id="507" name="F1_0506_patch_485">
               <a:extLst>
                 <a:ext uri="{FF2B5EF4-FFF2-40B4-BE49-F238E27FC236}">
-                  <a16:creationId id="{D0993E5C-73C6-4993-9855-D90BBA26E35F}"/>
+                  <a16:creationId xmlns:a16="http://schemas.microsoft.com/office/drawing/2014/main" id="{D0993E5C-73C6-4993-9855-D90BBA26E35F}"/>
                 </a:ext>
               </a:extLst>
             </p:cNvPr>
@@ -31894,7 +31977,7 @@
             <p:cNvPr id="508" name="F1_0507_patch_486">
               <a:extLst>
                 <a:ext uri="{FF2B5EF4-FFF2-40B4-BE49-F238E27FC236}">
-                  <a16:creationId id="{7AF34F3F-2310-40CE-BE22-71ADA2E7A5FB}"/>
+                  <a16:creationId xmlns:a16="http://schemas.microsoft.com/office/drawing/2014/main" id="{7AF34F3F-2310-40CE-BE22-71ADA2E7A5FB}"/>
                 </a:ext>
               </a:extLst>
             </p:cNvPr>
@@ -31946,7 +32029,7 @@
             <p:cNvPr id="509" name="F1_0508_patch_487">
               <a:extLst>
                 <a:ext uri="{FF2B5EF4-FFF2-40B4-BE49-F238E27FC236}">
-                  <a16:creationId id="{10E2004A-AD02-4F0E-8C1B-C59795FF5EE5}"/>
+                  <a16:creationId xmlns:a16="http://schemas.microsoft.com/office/drawing/2014/main" id="{10E2004A-AD02-4F0E-8C1B-C59795FF5EE5}"/>
                 </a:ext>
               </a:extLst>
             </p:cNvPr>
@@ -31998,7 +32081,7 @@
             <p:cNvPr id="510" name="F1_0509_patch_488">
               <a:extLst>
                 <a:ext uri="{FF2B5EF4-FFF2-40B4-BE49-F238E27FC236}">
-                  <a16:creationId id="{97F12A6F-F6DF-49AD-BC08-60B5B6DD3BE1}"/>
+                  <a16:creationId xmlns:a16="http://schemas.microsoft.com/office/drawing/2014/main" id="{97F12A6F-F6DF-49AD-BC08-60B5B6DD3BE1}"/>
                 </a:ext>
               </a:extLst>
             </p:cNvPr>
@@ -32050,7 +32133,7 @@
             <p:cNvPr id="511" name="F1_0510_patch_489">
               <a:extLst>
                 <a:ext uri="{FF2B5EF4-FFF2-40B4-BE49-F238E27FC236}">
-                  <a16:creationId id="{B673D7F3-E69D-48B5-B398-67435C22C61C}"/>
+                  <a16:creationId xmlns:a16="http://schemas.microsoft.com/office/drawing/2014/main" id="{B673D7F3-E69D-48B5-B398-67435C22C61C}"/>
                 </a:ext>
               </a:extLst>
             </p:cNvPr>
@@ -32102,7 +32185,7 @@
             <p:cNvPr id="512" name="F1_0511_patch_490">
               <a:extLst>
                 <a:ext uri="{FF2B5EF4-FFF2-40B4-BE49-F238E27FC236}">
-                  <a16:creationId id="{0B76836B-34B6-4DE6-9A82-3A50413FA7C7}"/>
+                  <a16:creationId xmlns:a16="http://schemas.microsoft.com/office/drawing/2014/main" id="{0B76836B-34B6-4DE6-9A82-3A50413FA7C7}"/>
                 </a:ext>
               </a:extLst>
             </p:cNvPr>
@@ -32154,7 +32237,7 @@
             <p:cNvPr id="513" name="F1_0512_patch_491">
               <a:extLst>
                 <a:ext uri="{FF2B5EF4-FFF2-40B4-BE49-F238E27FC236}">
-                  <a16:creationId id="{FB524729-541C-413C-A21F-06A01145F4D8}"/>
+                  <a16:creationId xmlns:a16="http://schemas.microsoft.com/office/drawing/2014/main" id="{FB524729-541C-413C-A21F-06A01145F4D8}"/>
                 </a:ext>
               </a:extLst>
             </p:cNvPr>
@@ -32206,7 +32289,7 @@
             <p:cNvPr id="514" name="F1_0513_patch_492">
               <a:extLst>
                 <a:ext uri="{FF2B5EF4-FFF2-40B4-BE49-F238E27FC236}">
-                  <a16:creationId id="{9F9110C3-40F0-4421-87CC-4722D35EE76E}"/>
+                  <a16:creationId xmlns:a16="http://schemas.microsoft.com/office/drawing/2014/main" id="{9F9110C3-40F0-4421-87CC-4722D35EE76E}"/>
                 </a:ext>
               </a:extLst>
             </p:cNvPr>
@@ -32258,7 +32341,7 @@
             <p:cNvPr id="515" name="F1_0514_patch_493">
               <a:extLst>
                 <a:ext uri="{FF2B5EF4-FFF2-40B4-BE49-F238E27FC236}">
-                  <a16:creationId id="{10804C2A-8107-4AFE-96CE-DFCBFE7D60F3}"/>
+                  <a16:creationId xmlns:a16="http://schemas.microsoft.com/office/drawing/2014/main" id="{10804C2A-8107-4AFE-96CE-DFCBFE7D60F3}"/>
                 </a:ext>
               </a:extLst>
             </p:cNvPr>
@@ -32310,7 +32393,7 @@
             <p:cNvPr id="516" name="F1_0515_patch_494">
               <a:extLst>
                 <a:ext uri="{FF2B5EF4-FFF2-40B4-BE49-F238E27FC236}">
-                  <a16:creationId id="{A9178986-C2CE-466F-B438-052F0F42F14C}"/>
+                  <a16:creationId xmlns:a16="http://schemas.microsoft.com/office/drawing/2014/main" id="{A9178986-C2CE-466F-B438-052F0F42F14C}"/>
                 </a:ext>
               </a:extLst>
             </p:cNvPr>
@@ -32362,7 +32445,7 @@
             <p:cNvPr id="517" name="F1_0516_patch_495">
               <a:extLst>
                 <a:ext uri="{FF2B5EF4-FFF2-40B4-BE49-F238E27FC236}">
-                  <a16:creationId id="{B27D27EE-92F1-4471-A1FB-910E86A1A501}"/>
+                  <a16:creationId xmlns:a16="http://schemas.microsoft.com/office/drawing/2014/main" id="{B27D27EE-92F1-4471-A1FB-910E86A1A501}"/>
                 </a:ext>
               </a:extLst>
             </p:cNvPr>
@@ -32414,7 +32497,7 @@
             <p:cNvPr id="518" name="F1_0517_patch_496">
               <a:extLst>
                 <a:ext uri="{FF2B5EF4-FFF2-40B4-BE49-F238E27FC236}">
-                  <a16:creationId id="{F15CEB8C-1765-4240-A0DA-DD5D1E96F7DF}"/>
+                  <a16:creationId xmlns:a16="http://schemas.microsoft.com/office/drawing/2014/main" id="{F15CEB8C-1765-4240-A0DA-DD5D1E96F7DF}"/>
                 </a:ext>
               </a:extLst>
             </p:cNvPr>
@@ -32466,7 +32549,7 @@
             <p:cNvPr id="519" name="F1_0518_patch_497">
               <a:extLst>
                 <a:ext uri="{FF2B5EF4-FFF2-40B4-BE49-F238E27FC236}">
-                  <a16:creationId id="{EDC61C36-A6AE-414D-BBF6-D92ED5F06FCB}"/>
+                  <a16:creationId xmlns:a16="http://schemas.microsoft.com/office/drawing/2014/main" id="{EDC61C36-A6AE-414D-BBF6-D92ED5F06FCB}"/>
                 </a:ext>
               </a:extLst>
             </p:cNvPr>
@@ -32518,7 +32601,7 @@
             <p:cNvPr id="520" name="F1_0519_patch_498">
               <a:extLst>
                 <a:ext uri="{FF2B5EF4-FFF2-40B4-BE49-F238E27FC236}">
-                  <a16:creationId id="{6CFA84C8-10DB-4A02-9814-B5EC9BFD7349}"/>
+                  <a16:creationId xmlns:a16="http://schemas.microsoft.com/office/drawing/2014/main" id="{6CFA84C8-10DB-4A02-9814-B5EC9BFD7349}"/>
                 </a:ext>
               </a:extLst>
             </p:cNvPr>
@@ -32570,7 +32653,7 @@
             <p:cNvPr id="521" name="F1_0520_patch_499">
               <a:extLst>
                 <a:ext uri="{FF2B5EF4-FFF2-40B4-BE49-F238E27FC236}">
-                  <a16:creationId id="{622ABBF5-DA4F-447B-ABF9-454BE1697D64}"/>
+                  <a16:creationId xmlns:a16="http://schemas.microsoft.com/office/drawing/2014/main" id="{622ABBF5-DA4F-447B-ABF9-454BE1697D64}"/>
                 </a:ext>
               </a:extLst>
             </p:cNvPr>
@@ -32622,7 +32705,7 @@
             <p:cNvPr id="522" name="F1_0521_patch_500">
               <a:extLst>
                 <a:ext uri="{FF2B5EF4-FFF2-40B4-BE49-F238E27FC236}">
-                  <a16:creationId id="{AC919F35-2D29-412F-AA91-FD9C9226E713}"/>
+                  <a16:creationId xmlns:a16="http://schemas.microsoft.com/office/drawing/2014/main" id="{AC919F35-2D29-412F-AA91-FD9C9226E713}"/>
                 </a:ext>
               </a:extLst>
             </p:cNvPr>
@@ -32674,7 +32757,7 @@
             <p:cNvPr id="523" name="F1_0522_patch_501">
               <a:extLst>
                 <a:ext uri="{FF2B5EF4-FFF2-40B4-BE49-F238E27FC236}">
-                  <a16:creationId id="{ECE7FA55-8811-4F74-8C30-5EE8BE0AAA2C}"/>
+                  <a16:creationId xmlns:a16="http://schemas.microsoft.com/office/drawing/2014/main" id="{ECE7FA55-8811-4F74-8C30-5EE8BE0AAA2C}"/>
                 </a:ext>
               </a:extLst>
             </p:cNvPr>
@@ -32726,7 +32809,7 @@
             <p:cNvPr id="524" name="F1_0523_patch_502">
               <a:extLst>
                 <a:ext uri="{FF2B5EF4-FFF2-40B4-BE49-F238E27FC236}">
-                  <a16:creationId id="{17CFB7D9-5644-4190-8BA8-D7C631CB4878}"/>
+                  <a16:creationId xmlns:a16="http://schemas.microsoft.com/office/drawing/2014/main" id="{17CFB7D9-5644-4190-8BA8-D7C631CB4878}"/>
                 </a:ext>
               </a:extLst>
             </p:cNvPr>
@@ -32778,7 +32861,7 @@
             <p:cNvPr id="525" name="F1_0524_patch_503">
               <a:extLst>
                 <a:ext uri="{FF2B5EF4-FFF2-40B4-BE49-F238E27FC236}">
-                  <a16:creationId id="{1BDA3128-0571-4226-8736-BEEF92FAE893}"/>
+                  <a16:creationId xmlns:a16="http://schemas.microsoft.com/office/drawing/2014/main" id="{1BDA3128-0571-4226-8736-BEEF92FAE893}"/>
                 </a:ext>
               </a:extLst>
             </p:cNvPr>
@@ -32830,7 +32913,7 @@
             <p:cNvPr id="526" name="F1_0525_patch_504">
               <a:extLst>
                 <a:ext uri="{FF2B5EF4-FFF2-40B4-BE49-F238E27FC236}">
-                  <a16:creationId id="{8A6258DD-4670-47DB-8FFC-DA2923D5ECBF}"/>
+                  <a16:creationId xmlns:a16="http://schemas.microsoft.com/office/drawing/2014/main" id="{8A6258DD-4670-47DB-8FFC-DA2923D5ECBF}"/>
                 </a:ext>
               </a:extLst>
             </p:cNvPr>
@@ -32882,7 +32965,7 @@
             <p:cNvPr id="527" name="F1_0526_patch_505">
               <a:extLst>
                 <a:ext uri="{FF2B5EF4-FFF2-40B4-BE49-F238E27FC236}">
-                  <a16:creationId id="{2E645259-9E81-4C1B-9331-9DF91F679AD8}"/>
+                  <a16:creationId xmlns:a16="http://schemas.microsoft.com/office/drawing/2014/main" id="{2E645259-9E81-4C1B-9331-9DF91F679AD8}"/>
                 </a:ext>
               </a:extLst>
             </p:cNvPr>
@@ -32934,7 +33017,7 @@
             <p:cNvPr id="528" name="F1_0527_patch_506">
               <a:extLst>
                 <a:ext uri="{FF2B5EF4-FFF2-40B4-BE49-F238E27FC236}">
-                  <a16:creationId id="{EFFFF4BD-69A3-4A10-8755-B52E194D56DC}"/>
+                  <a16:creationId xmlns:a16="http://schemas.microsoft.com/office/drawing/2014/main" id="{EFFFF4BD-69A3-4A10-8755-B52E194D56DC}"/>
                 </a:ext>
               </a:extLst>
             </p:cNvPr>
@@ -32986,7 +33069,7 @@
             <p:cNvPr id="529" name="F1_0528_patch_507">
               <a:extLst>
                 <a:ext uri="{FF2B5EF4-FFF2-40B4-BE49-F238E27FC236}">
-                  <a16:creationId id="{EB8C91B9-4B92-44CB-B703-5DA1EE0F4EDA}"/>
+                  <a16:creationId xmlns:a16="http://schemas.microsoft.com/office/drawing/2014/main" id="{EB8C91B9-4B92-44CB-B703-5DA1EE0F4EDA}"/>
                 </a:ext>
               </a:extLst>
             </p:cNvPr>
@@ -33038,7 +33121,7 @@
             <p:cNvPr id="530" name="F1_0529_patch_508">
               <a:extLst>
                 <a:ext uri="{FF2B5EF4-FFF2-40B4-BE49-F238E27FC236}">
-                  <a16:creationId id="{5F1FC97E-BA6A-48DC-BCBC-588382DB2000}"/>
+                  <a16:creationId xmlns:a16="http://schemas.microsoft.com/office/drawing/2014/main" id="{5F1FC97E-BA6A-48DC-BCBC-588382DB2000}"/>
                 </a:ext>
               </a:extLst>
             </p:cNvPr>
@@ -33090,7 +33173,7 @@
             <p:cNvPr id="531" name="F1_0530_patch_509">
               <a:extLst>
                 <a:ext uri="{FF2B5EF4-FFF2-40B4-BE49-F238E27FC236}">
-                  <a16:creationId id="{AC24F742-1410-4798-931E-C59783852A46}"/>
+                  <a16:creationId xmlns:a16="http://schemas.microsoft.com/office/drawing/2014/main" id="{AC24F742-1410-4798-931E-C59783852A46}"/>
                 </a:ext>
               </a:extLst>
             </p:cNvPr>
@@ -33142,7 +33225,7 @@
             <p:cNvPr id="532" name="F1_0531_patch_510">
               <a:extLst>
                 <a:ext uri="{FF2B5EF4-FFF2-40B4-BE49-F238E27FC236}">
-                  <a16:creationId id="{744314B0-379E-41A9-9F67-36D6E482A2F8}"/>
+                  <a16:creationId xmlns:a16="http://schemas.microsoft.com/office/drawing/2014/main" id="{744314B0-379E-41A9-9F67-36D6E482A2F8}"/>
                 </a:ext>
               </a:extLst>
             </p:cNvPr>
@@ -33194,7 +33277,7 @@
             <p:cNvPr id="533" name="F1_0532_patch_511">
               <a:extLst>
                 <a:ext uri="{FF2B5EF4-FFF2-40B4-BE49-F238E27FC236}">
-                  <a16:creationId id="{9C1FC57A-A4B0-4395-ACB4-E0280BD56ABF}"/>
+                  <a16:creationId xmlns:a16="http://schemas.microsoft.com/office/drawing/2014/main" id="{9C1FC57A-A4B0-4395-ACB4-E0280BD56ABF}"/>
                 </a:ext>
               </a:extLst>
             </p:cNvPr>
@@ -33246,7 +33329,7 @@
             <p:cNvPr id="534" name="F1_0533_patch_512">
               <a:extLst>
                 <a:ext uri="{FF2B5EF4-FFF2-40B4-BE49-F238E27FC236}">
-                  <a16:creationId id="{3EFAD20A-D538-47CE-B105-85125ECC0B47}"/>
+                  <a16:creationId xmlns:a16="http://schemas.microsoft.com/office/drawing/2014/main" id="{3EFAD20A-D538-47CE-B105-85125ECC0B47}"/>
                 </a:ext>
               </a:extLst>
             </p:cNvPr>
@@ -33298,7 +33381,7 @@
             <p:cNvPr id="535" name="F1_0534_patch_513">
               <a:extLst>
                 <a:ext uri="{FF2B5EF4-FFF2-40B4-BE49-F238E27FC236}">
-                  <a16:creationId id="{C7A85E60-D4E6-4C68-84A4-B497330E32A7}"/>
+                  <a16:creationId xmlns:a16="http://schemas.microsoft.com/office/drawing/2014/main" id="{C7A85E60-D4E6-4C68-84A4-B497330E32A7}"/>
                 </a:ext>
               </a:extLst>
             </p:cNvPr>
@@ -33350,7 +33433,7 @@
             <p:cNvPr id="536" name="F1_0535_patch_514">
               <a:extLst>
                 <a:ext uri="{FF2B5EF4-FFF2-40B4-BE49-F238E27FC236}">
-                  <a16:creationId id="{2BD06AF2-BD7A-43F6-A4DB-F1E8D6E2CC4A}"/>
+                  <a16:creationId xmlns:a16="http://schemas.microsoft.com/office/drawing/2014/main" id="{2BD06AF2-BD7A-43F6-A4DB-F1E8D6E2CC4A}"/>
                 </a:ext>
               </a:extLst>
             </p:cNvPr>
@@ -33402,7 +33485,7 @@
             <p:cNvPr id="537" name="F1_0536_patch_515">
               <a:extLst>
                 <a:ext uri="{FF2B5EF4-FFF2-40B4-BE49-F238E27FC236}">
-                  <a16:creationId id="{3A0A0863-6BDD-46D1-8554-8B69C578275D}"/>
+                  <a16:creationId xmlns:a16="http://schemas.microsoft.com/office/drawing/2014/main" id="{3A0A0863-6BDD-46D1-8554-8B69C578275D}"/>
                 </a:ext>
               </a:extLst>
             </p:cNvPr>
@@ -33454,7 +33537,7 @@
             <p:cNvPr id="538" name="F1_0537_patch_516">
               <a:extLst>
                 <a:ext uri="{FF2B5EF4-FFF2-40B4-BE49-F238E27FC236}">
-                  <a16:creationId id="{B070515A-1B7B-4227-AEC2-CCD953C299FE}"/>
+                  <a16:creationId xmlns:a16="http://schemas.microsoft.com/office/drawing/2014/main" id="{B070515A-1B7B-4227-AEC2-CCD953C299FE}"/>
                 </a:ext>
               </a:extLst>
             </p:cNvPr>
@@ -33506,7 +33589,7 @@
             <p:cNvPr id="539" name="F1_0538_patch_517">
               <a:extLst>
                 <a:ext uri="{FF2B5EF4-FFF2-40B4-BE49-F238E27FC236}">
-                  <a16:creationId id="{0BEE506D-0CC1-4DB3-BDFE-FFC0B49819AB}"/>
+                  <a16:creationId xmlns:a16="http://schemas.microsoft.com/office/drawing/2014/main" id="{0BEE506D-0CC1-4DB3-BDFE-FFC0B49819AB}"/>
                 </a:ext>
               </a:extLst>
             </p:cNvPr>
@@ -33558,7 +33641,7 @@
             <p:cNvPr id="540" name="F1_0539_patch_518">
               <a:extLst>
                 <a:ext uri="{FF2B5EF4-FFF2-40B4-BE49-F238E27FC236}">
-                  <a16:creationId id="{BD217F74-DCC0-44BB-B40F-95F0E640A77E}"/>
+                  <a16:creationId xmlns:a16="http://schemas.microsoft.com/office/drawing/2014/main" id="{BD217F74-DCC0-44BB-B40F-95F0E640A77E}"/>
                 </a:ext>
               </a:extLst>
             </p:cNvPr>
@@ -33610,7 +33693,7 @@
             <p:cNvPr id="541" name="F1_0540_patch_519">
               <a:extLst>
                 <a:ext uri="{FF2B5EF4-FFF2-40B4-BE49-F238E27FC236}">
-                  <a16:creationId id="{A6EB643B-ECA9-4817-B5DA-318B723469BD}"/>
+                  <a16:creationId xmlns:a16="http://schemas.microsoft.com/office/drawing/2014/main" id="{A6EB643B-ECA9-4817-B5DA-318B723469BD}"/>
                 </a:ext>
               </a:extLst>
             </p:cNvPr>
@@ -33662,7 +33745,7 @@
             <p:cNvPr id="542" name="F1_0541_patch_520">
               <a:extLst>
                 <a:ext uri="{FF2B5EF4-FFF2-40B4-BE49-F238E27FC236}">
-                  <a16:creationId id="{3B0D6F72-0807-400B-919F-7B2C7384926E}"/>
+                  <a16:creationId xmlns:a16="http://schemas.microsoft.com/office/drawing/2014/main" id="{3B0D6F72-0807-400B-919F-7B2C7384926E}"/>
                 </a:ext>
               </a:extLst>
             </p:cNvPr>
@@ -33714,7 +33797,7 @@
             <p:cNvPr id="543" name="F1_0542_patch_521">
               <a:extLst>
                 <a:ext uri="{FF2B5EF4-FFF2-40B4-BE49-F238E27FC236}">
-                  <a16:creationId id="{80F44493-CD15-47A6-B539-340D943FBC00}"/>
+                  <a16:creationId xmlns:a16="http://schemas.microsoft.com/office/drawing/2014/main" id="{80F44493-CD15-47A6-B539-340D943FBC00}"/>
                 </a:ext>
               </a:extLst>
             </p:cNvPr>
@@ -33766,7 +33849,7 @@
             <p:cNvPr id="544" name="F1_0543_patch_522">
               <a:extLst>
                 <a:ext uri="{FF2B5EF4-FFF2-40B4-BE49-F238E27FC236}">
-                  <a16:creationId id="{1158207B-560D-472C-B3E5-9A088CBE4283}"/>
+                  <a16:creationId xmlns:a16="http://schemas.microsoft.com/office/drawing/2014/main" id="{1158207B-560D-472C-B3E5-9A088CBE4283}"/>
                 </a:ext>
               </a:extLst>
             </p:cNvPr>
@@ -33818,7 +33901,7 @@
             <p:cNvPr id="545" name="F1_0544_patch_523">
               <a:extLst>
                 <a:ext uri="{FF2B5EF4-FFF2-40B4-BE49-F238E27FC236}">
-                  <a16:creationId id="{0167C712-F17F-4FAD-8DC5-902B70D4AC51}"/>
+                  <a16:creationId xmlns:a16="http://schemas.microsoft.com/office/drawing/2014/main" id="{0167C712-F17F-4FAD-8DC5-902B70D4AC51}"/>
                 </a:ext>
               </a:extLst>
             </p:cNvPr>
@@ -33870,7 +33953,7 @@
             <p:cNvPr id="546" name="F1_0545_patch_524">
               <a:extLst>
                 <a:ext uri="{FF2B5EF4-FFF2-40B4-BE49-F238E27FC236}">
-                  <a16:creationId id="{3DDC67C7-DAC3-4F7D-B55A-977387E95697}"/>
+                  <a16:creationId xmlns:a16="http://schemas.microsoft.com/office/drawing/2014/main" id="{3DDC67C7-DAC3-4F7D-B55A-977387E95697}"/>
                 </a:ext>
               </a:extLst>
             </p:cNvPr>
@@ -33922,7 +34005,7 @@
             <p:cNvPr id="547" name="F1_0546_patch_525">
               <a:extLst>
                 <a:ext uri="{FF2B5EF4-FFF2-40B4-BE49-F238E27FC236}">
-                  <a16:creationId id="{8929F323-6702-4E1D-9583-D2653F0BF6AD}"/>
+                  <a16:creationId xmlns:a16="http://schemas.microsoft.com/office/drawing/2014/main" id="{8929F323-6702-4E1D-9583-D2653F0BF6AD}"/>
                 </a:ext>
               </a:extLst>
             </p:cNvPr>
@@ -33974,7 +34057,7 @@
             <p:cNvPr id="548" name="F1_0547_patch_526">
               <a:extLst>
                 <a:ext uri="{FF2B5EF4-FFF2-40B4-BE49-F238E27FC236}">
-                  <a16:creationId id="{813B2E7E-4DD7-4A8D-9ECF-BB0EBD86E5C6}"/>
+                  <a16:creationId xmlns:a16="http://schemas.microsoft.com/office/drawing/2014/main" id="{813B2E7E-4DD7-4A8D-9ECF-BB0EBD86E5C6}"/>
                 </a:ext>
               </a:extLst>
             </p:cNvPr>
@@ -34026,7 +34109,7 @@
             <p:cNvPr id="549" name="F1_0548_patch_527">
               <a:extLst>
                 <a:ext uri="{FF2B5EF4-FFF2-40B4-BE49-F238E27FC236}">
-                  <a16:creationId id="{AE447EC4-5721-4136-BB35-D828A6FCAD56}"/>
+                  <a16:creationId xmlns:a16="http://schemas.microsoft.com/office/drawing/2014/main" id="{AE447EC4-5721-4136-BB35-D828A6FCAD56}"/>
                 </a:ext>
               </a:extLst>
             </p:cNvPr>
@@ -34078,7 +34161,7 @@
             <p:cNvPr id="550" name="F1_0549_patch_528">
               <a:extLst>
                 <a:ext uri="{FF2B5EF4-FFF2-40B4-BE49-F238E27FC236}">
-                  <a16:creationId id="{E9C73F60-A2B1-4354-85EF-4C7DA4DB131A}"/>
+                  <a16:creationId xmlns:a16="http://schemas.microsoft.com/office/drawing/2014/main" id="{E9C73F60-A2B1-4354-85EF-4C7DA4DB131A}"/>
                 </a:ext>
               </a:extLst>
             </p:cNvPr>
@@ -34130,7 +34213,7 @@
             <p:cNvPr id="551" name="F1_0550_patch_529">
               <a:extLst>
                 <a:ext uri="{FF2B5EF4-FFF2-40B4-BE49-F238E27FC236}">
-                  <a16:creationId id="{2BF0E97D-E83A-4731-9995-6A769DAB58DD}"/>
+                  <a16:creationId xmlns:a16="http://schemas.microsoft.com/office/drawing/2014/main" id="{2BF0E97D-E83A-4731-9995-6A769DAB58DD}"/>
                 </a:ext>
               </a:extLst>
             </p:cNvPr>
@@ -34182,7 +34265,7 @@
             <p:cNvPr id="552" name="F1_0551_patch_530">
               <a:extLst>
                 <a:ext uri="{FF2B5EF4-FFF2-40B4-BE49-F238E27FC236}">
-                  <a16:creationId id="{1BFBF495-80CD-467A-9C56-39ABE27D17DC}"/>
+                  <a16:creationId xmlns:a16="http://schemas.microsoft.com/office/drawing/2014/main" id="{1BFBF495-80CD-467A-9C56-39ABE27D17DC}"/>
                 </a:ext>
               </a:extLst>
             </p:cNvPr>
@@ -34234,7 +34317,7 @@
             <p:cNvPr id="553" name="F1_0552_patch_531">
               <a:extLst>
                 <a:ext uri="{FF2B5EF4-FFF2-40B4-BE49-F238E27FC236}">
-                  <a16:creationId id="{DEC7B058-487E-490E-BE5C-04E9C2AB88AF}"/>
+                  <a16:creationId xmlns:a16="http://schemas.microsoft.com/office/drawing/2014/main" id="{DEC7B058-487E-490E-BE5C-04E9C2AB88AF}"/>
                 </a:ext>
               </a:extLst>
             </p:cNvPr>
@@ -34286,7 +34369,7 @@
             <p:cNvPr id="554" name="F1_0553_patch_532">
               <a:extLst>
                 <a:ext uri="{FF2B5EF4-FFF2-40B4-BE49-F238E27FC236}">
-                  <a16:creationId id="{5787BA6F-261F-43E8-B34F-A938FEBB76B9}"/>
+                  <a16:creationId xmlns:a16="http://schemas.microsoft.com/office/drawing/2014/main" id="{5787BA6F-261F-43E8-B34F-A938FEBB76B9}"/>
                 </a:ext>
               </a:extLst>
             </p:cNvPr>
@@ -34338,7 +34421,7 @@
             <p:cNvPr id="555" name="F1_0554_patch_533">
               <a:extLst>
                 <a:ext uri="{FF2B5EF4-FFF2-40B4-BE49-F238E27FC236}">
-                  <a16:creationId id="{717FB5C9-CC9E-4523-937D-E0A132C3B9E4}"/>
+                  <a16:creationId xmlns:a16="http://schemas.microsoft.com/office/drawing/2014/main" id="{717FB5C9-CC9E-4523-937D-E0A132C3B9E4}"/>
                 </a:ext>
               </a:extLst>
             </p:cNvPr>
@@ -34390,7 +34473,7 @@
             <p:cNvPr id="556" name="F1_0555_patch_534">
               <a:extLst>
                 <a:ext uri="{FF2B5EF4-FFF2-40B4-BE49-F238E27FC236}">
-                  <a16:creationId id="{2AABD867-D931-426E-97A0-0E3CD7435C45}"/>
+                  <a16:creationId xmlns:a16="http://schemas.microsoft.com/office/drawing/2014/main" id="{2AABD867-D931-426E-97A0-0E3CD7435C45}"/>
                 </a:ext>
               </a:extLst>
             </p:cNvPr>
@@ -34442,7 +34525,7 @@
             <p:cNvPr id="557" name="F1_0556_patch_535">
               <a:extLst>
                 <a:ext uri="{FF2B5EF4-FFF2-40B4-BE49-F238E27FC236}">
-                  <a16:creationId id="{265E628F-3F66-4116-930E-47573B1F9C53}"/>
+                  <a16:creationId xmlns:a16="http://schemas.microsoft.com/office/drawing/2014/main" id="{265E628F-3F66-4116-930E-47573B1F9C53}"/>
                 </a:ext>
               </a:extLst>
             </p:cNvPr>
@@ -34494,7 +34577,7 @@
             <p:cNvPr id="558" name="F1_0557_patch_536">
               <a:extLst>
                 <a:ext uri="{FF2B5EF4-FFF2-40B4-BE49-F238E27FC236}">
-                  <a16:creationId id="{3E9EF8C5-BB92-4C96-B9D4-B79C236E6FBB}"/>
+                  <a16:creationId xmlns:a16="http://schemas.microsoft.com/office/drawing/2014/main" id="{3E9EF8C5-BB92-4C96-B9D4-B79C236E6FBB}"/>
                 </a:ext>
               </a:extLst>
             </p:cNvPr>
@@ -34546,7 +34629,7 @@
             <p:cNvPr id="559" name="F1_0558_patch_537">
               <a:extLst>
                 <a:ext uri="{FF2B5EF4-FFF2-40B4-BE49-F238E27FC236}">
-                  <a16:creationId id="{E8F9470C-6C1B-4B01-8B9A-7EF44CD1AD12}"/>
+                  <a16:creationId xmlns:a16="http://schemas.microsoft.com/office/drawing/2014/main" id="{E8F9470C-6C1B-4B01-8B9A-7EF44CD1AD12}"/>
                 </a:ext>
               </a:extLst>
             </p:cNvPr>
@@ -34598,7 +34681,7 @@
             <p:cNvPr id="560" name="F1_0559_patch_538">
               <a:extLst>
                 <a:ext uri="{FF2B5EF4-FFF2-40B4-BE49-F238E27FC236}">
-                  <a16:creationId id="{984E00E3-BCD5-46F3-AB18-39E3C3B45B7E}"/>
+                  <a16:creationId xmlns:a16="http://schemas.microsoft.com/office/drawing/2014/main" id="{984E00E3-BCD5-46F3-AB18-39E3C3B45B7E}"/>
                 </a:ext>
               </a:extLst>
             </p:cNvPr>
@@ -34650,7 +34733,7 @@
             <p:cNvPr id="561" name="F1_0560_patch_539">
               <a:extLst>
                 <a:ext uri="{FF2B5EF4-FFF2-40B4-BE49-F238E27FC236}">
-                  <a16:creationId id="{7D879535-CAC2-4B0E-8D91-54D0B3005CDD}"/>
+                  <a16:creationId xmlns:a16="http://schemas.microsoft.com/office/drawing/2014/main" id="{7D879535-CAC2-4B0E-8D91-54D0B3005CDD}"/>
                 </a:ext>
               </a:extLst>
             </p:cNvPr>
@@ -34702,7 +34785,7 @@
             <p:cNvPr id="562" name="F1_0561_patch_540">
               <a:extLst>
                 <a:ext uri="{FF2B5EF4-FFF2-40B4-BE49-F238E27FC236}">
-                  <a16:creationId id="{9A139DC4-EED5-469E-89CC-9CFE42B5BA4E}"/>
+                  <a16:creationId xmlns:a16="http://schemas.microsoft.com/office/drawing/2014/main" id="{9A139DC4-EED5-469E-89CC-9CFE42B5BA4E}"/>
                 </a:ext>
               </a:extLst>
             </p:cNvPr>
@@ -34754,7 +34837,7 @@
             <p:cNvPr id="563" name="F1_0562_patch_541">
               <a:extLst>
                 <a:ext uri="{FF2B5EF4-FFF2-40B4-BE49-F238E27FC236}">
-                  <a16:creationId id="{BDA55E2A-25B0-4C28-B105-2D1E6063CD67}"/>
+                  <a16:creationId xmlns:a16="http://schemas.microsoft.com/office/drawing/2014/main" id="{BDA55E2A-25B0-4C28-B105-2D1E6063CD67}"/>
                 </a:ext>
               </a:extLst>
             </p:cNvPr>
@@ -34806,7 +34889,7 @@
             <p:cNvPr id="564" name="F1_0563_patch_542">
               <a:extLst>
                 <a:ext uri="{FF2B5EF4-FFF2-40B4-BE49-F238E27FC236}">
-                  <a16:creationId id="{9D045DB6-D8BC-49DA-81E8-E6C86989FF73}"/>
+                  <a16:creationId xmlns:a16="http://schemas.microsoft.com/office/drawing/2014/main" id="{9D045DB6-D8BC-49DA-81E8-E6C86989FF73}"/>
                 </a:ext>
               </a:extLst>
             </p:cNvPr>
@@ -34858,7 +34941,7 @@
             <p:cNvPr id="565" name="F1_0564_patch_543">
               <a:extLst>
                 <a:ext uri="{FF2B5EF4-FFF2-40B4-BE49-F238E27FC236}">
-                  <a16:creationId id="{37640C9B-CFEB-4323-92C9-F0FDE7D538A7}"/>
+                  <a16:creationId xmlns:a16="http://schemas.microsoft.com/office/drawing/2014/main" id="{37640C9B-CFEB-4323-92C9-F0FDE7D538A7}"/>
                 </a:ext>
               </a:extLst>
             </p:cNvPr>
@@ -34910,7 +34993,7 @@
             <p:cNvPr id="566" name="F1_0565_patch_544">
               <a:extLst>
                 <a:ext uri="{FF2B5EF4-FFF2-40B4-BE49-F238E27FC236}">
-                  <a16:creationId id="{00EDF90B-4D60-4F53-9F8F-E921B3AFF61B}"/>
+                  <a16:creationId xmlns:a16="http://schemas.microsoft.com/office/drawing/2014/main" id="{00EDF90B-4D60-4F53-9F8F-E921B3AFF61B}"/>
                 </a:ext>
               </a:extLst>
             </p:cNvPr>
@@ -34962,7 +35045,7 @@
             <p:cNvPr id="567" name="F1_0566_patch_545">
               <a:extLst>
                 <a:ext uri="{FF2B5EF4-FFF2-40B4-BE49-F238E27FC236}">
-                  <a16:creationId id="{E9F4AFFD-0ABC-40C7-9751-893FFE6DCE3A}"/>
+                  <a16:creationId xmlns:a16="http://schemas.microsoft.com/office/drawing/2014/main" id="{E9F4AFFD-0ABC-40C7-9751-893FFE6DCE3A}"/>
                 </a:ext>
               </a:extLst>
             </p:cNvPr>
@@ -35014,7 +35097,7 @@
             <p:cNvPr id="568" name="F1_0567_patch_546">
               <a:extLst>
                 <a:ext uri="{FF2B5EF4-FFF2-40B4-BE49-F238E27FC236}">
-                  <a16:creationId id="{BB0CC855-6BE3-4C76-9BCC-2583E063175D}"/>
+                  <a16:creationId xmlns:a16="http://schemas.microsoft.com/office/drawing/2014/main" id="{BB0CC855-6BE3-4C76-9BCC-2583E063175D}"/>
                 </a:ext>
               </a:extLst>
             </p:cNvPr>
@@ -35066,7 +35149,7 @@
             <p:cNvPr id="569" name="F1_0568_patch_547">
               <a:extLst>
                 <a:ext uri="{FF2B5EF4-FFF2-40B4-BE49-F238E27FC236}">
-                  <a16:creationId id="{7ECCB811-AC13-4E3A-B934-884A6789EC77}"/>
+                  <a16:creationId xmlns:a16="http://schemas.microsoft.com/office/drawing/2014/main" id="{7ECCB811-AC13-4E3A-B934-884A6789EC77}"/>
                 </a:ext>
               </a:extLst>
             </p:cNvPr>
@@ -35118,7 +35201,7 @@
             <p:cNvPr id="570" name="F1_0569_patch_548">
               <a:extLst>
                 <a:ext uri="{FF2B5EF4-FFF2-40B4-BE49-F238E27FC236}">
-                  <a16:creationId id="{DE4BDB03-34B2-4033-9140-D7926956A857}"/>
+                  <a16:creationId xmlns:a16="http://schemas.microsoft.com/office/drawing/2014/main" id="{DE4BDB03-34B2-4033-9140-D7926956A857}"/>
                 </a:ext>
               </a:extLst>
             </p:cNvPr>
@@ -35170,7 +35253,7 @@
             <p:cNvPr id="571" name="F1_0570_patch_549">
               <a:extLst>
                 <a:ext uri="{FF2B5EF4-FFF2-40B4-BE49-F238E27FC236}">
-                  <a16:creationId id="{F3FCA4AE-1823-46C6-A613-BDCF0A451010}"/>
+                  <a16:creationId xmlns:a16="http://schemas.microsoft.com/office/drawing/2014/main" id="{F3FCA4AE-1823-46C6-A613-BDCF0A451010}"/>
                 </a:ext>
               </a:extLst>
             </p:cNvPr>
@@ -35222,7 +35305,7 @@
             <p:cNvPr id="572" name="F1_0571_patch_550">
               <a:extLst>
                 <a:ext uri="{FF2B5EF4-FFF2-40B4-BE49-F238E27FC236}">
-                  <a16:creationId id="{7F6F4825-E468-41E0-B013-070C277082BA}"/>
+                  <a16:creationId xmlns:a16="http://schemas.microsoft.com/office/drawing/2014/main" id="{7F6F4825-E468-41E0-B013-070C277082BA}"/>
                 </a:ext>
               </a:extLst>
             </p:cNvPr>
@@ -35274,7 +35357,7 @@
             <p:cNvPr id="573" name="F1_0572_patch_551">
               <a:extLst>
                 <a:ext uri="{FF2B5EF4-FFF2-40B4-BE49-F238E27FC236}">
-                  <a16:creationId id="{7B3795FB-5A89-479B-828E-B98FEFF1DD20}"/>
+                  <a16:creationId xmlns:a16="http://schemas.microsoft.com/office/drawing/2014/main" id="{7B3795FB-5A89-479B-828E-B98FEFF1DD20}"/>
                 </a:ext>
               </a:extLst>
             </p:cNvPr>
@@ -35326,7 +35409,7 @@
             <p:cNvPr id="574" name="F1_0573_patch_552">
               <a:extLst>
                 <a:ext uri="{FF2B5EF4-FFF2-40B4-BE49-F238E27FC236}">
-                  <a16:creationId id="{8C4D6BB8-3BF0-462B-AB40-A445467864AC}"/>
+                  <a16:creationId xmlns:a16="http://schemas.microsoft.com/office/drawing/2014/main" id="{8C4D6BB8-3BF0-462B-AB40-A445467864AC}"/>
                 </a:ext>
               </a:extLst>
             </p:cNvPr>
@@ -35378,7 +35461,7 @@
             <p:cNvPr id="575" name="F1_0574_patch_553">
               <a:extLst>
                 <a:ext uri="{FF2B5EF4-FFF2-40B4-BE49-F238E27FC236}">
-                  <a16:creationId id="{1F647544-A56E-4362-A2F2-7B04769789FC}"/>
+                  <a16:creationId xmlns:a16="http://schemas.microsoft.com/office/drawing/2014/main" id="{1F647544-A56E-4362-A2F2-7B04769789FC}"/>
                 </a:ext>
               </a:extLst>
             </p:cNvPr>
@@ -35430,7 +35513,7 @@
             <p:cNvPr id="576" name="F1_0575_patch_554">
               <a:extLst>
                 <a:ext uri="{FF2B5EF4-FFF2-40B4-BE49-F238E27FC236}">
-                  <a16:creationId id="{18FEED3D-FAAC-4121-AB19-03D096B986D6}"/>
+                  <a16:creationId xmlns:a16="http://schemas.microsoft.com/office/drawing/2014/main" id="{18FEED3D-FAAC-4121-AB19-03D096B986D6}"/>
                 </a:ext>
               </a:extLst>
             </p:cNvPr>
@@ -35482,7 +35565,7 @@
             <p:cNvPr id="577" name="F1_0576_patch_555">
               <a:extLst>
                 <a:ext uri="{FF2B5EF4-FFF2-40B4-BE49-F238E27FC236}">
-                  <a16:creationId id="{800A82C5-408A-4949-B7DC-BCACA4FF71CD}"/>
+                  <a16:creationId xmlns:a16="http://schemas.microsoft.com/office/drawing/2014/main" id="{800A82C5-408A-4949-B7DC-BCACA4FF71CD}"/>
                 </a:ext>
               </a:extLst>
             </p:cNvPr>
@@ -35534,7 +35617,7 @@
             <p:cNvPr id="578" name="F1_0577_patch_556">
               <a:extLst>
                 <a:ext uri="{FF2B5EF4-FFF2-40B4-BE49-F238E27FC236}">
-                  <a16:creationId id="{1DE8AD20-B93E-4DF9-AC28-FC3CA149ABF7}"/>
+                  <a16:creationId xmlns:a16="http://schemas.microsoft.com/office/drawing/2014/main" id="{1DE8AD20-B93E-4DF9-AC28-FC3CA149ABF7}"/>
                 </a:ext>
               </a:extLst>
             </p:cNvPr>
@@ -35586,7 +35669,7 @@
             <p:cNvPr id="579" name="F1_0578_patch_557">
               <a:extLst>
                 <a:ext uri="{FF2B5EF4-FFF2-40B4-BE49-F238E27FC236}">
-                  <a16:creationId id="{F3FF3EA8-2904-488D-91C4-919E4BD4DD96}"/>
+                  <a16:creationId xmlns:a16="http://schemas.microsoft.com/office/drawing/2014/main" id="{F3FF3EA8-2904-488D-91C4-919E4BD4DD96}"/>
                 </a:ext>
               </a:extLst>
             </p:cNvPr>
@@ -35638,7 +35721,7 @@
             <p:cNvPr id="580" name="F1_0579_patch_558">
               <a:extLst>
                 <a:ext uri="{FF2B5EF4-FFF2-40B4-BE49-F238E27FC236}">
-                  <a16:creationId id="{7A6F7A06-3895-4ADD-A374-8A8AB001D5C7}"/>
+                  <a16:creationId xmlns:a16="http://schemas.microsoft.com/office/drawing/2014/main" id="{7A6F7A06-3895-4ADD-A374-8A8AB001D5C7}"/>
                 </a:ext>
               </a:extLst>
             </p:cNvPr>
@@ -35690,7 +35773,7 @@
             <p:cNvPr id="581" name="F1_0580_patch_559">
               <a:extLst>
                 <a:ext uri="{FF2B5EF4-FFF2-40B4-BE49-F238E27FC236}">
-                  <a16:creationId id="{630E02FC-B820-4E8C-8128-F4C9BF05C44D}"/>
+                  <a16:creationId xmlns:a16="http://schemas.microsoft.com/office/drawing/2014/main" id="{630E02FC-B820-4E8C-8128-F4C9BF05C44D}"/>
                 </a:ext>
               </a:extLst>
             </p:cNvPr>
@@ -35742,7 +35825,7 @@
             <p:cNvPr id="582" name="F1_0581_patch_560">
               <a:extLst>
                 <a:ext uri="{FF2B5EF4-FFF2-40B4-BE49-F238E27FC236}">
-                  <a16:creationId id="{6ADC040A-3965-4632-BA16-0D6823303C84}"/>
+                  <a16:creationId xmlns:a16="http://schemas.microsoft.com/office/drawing/2014/main" id="{6ADC040A-3965-4632-BA16-0D6823303C84}"/>
                 </a:ext>
               </a:extLst>
             </p:cNvPr>
@@ -35794,7 +35877,7 @@
             <p:cNvPr id="583" name="F1_0582_patch_561">
               <a:extLst>
                 <a:ext uri="{FF2B5EF4-FFF2-40B4-BE49-F238E27FC236}">
-                  <a16:creationId id="{38563739-BE4A-4991-92CD-CA7AE1A1A194}"/>
+                  <a16:creationId xmlns:a16="http://schemas.microsoft.com/office/drawing/2014/main" id="{38563739-BE4A-4991-92CD-CA7AE1A1A194}"/>
                 </a:ext>
               </a:extLst>
             </p:cNvPr>
@@ -35846,7 +35929,7 @@
             <p:cNvPr id="584" name="F1_0583_patch_562">
               <a:extLst>
                 <a:ext uri="{FF2B5EF4-FFF2-40B4-BE49-F238E27FC236}">
-                  <a16:creationId id="{CC56C010-D22A-4EE9-A90E-A35D6344A1D7}"/>
+                  <a16:creationId xmlns:a16="http://schemas.microsoft.com/office/drawing/2014/main" id="{CC56C010-D22A-4EE9-A90E-A35D6344A1D7}"/>
                 </a:ext>
               </a:extLst>
             </p:cNvPr>
@@ -35898,7 +35981,7 @@
             <p:cNvPr id="585" name="F1_0584_patch_563">
               <a:extLst>
                 <a:ext uri="{FF2B5EF4-FFF2-40B4-BE49-F238E27FC236}">
-                  <a16:creationId id="{94D9DD3A-8BEC-4011-AF81-4CF2B40EFDCB}"/>
+                  <a16:creationId xmlns:a16="http://schemas.microsoft.com/office/drawing/2014/main" id="{94D9DD3A-8BEC-4011-AF81-4CF2B40EFDCB}"/>
                 </a:ext>
               </a:extLst>
             </p:cNvPr>
@@ -35950,7 +36033,7 @@
             <p:cNvPr id="586" name="F1_0585_patch_564">
               <a:extLst>
                 <a:ext uri="{FF2B5EF4-FFF2-40B4-BE49-F238E27FC236}">
-                  <a16:creationId id="{47476B13-79C1-4334-8921-B84651620C21}"/>
+                  <a16:creationId xmlns:a16="http://schemas.microsoft.com/office/drawing/2014/main" id="{47476B13-79C1-4334-8921-B84651620C21}"/>
                 </a:ext>
               </a:extLst>
             </p:cNvPr>
@@ -36002,7 +36085,7 @@
             <p:cNvPr id="587" name="F1_0586_patch_565">
               <a:extLst>
                 <a:ext uri="{FF2B5EF4-FFF2-40B4-BE49-F238E27FC236}">
-                  <a16:creationId id="{3C25B077-44F9-4E6F-9993-0FF2D47AE3EA}"/>
+                  <a16:creationId xmlns:a16="http://schemas.microsoft.com/office/drawing/2014/main" id="{3C25B077-44F9-4E6F-9993-0FF2D47AE3EA}"/>
                 </a:ext>
               </a:extLst>
             </p:cNvPr>
@@ -36054,7 +36137,7 @@
             <p:cNvPr id="588" name="F1_0587_patch_566">
               <a:extLst>
                 <a:ext uri="{FF2B5EF4-FFF2-40B4-BE49-F238E27FC236}">
-                  <a16:creationId id="{F47FA44C-C4DF-4385-8DA9-D6653999394A}"/>
+                  <a16:creationId xmlns:a16="http://schemas.microsoft.com/office/drawing/2014/main" id="{F47FA44C-C4DF-4385-8DA9-D6653999394A}"/>
                 </a:ext>
               </a:extLst>
             </p:cNvPr>
@@ -36106,7 +36189,7 @@
             <p:cNvPr id="589" name="F1_0588_patch_567">
               <a:extLst>
                 <a:ext uri="{FF2B5EF4-FFF2-40B4-BE49-F238E27FC236}">
-                  <a16:creationId id="{B0B3F1FF-1FA2-4634-81D1-949E314D8B6D}"/>
+                  <a16:creationId xmlns:a16="http://schemas.microsoft.com/office/drawing/2014/main" id="{B0B3F1FF-1FA2-4634-81D1-949E314D8B6D}"/>
                 </a:ext>
               </a:extLst>
             </p:cNvPr>
@@ -36158,7 +36241,7 @@
             <p:cNvPr id="590" name="F1_0589_patch_568">
               <a:extLst>
                 <a:ext uri="{FF2B5EF4-FFF2-40B4-BE49-F238E27FC236}">
-                  <a16:creationId id="{5222BBA4-51CB-40DD-B249-15B83FF25515}"/>
+                  <a16:creationId xmlns:a16="http://schemas.microsoft.com/office/drawing/2014/main" id="{5222BBA4-51CB-40DD-B249-15B83FF25515}"/>
                 </a:ext>
               </a:extLst>
             </p:cNvPr>
@@ -36210,7 +36293,7 @@
             <p:cNvPr id="591" name="F1_0590_patch_569">
               <a:extLst>
                 <a:ext uri="{FF2B5EF4-FFF2-40B4-BE49-F238E27FC236}">
-                  <a16:creationId id="{F0D8A9D8-E994-4474-9CC4-56F8FFDF73BF}"/>
+                  <a16:creationId xmlns:a16="http://schemas.microsoft.com/office/drawing/2014/main" id="{F0D8A9D8-E994-4474-9CC4-56F8FFDF73BF}"/>
                 </a:ext>
               </a:extLst>
             </p:cNvPr>
@@ -36262,7 +36345,7 @@
             <p:cNvPr id="592" name="F1_0591_patch_570">
               <a:extLst>
                 <a:ext uri="{FF2B5EF4-FFF2-40B4-BE49-F238E27FC236}">
-                  <a16:creationId id="{FE04F105-ADCF-47AB-AF77-8D8B8E116721}"/>
+                  <a16:creationId xmlns:a16="http://schemas.microsoft.com/office/drawing/2014/main" id="{FE04F105-ADCF-47AB-AF77-8D8B8E116721}"/>
                 </a:ext>
               </a:extLst>
             </p:cNvPr>
@@ -36314,7 +36397,7 @@
             <p:cNvPr id="593" name="F1_0592_patch_571">
               <a:extLst>
                 <a:ext uri="{FF2B5EF4-FFF2-40B4-BE49-F238E27FC236}">
-                  <a16:creationId id="{387DD7A6-0DCF-40E4-BCFA-BCCE9849EF8F}"/>
+                  <a16:creationId xmlns:a16="http://schemas.microsoft.com/office/drawing/2014/main" id="{387DD7A6-0DCF-40E4-BCFA-BCCE9849EF8F}"/>
                 </a:ext>
               </a:extLst>
             </p:cNvPr>
@@ -36366,7 +36449,7 @@
             <p:cNvPr id="594" name="F1_0593_patch_572">
               <a:extLst>
                 <a:ext uri="{FF2B5EF4-FFF2-40B4-BE49-F238E27FC236}">
-                  <a16:creationId id="{9122C0D1-B7E5-4EDC-A257-36136D64B575}"/>
+                  <a16:creationId xmlns:a16="http://schemas.microsoft.com/office/drawing/2014/main" id="{9122C0D1-B7E5-4EDC-A257-36136D64B575}"/>
                 </a:ext>
               </a:extLst>
             </p:cNvPr>
@@ -36418,7 +36501,7 @@
             <p:cNvPr id="595" name="F1_0594_patch_573">
               <a:extLst>
                 <a:ext uri="{FF2B5EF4-FFF2-40B4-BE49-F238E27FC236}">
-                  <a16:creationId id="{58393E9F-23E4-43A5-A5CB-10E4F97D9223}"/>
+                  <a16:creationId xmlns:a16="http://schemas.microsoft.com/office/drawing/2014/main" id="{58393E9F-23E4-43A5-A5CB-10E4F97D9223}"/>
                 </a:ext>
               </a:extLst>
             </p:cNvPr>
@@ -36470,7 +36553,7 @@
             <p:cNvPr id="596" name="F1_0595_patch_574">
               <a:extLst>
                 <a:ext uri="{FF2B5EF4-FFF2-40B4-BE49-F238E27FC236}">
-                  <a16:creationId id="{2FE45B27-4525-4FC2-AEF0-802DE1D672C3}"/>
+                  <a16:creationId xmlns:a16="http://schemas.microsoft.com/office/drawing/2014/main" id="{2FE45B27-4525-4FC2-AEF0-802DE1D672C3}"/>
                 </a:ext>
               </a:extLst>
             </p:cNvPr>
@@ -36522,7 +36605,7 @@
             <p:cNvPr id="597" name="F1_0596_patch_575">
               <a:extLst>
                 <a:ext uri="{FF2B5EF4-FFF2-40B4-BE49-F238E27FC236}">
-                  <a16:creationId id="{26AD193E-787E-4BE5-B493-56D8DCFE74C0}"/>
+                  <a16:creationId xmlns:a16="http://schemas.microsoft.com/office/drawing/2014/main" id="{26AD193E-787E-4BE5-B493-56D8DCFE74C0}"/>
                 </a:ext>
               </a:extLst>
             </p:cNvPr>
@@ -36574,7 +36657,7 @@
             <p:cNvPr id="598" name="F1_0597_patch_576">
               <a:extLst>
                 <a:ext uri="{FF2B5EF4-FFF2-40B4-BE49-F238E27FC236}">
-                  <a16:creationId id="{D10DC006-681D-4F41-A7BF-042E1DC3A42C}"/>
+                  <a16:creationId xmlns:a16="http://schemas.microsoft.com/office/drawing/2014/main" id="{D10DC006-681D-4F41-A7BF-042E1DC3A42C}"/>
                 </a:ext>
               </a:extLst>
             </p:cNvPr>
@@ -36626,7 +36709,7 @@
             <p:cNvPr id="599" name="F1_0598_patch_577">
               <a:extLst>
                 <a:ext uri="{FF2B5EF4-FFF2-40B4-BE49-F238E27FC236}">
-                  <a16:creationId id="{50AA20EA-766E-4664-962D-E679F26712CA}"/>
+                  <a16:creationId xmlns:a16="http://schemas.microsoft.com/office/drawing/2014/main" id="{50AA20EA-766E-4664-962D-E679F26712CA}"/>
                 </a:ext>
               </a:extLst>
             </p:cNvPr>
@@ -36678,7 +36761,7 @@
             <p:cNvPr id="600" name="F1_0599_patch_578">
               <a:extLst>
                 <a:ext uri="{FF2B5EF4-FFF2-40B4-BE49-F238E27FC236}">
-                  <a16:creationId id="{2908DF3E-D646-47AB-9F78-DFFABB050617}"/>
+                  <a16:creationId xmlns:a16="http://schemas.microsoft.com/office/drawing/2014/main" id="{2908DF3E-D646-47AB-9F78-DFFABB050617}"/>
                 </a:ext>
               </a:extLst>
             </p:cNvPr>
@@ -36730,7 +36813,7 @@
             <p:cNvPr id="601" name="F1_0600_patch_579">
               <a:extLst>
                 <a:ext uri="{FF2B5EF4-FFF2-40B4-BE49-F238E27FC236}">
-                  <a16:creationId id="{202B49AE-9738-4FD2-B816-8D2F41A2783C}"/>
+                  <a16:creationId xmlns:a16="http://schemas.microsoft.com/office/drawing/2014/main" id="{202B49AE-9738-4FD2-B816-8D2F41A2783C}"/>
                 </a:ext>
               </a:extLst>
             </p:cNvPr>
@@ -36782,7 +36865,7 @@
             <p:cNvPr id="602" name="F1_0601_patch_580">
               <a:extLst>
                 <a:ext uri="{FF2B5EF4-FFF2-40B4-BE49-F238E27FC236}">
-                  <a16:creationId id="{46F325B3-1B87-495E-A7D7-FF6AA4FBC76C}"/>
+                  <a16:creationId xmlns:a16="http://schemas.microsoft.com/office/drawing/2014/main" id="{46F325B3-1B87-495E-A7D7-FF6AA4FBC76C}"/>
                 </a:ext>
               </a:extLst>
             </p:cNvPr>
@@ -36834,7 +36917,7 @@
             <p:cNvPr id="603" name="F1_0602_patch_581">
               <a:extLst>
                 <a:ext uri="{FF2B5EF4-FFF2-40B4-BE49-F238E27FC236}">
-                  <a16:creationId id="{6E867C81-E088-4427-B0FA-2829A9CDEB89}"/>
+                  <a16:creationId xmlns:a16="http://schemas.microsoft.com/office/drawing/2014/main" id="{6E867C81-E088-4427-B0FA-2829A9CDEB89}"/>
                 </a:ext>
               </a:extLst>
             </p:cNvPr>
@@ -36886,7 +36969,7 @@
             <p:cNvPr id="604" name="F1_0603_patch_582">
               <a:extLst>
                 <a:ext uri="{FF2B5EF4-FFF2-40B4-BE49-F238E27FC236}">
-                  <a16:creationId id="{5494BBAE-3372-4790-87E1-E90EB7567BB5}"/>
+                  <a16:creationId xmlns:a16="http://schemas.microsoft.com/office/drawing/2014/main" id="{5494BBAE-3372-4790-87E1-E90EB7567BB5}"/>
                 </a:ext>
               </a:extLst>
             </p:cNvPr>
@@ -36938,7 +37021,7 @@
             <p:cNvPr id="605" name="F1_0604_patch_583">
               <a:extLst>
                 <a:ext uri="{FF2B5EF4-FFF2-40B4-BE49-F238E27FC236}">
-                  <a16:creationId id="{677E095B-F069-4FDF-8BFA-858A2A55A75A}"/>
+                  <a16:creationId xmlns:a16="http://schemas.microsoft.com/office/drawing/2014/main" id="{677E095B-F069-4FDF-8BFA-858A2A55A75A}"/>
                 </a:ext>
               </a:extLst>
             </p:cNvPr>
@@ -36990,7 +37073,7 @@
             <p:cNvPr id="606" name="F1_0605_patch_584">
               <a:extLst>
                 <a:ext uri="{FF2B5EF4-FFF2-40B4-BE49-F238E27FC236}">
-                  <a16:creationId id="{11A0B8AF-91D1-4FBD-B9C0-26E022E77FA4}"/>
+                  <a16:creationId xmlns:a16="http://schemas.microsoft.com/office/drawing/2014/main" id="{11A0B8AF-91D1-4FBD-B9C0-26E022E77FA4}"/>
                 </a:ext>
               </a:extLst>
             </p:cNvPr>
@@ -37042,7 +37125,7 @@
             <p:cNvPr id="607" name="F1_0606_patch_585">
               <a:extLst>
                 <a:ext uri="{FF2B5EF4-FFF2-40B4-BE49-F238E27FC236}">
-                  <a16:creationId id="{2ABA6B50-5E84-470F-B03A-A30AB2739C44}"/>
+                  <a16:creationId xmlns:a16="http://schemas.microsoft.com/office/drawing/2014/main" id="{2ABA6B50-5E84-470F-B03A-A30AB2739C44}"/>
                 </a:ext>
               </a:extLst>
             </p:cNvPr>
@@ -37094,7 +37177,7 @@
             <p:cNvPr id="608" name="F1_0607_patch_586">
               <a:extLst>
                 <a:ext uri="{FF2B5EF4-FFF2-40B4-BE49-F238E27FC236}">
-                  <a16:creationId id="{76916FF3-DB58-4313-BC3E-33EC3653C8F3}"/>
+                  <a16:creationId xmlns:a16="http://schemas.microsoft.com/office/drawing/2014/main" id="{76916FF3-DB58-4313-BC3E-33EC3653C8F3}"/>
                 </a:ext>
               </a:extLst>
             </p:cNvPr>
@@ -37146,7 +37229,7 @@
             <p:cNvPr id="609" name="F1_0608_patch_587">
               <a:extLst>
                 <a:ext uri="{FF2B5EF4-FFF2-40B4-BE49-F238E27FC236}">
-                  <a16:creationId id="{F17EB56F-0FD1-4877-AA69-DEC7A88D184B}"/>
+                  <a16:creationId xmlns:a16="http://schemas.microsoft.com/office/drawing/2014/main" id="{F17EB56F-0FD1-4877-AA69-DEC7A88D184B}"/>
                 </a:ext>
               </a:extLst>
             </p:cNvPr>
@@ -37198,7 +37281,7 @@
             <p:cNvPr id="610" name="F1_0609_patch_588">
               <a:extLst>
                 <a:ext uri="{FF2B5EF4-FFF2-40B4-BE49-F238E27FC236}">
-                  <a16:creationId id="{19C7FC9A-68DF-43F7-B7D2-199336AC05ED}"/>
+                  <a16:creationId xmlns:a16="http://schemas.microsoft.com/office/drawing/2014/main" id="{19C7FC9A-68DF-43F7-B7D2-199336AC05ED}"/>
                 </a:ext>
               </a:extLst>
             </p:cNvPr>
@@ -37250,7 +37333,7 @@
             <p:cNvPr id="611" name="F1_0610_patch_589">
               <a:extLst>
                 <a:ext uri="{FF2B5EF4-FFF2-40B4-BE49-F238E27FC236}">
-                  <a16:creationId id="{1297CF93-4187-4755-ADE8-9A4C600620A2}"/>
+                  <a16:creationId xmlns:a16="http://schemas.microsoft.com/office/drawing/2014/main" id="{1297CF93-4187-4755-ADE8-9A4C600620A2}"/>
                 </a:ext>
               </a:extLst>
             </p:cNvPr>
@@ -37302,7 +37385,7 @@
             <p:cNvPr id="612" name="F1_0611_patch_590">
               <a:extLst>
                 <a:ext uri="{FF2B5EF4-FFF2-40B4-BE49-F238E27FC236}">
-                  <a16:creationId id="{12577CC2-3F11-4236-9149-0DF99DE78957}"/>
+                  <a16:creationId xmlns:a16="http://schemas.microsoft.com/office/drawing/2014/main" id="{12577CC2-3F11-4236-9149-0DF99DE78957}"/>
                 </a:ext>
               </a:extLst>
             </p:cNvPr>
@@ -37354,7 +37437,7 @@
             <p:cNvPr id="613" name="F1_0612_patch_591">
               <a:extLst>
                 <a:ext uri="{FF2B5EF4-FFF2-40B4-BE49-F238E27FC236}">
-                  <a16:creationId id="{432C8DEC-D33C-499D-B091-4DAB0DFF58C4}"/>
+                  <a16:creationId xmlns:a16="http://schemas.microsoft.com/office/drawing/2014/main" id="{432C8DEC-D33C-499D-B091-4DAB0DFF58C4}"/>
                 </a:ext>
               </a:extLst>
             </p:cNvPr>
@@ -37406,7 +37489,7 @@
             <p:cNvPr id="614" name="F1_0613_patch_592">
               <a:extLst>
                 <a:ext uri="{FF2B5EF4-FFF2-40B4-BE49-F238E27FC236}">
-                  <a16:creationId id="{9A0A75E8-14C7-4EF8-924A-BBC6E29D0C1D}"/>
+                  <a16:creationId xmlns:a16="http://schemas.microsoft.com/office/drawing/2014/main" id="{9A0A75E8-14C7-4EF8-924A-BBC6E29D0C1D}"/>
                 </a:ext>
               </a:extLst>
             </p:cNvPr>
@@ -37458,7 +37541,7 @@
             <p:cNvPr id="615" name="F1_0614_patch_593">
               <a:extLst>
                 <a:ext uri="{FF2B5EF4-FFF2-40B4-BE49-F238E27FC236}">
-                  <a16:creationId id="{CA297AFB-0598-4141-908A-5E1E4377CC5B}"/>
+                  <a16:creationId xmlns:a16="http://schemas.microsoft.com/office/drawing/2014/main" id="{CA297AFB-0598-4141-908A-5E1E4377CC5B}"/>
                 </a:ext>
               </a:extLst>
             </p:cNvPr>
@@ -37510,7 +37593,7 @@
             <p:cNvPr id="616" name="F1_0615_patch_594">
               <a:extLst>
                 <a:ext uri="{FF2B5EF4-FFF2-40B4-BE49-F238E27FC236}">
-                  <a16:creationId id="{C01E684F-F88C-4FA8-9EFA-CCEC3D572398}"/>
+                  <a16:creationId xmlns:a16="http://schemas.microsoft.com/office/drawing/2014/main" id="{C01E684F-F88C-4FA8-9EFA-CCEC3D572398}"/>
                 </a:ext>
               </a:extLst>
             </p:cNvPr>
@@ -37562,7 +37645,7 @@
             <p:cNvPr id="617" name="F1_0616_patch_595">
               <a:extLst>
                 <a:ext uri="{FF2B5EF4-FFF2-40B4-BE49-F238E27FC236}">
-                  <a16:creationId id="{C3822AC5-6837-4C3A-B0B1-901DD3C9433A}"/>
+                  <a16:creationId xmlns:a16="http://schemas.microsoft.com/office/drawing/2014/main" id="{C3822AC5-6837-4C3A-B0B1-901DD3C9433A}"/>
                 </a:ext>
               </a:extLst>
             </p:cNvPr>
@@ -37614,7 +37697,7 @@
             <p:cNvPr id="618" name="F1_0617_patch_596">
               <a:extLst>
                 <a:ext uri="{FF2B5EF4-FFF2-40B4-BE49-F238E27FC236}">
-                  <a16:creationId id="{BD878103-D719-41AC-8DB6-89B48C68A90D}"/>
+                  <a16:creationId xmlns:a16="http://schemas.microsoft.com/office/drawing/2014/main" id="{BD878103-D719-41AC-8DB6-89B48C68A90D}"/>
                 </a:ext>
               </a:extLst>
             </p:cNvPr>
@@ -37666,7 +37749,7 @@
             <p:cNvPr id="619" name="F1_0618_patch_597">
               <a:extLst>
                 <a:ext uri="{FF2B5EF4-FFF2-40B4-BE49-F238E27FC236}">
-                  <a16:creationId id="{A4FC22A7-3A80-4DD9-AD49-9CAD06E76E4E}"/>
+                  <a16:creationId xmlns:a16="http://schemas.microsoft.com/office/drawing/2014/main" id="{A4FC22A7-3A80-4DD9-AD49-9CAD06E76E4E}"/>
                 </a:ext>
               </a:extLst>
             </p:cNvPr>
@@ -37718,7 +37801,7 @@
             <p:cNvPr id="620" name="F1_0619_patch_598">
               <a:extLst>
                 <a:ext uri="{FF2B5EF4-FFF2-40B4-BE49-F238E27FC236}">
-                  <a16:creationId id="{7ECB9E81-AF2C-4EF7-9EC1-033C2B653D12}"/>
+                  <a16:creationId xmlns:a16="http://schemas.microsoft.com/office/drawing/2014/main" id="{7ECB9E81-AF2C-4EF7-9EC1-033C2B653D12}"/>
                 </a:ext>
               </a:extLst>
             </p:cNvPr>
@@ -37770,7 +37853,7 @@
             <p:cNvPr id="623" name="F1_0622_line2d_3">
               <a:extLst>
                 <a:ext uri="{FF2B5EF4-FFF2-40B4-BE49-F238E27FC236}">
-                  <a16:creationId id="{F56646B4-4F01-4C63-A07F-74C10FDFD02A}"/>
+                  <a16:creationId xmlns:a16="http://schemas.microsoft.com/office/drawing/2014/main" id="{F56646B4-4F01-4C63-A07F-74C10FDFD02A}"/>
                 </a:ext>
               </a:extLst>
             </p:cNvPr>
@@ -37907,7 +37990,7 @@
             <p:cNvPr id="635" name="F1_0634_line2d_4">
               <a:extLst>
                 <a:ext uri="{FF2B5EF4-FFF2-40B4-BE49-F238E27FC236}">
-                  <a16:creationId id="{5F462A12-A329-4AA1-864A-A258FB536119}"/>
+                  <a16:creationId xmlns:a16="http://schemas.microsoft.com/office/drawing/2014/main" id="{5F462A12-A329-4AA1-864A-A258FB536119}"/>
                 </a:ext>
               </a:extLst>
             </p:cNvPr>
@@ -37958,7 +38041,7 @@
             <p:cNvPr id="636" name="F1_0635_line2d_5">
               <a:extLst>
                 <a:ext uri="{FF2B5EF4-FFF2-40B4-BE49-F238E27FC236}">
-                  <a16:creationId id="{55325D91-EF68-4F37-B4A2-EC27F8E620A6}"/>
+                  <a16:creationId xmlns:a16="http://schemas.microsoft.com/office/drawing/2014/main" id="{55325D91-EF68-4F37-B4A2-EC27F8E620A6}"/>
                 </a:ext>
               </a:extLst>
             </p:cNvPr>
@@ -38055,7 +38138,7 @@
             <p:cNvPr id="642" name="F1_0641_line2d_6">
               <a:extLst>
                 <a:ext uri="{FF2B5EF4-FFF2-40B4-BE49-F238E27FC236}">
-                  <a16:creationId id="{8233AD90-1AB2-4458-833C-B28DB991BDEE}"/>
+                  <a16:creationId xmlns:a16="http://schemas.microsoft.com/office/drawing/2014/main" id="{8233AD90-1AB2-4458-833C-B28DB991BDEE}"/>
                 </a:ext>
               </a:extLst>
             </p:cNvPr>
@@ -38100,7 +38183,7 @@
             <p:cNvPr id="643" name="F1_0642_line2d_7">
               <a:extLst>
                 <a:ext uri="{FF2B5EF4-FFF2-40B4-BE49-F238E27FC236}">
-                  <a16:creationId id="{4D6178C8-514F-48E1-9A2D-1B192E229A17}"/>
+                  <a16:creationId xmlns:a16="http://schemas.microsoft.com/office/drawing/2014/main" id="{4D6178C8-514F-48E1-9A2D-1B192E229A17}"/>
                 </a:ext>
               </a:extLst>
             </p:cNvPr>
@@ -38145,7 +38228,7 @@
             <p:cNvPr id="644" name="F1_0643_line2d_8">
               <a:extLst>
                 <a:ext uri="{FF2B5EF4-FFF2-40B4-BE49-F238E27FC236}">
-                  <a16:creationId id="{6D9CBDBA-03AB-40B6-A0B1-53D53DF88751}"/>
+                  <a16:creationId xmlns:a16="http://schemas.microsoft.com/office/drawing/2014/main" id="{6D9CBDBA-03AB-40B6-A0B1-53D53DF88751}"/>
                 </a:ext>
               </a:extLst>
             </p:cNvPr>
@@ -38190,7 +38273,7 @@
             <p:cNvPr id="774" name="F1_0773_text_77" descr="(d)">
               <a:extLst>
                 <a:ext uri="{FF2B5EF4-FFF2-40B4-BE49-F238E27FC236}">
-                  <a16:creationId id="{4FDCE844-A85F-4CD2-A7AC-D845CA3233D7}"/>
+                  <a16:creationId xmlns:a16="http://schemas.microsoft.com/office/drawing/2014/main" id="{4FDCE844-A85F-4CD2-A7AC-D845CA3233D7}"/>
                 </a:ext>
               </a:extLst>
             </p:cNvPr>
@@ -38247,7 +38330,7 @@
             <p:cNvPr id="775" name="F1_0774_text_78" descr="Choose the playwright, not the composer.">
               <a:extLst>
                 <a:ext uri="{FF2B5EF4-FFF2-40B4-BE49-F238E27FC236}">
-                  <a16:creationId id="{0FCCD4E6-6D4C-487E-9A42-2715F058C7B5}"/>
+                  <a16:creationId xmlns:a16="http://schemas.microsoft.com/office/drawing/2014/main" id="{0FCCD4E6-6D4C-487E-9A42-2715F058C7B5}"/>
                 </a:ext>
               </a:extLst>
             </p:cNvPr>
@@ -38304,7 +38387,7 @@
             <p:cNvPr id="776" name="F1_0775_text_79" descr="MoreHopQA example 1">
               <a:extLst>
                 <a:ext uri="{FF2B5EF4-FFF2-40B4-BE49-F238E27FC236}">
-                  <a16:creationId id="{8AE702D7-03DD-47BA-AE8C-E072C3F1F3D9}"/>
+                  <a16:creationId xmlns:a16="http://schemas.microsoft.com/office/drawing/2014/main" id="{8AE702D7-03DD-47BA-AE8C-E072C3F1F3D9}"/>
                 </a:ext>
               </a:extLst>
             </p:cNvPr>
@@ -38343,6 +38426,17 @@
                 </a:defRPr>
               </a:pPr>
               <a:r>
+                <a:rPr lang="en-US" sz="2040" b="0" i="0" kern="1200" spc="0" dirty="0" err="1">
+                  <a:solidFill>
+                    <a:srgbClr val="748293"/>
+                  </a:solidFill>
+                  <a:latin typeface="TimesNewRomanPSMT"/>
+                  <a:ea typeface="TimesNewRomanPSMT"/>
+                  <a:cs typeface="TimesNewRomanPSMT"/>
+                </a:rPr>
+                <a:t>MoreHopQA</a:t>
+              </a:r>
+              <a:r>
                 <a:rPr lang="en-US" sz="2040" b="0" i="0" kern="1200" spc="0" dirty="0">
                   <a:solidFill>
                     <a:srgbClr val="748293"/>
@@ -38351,7 +38445,7 @@
                   <a:ea typeface="TimesNewRomanPSMT"/>
                   <a:cs typeface="TimesNewRomanPSMT"/>
                 </a:rPr>
-                <a:t>MoreHopQA example 1</a:t>
+                <a:t> example</a:t>
               </a:r>
             </a:p>
           </p:txBody>
@@ -38361,7 +38455,7 @@
             <p:cNvPr id="777" name="F1_0776_text_80" descr="CONTEXT EXCERPTS">
               <a:extLst>
                 <a:ext uri="{FF2B5EF4-FFF2-40B4-BE49-F238E27FC236}">
-                  <a16:creationId id="{E4DAE491-7E8B-40FD-9614-5A5121814483}"/>
+                  <a16:creationId xmlns:a16="http://schemas.microsoft.com/office/drawing/2014/main" id="{E4DAE491-7E8B-40FD-9614-5A5121814483}"/>
                 </a:ext>
               </a:extLst>
             </p:cNvPr>
@@ -38418,7 +38512,7 @@
             <p:cNvPr id="778" name="F1_0777_text_81" descr="Name-span total (nats)">
               <a:extLst>
                 <a:ext uri="{FF2B5EF4-FFF2-40B4-BE49-F238E27FC236}">
-                  <a16:creationId id="{D8E618EA-2FB3-43DE-9683-8E34D2F78537}"/>
+                  <a16:creationId xmlns:a16="http://schemas.microsoft.com/office/drawing/2014/main" id="{D8E618EA-2FB3-43DE-9683-8E34D2F78537}"/>
                 </a:ext>
               </a:extLst>
             </p:cNvPr>
@@ -38475,7 +38569,7 @@
             <p:cNvPr id="779" name="F1_0778_text_82" descr="…">
               <a:extLst>
                 <a:ext uri="{FF2B5EF4-FFF2-40B4-BE49-F238E27FC236}">
-                  <a16:creationId id="{E93FC2EB-CC6F-4670-ACA6-5268BA0E1CF1}"/>
+                  <a16:creationId xmlns:a16="http://schemas.microsoft.com/office/drawing/2014/main" id="{E93FC2EB-CC6F-4670-ACA6-5268BA0E1CF1}"/>
                 </a:ext>
               </a:extLst>
             </p:cNvPr>
@@ -38532,7 +38626,7 @@
             <p:cNvPr id="780" name="F1_0779_text_83" descr="…">
               <a:extLst>
                 <a:ext uri="{FF2B5EF4-FFF2-40B4-BE49-F238E27FC236}">
-                  <a16:creationId id="{8C355D10-3E1B-414E-8265-1F990925970D}"/>
+                  <a16:creationId xmlns:a16="http://schemas.microsoft.com/office/drawing/2014/main" id="{8C355D10-3E1B-414E-8265-1F990925970D}"/>
                 </a:ext>
               </a:extLst>
             </p:cNvPr>
@@ -38589,7 +38683,7 @@
             <p:cNvPr id="781" name="F1_0780_text_84" descr="+1.56">
               <a:extLst>
                 <a:ext uri="{FF2B5EF4-FFF2-40B4-BE49-F238E27FC236}">
-                  <a16:creationId id="{C4C74CD7-8948-4FCD-88AD-75B7526DFF27}"/>
+                  <a16:creationId xmlns:a16="http://schemas.microsoft.com/office/drawing/2014/main" id="{C4C74CD7-8948-4FCD-88AD-75B7526DFF27}"/>
                 </a:ext>
               </a:extLst>
             </p:cNvPr>
@@ -38646,7 +38740,7 @@
             <p:cNvPr id="782" name="F1_0781_text_85" descr="−1.13">
               <a:extLst>
                 <a:ext uri="{FF2B5EF4-FFF2-40B4-BE49-F238E27FC236}">
-                  <a16:creationId id="{014E93FB-9583-46B2-868B-92A81A132750}"/>
+                  <a16:creationId xmlns:a16="http://schemas.microsoft.com/office/drawing/2014/main" id="{014E93FB-9583-46B2-868B-92A81A132750}"/>
                 </a:ext>
               </a:extLst>
             </p:cNvPr>
@@ -38703,7 +38797,7 @@
             <p:cNvPr id="783" name="F1_0782_text_86" descr="REQUESTED ROLE (EXCERPT)">
               <a:extLst>
                 <a:ext uri="{FF2B5EF4-FFF2-40B4-BE49-F238E27FC236}">
-                  <a16:creationId id="{53147C23-87C2-4278-8B9E-300E864BBA72}"/>
+                  <a16:creationId xmlns:a16="http://schemas.microsoft.com/office/drawing/2014/main" id="{53147C23-87C2-4278-8B9E-300E864BBA72}"/>
                 </a:ext>
               </a:extLst>
             </p:cNvPr>
@@ -38760,7 +38854,7 @@
             <p:cNvPr id="784" name="F1_0783_text_87" descr="…">
               <a:extLst>
                 <a:ext uri="{FF2B5EF4-FFF2-40B4-BE49-F238E27FC236}">
-                  <a16:creationId id="{4B873B86-4A95-425D-BC64-3DBA2359ECCC}"/>
+                  <a16:creationId xmlns:a16="http://schemas.microsoft.com/office/drawing/2014/main" id="{4B873B86-4A95-425D-BC64-3DBA2359ECCC}"/>
                 </a:ext>
               </a:extLst>
             </p:cNvPr>
@@ -38817,7 +38911,7 @@
             <p:cNvPr id="785" name="F1_0784_text_88" descr="…">
               <a:extLst>
                 <a:ext uri="{FF2B5EF4-FFF2-40B4-BE49-F238E27FC236}">
-                  <a16:creationId id="{65DAF87C-0B82-44FB-8B50-01C1BCDD3D09}"/>
+                  <a16:creationId xmlns:a16="http://schemas.microsoft.com/office/drawing/2014/main" id="{65DAF87C-0B82-44FB-8B50-01C1BCDD3D09}"/>
                 </a:ext>
               </a:extLst>
             </p:cNvPr>
@@ -38874,7 +38968,7 @@
             <p:cNvPr id="786" name="F1_0785_text_89" descr="Answer">
               <a:extLst>
                 <a:ext uri="{FF2B5EF4-FFF2-40B4-BE49-F238E27FC236}">
-                  <a16:creationId id="{87F3324E-2F31-4165-ABEB-8FE5C38D4F8E}"/>
+                  <a16:creationId xmlns:a16="http://schemas.microsoft.com/office/drawing/2014/main" id="{87F3324E-2F31-4165-ABEB-8FE5C38D4F8E}"/>
                 </a:ext>
               </a:extLst>
             </p:cNvPr>
@@ -38931,7 +39025,7 @@
             <p:cNvPr id="787" name="F1_0786_text_90" descr="William">
               <a:extLst>
                 <a:ext uri="{FF2B5EF4-FFF2-40B4-BE49-F238E27FC236}">
-                  <a16:creationId id="{A83AD285-0CAA-4A0A-B0AA-D5F66064E887}"/>
+                  <a16:creationId xmlns:a16="http://schemas.microsoft.com/office/drawing/2014/main" id="{A83AD285-0CAA-4A0A-B0AA-D5F66064E887}"/>
                 </a:ext>
               </a:extLst>
             </p:cNvPr>
@@ -38988,7 +39082,7 @@
             <p:cNvPr id="788" name="F1_0787_text_91" descr="Shakespeare">
               <a:extLst>
                 <a:ext uri="{FF2B5EF4-FFF2-40B4-BE49-F238E27FC236}">
-                  <a16:creationId id="{ACA1D460-67A3-4899-A938-4ED89A40A5D7}"/>
+                  <a16:creationId xmlns:a16="http://schemas.microsoft.com/office/drawing/2014/main" id="{ACA1D460-67A3-4899-A938-4ED89A40A5D7}"/>
                 </a:ext>
               </a:extLst>
             </p:cNvPr>
@@ -39054,7 +39148,7 @@
               <a:chExt cx="1217448" cy="687853"/>
             </a:xfrm>
           </p:grpSpPr>
-          <mc:AlternateContent>
+          <mc:AlternateContent xmlns:mc="http://schemas.openxmlformats.org/markup-compatibility/2006" xmlns:a14="http://schemas.microsoft.com/office/drawing/2010/main">
             <mc:Choice Requires="a14">
               <p:sp>
                 <p:nvSpPr>
@@ -39092,11 +39186,11 @@
                       </a:defRPr>
                     </a:pPr>
                     <a14:m>
-                      <m:oMathPara>
+                      <m:oMathPara xmlns:m="http://schemas.openxmlformats.org/officeDocument/2006/math">
                         <m:oMathParaPr>
                           <m:jc m:val="centerGroup"/>
                         </m:oMathParaPr>
-                        <m:oMath>
+                        <m:oMath xmlns:m="http://schemas.openxmlformats.org/officeDocument/2006/math">
                           <m:limLow>
                             <m:limLowPr>
                               <m:ctrlPr>
@@ -39228,7 +39322,7 @@
                 </p:txBody>
               </p:sp>
             </mc:Choice>
-            <mc:Fallback>
+            <mc:Fallback xmlns:ns7="http://schemas.microsoft.com/office/powerpoint/2010/main" xmlns:m="http://schemas.openxmlformats.org/officeDocument/2006/math" xmlns:a16="http://schemas.microsoft.com/office/drawing/2014/main" xmlns="">
               <p:sp>
                 <p:nvSpPr>
                   <p:cNvPr id="20053" name="Equation sum_i sub(A,i)=ΔF" descr="sum_i sub(A,i)=ΔF"/>
@@ -39246,7 +39340,7 @@
                     <a:avLst/>
                   </a:prstGeom>
                   <a:blipFill>
-                    <a:blip r:embed="rId32"/>
+                    <a:blip r:embed="rId33"/>
                     <a:stretch>
                       <a:fillRect l="-11429" r="-7619"/>
                     </a:stretch>
@@ -39276,7 +39370,7 @@
             <p:cNvPr id="796" name="F1_0795_text_93" descr="Across all input sources">
               <a:extLst>
                 <a:ext uri="{FF2B5EF4-FFF2-40B4-BE49-F238E27FC236}">
-                  <a16:creationId id="{EBC6334C-29C3-4C1D-8542-1A1A3B0CC69A}"/>
+                  <a16:creationId xmlns:a16="http://schemas.microsoft.com/office/drawing/2014/main" id="{EBC6334C-29C3-4C1D-8542-1A1A3B0CC69A}"/>
                 </a:ext>
               </a:extLst>
             </p:cNvPr>
@@ -39333,7 +39427,7 @@
             <p:cNvPr id="797" name="F1_0796_text_94" descr="Full input">
               <a:extLst>
                 <a:ext uri="{FF2B5EF4-FFF2-40B4-BE49-F238E27FC236}">
-                  <a16:creationId id="{6BD20EE1-9A6E-4965-AE1B-D637B4A2D601}"/>
+                  <a16:creationId xmlns:a16="http://schemas.microsoft.com/office/drawing/2014/main" id="{6BD20EE1-9A6E-4965-AE1B-D637B4A2D601}"/>
                 </a:ext>
               </a:extLst>
             </p:cNvPr>
@@ -39390,7 +39484,7 @@
             <p:cNvPr id="798" name="F1_0797_text_95" descr="Shown spans underlined">
               <a:extLst>
                 <a:ext uri="{FF2B5EF4-FFF2-40B4-BE49-F238E27FC236}">
-                  <a16:creationId id="{966119C6-4F5A-4D9C-8816-71DBBEFED480}"/>
+                  <a16:creationId xmlns:a16="http://schemas.microsoft.com/office/drawing/2014/main" id="{966119C6-4F5A-4D9C-8816-71DBBEFED480}"/>
                 </a:ext>
               </a:extLst>
             </p:cNvPr>
@@ -39447,7 +39541,7 @@
             <p:cNvPr id="799" name="F1_0798_text_96" descr="≤−2.5">
               <a:extLst>
                 <a:ext uri="{FF2B5EF4-FFF2-40B4-BE49-F238E27FC236}">
-                  <a16:creationId id="{7EBEB90D-3849-42C4-BFBE-9E913CF764B2}"/>
+                  <a16:creationId xmlns:a16="http://schemas.microsoft.com/office/drawing/2014/main" id="{7EBEB90D-3849-42C4-BFBE-9E913CF764B2}"/>
                 </a:ext>
               </a:extLst>
             </p:cNvPr>
@@ -39504,7 +39598,7 @@
             <p:cNvPr id="800" name="F1_0799_text_97" descr="0">
               <a:extLst>
                 <a:ext uri="{FF2B5EF4-FFF2-40B4-BE49-F238E27FC236}">
-                  <a16:creationId id="{212DA0F7-10D9-4BE9-BAC7-AE8966021E1A}"/>
+                  <a16:creationId xmlns:a16="http://schemas.microsoft.com/office/drawing/2014/main" id="{212DA0F7-10D9-4BE9-BAC7-AE8966021E1A}"/>
                 </a:ext>
               </a:extLst>
             </p:cNvPr>
@@ -39561,7 +39655,7 @@
             <p:cNvPr id="801" name="F1_0800_text_98" descr="≥+2.5">
               <a:extLst>
                 <a:ext uri="{FF2B5EF4-FFF2-40B4-BE49-F238E27FC236}">
-                  <a16:creationId id="{AFD8B901-9052-4ECB-A78C-38AB64B910C7}"/>
+                  <a16:creationId xmlns:a16="http://schemas.microsoft.com/office/drawing/2014/main" id="{AFD8B901-9052-4ECB-A78C-38AB64B910C7}"/>
                 </a:ext>
               </a:extLst>
             </p:cNvPr>
@@ -39618,7 +39712,7 @@
             <p:cNvPr id="802" name="F1_0801_text_99" descr="Token contribution (nats)">
               <a:extLst>
                 <a:ext uri="{FF2B5EF4-FFF2-40B4-BE49-F238E27FC236}">
-                  <a16:creationId id="{30CC9E30-CAF2-4A93-A58B-4BE3F63569EF}"/>
+                  <a16:creationId xmlns:a16="http://schemas.microsoft.com/office/drawing/2014/main" id="{30CC9E30-CAF2-4A93-A58B-4BE3F63569EF}"/>
                 </a:ext>
               </a:extLst>
             </p:cNvPr>
@@ -39671,14 +39765,14 @@
           </p:txBody>
         </p:sp>
       </p:grpSp>
-      <mc:AlternateContent>
+      <mc:AlternateContent xmlns:mc="http://schemas.openxmlformats.org/markup-compatibility/2006" xmlns:a14="http://schemas.microsoft.com/office/drawing/2010/main">
         <mc:Choice Requires="a14">
           <p:sp>
             <p:nvSpPr>
               <p:cNvPr id="9988" name="文本框 9987">
                 <a:extLst>
                   <a:ext uri="{FF2B5EF4-FFF2-40B4-BE49-F238E27FC236}">
-                    <a16:creationId id="{3954FD6B-EF8A-4780-9802-7256D1D443B4}"/>
+                    <a16:creationId xmlns:a16="http://schemas.microsoft.com/office/drawing/2014/main" id="{3954FD6B-EF8A-4780-9802-7256D1D443B4}"/>
                   </a:ext>
                 </a:extLst>
               </p:cNvPr>
@@ -39703,11 +39797,11 @@
               <a:p>
                 <a:pPr/>
                 <a14:m>
-                  <m:oMathPara>
+                  <m:oMathPara xmlns:m="http://schemas.openxmlformats.org/officeDocument/2006/math">
                     <m:oMathParaPr>
                       <m:jc m:val="centerGroup"/>
                     </m:oMathParaPr>
-                    <m:oMath>
+                    <m:oMath xmlns:m="http://schemas.openxmlformats.org/officeDocument/2006/math">
                       <m:r>
                         <a:rPr lang="en-US" altLang="zh-CN" sz="2000" b="0" i="1" smtClean="0">
                           <a:latin typeface="Cambria Math" panose="02040503050406030204" pitchFamily="18" charset="0"/>
@@ -39771,7 +39865,7 @@
             </p:txBody>
           </p:sp>
         </mc:Choice>
-        <mc:Fallback>
+        <mc:Fallback xmlns:ns7="http://schemas.microsoft.com/office/powerpoint/2010/main" xmlns:m="http://schemas.openxmlformats.org/officeDocument/2006/math" xmlns:a16="http://schemas.microsoft.com/office/drawing/2014/main" xmlns="">
           <p:sp>
             <p:nvSpPr>
               <p:cNvPr id="9988" name="文本框 9987">
@@ -39795,7 +39889,7 @@
                 <a:avLst/>
               </a:prstGeom>
               <a:blipFill>
-                <a:blip r:embed="rId33"/>
+                <a:blip r:embed="rId34"/>
                 <a:stretch>
                   <a:fillRect l="-6000" t="-1961" r="-10000" b="-33333"/>
                 </a:stretch>
@@ -39816,14 +39910,14 @@
           </p:sp>
         </mc:Fallback>
       </mc:AlternateContent>
-      <mc:AlternateContent>
+      <mc:AlternateContent xmlns:mc="http://schemas.openxmlformats.org/markup-compatibility/2006" xmlns:a14="http://schemas.microsoft.com/office/drawing/2010/main">
         <mc:Choice Requires="a14">
           <p:sp>
             <p:nvSpPr>
               <p:cNvPr id="863" name="文本框 862">
                 <a:extLst>
                   <a:ext uri="{FF2B5EF4-FFF2-40B4-BE49-F238E27FC236}">
-                    <a16:creationId id="{08975422-39AB-44E7-BE46-F37BEEAE27CC}"/>
+                    <a16:creationId xmlns:a16="http://schemas.microsoft.com/office/drawing/2014/main" id="{08975422-39AB-44E7-BE46-F37BEEAE27CC}"/>
                   </a:ext>
                 </a:extLst>
               </p:cNvPr>
@@ -39848,11 +39942,11 @@
               <a:p>
                 <a:pPr/>
                 <a14:m>
-                  <m:oMathPara>
+                  <m:oMathPara xmlns:m="http://schemas.openxmlformats.org/officeDocument/2006/math">
                     <m:oMathParaPr>
                       <m:jc m:val="centerGroup"/>
                     </m:oMathParaPr>
-                    <m:oMath>
+                    <m:oMath xmlns:m="http://schemas.openxmlformats.org/officeDocument/2006/math">
                       <m:r>
                         <a:rPr lang="en-US" altLang="zh-CN" sz="2000" b="0" i="1" smtClean="0">
                           <a:latin typeface="Cambria Math" panose="02040503050406030204" pitchFamily="18" charset="0"/>
@@ -39916,7 +40010,7 @@
             </p:txBody>
           </p:sp>
         </mc:Choice>
-        <mc:Fallback>
+        <mc:Fallback xmlns:ns7="http://schemas.microsoft.com/office/powerpoint/2010/main" xmlns:m="http://schemas.openxmlformats.org/officeDocument/2006/math" xmlns:a16="http://schemas.microsoft.com/office/drawing/2014/main" xmlns="">
           <p:sp>
             <p:nvSpPr>
               <p:cNvPr id="863" name="文本框 862">
@@ -39940,7 +40034,7 @@
                 <a:avLst/>
               </a:prstGeom>
               <a:blipFill>
-                <a:blip r:embed="rId34"/>
+                <a:blip r:embed="rId35"/>
                 <a:stretch>
                   <a:fillRect l="-5960" t="-1961" r="-9934" b="-33333"/>
                 </a:stretch>
@@ -39966,7 +40060,7 @@
           <p:cNvPr id="9989" name="任意多边形: 形状 9988">
             <a:extLst>
               <a:ext uri="{FF2B5EF4-FFF2-40B4-BE49-F238E27FC236}">
-                <a16:creationId id="{847A4AB0-FC6E-45D0-910B-C69748586C3E}"/>
+                <a16:creationId xmlns:a16="http://schemas.microsoft.com/office/drawing/2014/main" id="{847A4AB0-FC6E-45D0-910B-C69748586C3E}"/>
               </a:ext>
             </a:extLst>
           </p:cNvPr>
@@ -40081,7 +40175,7 @@
           <p:cNvPr id="9992" name="任意多边形: 形状 9991">
             <a:extLst>
               <a:ext uri="{FF2B5EF4-FFF2-40B4-BE49-F238E27FC236}">
-                <a16:creationId id="{933268DB-A5A4-43F7-B313-17945B3C07AB}"/>
+                <a16:creationId xmlns:a16="http://schemas.microsoft.com/office/drawing/2014/main" id="{933268DB-A5A4-43F7-B313-17945B3C07AB}"/>
               </a:ext>
             </a:extLst>
           </p:cNvPr>
@@ -40197,7 +40291,7 @@
           <p:cNvPr id="698" name="F1_0697_text_39" descr="Token">
             <a:extLst>
               <a:ext uri="{FF2B5EF4-FFF2-40B4-BE49-F238E27FC236}">
-                <a16:creationId id="{6D3F6334-82E0-49EE-A96D-39C97CD9831D}"/>
+                <a16:creationId xmlns:a16="http://schemas.microsoft.com/office/drawing/2014/main" id="{6D3F6334-82E0-49EE-A96D-39C97CD9831D}"/>
               </a:ext>
             </a:extLst>
           </p:cNvPr>
@@ -40254,7 +40348,7 @@
           <p:cNvPr id="700" name="F1_0699_text_41" descr="EOS">
             <a:extLst>
               <a:ext uri="{FF2B5EF4-FFF2-40B4-BE49-F238E27FC236}">
-                <a16:creationId id="{953FDFF1-263C-4B14-A0CE-CC8546AA3831}"/>
+                <a16:creationId xmlns:a16="http://schemas.microsoft.com/office/drawing/2014/main" id="{953FDFF1-263C-4B14-A0CE-CC8546AA3831}"/>
               </a:ext>
             </a:extLst>
           </p:cNvPr>
@@ -40311,7 +40405,7 @@
           <p:cNvPr id="9994" name="任意多边形: 形状 9993">
             <a:extLst>
               <a:ext uri="{FF2B5EF4-FFF2-40B4-BE49-F238E27FC236}">
-                <a16:creationId id="{DEDD7BB4-8914-4AC6-8752-1572DE2CAA02}"/>
+                <a16:creationId xmlns:a16="http://schemas.microsoft.com/office/drawing/2014/main" id="{DEDD7BB4-8914-4AC6-8752-1572DE2CAA02}"/>
               </a:ext>
             </a:extLst>
           </p:cNvPr>
@@ -40425,7 +40519,7 @@
     </p:spTree>
     <p:extLst>
       <p:ext uri="{BB962C8B-B14F-4D97-AF65-F5344CB8AC3E}">
-        <ns7:creationId val="793449355"/>
+        <p14:creationId xmlns:p14="http://schemas.microsoft.com/office/powerpoint/2010/main" val="793449355"/>
       </p:ext>
     </p:extLst>
   </p:cSld>
